--- a/docs/deck/Sahayak_Pitch_Deck_v3.pptx
+++ b/docs/deck/Sahayak_Pitch_Deck_v3.pptx
@@ -19,9 +19,10 @@
     <p:sldId id="267" r:id="rId13"/>
     <p:sldId id="268" r:id="rId14"/>
     <p:sldId id="269" r:id="rId15"/>
+    <p:sldId id="270" r:id="rId16"/>
   </p:sldIdLst>
   <p:notesMasterIdLst>
-    <p:notesMasterId r:id="rId16"/>
+    <p:notesMasterId r:id="rId17"/>
   </p:notesMasterIdLst>
   <p:sldSz cx="12188952" cy="6858000"/>
   <p:notesSz cx="6858000" cy="12188952"/>
@@ -603,7 +604,7 @@
           <a:p>
             <a:r>
               <a:rPr lang="en-US" dirty="0"/>
-              <a:t>The operator's incentive matters: most rural operators earn very little, and every slip is a paid service at the counter.</a:t>
+              <a:t>Impact is economic (rupees at risk, entitlements claimed, cards made) and social (safety, dignity, trust).</a:t>
             </a:r>
             <a:endParaRPr lang="en-US" dirty="0"/>
           </a:p>
@@ -691,7 +692,7 @@
           <a:p>
             <a:r>
               <a:rPr lang="en-US" dirty="0"/>
-              <a:t>Maps Sahayak onto the track: financial inclusion first, with public service delivery and health on the same counter.</a:t>
+              <a:t>The operator's incentive matters: most rural operators earn very little, and every slip is a paid service at the counter.</a:t>
             </a:r>
             <a:endParaRPr lang="en-US" dirty="0"/>
           </a:p>
@@ -779,7 +780,7 @@
           <a:p>
             <a:r>
               <a:rPr lang="en-US" dirty="0"/>
-              <a:t>Honest: the technology is built; the partnerships are what this challenge begins. Update the status pills in docs/deck/facts_v3.json as letters come in.</a:t>
+              <a:t>Maps Sahayak onto the track: financial inclusion first, with public service delivery and health on the same counter.</a:t>
             </a:r>
             <a:endParaRPr lang="en-US" dirty="0"/>
           </a:p>
@@ -867,7 +868,7 @@
           <a:p>
             <a:r>
               <a:rPr lang="en-US" dirty="0"/>
-              <a:t>The technology is built and measured; the pilot is integration and field validation, not new research.</a:t>
+              <a:t>Honest: the technology is built; the partnerships are what this challenge begins. Update the status pills in docs/deck/facts_v3.json as letters come in.</a:t>
             </a:r>
             <a:endParaRPr lang="en-US" dirty="0"/>
           </a:p>
@@ -955,7 +956,7 @@
           <a:p>
             <a:r>
               <a:rPr lang="en-US" dirty="0"/>
-              <a:t>Close on the line: banked half a billion; Sahayak helps keep them safe and claim what they are owed.</a:t>
+              <a:t>The technology is built and measured; the pilot is integration and field validation, not new research.</a:t>
             </a:r>
             <a:endParaRPr lang="en-US" dirty="0"/>
           </a:p>
@@ -979,6 +980,94 @@
             <a:fld id="{F7021451-1387-4CA6-816F-3879F97B5CBC}" type="slidenum">
               <a:rPr lang="en-US"/>
               <a:t>14</a:t>
+            </a:fld>
+            <a:endParaRPr lang="en-US"/>
+          </a:p>
+        </p:txBody>
+      </p:sp>
+    </p:spTree>
+    <p:extLst>
+      <p:ext uri="{BB962C8B-B14F-4D97-AF65-F5344CB8AC3E}">
+        <p14:creationId xmlns:p14="http://schemas.microsoft.com/office/powerpoint/2010/main" val="1024086991"/>
+      </p:ext>
+    </p:extLst>
+  </p:cSld>
+  <p:clrMapOvr>
+    <a:masterClrMapping/>
+  </p:clrMapOvr>
+</p:notes>
+</file>
+
+<file path=ppt/notesSlides/notesSlide15.xml><?xml version="1.0" encoding="utf-8"?>
+<p:notes xmlns:a="http://schemas.openxmlformats.org/drawingml/2006/main" xmlns:r="http://schemas.openxmlformats.org/officeDocument/2006/relationships" xmlns:p="http://schemas.openxmlformats.org/presentationml/2006/main">
+  <p:cSld>
+    <p:spTree>
+      <p:nvGrpSpPr>
+        <p:cNvPr id="1" name=""/>
+        <p:cNvGrpSpPr/>
+        <p:nvPr/>
+      </p:nvGrpSpPr>
+      <p:grpSpPr>
+        <a:xfrm>
+          <a:off x="0" y="0"/>
+          <a:ext cx="0" cy="0"/>
+          <a:chOff x="0" y="0"/>
+          <a:chExt cx="0" cy="0"/>
+        </a:xfrm>
+      </p:grpSpPr>
+      <p:sp>
+        <p:nvSpPr>
+          <p:cNvPr id="2" name="Slide Image Placeholder 1"/>
+          <p:cNvSpPr>
+            <a:spLocks noGrp="1" noRot="1" noChangeAspect="1"/>
+          </p:cNvSpPr>
+          <p:nvPr>
+            <p:ph type="sldImg"/>
+          </p:nvPr>
+        </p:nvSpPr>
+        <p:spPr/>
+      </p:sp>
+      <p:sp>
+        <p:nvSpPr>
+          <p:cNvPr id="3" name="Notes Placeholder 2"/>
+          <p:cNvSpPr>
+            <a:spLocks noGrp="1"/>
+          </p:cNvSpPr>
+          <p:nvPr>
+            <p:ph type="body" idx="1"/>
+          </p:nvPr>
+        </p:nvSpPr>
+        <p:spPr/>
+        <p:txBody>
+          <a:bodyPr/>
+          <a:lstStyle/>
+          <a:p>
+            <a:r>
+              <a:rPr lang="en-US" dirty="0"/>
+              <a:t>Close on the line: banked half a billion; Sahayak helps keep them safe and claim what they are owed.</a:t>
+            </a:r>
+            <a:endParaRPr lang="en-US" dirty="0"/>
+          </a:p>
+        </p:txBody>
+      </p:sp>
+      <p:sp>
+        <p:nvSpPr>
+          <p:cNvPr id="4" name="Slide Number Placeholder 3"/>
+          <p:cNvSpPr>
+            <a:spLocks noGrp="1"/>
+          </p:cNvSpPr>
+          <p:nvPr>
+            <p:ph type="sldNum" sz="quarter" idx="10"/>
+          </p:nvPr>
+        </p:nvSpPr>
+        <p:spPr/>
+        <p:txBody>
+          <a:bodyPr/>
+          <a:lstStyle/>
+          <a:p>
+            <a:fld id="{F7021451-1387-4CA6-816F-3879F97B5CBC}" type="slidenum">
+              <a:rPr lang="en-US"/>
+              <a:t>15</a:t>
             </a:fld>
             <a:endParaRPr lang="en-US"/>
           </a:p>
@@ -1395,7 +1484,7 @@
           <a:p>
             <a:r>
               <a:rPr lang="en-US" dirty="0"/>
-              <a:t>We complement the network filters and the helplines; no one else checks the thing in front of the person, offline, and explains it.</a:t>
+              <a:t>Say it before they ask: we promised a big model, we measured one, and we chose rules for the verdict because it was right more often on genuine messages, 1,000 times faster, and every verdict explains itself. The Crucible server was never connected to Sahayak; the change note says so.</a:t>
             </a:r>
             <a:endParaRPr lang="en-US" dirty="0"/>
           </a:p>
@@ -1483,7 +1572,7 @@
           <a:p>
             <a:r>
               <a:rPr lang="en-US" dirty="0"/>
-              <a:t>Every number comes from a script in bench/ and the testing report; the caveats are on the slide.</a:t>
+              <a:t>We complement the network filters and the helplines; no one else checks the thing in front of the person, offline, and explains it.</a:t>
             </a:r>
             <a:endParaRPr lang="en-US" dirty="0"/>
           </a:p>
@@ -1571,7 +1660,7 @@
           <a:p>
             <a:r>
               <a:rPr lang="en-US" dirty="0"/>
-              <a:t>Optum's mission is healthier lives: this is the shortest path from Sahayak to a hospital bill that never has to be paid.</a:t>
+              <a:t>Every number comes from a script in bench/ and the testing report; the caveats are on the slide.</a:t>
             </a:r>
             <a:endParaRPr lang="en-US" dirty="0"/>
           </a:p>
@@ -1659,7 +1748,7 @@
           <a:p>
             <a:r>
               <a:rPr lang="en-US" dirty="0"/>
-              <a:t>Impact is economic (rupees at risk, entitlements claimed, cards made) and social (safety, dignity, trust).</a:t>
+              <a:t>Optum's mission is healthier lives: this is the shortest path from Sahayak to a hospital bill that never has to be paid.</a:t>
             </a:r>
             <a:endParaRPr lang="en-US" dirty="0"/>
           </a:p>
@@ -2446,7 +2535,7 @@
                 <a:ea typeface="Arial" pitchFamily="34" charset="-122"/>
                 <a:cs typeface="Arial" pitchFamily="34" charset="-120"/>
               </a:rPr>
-              <a:t>SCALABILITY AND SUSTAINABILITY</a:t>
+              <a:t>IMPACT METRICS</a:t>
             </a:r>
             <a:endParaRPr lang="en-US" sz="1250" dirty="0"/>
           </a:p>
@@ -2485,7 +2574,7 @@
                 <a:ea typeface="Arial" pitchFamily="34" charset="-122"/>
                 <a:cs typeface="Arial" pitchFamily="34" charset="-120"/>
               </a:rPr>
-              <a:t>Grow by replication; paid for by those who gain</a:t>
+              <a:t>From "account opened" to "citizen safe"</a:t>
             </a:r>
             <a:endParaRPr lang="en-US" sz="3000" dirty="0"/>
           </a:p>
@@ -2499,12 +2588,12 @@
         </p:nvSpPr>
         <p:spPr>
           <a:xfrm>
-            <a:off x="548640" y="1783080"/>
-            <a:ext cx="5349240" cy="4389120"/>
+            <a:off x="548640" y="1828800"/>
+            <a:ext cx="3520440" cy="2514600"/>
           </a:xfrm>
           <a:prstGeom prst="roundRect">
             <a:avLst>
-              <a:gd name="adj" fmla="val 2083"/>
+              <a:gd name="adj" fmla="val 3636"/>
             </a:avLst>
           </a:prstGeom>
           <a:solidFill>
@@ -2533,34 +2622,34 @@
         </p:nvSpPr>
         <p:spPr>
           <a:xfrm>
-            <a:off x="822960" y="1965960"/>
-            <a:ext cx="4846320" cy="411480"/>
-          </a:xfrm>
-          <a:prstGeom prst="rect">
-            <a:avLst/>
-          </a:prstGeom>
-          <a:noFill/>
-          <a:ln/>
-        </p:spPr>
-        <p:txBody>
-          <a:bodyPr wrap="square" lIns="0" tIns="0" rIns="0" bIns="0" rtlCol="0" anchor="ctr"/>
+            <a:off x="850392" y="2084832"/>
+            <a:ext cx="2926080" cy="731520"/>
+          </a:xfrm>
+          <a:prstGeom prst="rect">
+            <a:avLst/>
+          </a:prstGeom>
+          <a:noFill/>
+          <a:ln/>
+        </p:spPr>
+        <p:txBody>
+          <a:bodyPr wrap="square" lIns="0" tIns="0" rIns="0" bIns="0" rtlCol="0" anchor="t"/>
           <a:lstStyle/>
           <a:p>
             <a:pPr indent="0" marL="0">
               <a:buNone/>
             </a:pPr>
             <a:r>
-              <a:rPr lang="en-US" sz="1600" b="1" dirty="0">
-                <a:solidFill>
-                  <a:srgbClr val="27C08A"/>
+              <a:rPr lang="en-US" sz="1700" b="1" dirty="0">
+                <a:solidFill>
+                  <a:srgbClr val="FF9E3D"/>
                 </a:solidFill>
                 <a:latin typeface="Arial" pitchFamily="34" charset="0"/>
                 <a:ea typeface="Arial" pitchFamily="34" charset="-122"/>
                 <a:cs typeface="Arial" pitchFamily="34" charset="-120"/>
               </a:rPr>
-              <a:t>Replication, not reinvention</a:t>
-            </a:r>
-            <a:endParaRPr lang="en-US" sz="1600" dirty="0"/>
+              <a:t>Rupees at risk</a:t>
+            </a:r>
+            <a:endParaRPr lang="en-US" sz="1700" dirty="0"/>
           </a:p>
         </p:txBody>
       </p:sp>
@@ -2572,8 +2661,8 @@
         </p:nvSpPr>
         <p:spPr>
           <a:xfrm>
-            <a:off x="822960" y="2468880"/>
-            <a:ext cx="4892040" cy="3566160"/>
+            <a:off x="850392" y="2852928"/>
+            <a:ext cx="2971800" cy="1325880"/>
           </a:xfrm>
           <a:prstGeom prst="rect">
             <a:avLst/>
@@ -2585,12 +2674,8 @@
           <a:bodyPr wrap="square" lIns="0" tIns="0" rIns="0" bIns="0" rtlCol="0" anchor="t"/>
           <a:lstStyle/>
           <a:p>
-            <a:pPr marL="342900" indent="-342900">
-              <a:spcAft>
-                <a:spcPts val="600"/>
-              </a:spcAft>
-              <a:buSzPct val="100000"/>
-              <a:buChar char="•"/>
+            <a:pPr indent="0" marL="0">
+              <a:buNone/>
             </a:pPr>
             <a:r>
               <a:rPr lang="en-US" sz="1250" dirty="0">
@@ -2601,17 +2686,108 @@
                 <a:ea typeface="Calibri" pitchFamily="34" charset="-122"/>
                 <a:cs typeface="Calibri" pitchFamily="34" charset="-120"/>
               </a:rPr>
-              <a:t>6 lakh functional CSCs, 4.7 lakh of them at gram-panchayat level: the counters already exist.</a:t>
+              <a:t>The node adds up the money asked for in messages it flags, every month: never called "saved", always shown to the district without personal data.</a:t>
             </a:r>
             <a:endParaRPr lang="en-US" sz="1250" dirty="0"/>
           </a:p>
-          <a:p>
-            <a:pPr marL="342900" indent="-342900">
-              <a:spcAft>
-                <a:spcPts val="600"/>
-              </a:spcAft>
-              <a:buSzPct val="100000"/>
-              <a:buChar char="•"/>
+        </p:txBody>
+      </p:sp>
+      <p:sp>
+        <p:nvSpPr>
+          <p:cNvPr id="11" name="Shape 9"/>
+          <p:cNvSpPr/>
+          <p:nvPr/>
+        </p:nvSpPr>
+        <p:spPr>
+          <a:xfrm>
+            <a:off x="4315968" y="1828800"/>
+            <a:ext cx="3520440" cy="2514600"/>
+          </a:xfrm>
+          <a:prstGeom prst="roundRect">
+            <a:avLst>
+              <a:gd name="adj" fmla="val 3636"/>
+            </a:avLst>
+          </a:prstGeom>
+          <a:solidFill>
+            <a:srgbClr val="152017"/>
+          </a:solidFill>
+          <a:ln w="12700">
+            <a:solidFill>
+              <a:srgbClr val="2C4636"/>
+            </a:solidFill>
+            <a:prstDash val="solid"/>
+          </a:ln>
+          <a:effectLst>
+            <a:outerShdw sx="100000" sy="100000" kx="0" ky="0" algn="bl" rotWithShape="0" blurRad="127000" dist="38100" dir="5400000">
+              <a:srgbClr val="000000">
+                <a:alpha val="40000"/>
+              </a:srgbClr>
+            </a:outerShdw>
+          </a:effectLst>
+        </p:spPr>
+      </p:sp>
+      <p:sp>
+        <p:nvSpPr>
+          <p:cNvPr id="12" name="Text 10"/>
+          <p:cNvSpPr/>
+          <p:nvPr/>
+        </p:nvSpPr>
+        <p:spPr>
+          <a:xfrm>
+            <a:off x="4617720" y="2084832"/>
+            <a:ext cx="2926080" cy="731520"/>
+          </a:xfrm>
+          <a:prstGeom prst="rect">
+            <a:avLst/>
+          </a:prstGeom>
+          <a:noFill/>
+          <a:ln/>
+        </p:spPr>
+        <p:txBody>
+          <a:bodyPr wrap="square" lIns="0" tIns="0" rIns="0" bIns="0" rtlCol="0" anchor="t"/>
+          <a:lstStyle/>
+          <a:p>
+            <a:pPr indent="0" marL="0">
+              <a:buNone/>
+            </a:pPr>
+            <a:r>
+              <a:rPr lang="en-US" sz="1700" b="1" dirty="0">
+                <a:solidFill>
+                  <a:srgbClr val="27C08A"/>
+                </a:solidFill>
+                <a:latin typeface="Arial" pitchFamily="34" charset="0"/>
+                <a:ea typeface="Arial" pitchFamily="34" charset="-122"/>
+                <a:cs typeface="Arial" pitchFamily="34" charset="-120"/>
+              </a:rPr>
+              <a:t>People found, health first</a:t>
+            </a:r>
+            <a:endParaRPr lang="en-US" sz="1700" dirty="0"/>
+          </a:p>
+        </p:txBody>
+      </p:sp>
+      <p:sp>
+        <p:nvSpPr>
+          <p:cNvPr id="13" name="Text 11"/>
+          <p:cNvSpPr/>
+          <p:nvPr/>
+        </p:nvSpPr>
+        <p:spPr>
+          <a:xfrm>
+            <a:off x="4617720" y="2852928"/>
+            <a:ext cx="2971800" cy="1325880"/>
+          </a:xfrm>
+          <a:prstGeom prst="rect">
+            <a:avLst/>
+          </a:prstGeom>
+          <a:noFill/>
+          <a:ln/>
+        </p:spPr>
+        <p:txBody>
+          <a:bodyPr wrap="square" lIns="0" tIns="0" rIns="0" bIns="0" rtlCol="0" anchor="t"/>
+          <a:lstStyle/>
+          <a:p>
+            <a:pPr indent="0" marL="0">
+              <a:buNone/>
             </a:pPr>
             <a:r>
               <a:rPr lang="en-US" sz="1250" dirty="0">
@@ -2622,17 +2798,108 @@
                 <a:ea typeface="Calibri" pitchFamily="34" charset="-122"/>
                 <a:cs typeface="Calibri" pitchFamily="34" charset="-120"/>
               </a:rPr>
-              <a:t>A deployment is a node image, signed packs and a one-page operator guide; a new scam or scheme is a pack update by USB.</a:t>
+              <a:t>People found eligible, by scheme, with seniors found for Ayushman Vay Vandana counted on their own; each slip lets the operator finish the form.</a:t>
             </a:r>
             <a:endParaRPr lang="en-US" sz="1250" dirty="0"/>
           </a:p>
-          <a:p>
-            <a:pPr marL="342900" indent="-342900">
-              <a:spcAft>
-                <a:spcPts val="600"/>
-              </a:spcAft>
-              <a:buSzPct val="100000"/>
-              <a:buChar char="•"/>
+        </p:txBody>
+      </p:sp>
+      <p:sp>
+        <p:nvSpPr>
+          <p:cNvPr id="14" name="Shape 12"/>
+          <p:cNvSpPr/>
+          <p:nvPr/>
+        </p:nvSpPr>
+        <p:spPr>
+          <a:xfrm>
+            <a:off x="8083296" y="1828800"/>
+            <a:ext cx="3520440" cy="2514600"/>
+          </a:xfrm>
+          <a:prstGeom prst="roundRect">
+            <a:avLst>
+              <a:gd name="adj" fmla="val 3636"/>
+            </a:avLst>
+          </a:prstGeom>
+          <a:solidFill>
+            <a:srgbClr val="152017"/>
+          </a:solidFill>
+          <a:ln w="12700">
+            <a:solidFill>
+              <a:srgbClr val="2C4636"/>
+            </a:solidFill>
+            <a:prstDash val="solid"/>
+          </a:ln>
+          <a:effectLst>
+            <a:outerShdw sx="100000" sy="100000" kx="0" ky="0" algn="bl" rotWithShape="0" blurRad="127000" dist="38100" dir="5400000">
+              <a:srgbClr val="000000">
+                <a:alpha val="40000"/>
+              </a:srgbClr>
+            </a:outerShdw>
+          </a:effectLst>
+        </p:spPr>
+      </p:sp>
+      <p:sp>
+        <p:nvSpPr>
+          <p:cNvPr id="15" name="Text 13"/>
+          <p:cNvSpPr/>
+          <p:nvPr/>
+        </p:nvSpPr>
+        <p:spPr>
+          <a:xfrm>
+            <a:off x="8385048" y="2084832"/>
+            <a:ext cx="2926080" cy="731520"/>
+          </a:xfrm>
+          <a:prstGeom prst="rect">
+            <a:avLst/>
+          </a:prstGeom>
+          <a:noFill/>
+          <a:ln/>
+        </p:spPr>
+        <p:txBody>
+          <a:bodyPr wrap="square" lIns="0" tIns="0" rIns="0" bIns="0" rtlCol="0" anchor="t"/>
+          <a:lstStyle/>
+          <a:p>
+            <a:pPr indent="0" marL="0">
+              <a:buNone/>
+            </a:pPr>
+            <a:r>
+              <a:rPr lang="en-US" sz="1700" b="1" dirty="0">
+                <a:solidFill>
+                  <a:srgbClr val="4FE3B0"/>
+                </a:solidFill>
+                <a:latin typeface="Arial" pitchFamily="34" charset="0"/>
+                <a:ea typeface="Arial" pitchFamily="34" charset="-122"/>
+                <a:cs typeface="Arial" pitchFamily="34" charset="-120"/>
+              </a:rPr>
+              <a:t>Reported in time</a:t>
+            </a:r>
+            <a:endParaRPr lang="en-US" sz="1700" dirty="0"/>
+          </a:p>
+        </p:txBody>
+      </p:sp>
+      <p:sp>
+        <p:nvSpPr>
+          <p:cNvPr id="16" name="Text 14"/>
+          <p:cNvSpPr/>
+          <p:nvPr/>
+        </p:nvSpPr>
+        <p:spPr>
+          <a:xfrm>
+            <a:off x="8385048" y="2852928"/>
+            <a:ext cx="2971800" cy="1325880"/>
+          </a:xfrm>
+          <a:prstGeom prst="rect">
+            <a:avLst/>
+          </a:prstGeom>
+          <a:noFill/>
+          <a:ln/>
+        </p:spPr>
+        <p:txBody>
+          <a:bodyPr wrap="square" lIns="0" tIns="0" rIns="0" bIns="0" rtlCol="0" anchor="t"/>
+          <a:lstStyle/>
+          <a:p>
+            <a:pPr indent="0" marL="0">
+              <a:buNone/>
             </a:pPr>
             <a:r>
               <a:rPr lang="en-US" sz="1250" dirty="0">
@@ -2643,47 +2910,26 @@
                 <a:ea typeface="Calibri" pitchFamily="34" charset="-122"/>
                 <a:cs typeface="Calibri" pitchFamily="34" charset="-120"/>
               </a:rPr>
-              <a:t>Every phone that visits can keep its own copy, so protection spreads beyond the counter at no extra cost.</a:t>
+              <a:t>From 1 Jan 2027, RBI compensates small losses from stolen OTPs and PINs if reported within 5 days; Sahayak drafts the complaint on the spot. Money sent willingly is not compensated: there, stopping the payment is the only protection.</a:t>
             </a:r>
             <a:endParaRPr lang="en-US" sz="1250" dirty="0"/>
           </a:p>
-          <a:p>
-            <a:pPr marL="342900" indent="-342900">
-              <a:spcAft>
-                <a:spcPts val="600"/>
-              </a:spcAft>
-              <a:buSzPct val="100000"/>
-              <a:buChar char="•"/>
-            </a:pPr>
-            <a:r>
-              <a:rPr lang="en-US" sz="1250" dirty="0">
-                <a:solidFill>
-                  <a:srgbClr val="9DB0A4"/>
-                </a:solidFill>
-                <a:latin typeface="Calibri" pitchFamily="34" charset="0"/>
-                <a:ea typeface="Calibri" pitchFamily="34" charset="-122"/>
-                <a:cs typeface="Calibri" pitchFamily="34" charset="-120"/>
-              </a:rPr>
-              <a:t>No cloud and no per-query fee; open, tested rules any state can audit.</a:t>
-            </a:r>
-            <a:endParaRPr lang="en-US" sz="1250" dirty="0"/>
-          </a:p>
-        </p:txBody>
-      </p:sp>
-      <p:sp>
-        <p:nvSpPr>
-          <p:cNvPr id="11" name="Shape 9"/>
-          <p:cNvSpPr/>
-          <p:nvPr/>
-        </p:nvSpPr>
-        <p:spPr>
-          <a:xfrm>
-            <a:off x="6080760" y="1783080"/>
-            <a:ext cx="5532120" cy="4389120"/>
+        </p:txBody>
+      </p:sp>
+      <p:sp>
+        <p:nvSpPr>
+          <p:cNvPr id="17" name="Shape 15"/>
+          <p:cNvSpPr/>
+          <p:nvPr/>
+        </p:nvSpPr>
+        <p:spPr>
+          <a:xfrm>
+            <a:off x="548640" y="4572000"/>
+            <a:ext cx="11064240" cy="1600200"/>
           </a:xfrm>
           <a:prstGeom prst="roundRect">
             <a:avLst>
-              <a:gd name="adj" fmla="val 2083"/>
+              <a:gd name="adj" fmla="val 5714"/>
             </a:avLst>
           </a:prstGeom>
           <a:solidFill>
@@ -2706,14 +2952,14 @@
       </p:sp>
       <p:sp>
         <p:nvSpPr>
-          <p:cNvPr id="12" name="Text 10"/>
-          <p:cNvSpPr/>
-          <p:nvPr/>
-        </p:nvSpPr>
-        <p:spPr>
-          <a:xfrm>
-            <a:off x="6355080" y="1965960"/>
-            <a:ext cx="5029200" cy="411480"/>
+          <p:cNvPr id="18" name="Text 16"/>
+          <p:cNvSpPr/>
+          <p:nvPr/>
+        </p:nvSpPr>
+        <p:spPr>
+          <a:xfrm>
+            <a:off x="822960" y="4681728"/>
+            <a:ext cx="10515600" cy="365760"/>
           </a:xfrm>
           <a:prstGeom prst="rect">
             <a:avLst/>
@@ -2729,87 +2975,46 @@
               <a:buNone/>
             </a:pPr>
             <a:r>
-              <a:rPr lang="en-US" sz="1600" b="1" dirty="0">
-                <a:solidFill>
-                  <a:srgbClr val="FF9E3D"/>
+              <a:rPr lang="en-US" sz="1450" b="1" dirty="0">
+                <a:solidFill>
+                  <a:srgbClr val="EEF3EE"/>
                 </a:solidFill>
                 <a:latin typeface="Arial" pitchFamily="34" charset="0"/>
                 <a:ea typeface="Arial" pitchFamily="34" charset="-122"/>
                 <a:cs typeface="Arial" pitchFamily="34" charset="-120"/>
               </a:rPr>
-              <a:t>Who pays</a:t>
-            </a:r>
-            <a:endParaRPr lang="en-US" sz="1600" dirty="0"/>
-          </a:p>
-        </p:txBody>
-      </p:sp>
-      <p:sp>
-        <p:nvSpPr>
-          <p:cNvPr id="13" name="Text 11"/>
-          <p:cNvSpPr/>
-          <p:nvPr/>
-        </p:nvSpPr>
-        <p:spPr>
-          <a:xfrm>
-            <a:off x="6355080" y="2423160"/>
-            <a:ext cx="5029200" cy="548640"/>
-          </a:xfrm>
-          <a:prstGeom prst="rect">
-            <a:avLst/>
-          </a:prstGeom>
-          <a:noFill/>
-          <a:ln/>
-        </p:spPr>
-        <p:txBody>
-          <a:bodyPr wrap="square" lIns="0" tIns="0" rIns="0" bIns="0" rtlCol="0" anchor="ctr">
-            <a:normAutofit/>
-          </a:bodyPr>
+              <a:t>Pilot target, not a result</a:t>
+            </a:r>
+            <a:endParaRPr lang="en-US" sz="1450" dirty="0"/>
+          </a:p>
+        </p:txBody>
+      </p:sp>
+      <p:sp>
+        <p:nvSpPr>
+          <p:cNvPr id="19" name="Text 17"/>
+          <p:cNvSpPr/>
+          <p:nvPr/>
+        </p:nvSpPr>
+        <p:spPr>
+          <a:xfrm>
+            <a:off x="822960" y="5074920"/>
+            <a:ext cx="10515600" cy="1005840"/>
+          </a:xfrm>
+          <a:prstGeom prst="rect">
+            <a:avLst/>
+          </a:prstGeom>
+          <a:noFill/>
+          <a:ln/>
+        </p:spPr>
+        <p:txBody>
+          <a:bodyPr wrap="square" lIns="0" tIns="0" rIns="0" bIns="0" rtlCol="0" anchor="t"/>
           <a:lstStyle/>
           <a:p>
             <a:pPr indent="0" marL="0">
               <a:buNone/>
             </a:pPr>
             <a:r>
-              <a:rPr lang="en-US" sz="2400" b="1" dirty="0">
-                <a:solidFill>
-                  <a:srgbClr val="EEF3EE"/>
-                </a:solidFill>
-                <a:latin typeface="Arial" pitchFamily="34" charset="0"/>
-                <a:ea typeface="Arial" pitchFamily="34" charset="-122"/>
-                <a:cs typeface="Arial" pitchFamily="34" charset="-120"/>
-              </a:rPr>
-              <a:t>₹25,000–35,000</a:t>
-            </a:r>
-            <a:endParaRPr lang="en-US" sz="2400" dirty="0"/>
-          </a:p>
-        </p:txBody>
-      </p:sp>
-      <p:sp>
-        <p:nvSpPr>
-          <p:cNvPr id="14" name="Text 12"/>
-          <p:cNvSpPr/>
-          <p:nvPr/>
-        </p:nvSpPr>
-        <p:spPr>
-          <a:xfrm>
-            <a:off x="6355080" y="2971800"/>
-            <a:ext cx="5029200" cy="457200"/>
-          </a:xfrm>
-          <a:prstGeom prst="rect">
-            <a:avLst/>
-          </a:prstGeom>
-          <a:noFill/>
-          <a:ln/>
-        </p:spPr>
-        <p:txBody>
-          <a:bodyPr wrap="square" lIns="0" tIns="0" rIns="0" bIns="0" rtlCol="0" anchor="ctr"/>
-          <a:lstStyle/>
-          <a:p>
-            <a:pPr indent="0" marL="0">
-              <a:buNone/>
-            </a:pPr>
-            <a:r>
-              <a:rPr lang="en-US" sz="1200" dirty="0">
+              <a:rPr lang="en-US" sz="1250" dirty="0">
                 <a:solidFill>
                   <a:srgbClr val="9DB0A4"/>
                 </a:solidFill>
@@ -2817,22 +3022,22 @@
                 <a:ea typeface="Calibri" pitchFamily="34" charset="-122"/>
                 <a:cs typeface="Calibri" pitchFamily="34" charset="-120"/>
               </a:rPr>
-              <a:t>once per node (an N150 mini-PC (8–16 GB) or a refurbished i5 laptop); each check costs nothing.</a:t>
-            </a:r>
-            <a:endParaRPr lang="en-US" sz="1200" dirty="0"/>
-          </a:p>
-        </p:txBody>
-      </p:sp>
-      <p:sp>
-        <p:nvSpPr>
-          <p:cNvPr id="15" name="Text 13"/>
-          <p:cNvSpPr/>
-          <p:nvPr/>
-        </p:nvSpPr>
-        <p:spPr>
-          <a:xfrm>
-            <a:off x="6355080" y="3520440"/>
-            <a:ext cx="5029200" cy="2560320"/>
+              <a:t>One district: about 20 villages and 50 counters (nodes at 20 CSCs, the phone app at 30 bank-agent points), six months, ₹39.2 lakh line by line. Scams flagged, people found eligible and cards made (the operator ticks each), all from the node's counters. A one-morning field test at a CSC (protocol and consent ready) comes first.</a:t>
+            </a:r>
+            <a:endParaRPr lang="en-US" sz="1250" dirty="0"/>
+          </a:p>
+        </p:txBody>
+      </p:sp>
+      <p:sp>
+        <p:nvSpPr>
+          <p:cNvPr id="20" name="Text 18"/>
+          <p:cNvSpPr/>
+          <p:nvPr/>
+        </p:nvSpPr>
+        <p:spPr>
+          <a:xfrm>
+            <a:off x="548640" y="6355080"/>
+            <a:ext cx="11064240" cy="320040"/>
           </a:xfrm>
           <a:prstGeom prst="rect">
             <a:avLst/>
@@ -2844,104 +3049,19 @@
           <a:bodyPr wrap="square" lIns="0" tIns="0" rIns="0" bIns="0" rtlCol="0" anchor="t"/>
           <a:lstStyle/>
           <a:p>
-            <a:pPr marL="342900" indent="-342900">
-              <a:spcAft>
-                <a:spcPts val="600"/>
-              </a:spcAft>
-              <a:buSzPct val="100000"/>
-              <a:buChar char="•"/>
-            </a:pPr>
-            <a:r>
-              <a:rPr lang="en-US" sz="1250" dirty="0">
-                <a:solidFill>
-                  <a:srgbClr val="9DB0A4"/>
+            <a:pPr indent="0" marL="0">
+              <a:buNone/>
+            </a:pPr>
+            <a:r>
+              <a:rPr lang="en-US" sz="950" dirty="0">
+                <a:solidFill>
+                  <a:srgbClr val="6E8579"/>
                 </a:solidFill>
                 <a:latin typeface="Calibri" pitchFamily="34" charset="0"/>
                 <a:ea typeface="Calibri" pitchFamily="34" charset="-122"/>
                 <a:cs typeface="Calibri" pitchFamily="34" charset="-120"/>
               </a:rPr>
-              <a:t>Banks: from 1 Jan 2027 they share the cost of compensating fraud losses, so a loss prevented is money kept.</a:t>
-            </a:r>
-            <a:endParaRPr lang="en-US" sz="1250" dirty="0"/>
-          </a:p>
-          <a:p>
-            <a:pPr marL="342900" indent="-342900">
-              <a:spcAft>
-                <a:spcPts val="600"/>
-              </a:spcAft>
-              <a:buSzPct val="100000"/>
-              <a:buChar char="•"/>
-            </a:pPr>
-            <a:r>
-              <a:rPr lang="en-US" sz="1250" dirty="0">
-                <a:solidFill>
-                  <a:srgbClr val="9DB0A4"/>
-                </a:solidFill>
-                <a:latin typeface="Calibri" pitchFamily="34" charset="0"/>
-                <a:ea typeface="Calibri" pitchFamily="34" charset="-122"/>
-                <a:cs typeface="Calibri" pitchFamily="34" charset="-120"/>
-              </a:rPr>
-              <a:t>The CSC operator: paid about ₹20 per first-time Ayushman card or e-Shram registration Sahayak sends to the counter; 86% of rural operators earn under ₹500 a month.</a:t>
-            </a:r>
-            <a:endParaRPr lang="en-US" sz="1250" dirty="0"/>
-          </a:p>
-          <a:p>
-            <a:pPr marL="342900" indent="-342900">
-              <a:spcAft>
-                <a:spcPts val="600"/>
-              </a:spcAft>
-              <a:buSzPct val="100000"/>
-              <a:buChar char="•"/>
-            </a:pPr>
-            <a:r>
-              <a:rPr lang="en-US" sz="1250" dirty="0">
-                <a:solidFill>
-                  <a:srgbClr val="9DB0A4"/>
-                </a:solidFill>
-                <a:latin typeface="Calibri" pitchFamily="34" charset="0"/>
-                <a:ea typeface="Calibri" pitchFamily="34" charset="-122"/>
-                <a:cs typeface="Calibri" pitchFamily="34" charset="-120"/>
-              </a:rPr>
-              <a:t>The district: a signed monthly count of scams seen and people found eligible, to fund against.</a:t>
-            </a:r>
-            <a:endParaRPr lang="en-US" sz="1250" dirty="0"/>
-          </a:p>
-        </p:txBody>
-      </p:sp>
-      <p:sp>
-        <p:nvSpPr>
-          <p:cNvPr id="16" name="Text 14"/>
-          <p:cNvSpPr/>
-          <p:nvPr/>
-        </p:nvSpPr>
-        <p:spPr>
-          <a:xfrm>
-            <a:off x="548640" y="6355080"/>
-            <a:ext cx="11064240" cy="320040"/>
-          </a:xfrm>
-          <a:prstGeom prst="rect">
-            <a:avLst/>
-          </a:prstGeom>
-          <a:noFill/>
-          <a:ln/>
-        </p:spPr>
-        <p:txBody>
-          <a:bodyPr wrap="square" lIns="0" tIns="0" rIns="0" bIns="0" rtlCol="0" anchor="t"/>
-          <a:lstStyle/>
-          <a:p>
-            <a:pPr indent="0" marL="0">
-              <a:buNone/>
-            </a:pPr>
-            <a:r>
-              <a:rPr lang="en-US" sz="950" dirty="0">
-                <a:solidFill>
-                  <a:srgbClr val="6E8579"/>
-                </a:solidFill>
-                <a:latin typeface="Calibri" pitchFamily="34" charset="0"/>
-                <a:ea typeface="Calibri" pitchFamily="34" charset="-122"/>
-                <a:cs typeface="Calibri" pitchFamily="34" charset="-120"/>
-              </a:rPr>
-              <a:t>Sources: MeitY, Rajya Sabha, Mar 2025; Amazon.in listings, 6 Oct 2026; RBI Directions, 24 Jun 2026; NHA–CSC MoU, 2021; Ministry of Labour; CAG audit, reported Apr 2026</a:t>
+              <a:t>Sources: RBI (Commercial Banks – Responsible Business Conduct) Third Amendment Directions, 2026, paras 4(15A) and 76T; press release 2026-2027/533, 24 Jun 2026</a:t>
             </a:r>
             <a:endParaRPr lang="en-US" sz="950" dirty="0"/>
           </a:p>
@@ -3092,7 +3212,7 @@
                 <a:ea typeface="Arial" pitchFamily="34" charset="-122"/>
                 <a:cs typeface="Arial" pitchFamily="34" charset="-120"/>
               </a:rPr>
-              <a:t>THEME ALIGNMENT</a:t>
+              <a:t>SCALABILITY AND SUSTAINABILITY</a:t>
             </a:r>
             <a:endParaRPr lang="en-US" sz="1250" dirty="0"/>
           </a:p>
@@ -3131,7 +3251,7 @@
                 <a:ea typeface="Arial" pitchFamily="34" charset="-122"/>
                 <a:cs typeface="Arial" pitchFamily="34" charset="-120"/>
               </a:rPr>
-              <a:t>Inclusive innovation on India's own rails</a:t>
+              <a:t>Grow by replication; paid for by those who gain</a:t>
             </a:r>
             <a:endParaRPr lang="en-US" sz="3000" dirty="0"/>
           </a:p>
@@ -3145,12 +3265,12 @@
         </p:nvSpPr>
         <p:spPr>
           <a:xfrm>
-            <a:off x="548640" y="2011680"/>
-            <a:ext cx="3520440" cy="1783080"/>
+            <a:off x="548640" y="1783080"/>
+            <a:ext cx="5349240" cy="4389120"/>
           </a:xfrm>
           <a:prstGeom prst="roundRect">
             <a:avLst>
-              <a:gd name="adj" fmla="val 5128"/>
+              <a:gd name="adj" fmla="val 2083"/>
             </a:avLst>
           </a:prstGeom>
           <a:solidFill>
@@ -3179,8 +3299,8 @@
         </p:nvSpPr>
         <p:spPr>
           <a:xfrm>
-            <a:off x="822960" y="2212848"/>
-            <a:ext cx="3017520" cy="502920"/>
+            <a:off x="822960" y="1965960"/>
+            <a:ext cx="4846320" cy="411480"/>
           </a:xfrm>
           <a:prstGeom prst="rect">
             <a:avLst/>
@@ -3196,7 +3316,7 @@
               <a:buNone/>
             </a:pPr>
             <a:r>
-              <a:rPr lang="en-US" sz="1450" b="1" dirty="0">
+              <a:rPr lang="en-US" sz="1600" b="1" dirty="0">
                 <a:solidFill>
                   <a:srgbClr val="27C08A"/>
                 </a:solidFill>
@@ -3204,9 +3324,9 @@
                 <a:ea typeface="Arial" pitchFamily="34" charset="-122"/>
                 <a:cs typeface="Arial" pitchFamily="34" charset="-120"/>
               </a:rPr>
-              <a:t>Financial inclusion, made safe</a:t>
-            </a:r>
-            <a:endParaRPr lang="en-US" sz="1450" dirty="0"/>
+              <a:t>Replication, not reinvention</a:t>
+            </a:r>
+            <a:endParaRPr lang="en-US" sz="1600" dirty="0"/>
           </a:p>
         </p:txBody>
       </p:sp>
@@ -3218,8 +3338,8 @@
         </p:nvSpPr>
         <p:spPr>
           <a:xfrm>
-            <a:off x="822960" y="2743200"/>
-            <a:ext cx="3017520" cy="960120"/>
+            <a:off x="822960" y="2468880"/>
+            <a:ext cx="4892040" cy="3566160"/>
           </a:xfrm>
           <a:prstGeom prst="rect">
             <a:avLst/>
@@ -3231,11 +3351,15 @@
           <a:bodyPr wrap="square" lIns="0" tIns="0" rIns="0" bIns="0" rtlCol="0" anchor="t"/>
           <a:lstStyle/>
           <a:p>
-            <a:pPr indent="0" marL="0">
-              <a:buNone/>
-            </a:pPr>
-            <a:r>
-              <a:rPr lang="en-US" sz="1200" dirty="0">
+            <a:pPr marL="342900" indent="-342900">
+              <a:spcAft>
+                <a:spcPts val="600"/>
+              </a:spcAft>
+              <a:buSzPct val="100000"/>
+              <a:buChar char="•"/>
+            </a:pPr>
+            <a:r>
+              <a:rPr lang="en-US" sz="1250" dirty="0">
                 <a:solidFill>
                   <a:srgbClr val="9DB0A4"/>
                 </a:solidFill>
@@ -3243,9 +3367,72 @@
                 <a:ea typeface="Calibri" pitchFamily="34" charset="-122"/>
                 <a:cs typeface="Calibri" pitchFamily="34" charset="-120"/>
               </a:rPr>
-              <a:t>Protects the 59 crore Jan Dhan accounts and the UPI base the nation built, for the people who opened them last.</a:t>
-            </a:r>
-            <a:endParaRPr lang="en-US" sz="1200" dirty="0"/>
+              <a:t>6 lakh functional CSCs, 4.7 lakh of them at gram-panchayat level: the counters already exist.</a:t>
+            </a:r>
+            <a:endParaRPr lang="en-US" sz="1250" dirty="0"/>
+          </a:p>
+          <a:p>
+            <a:pPr marL="342900" indent="-342900">
+              <a:spcAft>
+                <a:spcPts val="600"/>
+              </a:spcAft>
+              <a:buSzPct val="100000"/>
+              <a:buChar char="•"/>
+            </a:pPr>
+            <a:r>
+              <a:rPr lang="en-US" sz="1250" dirty="0">
+                <a:solidFill>
+                  <a:srgbClr val="9DB0A4"/>
+                </a:solidFill>
+                <a:latin typeface="Calibri" pitchFamily="34" charset="0"/>
+                <a:ea typeface="Calibri" pitchFamily="34" charset="-122"/>
+                <a:cs typeface="Calibri" pitchFamily="34" charset="-120"/>
+              </a:rPr>
+              <a:t>A deployment is a node image, signed packs and a one-page operator guide; a new scam or scheme is a pack update by USB.</a:t>
+            </a:r>
+            <a:endParaRPr lang="en-US" sz="1250" dirty="0"/>
+          </a:p>
+          <a:p>
+            <a:pPr marL="342900" indent="-342900">
+              <a:spcAft>
+                <a:spcPts val="600"/>
+              </a:spcAft>
+              <a:buSzPct val="100000"/>
+              <a:buChar char="•"/>
+            </a:pPr>
+            <a:r>
+              <a:rPr lang="en-US" sz="1250" dirty="0">
+                <a:solidFill>
+                  <a:srgbClr val="9DB0A4"/>
+                </a:solidFill>
+                <a:latin typeface="Calibri" pitchFamily="34" charset="0"/>
+                <a:ea typeface="Calibri" pitchFamily="34" charset="-122"/>
+                <a:cs typeface="Calibri" pitchFamily="34" charset="-120"/>
+              </a:rPr>
+              <a:t>Every phone that visits can keep its own copy, so protection spreads beyond the counter at no extra cost.</a:t>
+            </a:r>
+            <a:endParaRPr lang="en-US" sz="1250" dirty="0"/>
+          </a:p>
+          <a:p>
+            <a:pPr marL="342900" indent="-342900">
+              <a:spcAft>
+                <a:spcPts val="600"/>
+              </a:spcAft>
+              <a:buSzPct val="100000"/>
+              <a:buChar char="•"/>
+            </a:pPr>
+            <a:r>
+              <a:rPr lang="en-US" sz="1250" dirty="0">
+                <a:solidFill>
+                  <a:srgbClr val="9DB0A4"/>
+                </a:solidFill>
+                <a:latin typeface="Calibri" pitchFamily="34" charset="0"/>
+                <a:ea typeface="Calibri" pitchFamily="34" charset="-122"/>
+                <a:cs typeface="Calibri" pitchFamily="34" charset="-120"/>
+              </a:rPr>
+              <a:t>No cloud and no per-query fee; open, tested rules any state can audit.</a:t>
+            </a:r>
+            <a:endParaRPr lang="en-US" sz="1250" dirty="0"/>
           </a:p>
         </p:txBody>
       </p:sp>
@@ -3257,16 +3444,16 @@
         </p:nvSpPr>
         <p:spPr>
           <a:xfrm>
-            <a:off x="4315968" y="2011680"/>
-            <a:ext cx="3520440" cy="1783080"/>
+            <a:off x="6080760" y="1783080"/>
+            <a:ext cx="5532120" cy="4389120"/>
           </a:xfrm>
           <a:prstGeom prst="roundRect">
             <a:avLst>
-              <a:gd name="adj" fmla="val 5128"/>
+              <a:gd name="adj" fmla="val 2083"/>
             </a:avLst>
           </a:prstGeom>
           <a:solidFill>
-            <a:srgbClr val="152017"/>
+            <a:srgbClr val="1B2A20"/>
           </a:solidFill>
           <a:ln w="12700">
             <a:solidFill>
@@ -3291,8 +3478,8 @@
         </p:nvSpPr>
         <p:spPr>
           <a:xfrm>
-            <a:off x="4590288" y="2212848"/>
-            <a:ext cx="3017520" cy="502920"/>
+            <a:off x="6355080" y="1965960"/>
+            <a:ext cx="5029200" cy="411480"/>
           </a:xfrm>
           <a:prstGeom prst="rect">
             <a:avLst/>
@@ -3308,17 +3495,17 @@
               <a:buNone/>
             </a:pPr>
             <a:r>
-              <a:rPr lang="en-US" sz="1450" b="1" dirty="0">
-                <a:solidFill>
-                  <a:srgbClr val="27C08A"/>
+              <a:rPr lang="en-US" sz="1600" b="1" dirty="0">
+                <a:solidFill>
+                  <a:srgbClr val="FF9E3D"/>
                 </a:solidFill>
                 <a:latin typeface="Arial" pitchFamily="34" charset="0"/>
                 <a:ea typeface="Arial" pitchFamily="34" charset="-122"/>
                 <a:cs typeface="Arial" pitchFamily="34" charset="-120"/>
               </a:rPr>
-              <a:t>1930 and RBI's 2027 rules</a:t>
-            </a:r>
-            <a:endParaRPr lang="en-US" sz="1450" dirty="0"/>
+              <a:t>Who pays</a:t>
+            </a:r>
+            <a:endParaRPr lang="en-US" sz="1600" dirty="0"/>
           </a:p>
         </p:txBody>
       </p:sp>
@@ -3330,17 +3517,58 @@
         </p:nvSpPr>
         <p:spPr>
           <a:xfrm>
-            <a:off x="4590288" y="2743200"/>
-            <a:ext cx="3017520" cy="960120"/>
-          </a:xfrm>
-          <a:prstGeom prst="rect">
-            <a:avLst/>
-          </a:prstGeom>
-          <a:noFill/>
-          <a:ln/>
-        </p:spPr>
-        <p:txBody>
-          <a:bodyPr wrap="square" lIns="0" tIns="0" rIns="0" bIns="0" rtlCol="0" anchor="t"/>
+            <a:off x="6355080" y="2423160"/>
+            <a:ext cx="5029200" cy="548640"/>
+          </a:xfrm>
+          <a:prstGeom prst="rect">
+            <a:avLst/>
+          </a:prstGeom>
+          <a:noFill/>
+          <a:ln/>
+        </p:spPr>
+        <p:txBody>
+          <a:bodyPr wrap="square" lIns="0" tIns="0" rIns="0" bIns="0" rtlCol="0" anchor="ctr">
+            <a:normAutofit/>
+          </a:bodyPr>
+          <a:lstStyle/>
+          <a:p>
+            <a:pPr indent="0" marL="0">
+              <a:buNone/>
+            </a:pPr>
+            <a:r>
+              <a:rPr lang="en-US" sz="2400" b="1" dirty="0">
+                <a:solidFill>
+                  <a:srgbClr val="EEF3EE"/>
+                </a:solidFill>
+                <a:latin typeface="Arial" pitchFamily="34" charset="0"/>
+                <a:ea typeface="Arial" pitchFamily="34" charset="-122"/>
+                <a:cs typeface="Arial" pitchFamily="34" charset="-120"/>
+              </a:rPr>
+              <a:t>₹25,000–35,000</a:t>
+            </a:r>
+            <a:endParaRPr lang="en-US" sz="2400" dirty="0"/>
+          </a:p>
+        </p:txBody>
+      </p:sp>
+      <p:sp>
+        <p:nvSpPr>
+          <p:cNvPr id="14" name="Text 12"/>
+          <p:cNvSpPr/>
+          <p:nvPr/>
+        </p:nvSpPr>
+        <p:spPr>
+          <a:xfrm>
+            <a:off x="6355080" y="2971800"/>
+            <a:ext cx="5029200" cy="457200"/>
+          </a:xfrm>
+          <a:prstGeom prst="rect">
+            <a:avLst/>
+          </a:prstGeom>
+          <a:noFill/>
+          <a:ln/>
+        </p:spPr>
+        <p:txBody>
+          <a:bodyPr wrap="square" lIns="0" tIns="0" rIns="0" bIns="0" rtlCol="0" anchor="ctr"/>
           <a:lstStyle/>
           <a:p>
             <a:pPr indent="0" marL="0">
@@ -3355,7 +3583,7 @@
                 <a:ea typeface="Calibri" pitchFamily="34" charset="-122"/>
                 <a:cs typeface="Calibri" pitchFamily="34" charset="-120"/>
               </a:rPr>
-              <a:t>Every scam verdict ends in the national helpline; fast reporting is what RBI's compensation now requires.</a:t>
+              <a:t>once per node (an N150 mini-PC (8–16 GB) or a refurbished i5 laptop); each check costs nothing.</a:t>
             </a:r>
             <a:endParaRPr lang="en-US" sz="1200" dirty="0"/>
           </a:p>
@@ -3363,87 +3591,14 @@
       </p:sp>
       <p:sp>
         <p:nvSpPr>
-          <p:cNvPr id="14" name="Shape 12"/>
-          <p:cNvSpPr/>
-          <p:nvPr/>
-        </p:nvSpPr>
-        <p:spPr>
-          <a:xfrm>
-            <a:off x="8083296" y="2011680"/>
-            <a:ext cx="3520440" cy="1783080"/>
-          </a:xfrm>
-          <a:prstGeom prst="roundRect">
-            <a:avLst>
-              <a:gd name="adj" fmla="val 5128"/>
-            </a:avLst>
-          </a:prstGeom>
-          <a:solidFill>
-            <a:srgbClr val="152017"/>
-          </a:solidFill>
-          <a:ln w="12700">
-            <a:solidFill>
-              <a:srgbClr val="2C4636"/>
-            </a:solidFill>
-            <a:prstDash val="solid"/>
-          </a:ln>
-          <a:effectLst>
-            <a:outerShdw sx="100000" sy="100000" kx="0" ky="0" algn="bl" rotWithShape="0" blurRad="127000" dist="38100" dir="5400000">
-              <a:srgbClr val="000000">
-                <a:alpha val="40000"/>
-              </a:srgbClr>
-            </a:outerShdw>
-          </a:effectLst>
-        </p:spPr>
-      </p:sp>
-      <p:sp>
-        <p:nvSpPr>
           <p:cNvPr id="15" name="Text 13"/>
           <p:cNvSpPr/>
           <p:nvPr/>
         </p:nvSpPr>
         <p:spPr>
           <a:xfrm>
-            <a:off x="8357616" y="2212848"/>
-            <a:ext cx="3017520" cy="502920"/>
-          </a:xfrm>
-          <a:prstGeom prst="rect">
-            <a:avLst/>
-          </a:prstGeom>
-          <a:noFill/>
-          <a:ln/>
-        </p:spPr>
-        <p:txBody>
-          <a:bodyPr wrap="square" lIns="0" tIns="0" rIns="0" bIns="0" rtlCol="0" anchor="ctr"/>
-          <a:lstStyle/>
-          <a:p>
-            <a:pPr indent="0" marL="0">
-              <a:buNone/>
-            </a:pPr>
-            <a:r>
-              <a:rPr lang="en-US" sz="1450" b="1" dirty="0">
-                <a:solidFill>
-                  <a:srgbClr val="27C08A"/>
-                </a:solidFill>
-                <a:latin typeface="Arial" pitchFamily="34" charset="0"/>
-                <a:ea typeface="Arial" pitchFamily="34" charset="-122"/>
-                <a:cs typeface="Arial" pitchFamily="34" charset="-120"/>
-              </a:rPr>
-              <a:t>Ayushman Bharat</a:t>
-            </a:r>
-            <a:endParaRPr lang="en-US" sz="1450" dirty="0"/>
-          </a:p>
-        </p:txBody>
-      </p:sp>
-      <p:sp>
-        <p:nvSpPr>
-          <p:cNvPr id="16" name="Text 14"/>
-          <p:cNvSpPr/>
-          <p:nvPr/>
-        </p:nvSpPr>
-        <p:spPr>
-          <a:xfrm>
-            <a:off x="8357616" y="2743200"/>
-            <a:ext cx="3017520" cy="960120"/>
+            <a:off x="6355080" y="3520440"/>
+            <a:ext cx="5029200" cy="2560320"/>
           </a:xfrm>
           <a:prstGeom prst="rect">
             <a:avLst/>
@@ -3455,11 +3610,15 @@
           <a:bodyPr wrap="square" lIns="0" tIns="0" rIns="0" bIns="0" rtlCol="0" anchor="t"/>
           <a:lstStyle/>
           <a:p>
-            <a:pPr indent="0" marL="0">
-              <a:buNone/>
-            </a:pPr>
-            <a:r>
-              <a:rPr lang="en-US" sz="1200" dirty="0">
+            <a:pPr marL="342900" indent="-342900">
+              <a:spcAft>
+                <a:spcPts val="600"/>
+              </a:spcAft>
+              <a:buSzPct val="100000"/>
+              <a:buChar char="•"/>
+            </a:pPr>
+            <a:r>
+              <a:rPr lang="en-US" sz="1250" dirty="0">
                 <a:solidFill>
                   <a:srgbClr val="9DB0A4"/>
                 </a:solidFill>
@@ -3467,111 +3626,20 @@
                 <a:ea typeface="Calibri" pitchFamily="34" charset="-122"/>
                 <a:cs typeface="Calibri" pitchFamily="34" charset="-120"/>
               </a:rPr>
-              <a:t>Finds seniors for the Vay Vandana card and sends them to the counter that makes it.</a:t>
-            </a:r>
-            <a:endParaRPr lang="en-US" sz="1200" dirty="0"/>
-          </a:p>
-        </p:txBody>
-      </p:sp>
-      <p:sp>
-        <p:nvSpPr>
-          <p:cNvPr id="17" name="Shape 15"/>
-          <p:cNvSpPr/>
-          <p:nvPr/>
-        </p:nvSpPr>
-        <p:spPr>
-          <a:xfrm>
-            <a:off x="548640" y="3977640"/>
-            <a:ext cx="3520440" cy="1783080"/>
-          </a:xfrm>
-          <a:prstGeom prst="roundRect">
-            <a:avLst>
-              <a:gd name="adj" fmla="val 5128"/>
-            </a:avLst>
-          </a:prstGeom>
-          <a:solidFill>
-            <a:srgbClr val="152017"/>
-          </a:solidFill>
-          <a:ln w="12700">
-            <a:solidFill>
-              <a:srgbClr val="2C4636"/>
-            </a:solidFill>
-            <a:prstDash val="solid"/>
-          </a:ln>
-          <a:effectLst>
-            <a:outerShdw sx="100000" sy="100000" kx="0" ky="0" algn="bl" rotWithShape="0" blurRad="127000" dist="38100" dir="5400000">
-              <a:srgbClr val="000000">
-                <a:alpha val="40000"/>
-              </a:srgbClr>
-            </a:outerShdw>
-          </a:effectLst>
-        </p:spPr>
-      </p:sp>
-      <p:sp>
-        <p:nvSpPr>
-          <p:cNvPr id="18" name="Text 16"/>
-          <p:cNvSpPr/>
-          <p:nvPr/>
-        </p:nvSpPr>
-        <p:spPr>
-          <a:xfrm>
-            <a:off x="822960" y="4178808"/>
-            <a:ext cx="3017520" cy="502920"/>
-          </a:xfrm>
-          <a:prstGeom prst="rect">
-            <a:avLst/>
-          </a:prstGeom>
-          <a:noFill/>
-          <a:ln/>
-        </p:spPr>
-        <p:txBody>
-          <a:bodyPr wrap="square" lIns="0" tIns="0" rIns="0" bIns="0" rtlCol="0" anchor="ctr"/>
-          <a:lstStyle/>
-          <a:p>
-            <a:pPr indent="0" marL="0">
-              <a:buNone/>
-            </a:pPr>
-            <a:r>
-              <a:rPr lang="en-US" sz="1450" b="1" dirty="0">
-                <a:solidFill>
-                  <a:srgbClr val="27C08A"/>
-                </a:solidFill>
-                <a:latin typeface="Arial" pitchFamily="34" charset="0"/>
-                <a:ea typeface="Arial" pitchFamily="34" charset="-122"/>
-                <a:cs typeface="Arial" pitchFamily="34" charset="-120"/>
-              </a:rPr>
-              <a:t>Digital India, last mile</a:t>
-            </a:r>
-            <a:endParaRPr lang="en-US" sz="1450" dirty="0"/>
-          </a:p>
-        </p:txBody>
-      </p:sp>
-      <p:sp>
-        <p:nvSpPr>
-          <p:cNvPr id="19" name="Text 17"/>
-          <p:cNvSpPr/>
-          <p:nvPr/>
-        </p:nvSpPr>
-        <p:spPr>
-          <a:xfrm>
-            <a:off x="822960" y="4709160"/>
-            <a:ext cx="3017520" cy="960120"/>
-          </a:xfrm>
-          <a:prstGeom prst="rect">
-            <a:avLst/>
-          </a:prstGeom>
-          <a:noFill/>
-          <a:ln/>
-        </p:spPr>
-        <p:txBody>
-          <a:bodyPr wrap="square" lIns="0" tIns="0" rIns="0" bIns="0" rtlCol="0" anchor="t"/>
-          <a:lstStyle/>
-          <a:p>
-            <a:pPr indent="0" marL="0">
-              <a:buNone/>
-            </a:pPr>
-            <a:r>
-              <a:rPr lang="en-US" sz="1200" dirty="0">
+              <a:t>Banks: financial-inclusion or CSR budgets for their agent points, as customer education; fewer small-fraud payouts (shared with RBI from 1 Jan 2027) are a bonus, not the case.</a:t>
+            </a:r>
+            <a:endParaRPr lang="en-US" sz="1250" dirty="0"/>
+          </a:p>
+          <a:p>
+            <a:pPr marL="342900" indent="-342900">
+              <a:spcAft>
+                <a:spcPts val="600"/>
+              </a:spcAft>
+              <a:buSzPct val="100000"/>
+              <a:buChar char="•"/>
+            </a:pPr>
+            <a:r>
+              <a:rPr lang="en-US" sz="1250" dirty="0">
                 <a:solidFill>
                   <a:srgbClr val="9DB0A4"/>
                 </a:solidFill>
@@ -3579,111 +3647,20 @@
                 <a:ea typeface="Calibri" pitchFamily="34" charset="-122"/>
                 <a:cs typeface="Calibri" pitchFamily="34" charset="-120"/>
               </a:rPr>
-              <a:t>Hindi and English by voice today, offline; the language data is a pack, so more languages follow.</a:t>
-            </a:r>
-            <a:endParaRPr lang="en-US" sz="1200" dirty="0"/>
-          </a:p>
-        </p:txBody>
-      </p:sp>
-      <p:sp>
-        <p:nvSpPr>
-          <p:cNvPr id="20" name="Shape 18"/>
-          <p:cNvSpPr/>
-          <p:nvPr/>
-        </p:nvSpPr>
-        <p:spPr>
-          <a:xfrm>
-            <a:off x="4315968" y="3977640"/>
-            <a:ext cx="3520440" cy="1783080"/>
-          </a:xfrm>
-          <a:prstGeom prst="roundRect">
-            <a:avLst>
-              <a:gd name="adj" fmla="val 5128"/>
-            </a:avLst>
-          </a:prstGeom>
-          <a:solidFill>
-            <a:srgbClr val="152017"/>
-          </a:solidFill>
-          <a:ln w="12700">
-            <a:solidFill>
-              <a:srgbClr val="2C4636"/>
-            </a:solidFill>
-            <a:prstDash val="solid"/>
-          </a:ln>
-          <a:effectLst>
-            <a:outerShdw sx="100000" sy="100000" kx="0" ky="0" algn="bl" rotWithShape="0" blurRad="127000" dist="38100" dir="5400000">
-              <a:srgbClr val="000000">
-                <a:alpha val="40000"/>
-              </a:srgbClr>
-            </a:outerShdw>
-          </a:effectLst>
-        </p:spPr>
-      </p:sp>
-      <p:sp>
-        <p:nvSpPr>
-          <p:cNvPr id="21" name="Text 19"/>
-          <p:cNvSpPr/>
-          <p:nvPr/>
-        </p:nvSpPr>
-        <p:spPr>
-          <a:xfrm>
-            <a:off x="4590288" y="4178808"/>
-            <a:ext cx="3017520" cy="502920"/>
-          </a:xfrm>
-          <a:prstGeom prst="rect">
-            <a:avLst/>
-          </a:prstGeom>
-          <a:noFill/>
-          <a:ln/>
-        </p:spPr>
-        <p:txBody>
-          <a:bodyPr wrap="square" lIns="0" tIns="0" rIns="0" bIns="0" rtlCol="0" anchor="ctr"/>
-          <a:lstStyle/>
-          <a:p>
-            <a:pPr indent="0" marL="0">
-              <a:buNone/>
-            </a:pPr>
-            <a:r>
-              <a:rPr lang="en-US" sz="1450" b="1" dirty="0">
-                <a:solidFill>
-                  <a:srgbClr val="27C08A"/>
-                </a:solidFill>
-                <a:latin typeface="Arial" pitchFamily="34" charset="0"/>
-                <a:ea typeface="Arial" pitchFamily="34" charset="-122"/>
-                <a:cs typeface="Arial" pitchFamily="34" charset="-120"/>
-              </a:rPr>
-              <a:t>DPDP Act</a:t>
-            </a:r>
-            <a:endParaRPr lang="en-US" sz="1450" dirty="0"/>
-          </a:p>
-        </p:txBody>
-      </p:sp>
-      <p:sp>
-        <p:nvSpPr>
-          <p:cNvPr id="22" name="Text 20"/>
-          <p:cNvSpPr/>
-          <p:nvPr/>
-        </p:nvSpPr>
-        <p:spPr>
-          <a:xfrm>
-            <a:off x="4590288" y="4709160"/>
-            <a:ext cx="3017520" cy="960120"/>
-          </a:xfrm>
-          <a:prstGeom prst="rect">
-            <a:avLst/>
-          </a:prstGeom>
-          <a:noFill/>
-          <a:ln/>
-        </p:spPr>
-        <p:txBody>
-          <a:bodyPr wrap="square" lIns="0" tIns="0" rIns="0" bIns="0" rtlCol="0" anchor="t"/>
-          <a:lstStyle/>
-          <a:p>
-            <a:pPr indent="0" marL="0">
-              <a:buNone/>
-            </a:pPr>
-            <a:r>
-              <a:rPr lang="en-US" sz="1200" dirty="0">
+              <a:t>The CSC network: paid about ₹20 per first-time Ayushman card or e-Shram registration Sahayak sends to the counter (how much reaches the operator varies); 86% of rural operators earn under ₹500 a month.</a:t>
+            </a:r>
+            <a:endParaRPr lang="en-US" sz="1250" dirty="0"/>
+          </a:p>
+          <a:p>
+            <a:pPr marL="342900" indent="-342900">
+              <a:spcAft>
+                <a:spcPts val="600"/>
+              </a:spcAft>
+              <a:buSzPct val="100000"/>
+              <a:buChar char="•"/>
+            </a:pPr>
+            <a:r>
+              <a:rPr lang="en-US" sz="1250" dirty="0">
                 <a:solidFill>
                   <a:srgbClr val="9DB0A4"/>
                 </a:solidFill>
@@ -3691,121 +3668,48 @@
                 <a:ea typeface="Calibri" pitchFamily="34" charset="-122"/>
                 <a:cs typeface="Calibri" pitchFamily="34" charset="-120"/>
               </a:rPr>
-              <a:t>Privacy by design: consent first, nothing named, nothing written to disk, deleted by default.</a:t>
-            </a:r>
-            <a:endParaRPr lang="en-US" sz="1200" dirty="0"/>
-          </a:p>
-        </p:txBody>
-      </p:sp>
-      <p:sp>
-        <p:nvSpPr>
-          <p:cNvPr id="23" name="Shape 21"/>
-          <p:cNvSpPr/>
-          <p:nvPr/>
-        </p:nvSpPr>
-        <p:spPr>
-          <a:xfrm>
-            <a:off x="8083296" y="3977640"/>
-            <a:ext cx="3520440" cy="1783080"/>
-          </a:xfrm>
-          <a:prstGeom prst="roundRect">
-            <a:avLst>
-              <a:gd name="adj" fmla="val 5128"/>
-            </a:avLst>
-          </a:prstGeom>
-          <a:solidFill>
-            <a:srgbClr val="152017"/>
-          </a:solidFill>
-          <a:ln w="12700">
-            <a:solidFill>
-              <a:srgbClr val="2C4636"/>
-            </a:solidFill>
-            <a:prstDash val="solid"/>
-          </a:ln>
-          <a:effectLst>
-            <a:outerShdw sx="100000" sy="100000" kx="0" ky="0" algn="bl" rotWithShape="0" blurRad="127000" dist="38100" dir="5400000">
-              <a:srgbClr val="000000">
-                <a:alpha val="40000"/>
-              </a:srgbClr>
-            </a:outerShdw>
-          </a:effectLst>
-        </p:spPr>
-      </p:sp>
-      <p:sp>
-        <p:nvSpPr>
-          <p:cNvPr id="24" name="Text 22"/>
-          <p:cNvSpPr/>
-          <p:nvPr/>
-        </p:nvSpPr>
-        <p:spPr>
-          <a:xfrm>
-            <a:off x="8357616" y="4178808"/>
-            <a:ext cx="3017520" cy="502920"/>
-          </a:xfrm>
-          <a:prstGeom prst="rect">
-            <a:avLst/>
-          </a:prstGeom>
-          <a:noFill/>
-          <a:ln/>
-        </p:spPr>
-        <p:txBody>
-          <a:bodyPr wrap="square" lIns="0" tIns="0" rIns="0" bIns="0" rtlCol="0" anchor="ctr"/>
+              <a:t>The State Health Agency and the district: Vay Vandana card drives at the CSCs, funded against a signed monthly count of cards made.</a:t>
+            </a:r>
+            <a:endParaRPr lang="en-US" sz="1250" dirty="0"/>
+          </a:p>
+        </p:txBody>
+      </p:sp>
+      <p:sp>
+        <p:nvSpPr>
+          <p:cNvPr id="16" name="Text 14"/>
+          <p:cNvSpPr/>
+          <p:nvPr/>
+        </p:nvSpPr>
+        <p:spPr>
+          <a:xfrm>
+            <a:off x="548640" y="6355080"/>
+            <a:ext cx="11064240" cy="320040"/>
+          </a:xfrm>
+          <a:prstGeom prst="rect">
+            <a:avLst/>
+          </a:prstGeom>
+          <a:noFill/>
+          <a:ln/>
+        </p:spPr>
+        <p:txBody>
+          <a:bodyPr wrap="square" lIns="0" tIns="0" rIns="0" bIns="0" rtlCol="0" anchor="t"/>
           <a:lstStyle/>
           <a:p>
             <a:pPr indent="0" marL="0">
               <a:buNone/>
             </a:pPr>
             <a:r>
-              <a:rPr lang="en-US" sz="1450" b="1" dirty="0">
-                <a:solidFill>
-                  <a:srgbClr val="27C08A"/>
-                </a:solidFill>
-                <a:latin typeface="Arial" pitchFamily="34" charset="0"/>
-                <a:ea typeface="Arial" pitchFamily="34" charset="-122"/>
-                <a:cs typeface="Arial" pitchFamily="34" charset="-120"/>
-              </a:rPr>
-              <a:t>CSC · BC · ASHA</a:t>
-            </a:r>
-            <a:endParaRPr lang="en-US" sz="1450" dirty="0"/>
-          </a:p>
-        </p:txBody>
-      </p:sp>
-      <p:sp>
-        <p:nvSpPr>
-          <p:cNvPr id="25" name="Text 23"/>
-          <p:cNvSpPr/>
-          <p:nvPr/>
-        </p:nvSpPr>
-        <p:spPr>
-          <a:xfrm>
-            <a:off x="8357616" y="4709160"/>
-            <a:ext cx="3017520" cy="960120"/>
-          </a:xfrm>
-          <a:prstGeom prst="rect">
-            <a:avLst/>
-          </a:prstGeom>
-          <a:noFill/>
-          <a:ln/>
-        </p:spPr>
-        <p:txBody>
-          <a:bodyPr wrap="square" lIns="0" tIns="0" rIns="0" bIns="0" rtlCol="0" anchor="t"/>
-          <a:lstStyle/>
-          <a:p>
-            <a:pPr indent="0" marL="0">
-              <a:buNone/>
-            </a:pPr>
-            <a:r>
-              <a:rPr lang="en-US" sz="1200" dirty="0">
-                <a:solidFill>
-                  <a:srgbClr val="9DB0A4"/>
+              <a:rPr lang="en-US" sz="950" dirty="0">
+                <a:solidFill>
+                  <a:srgbClr val="6E8579"/>
                 </a:solidFill>
                 <a:latin typeface="Calibri" pitchFamily="34" charset="0"/>
                 <a:ea typeface="Calibri" pitchFamily="34" charset="-122"/>
                 <a:cs typeface="Calibri" pitchFamily="34" charset="-120"/>
               </a:rPr>
-              <a:t>Delivered through the public networks people already trust, with an operator at the counter.</a:t>
-            </a:r>
-            <a:endParaRPr lang="en-US" sz="1200" dirty="0"/>
+              <a:t>Sources: MeitY, Rajya Sabha, Mar 2025; Amazon.in listings, 6 Oct 2026; RBI (Commercial Banks – Responsible Business Conduct) Third Amendment Directions, 2026, paras 4(15A) and 76T; press release 2026-2027/533, 24 Jun 2026; NHA–CSC MoU, 2021; Ministry of Labour; CAG audit, reported Apr 2026</a:t>
+            </a:r>
+            <a:endParaRPr lang="en-US" sz="950" dirty="0"/>
           </a:p>
         </p:txBody>
       </p:sp>
@@ -3954,7 +3858,7 @@
                 <a:ea typeface="Arial" pitchFamily="34" charset="-122"/>
                 <a:cs typeface="Arial" pitchFamily="34" charset="-120"/>
               </a:rPr>
-              <a:t>COLLABORATIONS</a:t>
+              <a:t>THEME ALIGNMENT</a:t>
             </a:r>
             <a:endParaRPr lang="en-US" sz="1250" dirty="0"/>
           </a:p>
@@ -3993,7 +3897,7 @@
                 <a:ea typeface="Arial" pitchFamily="34" charset="-122"/>
                 <a:cs typeface="Arial" pitchFamily="34" charset="-120"/>
               </a:rPr>
-              <a:t>Built in the open; seeking last-mile partners</a:t>
+              <a:t>Inclusive innovation on India's own rails</a:t>
             </a:r>
             <a:endParaRPr lang="en-US" sz="3000" dirty="0"/>
           </a:p>
@@ -4007,12 +3911,12 @@
         </p:nvSpPr>
         <p:spPr>
           <a:xfrm>
-            <a:off x="548640" y="1783080"/>
-            <a:ext cx="11064240" cy="804672"/>
+            <a:off x="548640" y="2011680"/>
+            <a:ext cx="3520440" cy="1783080"/>
           </a:xfrm>
           <a:prstGeom prst="roundRect">
             <a:avLst>
-              <a:gd name="adj" fmla="val 11364"/>
+              <a:gd name="adj" fmla="val 5128"/>
             </a:avLst>
           </a:prstGeom>
           <a:solidFill>
@@ -4041,8 +3945,8 @@
         </p:nvSpPr>
         <p:spPr>
           <a:xfrm>
-            <a:off x="822960" y="1837944"/>
-            <a:ext cx="4206240" cy="694944"/>
+            <a:off x="822960" y="2212848"/>
+            <a:ext cx="3017520" cy="502920"/>
           </a:xfrm>
           <a:prstGeom prst="rect">
             <a:avLst/>
@@ -4058,17 +3962,17 @@
               <a:buNone/>
             </a:pPr>
             <a:r>
-              <a:rPr lang="en-US" sz="1350" b="1" dirty="0">
-                <a:solidFill>
-                  <a:srgbClr val="EEF3EE"/>
+              <a:rPr lang="en-US" sz="1450" b="1" dirty="0">
+                <a:solidFill>
+                  <a:srgbClr val="27C08A"/>
                 </a:solidFill>
                 <a:latin typeface="Arial" pitchFamily="34" charset="0"/>
                 <a:ea typeface="Arial" pitchFamily="34" charset="-122"/>
                 <a:cs typeface="Arial" pitchFamily="34" charset="-120"/>
               </a:rPr>
-              <a:t>CSC village-level entrepreneur or bank business correspondent</a:t>
-            </a:r>
-            <a:endParaRPr lang="en-US" sz="1350" dirty="0"/>
+              <a:t>Financial inclusion, made safe</a:t>
+            </a:r>
+            <a:endParaRPr lang="en-US" sz="1450" dirty="0"/>
           </a:p>
         </p:txBody>
       </p:sp>
@@ -4080,17 +3984,17 @@
         </p:nvSpPr>
         <p:spPr>
           <a:xfrm>
-            <a:off x="5120640" y="1837944"/>
-            <a:ext cx="4663440" cy="694944"/>
-          </a:xfrm>
-          <a:prstGeom prst="rect">
-            <a:avLst/>
-          </a:prstGeom>
-          <a:noFill/>
-          <a:ln/>
-        </p:spPr>
-        <p:txBody>
-          <a:bodyPr wrap="square" lIns="0" tIns="0" rIns="0" bIns="0" rtlCol="0" anchor="ctr"/>
+            <a:off x="822960" y="2743200"/>
+            <a:ext cx="3017520" cy="960120"/>
+          </a:xfrm>
+          <a:prstGeom prst="rect">
+            <a:avLst/>
+          </a:prstGeom>
+          <a:noFill/>
+          <a:ln/>
+        </p:spPr>
+        <p:txBody>
+          <a:bodyPr wrap="square" lIns="0" tIns="0" rIns="0" bIns="0" rtlCol="0" anchor="t"/>
           <a:lstStyle/>
           <a:p>
             <a:pPr indent="0" marL="0">
@@ -4105,7 +4009,7 @@
                 <a:ea typeface="Calibri" pitchFamily="34" charset="-122"/>
                 <a:cs typeface="Calibri" pitchFamily="34" charset="-120"/>
               </a:rPr>
-              <a:t>hosts the node and the field morning</a:t>
+              <a:t>Protects the 59 crore Jan Dhan accounts and the UPI base the nation built, for the people who opened them last.</a:t>
             </a:r>
             <a:endParaRPr lang="en-US" sz="1200" dirty="0"/>
           </a:p>
@@ -4119,78 +4023,12 @@
         </p:nvSpPr>
         <p:spPr>
           <a:xfrm>
-            <a:off x="9921240" y="2002536"/>
-            <a:ext cx="1463040" cy="365760"/>
+            <a:off x="4315968" y="2011680"/>
+            <a:ext cx="3520440" cy="1783080"/>
           </a:xfrm>
           <a:prstGeom prst="roundRect">
             <a:avLst>
-              <a:gd name="adj" fmla="val 20000"/>
-            </a:avLst>
-          </a:prstGeom>
-          <a:solidFill>
-            <a:srgbClr val="1B2A20"/>
-          </a:solidFill>
-          <a:ln w="12700">
-            <a:solidFill>
-              <a:srgbClr val="FF9E3D"/>
-            </a:solidFill>
-            <a:prstDash val="solid"/>
-          </a:ln>
-        </p:spPr>
-      </p:sp>
-      <p:sp>
-        <p:nvSpPr>
-          <p:cNvPr id="12" name="Text 10"/>
-          <p:cNvSpPr/>
-          <p:nvPr/>
-        </p:nvSpPr>
-        <p:spPr>
-          <a:xfrm>
-            <a:off x="9921240" y="2002536"/>
-            <a:ext cx="1463040" cy="365760"/>
-          </a:xfrm>
-          <a:prstGeom prst="rect">
-            <a:avLst/>
-          </a:prstGeom>
-          <a:noFill/>
-          <a:ln/>
-        </p:spPr>
-        <p:txBody>
-          <a:bodyPr wrap="square" lIns="0" tIns="0" rIns="0" bIns="0" rtlCol="0" anchor="ctr"/>
-          <a:lstStyle/>
-          <a:p>
-            <a:pPr algn="ctr" indent="0" marL="0">
-              <a:buNone/>
-            </a:pPr>
-            <a:r>
-              <a:rPr lang="en-US" sz="1100" b="1" dirty="0">
-                <a:solidFill>
-                  <a:srgbClr val="FF9E3D"/>
-                </a:solidFill>
-                <a:latin typeface="Calibri" pitchFamily="34" charset="0"/>
-                <a:ea typeface="Calibri" pitchFamily="34" charset="-122"/>
-                <a:cs typeface="Calibri" pitchFamily="34" charset="-120"/>
-              </a:rPr>
-              <a:t>seeking</a:t>
-            </a:r>
-            <a:endParaRPr lang="en-US" sz="1100" dirty="0"/>
-          </a:p>
-        </p:txBody>
-      </p:sp>
-      <p:sp>
-        <p:nvSpPr>
-          <p:cNvPr id="13" name="Shape 11"/>
-          <p:cNvSpPr/>
-          <p:nvPr/>
-        </p:nvSpPr>
-        <p:spPr>
-          <a:xfrm>
-            <a:off x="548640" y="2715768"/>
-            <a:ext cx="11064240" cy="804672"/>
-          </a:xfrm>
-          <a:prstGeom prst="roundRect">
-            <a:avLst>
-              <a:gd name="adj" fmla="val 11364"/>
+              <a:gd name="adj" fmla="val 5128"/>
             </a:avLst>
           </a:prstGeom>
           <a:solidFill>
@@ -4213,14 +4051,14 @@
       </p:sp>
       <p:sp>
         <p:nvSpPr>
-          <p:cNvPr id="14" name="Text 12"/>
-          <p:cNvSpPr/>
-          <p:nvPr/>
-        </p:nvSpPr>
-        <p:spPr>
-          <a:xfrm>
-            <a:off x="822960" y="2770632"/>
-            <a:ext cx="4206240" cy="694944"/>
+          <p:cNvPr id="12" name="Text 10"/>
+          <p:cNvSpPr/>
+          <p:nvPr/>
+        </p:nvSpPr>
+        <p:spPr>
+          <a:xfrm>
+            <a:off x="4590288" y="2212848"/>
+            <a:ext cx="3017520" cy="502920"/>
           </a:xfrm>
           <a:prstGeom prst="rect">
             <a:avLst/>
@@ -4236,39 +4074,39 @@
               <a:buNone/>
             </a:pPr>
             <a:r>
-              <a:rPr lang="en-US" sz="1350" b="1" dirty="0">
-                <a:solidFill>
-                  <a:srgbClr val="EEF3EE"/>
+              <a:rPr lang="en-US" sz="1450" b="1" dirty="0">
+                <a:solidFill>
+                  <a:srgbClr val="27C08A"/>
                 </a:solidFill>
                 <a:latin typeface="Arial" pitchFamily="34" charset="0"/>
                 <a:ea typeface="Arial" pitchFamily="34" charset="-122"/>
                 <a:cs typeface="Arial" pitchFamily="34" charset="-120"/>
               </a:rPr>
-              <a:t>A rural NGO or SHG federation</a:t>
-            </a:r>
-            <a:endParaRPr lang="en-US" sz="1350" dirty="0"/>
-          </a:p>
-        </p:txBody>
-      </p:sp>
-      <p:sp>
-        <p:nvSpPr>
-          <p:cNvPr id="15" name="Text 13"/>
-          <p:cNvSpPr/>
-          <p:nvPr/>
-        </p:nvSpPr>
-        <p:spPr>
-          <a:xfrm>
-            <a:off x="5120640" y="2770632"/>
-            <a:ext cx="4663440" cy="694944"/>
-          </a:xfrm>
-          <a:prstGeom prst="rect">
-            <a:avLst/>
-          </a:prstGeom>
-          <a:noFill/>
-          <a:ln/>
-        </p:spPr>
-        <p:txBody>
-          <a:bodyPr wrap="square" lIns="0" tIns="0" rIns="0" bIns="0" rtlCol="0" anchor="ctr"/>
+              <a:t>1930 and RBI's 2027 rules</a:t>
+            </a:r>
+            <a:endParaRPr lang="en-US" sz="1450" dirty="0"/>
+          </a:p>
+        </p:txBody>
+      </p:sp>
+      <p:sp>
+        <p:nvSpPr>
+          <p:cNvPr id="13" name="Text 11"/>
+          <p:cNvSpPr/>
+          <p:nvPr/>
+        </p:nvSpPr>
+        <p:spPr>
+          <a:xfrm>
+            <a:off x="4590288" y="2743200"/>
+            <a:ext cx="3017520" cy="960120"/>
+          </a:xfrm>
+          <a:prstGeom prst="rect">
+            <a:avLst/>
+          </a:prstGeom>
+          <a:noFill/>
+          <a:ln/>
+        </p:spPr>
+        <p:txBody>
+          <a:bodyPr wrap="square" lIns="0" tIns="0" rIns="0" bIns="0" rtlCol="0" anchor="t"/>
           <a:lstStyle/>
           <a:p>
             <a:pPr indent="0" marL="0">
@@ -4283,7 +4121,7 @@
                 <a:ea typeface="Calibri" pitchFamily="34" charset="-122"/>
                 <a:cs typeface="Calibri" pitchFamily="34" charset="-120"/>
               </a:rPr>
-              <a:t>invites participants, checks the Hindi and the consent</a:t>
+              <a:t>Every scam verdict ends in the national helpline; fast reporting is what RBI's compensation now requires.</a:t>
             </a:r>
             <a:endParaRPr lang="en-US" sz="1200" dirty="0"/>
           </a:p>
@@ -4291,84 +4129,18 @@
       </p:sp>
       <p:sp>
         <p:nvSpPr>
-          <p:cNvPr id="16" name="Shape 14"/>
-          <p:cNvSpPr/>
-          <p:nvPr/>
-        </p:nvSpPr>
-        <p:spPr>
-          <a:xfrm>
-            <a:off x="9921240" y="2935224"/>
-            <a:ext cx="1463040" cy="365760"/>
+          <p:cNvPr id="14" name="Shape 12"/>
+          <p:cNvSpPr/>
+          <p:nvPr/>
+        </p:nvSpPr>
+        <p:spPr>
+          <a:xfrm>
+            <a:off x="8083296" y="2011680"/>
+            <a:ext cx="3520440" cy="1783080"/>
           </a:xfrm>
           <a:prstGeom prst="roundRect">
             <a:avLst>
-              <a:gd name="adj" fmla="val 20000"/>
-            </a:avLst>
-          </a:prstGeom>
-          <a:solidFill>
-            <a:srgbClr val="1B2A20"/>
-          </a:solidFill>
-          <a:ln w="12700">
-            <a:solidFill>
-              <a:srgbClr val="FF9E3D"/>
-            </a:solidFill>
-            <a:prstDash val="solid"/>
-          </a:ln>
-        </p:spPr>
-      </p:sp>
-      <p:sp>
-        <p:nvSpPr>
-          <p:cNvPr id="17" name="Text 15"/>
-          <p:cNvSpPr/>
-          <p:nvPr/>
-        </p:nvSpPr>
-        <p:spPr>
-          <a:xfrm>
-            <a:off x="9921240" y="2935224"/>
-            <a:ext cx="1463040" cy="365760"/>
-          </a:xfrm>
-          <a:prstGeom prst="rect">
-            <a:avLst/>
-          </a:prstGeom>
-          <a:noFill/>
-          <a:ln/>
-        </p:spPr>
-        <p:txBody>
-          <a:bodyPr wrap="square" lIns="0" tIns="0" rIns="0" bIns="0" rtlCol="0" anchor="ctr"/>
-          <a:lstStyle/>
-          <a:p>
-            <a:pPr algn="ctr" indent="0" marL="0">
-              <a:buNone/>
-            </a:pPr>
-            <a:r>
-              <a:rPr lang="en-US" sz="1100" b="1" dirty="0">
-                <a:solidFill>
-                  <a:srgbClr val="FF9E3D"/>
-                </a:solidFill>
-                <a:latin typeface="Calibri" pitchFamily="34" charset="0"/>
-                <a:ea typeface="Calibri" pitchFamily="34" charset="-122"/>
-                <a:cs typeface="Calibri" pitchFamily="34" charset="-120"/>
-              </a:rPr>
-              <a:t>seeking</a:t>
-            </a:r>
-            <a:endParaRPr lang="en-US" sz="1100" dirty="0"/>
-          </a:p>
-        </p:txBody>
-      </p:sp>
-      <p:sp>
-        <p:nvSpPr>
-          <p:cNvPr id="18" name="Shape 16"/>
-          <p:cNvSpPr/>
-          <p:nvPr/>
-        </p:nvSpPr>
-        <p:spPr>
-          <a:xfrm>
-            <a:off x="548640" y="3648456"/>
-            <a:ext cx="11064240" cy="804672"/>
-          </a:xfrm>
-          <a:prstGeom prst="roundRect">
-            <a:avLst>
-              <a:gd name="adj" fmla="val 11364"/>
+              <a:gd name="adj" fmla="val 5128"/>
             </a:avLst>
           </a:prstGeom>
           <a:solidFill>
@@ -4391,14 +4163,14 @@
       </p:sp>
       <p:sp>
         <p:nvSpPr>
-          <p:cNvPr id="19" name="Text 17"/>
-          <p:cNvSpPr/>
-          <p:nvPr/>
-        </p:nvSpPr>
-        <p:spPr>
-          <a:xfrm>
-            <a:off x="822960" y="3703320"/>
-            <a:ext cx="4206240" cy="694944"/>
+          <p:cNvPr id="15" name="Text 13"/>
+          <p:cNvSpPr/>
+          <p:nvPr/>
+        </p:nvSpPr>
+        <p:spPr>
+          <a:xfrm>
+            <a:off x="8357616" y="2212848"/>
+            <a:ext cx="3017520" cy="502920"/>
           </a:xfrm>
           <a:prstGeom prst="rect">
             <a:avLst/>
@@ -4414,39 +4186,39 @@
               <a:buNone/>
             </a:pPr>
             <a:r>
-              <a:rPr lang="en-US" sz="1350" b="1" dirty="0">
-                <a:solidFill>
-                  <a:srgbClr val="EEF3EE"/>
+              <a:rPr lang="en-US" sz="1450" b="1" dirty="0">
+                <a:solidFill>
+                  <a:srgbClr val="27C08A"/>
                 </a:solidFill>
                 <a:latin typeface="Arial" pitchFamily="34" charset="0"/>
                 <a:ea typeface="Arial" pitchFamily="34" charset="-122"/>
                 <a:cs typeface="Arial" pitchFamily="34" charset="-120"/>
               </a:rPr>
-              <a:t>A bank branch, regional office or SLBC</a:t>
-            </a:r>
-            <a:endParaRPr lang="en-US" sz="1350" dirty="0"/>
-          </a:p>
-        </p:txBody>
-      </p:sp>
-      <p:sp>
-        <p:nvSpPr>
-          <p:cNvPr id="20" name="Text 18"/>
-          <p:cNvSpPr/>
-          <p:nvPr/>
-        </p:nvSpPr>
-        <p:spPr>
-          <a:xfrm>
-            <a:off x="5120640" y="3703320"/>
-            <a:ext cx="4663440" cy="694944"/>
-          </a:xfrm>
-          <a:prstGeom prst="rect">
-            <a:avLst/>
-          </a:prstGeom>
-          <a:noFill/>
-          <a:ln/>
-        </p:spPr>
-        <p:txBody>
-          <a:bodyPr wrap="square" lIns="0" tIns="0" rIns="0" bIns="0" rtlCol="0" anchor="ctr"/>
+              <a:t>Ayushman Bharat</a:t>
+            </a:r>
+            <a:endParaRPr lang="en-US" sz="1450" dirty="0"/>
+          </a:p>
+        </p:txBody>
+      </p:sp>
+      <p:sp>
+        <p:nvSpPr>
+          <p:cNvPr id="16" name="Text 14"/>
+          <p:cNvSpPr/>
+          <p:nvPr/>
+        </p:nvSpPr>
+        <p:spPr>
+          <a:xfrm>
+            <a:off x="8357616" y="2743200"/>
+            <a:ext cx="3017520" cy="960120"/>
+          </a:xfrm>
+          <a:prstGeom prst="rect">
+            <a:avLst/>
+          </a:prstGeom>
+          <a:noFill/>
+          <a:ln/>
+        </p:spPr>
+        <p:txBody>
+          <a:bodyPr wrap="square" lIns="0" tIns="0" rIns="0" bIns="0" rtlCol="0" anchor="t"/>
           <a:lstStyle/>
           <a:p>
             <a:pPr indent="0" marL="0">
@@ -4461,7 +4233,7 @@
                 <a:ea typeface="Calibri" pitchFamily="34" charset="-122"/>
                 <a:cs typeface="Calibri" pitchFamily="34" charset="-120"/>
               </a:rPr>
-              <a:t>BC points for the pilot, real messages for ScamBench v1</a:t>
+              <a:t>Finds seniors for the Vay Vandana card and sends them to the counter that makes it.</a:t>
             </a:r>
             <a:endParaRPr lang="en-US" sz="1200" dirty="0"/>
           </a:p>
@@ -4469,84 +4241,18 @@
       </p:sp>
       <p:sp>
         <p:nvSpPr>
-          <p:cNvPr id="21" name="Shape 19"/>
-          <p:cNvSpPr/>
-          <p:nvPr/>
-        </p:nvSpPr>
-        <p:spPr>
-          <a:xfrm>
-            <a:off x="9921240" y="3867912"/>
-            <a:ext cx="1463040" cy="365760"/>
+          <p:cNvPr id="17" name="Shape 15"/>
+          <p:cNvSpPr/>
+          <p:nvPr/>
+        </p:nvSpPr>
+        <p:spPr>
+          <a:xfrm>
+            <a:off x="548640" y="3977640"/>
+            <a:ext cx="3520440" cy="1783080"/>
           </a:xfrm>
           <a:prstGeom prst="roundRect">
             <a:avLst>
-              <a:gd name="adj" fmla="val 20000"/>
-            </a:avLst>
-          </a:prstGeom>
-          <a:solidFill>
-            <a:srgbClr val="1B2A20"/>
-          </a:solidFill>
-          <a:ln w="12700">
-            <a:solidFill>
-              <a:srgbClr val="FF9E3D"/>
-            </a:solidFill>
-            <a:prstDash val="solid"/>
-          </a:ln>
-        </p:spPr>
-      </p:sp>
-      <p:sp>
-        <p:nvSpPr>
-          <p:cNvPr id="22" name="Text 20"/>
-          <p:cNvSpPr/>
-          <p:nvPr/>
-        </p:nvSpPr>
-        <p:spPr>
-          <a:xfrm>
-            <a:off x="9921240" y="3867912"/>
-            <a:ext cx="1463040" cy="365760"/>
-          </a:xfrm>
-          <a:prstGeom prst="rect">
-            <a:avLst/>
-          </a:prstGeom>
-          <a:noFill/>
-          <a:ln/>
-        </p:spPr>
-        <p:txBody>
-          <a:bodyPr wrap="square" lIns="0" tIns="0" rIns="0" bIns="0" rtlCol="0" anchor="ctr"/>
-          <a:lstStyle/>
-          <a:p>
-            <a:pPr algn="ctr" indent="0" marL="0">
-              <a:buNone/>
-            </a:pPr>
-            <a:r>
-              <a:rPr lang="en-US" sz="1100" b="1" dirty="0">
-                <a:solidFill>
-                  <a:srgbClr val="FF9E3D"/>
-                </a:solidFill>
-                <a:latin typeface="Calibri" pitchFamily="34" charset="0"/>
-                <a:ea typeface="Calibri" pitchFamily="34" charset="-122"/>
-                <a:cs typeface="Calibri" pitchFamily="34" charset="-120"/>
-              </a:rPr>
-              <a:t>seeking</a:t>
-            </a:r>
-            <a:endParaRPr lang="en-US" sz="1100" dirty="0"/>
-          </a:p>
-        </p:txBody>
-      </p:sp>
-      <p:sp>
-        <p:nvSpPr>
-          <p:cNvPr id="23" name="Shape 21"/>
-          <p:cNvSpPr/>
-          <p:nvPr/>
-        </p:nvSpPr>
-        <p:spPr>
-          <a:xfrm>
-            <a:off x="548640" y="4581144"/>
-            <a:ext cx="11064240" cy="804672"/>
-          </a:xfrm>
-          <a:prstGeom prst="roundRect">
-            <a:avLst>
-              <a:gd name="adj" fmla="val 11364"/>
+              <a:gd name="adj" fmla="val 5128"/>
             </a:avLst>
           </a:prstGeom>
           <a:solidFill>
@@ -4569,14 +4275,14 @@
       </p:sp>
       <p:sp>
         <p:nvSpPr>
-          <p:cNvPr id="24" name="Text 22"/>
-          <p:cNvSpPr/>
-          <p:nvPr/>
-        </p:nvSpPr>
-        <p:spPr>
-          <a:xfrm>
-            <a:off x="822960" y="4636008"/>
-            <a:ext cx="4206240" cy="694944"/>
+          <p:cNvPr id="18" name="Text 16"/>
+          <p:cNvSpPr/>
+          <p:nvPr/>
+        </p:nvSpPr>
+        <p:spPr>
+          <a:xfrm>
+            <a:off x="822960" y="4178808"/>
+            <a:ext cx="3017520" cy="502920"/>
           </a:xfrm>
           <a:prstGeom prst="rect">
             <a:avLst/>
@@ -4592,39 +4298,39 @@
               <a:buNone/>
             </a:pPr>
             <a:r>
-              <a:rPr lang="en-US" sz="1350" b="1" dirty="0">
-                <a:solidFill>
-                  <a:srgbClr val="EEF3EE"/>
+              <a:rPr lang="en-US" sz="1450" b="1" dirty="0">
+                <a:solidFill>
+                  <a:srgbClr val="27C08A"/>
                 </a:solidFill>
                 <a:latin typeface="Arial" pitchFamily="34" charset="0"/>
                 <a:ea typeface="Arial" pitchFamily="34" charset="-122"/>
                 <a:cs typeface="Arial" pitchFamily="34" charset="-120"/>
               </a:rPr>
-              <a:t>Haqdarshak or myScheme</a:t>
-            </a:r>
-            <a:endParaRPr lang="en-US" sz="1350" dirty="0"/>
-          </a:p>
-        </p:txBody>
-      </p:sp>
-      <p:sp>
-        <p:nvSpPr>
-          <p:cNvPr id="25" name="Text 23"/>
-          <p:cNvSpPr/>
-          <p:nvPr/>
-        </p:nvSpPr>
-        <p:spPr>
-          <a:xfrm>
-            <a:off x="5120640" y="4636008"/>
-            <a:ext cx="4663440" cy="694944"/>
-          </a:xfrm>
-          <a:prstGeom prst="rect">
-            <a:avLst/>
-          </a:prstGeom>
-          <a:noFill/>
-          <a:ln/>
-        </p:spPr>
-        <p:txBody>
-          <a:bodyPr wrap="square" lIns="0" tIns="0" rIns="0" bIns="0" rtlCol="0" anchor="ctr"/>
+              <a:t>Digital India, last mile</a:t>
+            </a:r>
+            <a:endParaRPr lang="en-US" sz="1450" dirty="0"/>
+          </a:p>
+        </p:txBody>
+      </p:sp>
+      <p:sp>
+        <p:nvSpPr>
+          <p:cNvPr id="19" name="Text 17"/>
+          <p:cNvSpPr/>
+          <p:nvPr/>
+        </p:nvSpPr>
+        <p:spPr>
+          <a:xfrm>
+            <a:off x="822960" y="4709160"/>
+            <a:ext cx="3017520" cy="960120"/>
+          </a:xfrm>
+          <a:prstGeom prst="rect">
+            <a:avLst/>
+          </a:prstGeom>
+          <a:noFill/>
+          <a:ln/>
+        </p:spPr>
+        <p:txBody>
+          <a:bodyPr wrap="square" lIns="0" tIns="0" rIns="0" bIns="0" rtlCol="0" anchor="t"/>
           <a:lstStyle/>
           <a:p>
             <a:pPr indent="0" marL="0">
@@ -4639,7 +4345,7 @@
                 <a:ea typeface="Calibri" pitchFamily="34" charset="-122"/>
                 <a:cs typeface="Calibri" pitchFamily="34" charset="-120"/>
               </a:rPr>
-              <a:t>scheme content beyond 12 central schemes; Sahayak is the offline front door</a:t>
+              <a:t>Hindi and English by voice today, offline; the language data is a pack, so more languages follow.</a:t>
             </a:r>
             <a:endParaRPr lang="en-US" sz="1200" dirty="0"/>
           </a:p>
@@ -4647,41 +4353,48 @@
       </p:sp>
       <p:sp>
         <p:nvSpPr>
-          <p:cNvPr id="26" name="Shape 24"/>
-          <p:cNvSpPr/>
-          <p:nvPr/>
-        </p:nvSpPr>
-        <p:spPr>
-          <a:xfrm>
-            <a:off x="9921240" y="4800600"/>
-            <a:ext cx="1463040" cy="365760"/>
+          <p:cNvPr id="20" name="Shape 18"/>
+          <p:cNvSpPr/>
+          <p:nvPr/>
+        </p:nvSpPr>
+        <p:spPr>
+          <a:xfrm>
+            <a:off x="4315968" y="3977640"/>
+            <a:ext cx="3520440" cy="1783080"/>
           </a:xfrm>
           <a:prstGeom prst="roundRect">
             <a:avLst>
-              <a:gd name="adj" fmla="val 20000"/>
+              <a:gd name="adj" fmla="val 5128"/>
             </a:avLst>
           </a:prstGeom>
           <a:solidFill>
-            <a:srgbClr val="1B2A20"/>
+            <a:srgbClr val="152017"/>
           </a:solidFill>
           <a:ln w="12700">
             <a:solidFill>
-              <a:srgbClr val="FF9E3D"/>
+              <a:srgbClr val="2C4636"/>
             </a:solidFill>
             <a:prstDash val="solid"/>
           </a:ln>
-        </p:spPr>
-      </p:sp>
-      <p:sp>
-        <p:nvSpPr>
-          <p:cNvPr id="27" name="Text 25"/>
-          <p:cNvSpPr/>
-          <p:nvPr/>
-        </p:nvSpPr>
-        <p:spPr>
-          <a:xfrm>
-            <a:off x="9921240" y="4800600"/>
-            <a:ext cx="1463040" cy="365760"/>
+          <a:effectLst>
+            <a:outerShdw sx="100000" sy="100000" kx="0" ky="0" algn="bl" rotWithShape="0" blurRad="127000" dist="38100" dir="5400000">
+              <a:srgbClr val="000000">
+                <a:alpha val="40000"/>
+              </a:srgbClr>
+            </a:outerShdw>
+          </a:effectLst>
+        </p:spPr>
+      </p:sp>
+      <p:sp>
+        <p:nvSpPr>
+          <p:cNvPr id="21" name="Text 19"/>
+          <p:cNvSpPr/>
+          <p:nvPr/>
+        </p:nvSpPr>
+        <p:spPr>
+          <a:xfrm>
+            <a:off x="4590288" y="4178808"/>
+            <a:ext cx="3017520" cy="502920"/>
           </a:xfrm>
           <a:prstGeom prst="rect">
             <a:avLst/>
@@ -4693,34 +4406,107 @@
           <a:bodyPr wrap="square" lIns="0" tIns="0" rIns="0" bIns="0" rtlCol="0" anchor="ctr"/>
           <a:lstStyle/>
           <a:p>
-            <a:pPr algn="ctr" indent="0" marL="0">
-              <a:buNone/>
-            </a:pPr>
-            <a:r>
-              <a:rPr lang="en-US" sz="1100" b="1" dirty="0">
-                <a:solidFill>
-                  <a:srgbClr val="FF9E3D"/>
+            <a:pPr indent="0" marL="0">
+              <a:buNone/>
+            </a:pPr>
+            <a:r>
+              <a:rPr lang="en-US" sz="1450" b="1" dirty="0">
+                <a:solidFill>
+                  <a:srgbClr val="27C08A"/>
+                </a:solidFill>
+                <a:latin typeface="Arial" pitchFamily="34" charset="0"/>
+                <a:ea typeface="Arial" pitchFamily="34" charset="-122"/>
+                <a:cs typeface="Arial" pitchFamily="34" charset="-120"/>
+              </a:rPr>
+              <a:t>DPDP Act</a:t>
+            </a:r>
+            <a:endParaRPr lang="en-US" sz="1450" dirty="0"/>
+          </a:p>
+        </p:txBody>
+      </p:sp>
+      <p:sp>
+        <p:nvSpPr>
+          <p:cNvPr id="22" name="Text 20"/>
+          <p:cNvSpPr/>
+          <p:nvPr/>
+        </p:nvSpPr>
+        <p:spPr>
+          <a:xfrm>
+            <a:off x="4590288" y="4709160"/>
+            <a:ext cx="3017520" cy="960120"/>
+          </a:xfrm>
+          <a:prstGeom prst="rect">
+            <a:avLst/>
+          </a:prstGeom>
+          <a:noFill/>
+          <a:ln/>
+        </p:spPr>
+        <p:txBody>
+          <a:bodyPr wrap="square" lIns="0" tIns="0" rIns="0" bIns="0" rtlCol="0" anchor="t"/>
+          <a:lstStyle/>
+          <a:p>
+            <a:pPr indent="0" marL="0">
+              <a:buNone/>
+            </a:pPr>
+            <a:r>
+              <a:rPr lang="en-US" sz="1200" dirty="0">
+                <a:solidFill>
+                  <a:srgbClr val="9DB0A4"/>
                 </a:solidFill>
                 <a:latin typeface="Calibri" pitchFamily="34" charset="0"/>
                 <a:ea typeface="Calibri" pitchFamily="34" charset="-122"/>
                 <a:cs typeface="Calibri" pitchFamily="34" charset="-120"/>
               </a:rPr>
-              <a:t>seeking</a:t>
-            </a:r>
-            <a:endParaRPr lang="en-US" sz="1100" dirty="0"/>
-          </a:p>
-        </p:txBody>
-      </p:sp>
-      <p:sp>
-        <p:nvSpPr>
-          <p:cNvPr id="28" name="Text 26"/>
-          <p:cNvSpPr/>
-          <p:nvPr/>
-        </p:nvSpPr>
-        <p:spPr>
-          <a:xfrm>
-            <a:off x="548640" y="5577840"/>
-            <a:ext cx="11064240" cy="548640"/>
+              <a:t>Privacy by design: consent first, nothing named, nothing written to disk, deleted by default.</a:t>
+            </a:r>
+            <a:endParaRPr lang="en-US" sz="1200" dirty="0"/>
+          </a:p>
+        </p:txBody>
+      </p:sp>
+      <p:sp>
+        <p:nvSpPr>
+          <p:cNvPr id="23" name="Shape 21"/>
+          <p:cNvSpPr/>
+          <p:nvPr/>
+        </p:nvSpPr>
+        <p:spPr>
+          <a:xfrm>
+            <a:off x="8083296" y="3977640"/>
+            <a:ext cx="3520440" cy="1783080"/>
+          </a:xfrm>
+          <a:prstGeom prst="roundRect">
+            <a:avLst>
+              <a:gd name="adj" fmla="val 5128"/>
+            </a:avLst>
+          </a:prstGeom>
+          <a:solidFill>
+            <a:srgbClr val="152017"/>
+          </a:solidFill>
+          <a:ln w="12700">
+            <a:solidFill>
+              <a:srgbClr val="2C4636"/>
+            </a:solidFill>
+            <a:prstDash val="solid"/>
+          </a:ln>
+          <a:effectLst>
+            <a:outerShdw sx="100000" sy="100000" kx="0" ky="0" algn="bl" rotWithShape="0" blurRad="127000" dist="38100" dir="5400000">
+              <a:srgbClr val="000000">
+                <a:alpha val="40000"/>
+              </a:srgbClr>
+            </a:outerShdw>
+          </a:effectLst>
+        </p:spPr>
+      </p:sp>
+      <p:sp>
+        <p:nvSpPr>
+          <p:cNvPr id="24" name="Text 22"/>
+          <p:cNvSpPr/>
+          <p:nvPr/>
+        </p:nvSpPr>
+        <p:spPr>
+          <a:xfrm>
+            <a:off x="8357616" y="4178808"/>
+            <a:ext cx="3017520" cy="502920"/>
           </a:xfrm>
           <a:prstGeom prst="rect">
             <a:avLst/>
@@ -4736,17 +4522,56 @@
               <a:buNone/>
             </a:pPr>
             <a:r>
-              <a:rPr lang="en-US" sz="1250" dirty="0">
-                <a:solidFill>
-                  <a:srgbClr val="EEF3EE"/>
+              <a:rPr lang="en-US" sz="1450" b="1" dirty="0">
+                <a:solidFill>
+                  <a:srgbClr val="27C08A"/>
+                </a:solidFill>
+                <a:latin typeface="Arial" pitchFamily="34" charset="0"/>
+                <a:ea typeface="Arial" pitchFamily="34" charset="-122"/>
+                <a:cs typeface="Arial" pitchFamily="34" charset="-120"/>
+              </a:rPr>
+              <a:t>CSC · BC · ASHA</a:t>
+            </a:r>
+            <a:endParaRPr lang="en-US" sz="1450" dirty="0"/>
+          </a:p>
+        </p:txBody>
+      </p:sp>
+      <p:sp>
+        <p:nvSpPr>
+          <p:cNvPr id="25" name="Text 23"/>
+          <p:cNvSpPr/>
+          <p:nvPr/>
+        </p:nvSpPr>
+        <p:spPr>
+          <a:xfrm>
+            <a:off x="8357616" y="4709160"/>
+            <a:ext cx="3017520" cy="960120"/>
+          </a:xfrm>
+          <a:prstGeom prst="rect">
+            <a:avLst/>
+          </a:prstGeom>
+          <a:noFill/>
+          <a:ln/>
+        </p:spPr>
+        <p:txBody>
+          <a:bodyPr wrap="square" lIns="0" tIns="0" rIns="0" bIns="0" rtlCol="0" anchor="t"/>
+          <a:lstStyle/>
+          <a:p>
+            <a:pPr indent="0" marL="0">
+              <a:buNone/>
+            </a:pPr>
+            <a:r>
+              <a:rPr lang="en-US" sz="1200" dirty="0">
+                <a:solidFill>
+                  <a:srgbClr val="9DB0A4"/>
                 </a:solidFill>
                 <a:latin typeface="Calibri" pitchFamily="34" charset="0"/>
                 <a:ea typeface="Calibri" pitchFamily="34" charset="-122"/>
                 <a:cs typeface="Calibri" pitchFamily="34" charset="-120"/>
               </a:rPr>
-              <a:t>Ready for each partner: a one-morning field protocol with consent in Hindi and English, a scoring script, and letters of intent. The code is MIT-licensed and open.</a:t>
-            </a:r>
-            <a:endParaRPr lang="en-US" sz="1250" dirty="0"/>
+              <a:t>Delivered through the public networks people already trust, with an operator at the counter.</a:t>
+            </a:r>
+            <a:endParaRPr lang="en-US" sz="1200" dirty="0"/>
           </a:p>
         </p:txBody>
       </p:sp>
@@ -4895,7 +4720,7 @@
                 <a:ea typeface="Arial" pitchFamily="34" charset="-122"/>
                 <a:cs typeface="Arial" pitchFamily="34" charset="-120"/>
               </a:rPr>
-              <a:t>TEAM AND THE ASK</a:t>
+              <a:t>COLLABORATIONS</a:t>
             </a:r>
             <a:endParaRPr lang="en-US" sz="1250" dirty="0"/>
           </a:p>
@@ -4934,7 +4759,7 @@
                 <a:ea typeface="Arial" pitchFamily="34" charset="-122"/>
                 <a:cs typeface="Arial" pitchFamily="34" charset="-120"/>
               </a:rPr>
-              <a:t>Builders who ship, asking for one district</a:t>
+              <a:t>Built in the open; seeking last-mile partners</a:t>
             </a:r>
             <a:endParaRPr lang="en-US" sz="3000" dirty="0"/>
           </a:p>
@@ -4948,12 +4773,12 @@
         </p:nvSpPr>
         <p:spPr>
           <a:xfrm>
-            <a:off x="548640" y="1828800"/>
-            <a:ext cx="5074920" cy="4023360"/>
+            <a:off x="548640" y="1783080"/>
+            <a:ext cx="11064240" cy="804672"/>
           </a:xfrm>
           <a:prstGeom prst="roundRect">
             <a:avLst>
-              <a:gd name="adj" fmla="val 2273"/>
+              <a:gd name="adj" fmla="val 11364"/>
             </a:avLst>
           </a:prstGeom>
           <a:solidFill>
@@ -4982,8 +4807,8 @@
         </p:nvSpPr>
         <p:spPr>
           <a:xfrm>
-            <a:off x="868680" y="2057400"/>
-            <a:ext cx="4572000" cy="457200"/>
+            <a:off x="822960" y="1837944"/>
+            <a:ext cx="4206240" cy="694944"/>
           </a:xfrm>
           <a:prstGeom prst="rect">
             <a:avLst/>
@@ -4999,7 +4824,7 @@
               <a:buNone/>
             </a:pPr>
             <a:r>
-              <a:rPr lang="en-US" sz="2100" b="1" dirty="0">
+              <a:rPr lang="en-US" sz="1350" b="1" dirty="0">
                 <a:solidFill>
                   <a:srgbClr val="EEF3EE"/>
                 </a:solidFill>
@@ -5007,9 +4832,9 @@
                 <a:ea typeface="Arial" pitchFamily="34" charset="-122"/>
                 <a:cs typeface="Arial" pitchFamily="34" charset="-120"/>
               </a:rPr>
-              <a:t>Roshan Raj</a:t>
-            </a:r>
-            <a:endParaRPr lang="en-US" sz="2100" dirty="0"/>
+              <a:t>CSC village-level entrepreneur or bank business correspondent</a:t>
+            </a:r>
+            <a:endParaRPr lang="en-US" sz="1350" dirty="0"/>
           </a:p>
         </p:txBody>
       </p:sp>
@@ -5021,8 +4846,8 @@
         </p:nvSpPr>
         <p:spPr>
           <a:xfrm>
-            <a:off x="868680" y="2514600"/>
-            <a:ext cx="4572000" cy="548640"/>
+            <a:off x="5120640" y="1837944"/>
+            <a:ext cx="4663440" cy="694944"/>
           </a:xfrm>
           <a:prstGeom prst="rect">
             <a:avLst/>
@@ -5038,30 +4863,57 @@
               <a:buNone/>
             </a:pPr>
             <a:r>
-              <a:rPr lang="en-US" sz="1250" dirty="0">
-                <a:solidFill>
-                  <a:srgbClr val="27C08A"/>
+              <a:rPr lang="en-US" sz="1200" dirty="0">
+                <a:solidFill>
+                  <a:srgbClr val="9DB0A4"/>
                 </a:solidFill>
                 <a:latin typeface="Calibri" pitchFamily="34" charset="0"/>
                 <a:ea typeface="Calibri" pitchFamily="34" charset="-122"/>
                 <a:cs typeface="Calibri" pitchFamily="34" charset="-120"/>
               </a:rPr>
-              <a:t>Systems and AI-infrastructure engineer · Manipal Institute of Technology · 7 patents pending</a:t>
-            </a:r>
-            <a:endParaRPr lang="en-US" sz="1250" dirty="0"/>
-          </a:p>
-        </p:txBody>
-      </p:sp>
-      <p:sp>
-        <p:nvSpPr>
-          <p:cNvPr id="11" name="Text 9"/>
-          <p:cNvSpPr/>
-          <p:nvPr/>
-        </p:nvSpPr>
-        <p:spPr>
-          <a:xfrm>
-            <a:off x="868680" y="3291840"/>
-            <a:ext cx="4572000" cy="457200"/>
+              <a:t>hosts the node and the field morning</a:t>
+            </a:r>
+            <a:endParaRPr lang="en-US" sz="1200" dirty="0"/>
+          </a:p>
+        </p:txBody>
+      </p:sp>
+      <p:sp>
+        <p:nvSpPr>
+          <p:cNvPr id="11" name="Shape 9"/>
+          <p:cNvSpPr/>
+          <p:nvPr/>
+        </p:nvSpPr>
+        <p:spPr>
+          <a:xfrm>
+            <a:off x="9921240" y="2002536"/>
+            <a:ext cx="1463040" cy="365760"/>
+          </a:xfrm>
+          <a:prstGeom prst="roundRect">
+            <a:avLst>
+              <a:gd name="adj" fmla="val 20000"/>
+            </a:avLst>
+          </a:prstGeom>
+          <a:solidFill>
+            <a:srgbClr val="1B2A20"/>
+          </a:solidFill>
+          <a:ln w="12700">
+            <a:solidFill>
+              <a:srgbClr val="FF9E3D"/>
+            </a:solidFill>
+            <a:prstDash val="solid"/>
+          </a:ln>
+        </p:spPr>
+      </p:sp>
+      <p:sp>
+        <p:nvSpPr>
+          <p:cNvPr id="12" name="Text 10"/>
+          <p:cNvSpPr/>
+          <p:nvPr/>
+        </p:nvSpPr>
+        <p:spPr>
+          <a:xfrm>
+            <a:off x="9921240" y="2002536"/>
+            <a:ext cx="1463040" cy="365760"/>
           </a:xfrm>
           <a:prstGeom prst="rect">
             <a:avLst/>
@@ -5073,120 +4925,42 @@
           <a:bodyPr wrap="square" lIns="0" tIns="0" rIns="0" bIns="0" rtlCol="0" anchor="ctr"/>
           <a:lstStyle/>
           <a:p>
-            <a:pPr indent="0" marL="0">
-              <a:buNone/>
-            </a:pPr>
-            <a:r>
-              <a:rPr lang="en-US" sz="2100" b="1" dirty="0">
-                <a:solidFill>
-                  <a:srgbClr val="EEF3EE"/>
-                </a:solidFill>
-                <a:latin typeface="Arial" pitchFamily="34" charset="0"/>
-                <a:ea typeface="Arial" pitchFamily="34" charset="-122"/>
-                <a:cs typeface="Arial" pitchFamily="34" charset="-120"/>
-              </a:rPr>
-              <a:t>Ishmiit Singh</a:t>
-            </a:r>
-            <a:endParaRPr lang="en-US" sz="2100" dirty="0"/>
-          </a:p>
-        </p:txBody>
-      </p:sp>
-      <p:sp>
-        <p:nvSpPr>
-          <p:cNvPr id="12" name="Text 10"/>
-          <p:cNvSpPr/>
-          <p:nvPr/>
-        </p:nvSpPr>
-        <p:spPr>
-          <a:xfrm>
-            <a:off x="868680" y="3749040"/>
-            <a:ext cx="4572000" cy="365760"/>
-          </a:xfrm>
-          <a:prstGeom prst="rect">
-            <a:avLst/>
-          </a:prstGeom>
-          <a:noFill/>
-          <a:ln/>
-        </p:spPr>
-        <p:txBody>
-          <a:bodyPr wrap="square" lIns="0" tIns="0" rIns="0" bIns="0" rtlCol="0" anchor="ctr"/>
-          <a:lstStyle/>
-          <a:p>
-            <a:pPr indent="0" marL="0">
-              <a:buNone/>
-            </a:pPr>
-            <a:r>
-              <a:rPr lang="en-US" sz="1250" dirty="0">
-                <a:solidFill>
-                  <a:srgbClr val="27C08A"/>
+            <a:pPr algn="ctr" indent="0" marL="0">
+              <a:buNone/>
+            </a:pPr>
+            <a:r>
+              <a:rPr lang="en-US" sz="1100" b="1" dirty="0">
+                <a:solidFill>
+                  <a:srgbClr val="FF9E3D"/>
                 </a:solidFill>
                 <a:latin typeface="Calibri" pitchFamily="34" charset="0"/>
                 <a:ea typeface="Calibri" pitchFamily="34" charset="-122"/>
                 <a:cs typeface="Calibri" pitchFamily="34" charset="-120"/>
               </a:rPr>
-              <a:t>Co-builder: product, content and evidence</a:t>
-            </a:r>
-            <a:endParaRPr lang="en-US" sz="1250" dirty="0"/>
-          </a:p>
-        </p:txBody>
-      </p:sp>
-      <p:sp>
-        <p:nvSpPr>
-          <p:cNvPr id="13" name="Text 11"/>
-          <p:cNvSpPr/>
-          <p:nvPr/>
-        </p:nvSpPr>
-        <p:spPr>
-          <a:xfrm>
-            <a:off x="868680" y="4297680"/>
-            <a:ext cx="4572000" cy="1371600"/>
-          </a:xfrm>
-          <a:prstGeom prst="rect">
-            <a:avLst/>
-          </a:prstGeom>
-          <a:noFill/>
-          <a:ln/>
-        </p:spPr>
-        <p:txBody>
-          <a:bodyPr wrap="square" lIns="0" tIns="0" rIns="0" bIns="0" rtlCol="0" anchor="t"/>
-          <a:lstStyle/>
-          <a:p>
-            <a:pPr indent="0" marL="0">
-              <a:buNone/>
-            </a:pPr>
-            <a:r>
-              <a:rPr lang="en-US" sz="1250" dirty="0">
-                <a:solidFill>
-                  <a:srgbClr val="9DB0A4"/>
-                </a:solidFill>
-                <a:latin typeface="Calibri" pitchFamily="34" charset="0"/>
-                <a:ea typeface="Calibri" pitchFamily="34" charset="-122"/>
-                <a:cs typeface="Calibri" pitchFamily="34" charset="-120"/>
-              </a:rPr>
-              <a:t>Together: the node, the scam shield, the scheme navigator, offline voice, the phone engine, the operator console and the benchmarks behind every number in this deck.</a:t>
-            </a:r>
-            <a:endParaRPr lang="en-US" sz="1250" dirty="0"/>
-          </a:p>
-        </p:txBody>
-      </p:sp>
-      <p:sp>
-        <p:nvSpPr>
-          <p:cNvPr id="14" name="Shape 12"/>
-          <p:cNvSpPr/>
-          <p:nvPr/>
-        </p:nvSpPr>
-        <p:spPr>
-          <a:xfrm>
-            <a:off x="5852160" y="1828800"/>
-            <a:ext cx="5760720" cy="4023360"/>
+              <a:t>seeking</a:t>
+            </a:r>
+            <a:endParaRPr lang="en-US" sz="1100" dirty="0"/>
+          </a:p>
+        </p:txBody>
+      </p:sp>
+      <p:sp>
+        <p:nvSpPr>
+          <p:cNvPr id="13" name="Shape 11"/>
+          <p:cNvSpPr/>
+          <p:nvPr/>
+        </p:nvSpPr>
+        <p:spPr>
+          <a:xfrm>
+            <a:off x="548640" y="2715768"/>
+            <a:ext cx="11064240" cy="804672"/>
           </a:xfrm>
           <a:prstGeom prst="roundRect">
             <a:avLst>
-              <a:gd name="adj" fmla="val 2273"/>
+              <a:gd name="adj" fmla="val 11364"/>
             </a:avLst>
           </a:prstGeom>
           <a:solidFill>
-            <a:srgbClr val="1B2A20"/>
+            <a:srgbClr val="152017"/>
           </a:solidFill>
           <a:ln w="12700">
             <a:solidFill>
@@ -5205,14 +4979,14 @@
       </p:sp>
       <p:sp>
         <p:nvSpPr>
-          <p:cNvPr id="15" name="Text 13"/>
-          <p:cNvSpPr/>
-          <p:nvPr/>
-        </p:nvSpPr>
-        <p:spPr>
-          <a:xfrm>
-            <a:off x="6172200" y="2057400"/>
-            <a:ext cx="5212080" cy="365760"/>
+          <p:cNvPr id="14" name="Text 12"/>
+          <p:cNvSpPr/>
+          <p:nvPr/>
+        </p:nvSpPr>
+        <p:spPr>
+          <a:xfrm>
+            <a:off x="822960" y="2770632"/>
+            <a:ext cx="4206240" cy="694944"/>
           </a:xfrm>
           <a:prstGeom prst="rect">
             <a:avLst/>
@@ -5228,30 +5002,30 @@
               <a:buNone/>
             </a:pPr>
             <a:r>
-              <a:rPr lang="en-US" sz="1400" b="1" spc="200" kern="0" dirty="0">
-                <a:solidFill>
-                  <a:srgbClr val="FF9E3D"/>
+              <a:rPr lang="en-US" sz="1350" b="1" dirty="0">
+                <a:solidFill>
+                  <a:srgbClr val="EEF3EE"/>
                 </a:solidFill>
                 <a:latin typeface="Arial" pitchFamily="34" charset="0"/>
                 <a:ea typeface="Arial" pitchFamily="34" charset="-122"/>
                 <a:cs typeface="Arial" pitchFamily="34" charset="-120"/>
               </a:rPr>
-              <a:t>The ask</a:t>
-            </a:r>
-            <a:endParaRPr lang="en-US" sz="1400" dirty="0"/>
-          </a:p>
-        </p:txBody>
-      </p:sp>
-      <p:sp>
-        <p:nvSpPr>
-          <p:cNvPr id="16" name="Text 14"/>
-          <p:cNvSpPr/>
-          <p:nvPr/>
-        </p:nvSpPr>
-        <p:spPr>
-          <a:xfrm>
-            <a:off x="6172200" y="2468880"/>
-            <a:ext cx="5212080" cy="640080"/>
+              <a:t>A rural NGO or SHG federation</a:t>
+            </a:r>
+            <a:endParaRPr lang="en-US" sz="1350" dirty="0"/>
+          </a:p>
+        </p:txBody>
+      </p:sp>
+      <p:sp>
+        <p:nvSpPr>
+          <p:cNvPr id="15" name="Text 13"/>
+          <p:cNvSpPr/>
+          <p:nvPr/>
+        </p:nvSpPr>
+        <p:spPr>
+          <a:xfrm>
+            <a:off x="5120640" y="2770632"/>
+            <a:ext cx="4663440" cy="694944"/>
           </a:xfrm>
           <a:prstGeom prst="rect">
             <a:avLst/>
@@ -5267,19 +5041,46 @@
               <a:buNone/>
             </a:pPr>
             <a:r>
-              <a:rPr lang="en-US" sz="1300" dirty="0">
-                <a:solidFill>
-                  <a:srgbClr val="EEF3EE"/>
+              <a:rPr lang="en-US" sz="1200" dirty="0">
+                <a:solidFill>
+                  <a:srgbClr val="9DB0A4"/>
                 </a:solidFill>
                 <a:latin typeface="Calibri" pitchFamily="34" charset="0"/>
                 <a:ea typeface="Calibri" pitchFamily="34" charset="-122"/>
                 <a:cs typeface="Calibri" pitchFamily="34" charset="-120"/>
               </a:rPr>
-              <a:t>A six-month, single-district pilot (about 20 villages, 50 counters, roughly ₹35–40 lakh) with:</a:t>
-            </a:r>
-            <a:endParaRPr lang="en-US" sz="1300" dirty="0"/>
-          </a:p>
-        </p:txBody>
+              <a:t>invites participants, checks the Hindi and the consent</a:t>
+            </a:r>
+            <a:endParaRPr lang="en-US" sz="1200" dirty="0"/>
+          </a:p>
+        </p:txBody>
+      </p:sp>
+      <p:sp>
+        <p:nvSpPr>
+          <p:cNvPr id="16" name="Shape 14"/>
+          <p:cNvSpPr/>
+          <p:nvPr/>
+        </p:nvSpPr>
+        <p:spPr>
+          <a:xfrm>
+            <a:off x="9921240" y="2935224"/>
+            <a:ext cx="1463040" cy="365760"/>
+          </a:xfrm>
+          <a:prstGeom prst="roundRect">
+            <a:avLst>
+              <a:gd name="adj" fmla="val 20000"/>
+            </a:avLst>
+          </a:prstGeom>
+          <a:solidFill>
+            <a:srgbClr val="1B2A20"/>
+          </a:solidFill>
+          <a:ln w="12700">
+            <a:solidFill>
+              <a:srgbClr val="FF9E3D"/>
+            </a:solidFill>
+            <a:prstDash val="solid"/>
+          </a:ln>
+        </p:spPr>
       </p:sp>
       <p:sp>
         <p:nvSpPr>
@@ -5289,49 +5090,136 @@
         </p:nvSpPr>
         <p:spPr>
           <a:xfrm>
-            <a:off x="6309360" y="3200400"/>
-            <a:ext cx="5074920" cy="2468880"/>
-          </a:xfrm>
-          <a:prstGeom prst="rect">
-            <a:avLst/>
-          </a:prstGeom>
-          <a:noFill/>
-          <a:ln/>
-        </p:spPr>
-        <p:txBody>
-          <a:bodyPr wrap="square" lIns="0" tIns="0" rIns="0" bIns="0" rtlCol="0" anchor="t"/>
-          <a:lstStyle/>
-          <a:p>
-            <a:pPr marL="342900" indent="-342900">
-              <a:spcAft>
-                <a:spcPts val="600"/>
-              </a:spcAft>
-              <a:buSzPct val="100000"/>
-              <a:buChar char="•"/>
-            </a:pPr>
-            <a:r>
-              <a:rPr lang="en-US" sz="1250" dirty="0">
-                <a:solidFill>
-                  <a:srgbClr val="9DB0A4"/>
+            <a:off x="9921240" y="2935224"/>
+            <a:ext cx="1463040" cy="365760"/>
+          </a:xfrm>
+          <a:prstGeom prst="rect">
+            <a:avLst/>
+          </a:prstGeom>
+          <a:noFill/>
+          <a:ln/>
+        </p:spPr>
+        <p:txBody>
+          <a:bodyPr wrap="square" lIns="0" tIns="0" rIns="0" bIns="0" rtlCol="0" anchor="ctr"/>
+          <a:lstStyle/>
+          <a:p>
+            <a:pPr algn="ctr" indent="0" marL="0">
+              <a:buNone/>
+            </a:pPr>
+            <a:r>
+              <a:rPr lang="en-US" sz="1100" b="1" dirty="0">
+                <a:solidFill>
+                  <a:srgbClr val="FF9E3D"/>
                 </a:solidFill>
                 <a:latin typeface="Calibri" pitchFamily="34" charset="0"/>
                 <a:ea typeface="Calibri" pitchFamily="34" charset="-122"/>
                 <a:cs typeface="Calibri" pitchFamily="34" charset="-120"/>
               </a:rPr>
-              <a:t>CSC e-Governance or the State IT department: the counters</a:t>
-            </a:r>
-            <a:endParaRPr lang="en-US" sz="1250" dirty="0"/>
-          </a:p>
-          <a:p>
-            <a:pPr marL="342900" indent="-342900">
-              <a:spcAft>
-                <a:spcPts val="600"/>
-              </a:spcAft>
-              <a:buSzPct val="100000"/>
-              <a:buChar char="•"/>
-            </a:pPr>
-            <a:r>
-              <a:rPr lang="en-US" sz="1250" dirty="0">
+              <a:t>seeking</a:t>
+            </a:r>
+            <a:endParaRPr lang="en-US" sz="1100" dirty="0"/>
+          </a:p>
+        </p:txBody>
+      </p:sp>
+      <p:sp>
+        <p:nvSpPr>
+          <p:cNvPr id="18" name="Shape 16"/>
+          <p:cNvSpPr/>
+          <p:nvPr/>
+        </p:nvSpPr>
+        <p:spPr>
+          <a:xfrm>
+            <a:off x="548640" y="3648456"/>
+            <a:ext cx="11064240" cy="804672"/>
+          </a:xfrm>
+          <a:prstGeom prst="roundRect">
+            <a:avLst>
+              <a:gd name="adj" fmla="val 11364"/>
+            </a:avLst>
+          </a:prstGeom>
+          <a:solidFill>
+            <a:srgbClr val="152017"/>
+          </a:solidFill>
+          <a:ln w="12700">
+            <a:solidFill>
+              <a:srgbClr val="2C4636"/>
+            </a:solidFill>
+            <a:prstDash val="solid"/>
+          </a:ln>
+          <a:effectLst>
+            <a:outerShdw sx="100000" sy="100000" kx="0" ky="0" algn="bl" rotWithShape="0" blurRad="127000" dist="38100" dir="5400000">
+              <a:srgbClr val="000000">
+                <a:alpha val="40000"/>
+              </a:srgbClr>
+            </a:outerShdw>
+          </a:effectLst>
+        </p:spPr>
+      </p:sp>
+      <p:sp>
+        <p:nvSpPr>
+          <p:cNvPr id="19" name="Text 17"/>
+          <p:cNvSpPr/>
+          <p:nvPr/>
+        </p:nvSpPr>
+        <p:spPr>
+          <a:xfrm>
+            <a:off x="822960" y="3703320"/>
+            <a:ext cx="4206240" cy="694944"/>
+          </a:xfrm>
+          <a:prstGeom prst="rect">
+            <a:avLst/>
+          </a:prstGeom>
+          <a:noFill/>
+          <a:ln/>
+        </p:spPr>
+        <p:txBody>
+          <a:bodyPr wrap="square" lIns="0" tIns="0" rIns="0" bIns="0" rtlCol="0" anchor="ctr"/>
+          <a:lstStyle/>
+          <a:p>
+            <a:pPr indent="0" marL="0">
+              <a:buNone/>
+            </a:pPr>
+            <a:r>
+              <a:rPr lang="en-US" sz="1350" b="1" dirty="0">
+                <a:solidFill>
+                  <a:srgbClr val="EEF3EE"/>
+                </a:solidFill>
+                <a:latin typeface="Arial" pitchFamily="34" charset="0"/>
+                <a:ea typeface="Arial" pitchFamily="34" charset="-122"/>
+                <a:cs typeface="Arial" pitchFamily="34" charset="-120"/>
+              </a:rPr>
+              <a:t>A bank branch, regional office or SLBC</a:t>
+            </a:r>
+            <a:endParaRPr lang="en-US" sz="1350" dirty="0"/>
+          </a:p>
+        </p:txBody>
+      </p:sp>
+      <p:sp>
+        <p:nvSpPr>
+          <p:cNvPr id="20" name="Text 18"/>
+          <p:cNvSpPr/>
+          <p:nvPr/>
+        </p:nvSpPr>
+        <p:spPr>
+          <a:xfrm>
+            <a:off x="5120640" y="3703320"/>
+            <a:ext cx="4663440" cy="694944"/>
+          </a:xfrm>
+          <a:prstGeom prst="rect">
+            <a:avLst/>
+          </a:prstGeom>
+          <a:noFill/>
+          <a:ln/>
+        </p:spPr>
+        <p:txBody>
+          <a:bodyPr wrap="square" lIns="0" tIns="0" rIns="0" bIns="0" rtlCol="0" anchor="ctr"/>
+          <a:lstStyle/>
+          <a:p>
+            <a:pPr indent="0" marL="0">
+              <a:buNone/>
+            </a:pPr>
+            <a:r>
+              <a:rPr lang="en-US" sz="1200" dirty="0">
                 <a:solidFill>
                   <a:srgbClr val="9DB0A4"/>
                 </a:solidFill>
@@ -5339,41 +5227,177 @@
                 <a:ea typeface="Calibri" pitchFamily="34" charset="-122"/>
                 <a:cs typeface="Calibri" pitchFamily="34" charset="-120"/>
               </a:rPr>
-              <a:t>A bank BC network or SLBC: reach, and real messages for ScamBench v1</a:t>
-            </a:r>
-            <a:endParaRPr lang="en-US" sz="1250" dirty="0"/>
-          </a:p>
-          <a:p>
-            <a:pPr marL="342900" indent="-342900">
-              <a:spcAft>
-                <a:spcPts val="600"/>
-              </a:spcAft>
-              <a:buSzPct val="100000"/>
-              <a:buChar char="•"/>
-            </a:pPr>
-            <a:r>
-              <a:rPr lang="en-US" sz="1250" dirty="0">
-                <a:solidFill>
-                  <a:srgbClr val="9DB0A4"/>
+              <a:t>BC points for the pilot, real messages for ScamBench v1</a:t>
+            </a:r>
+            <a:endParaRPr lang="en-US" sz="1200" dirty="0"/>
+          </a:p>
+        </p:txBody>
+      </p:sp>
+      <p:sp>
+        <p:nvSpPr>
+          <p:cNvPr id="21" name="Shape 19"/>
+          <p:cNvSpPr/>
+          <p:nvPr/>
+        </p:nvSpPr>
+        <p:spPr>
+          <a:xfrm>
+            <a:off x="9921240" y="3867912"/>
+            <a:ext cx="1463040" cy="365760"/>
+          </a:xfrm>
+          <a:prstGeom prst="roundRect">
+            <a:avLst>
+              <a:gd name="adj" fmla="val 20000"/>
+            </a:avLst>
+          </a:prstGeom>
+          <a:solidFill>
+            <a:srgbClr val="1B2A20"/>
+          </a:solidFill>
+          <a:ln w="12700">
+            <a:solidFill>
+              <a:srgbClr val="FF9E3D"/>
+            </a:solidFill>
+            <a:prstDash val="solid"/>
+          </a:ln>
+        </p:spPr>
+      </p:sp>
+      <p:sp>
+        <p:nvSpPr>
+          <p:cNvPr id="22" name="Text 20"/>
+          <p:cNvSpPr/>
+          <p:nvPr/>
+        </p:nvSpPr>
+        <p:spPr>
+          <a:xfrm>
+            <a:off x="9921240" y="3867912"/>
+            <a:ext cx="1463040" cy="365760"/>
+          </a:xfrm>
+          <a:prstGeom prst="rect">
+            <a:avLst/>
+          </a:prstGeom>
+          <a:noFill/>
+          <a:ln/>
+        </p:spPr>
+        <p:txBody>
+          <a:bodyPr wrap="square" lIns="0" tIns="0" rIns="0" bIns="0" rtlCol="0" anchor="ctr"/>
+          <a:lstStyle/>
+          <a:p>
+            <a:pPr algn="ctr" indent="0" marL="0">
+              <a:buNone/>
+            </a:pPr>
+            <a:r>
+              <a:rPr lang="en-US" sz="1100" b="1" dirty="0">
+                <a:solidFill>
+                  <a:srgbClr val="FF9E3D"/>
                 </a:solidFill>
                 <a:latin typeface="Calibri" pitchFamily="34" charset="0"/>
                 <a:ea typeface="Calibri" pitchFamily="34" charset="-122"/>
                 <a:cs typeface="Calibri" pitchFamily="34" charset="-120"/>
               </a:rPr>
-              <a:t>NHA or the state health agency: Vay Vandana cards made at the counter</a:t>
-            </a:r>
-            <a:endParaRPr lang="en-US" sz="1250" dirty="0"/>
-          </a:p>
-          <a:p>
-            <a:pPr marL="342900" indent="-342900">
-              <a:spcAft>
-                <a:spcPts val="600"/>
-              </a:spcAft>
-              <a:buSzPct val="100000"/>
-              <a:buChar char="•"/>
-            </a:pPr>
-            <a:r>
-              <a:rPr lang="en-US" sz="1250" dirty="0">
+              <a:t>seeking</a:t>
+            </a:r>
+            <a:endParaRPr lang="en-US" sz="1100" dirty="0"/>
+          </a:p>
+        </p:txBody>
+      </p:sp>
+      <p:sp>
+        <p:nvSpPr>
+          <p:cNvPr id="23" name="Shape 21"/>
+          <p:cNvSpPr/>
+          <p:nvPr/>
+        </p:nvSpPr>
+        <p:spPr>
+          <a:xfrm>
+            <a:off x="548640" y="4581144"/>
+            <a:ext cx="11064240" cy="804672"/>
+          </a:xfrm>
+          <a:prstGeom prst="roundRect">
+            <a:avLst>
+              <a:gd name="adj" fmla="val 11364"/>
+            </a:avLst>
+          </a:prstGeom>
+          <a:solidFill>
+            <a:srgbClr val="152017"/>
+          </a:solidFill>
+          <a:ln w="12700">
+            <a:solidFill>
+              <a:srgbClr val="2C4636"/>
+            </a:solidFill>
+            <a:prstDash val="solid"/>
+          </a:ln>
+          <a:effectLst>
+            <a:outerShdw sx="100000" sy="100000" kx="0" ky="0" algn="bl" rotWithShape="0" blurRad="127000" dist="38100" dir="5400000">
+              <a:srgbClr val="000000">
+                <a:alpha val="40000"/>
+              </a:srgbClr>
+            </a:outerShdw>
+          </a:effectLst>
+        </p:spPr>
+      </p:sp>
+      <p:sp>
+        <p:nvSpPr>
+          <p:cNvPr id="24" name="Text 22"/>
+          <p:cNvSpPr/>
+          <p:nvPr/>
+        </p:nvSpPr>
+        <p:spPr>
+          <a:xfrm>
+            <a:off x="822960" y="4636008"/>
+            <a:ext cx="4206240" cy="694944"/>
+          </a:xfrm>
+          <a:prstGeom prst="rect">
+            <a:avLst/>
+          </a:prstGeom>
+          <a:noFill/>
+          <a:ln/>
+        </p:spPr>
+        <p:txBody>
+          <a:bodyPr wrap="square" lIns="0" tIns="0" rIns="0" bIns="0" rtlCol="0" anchor="ctr"/>
+          <a:lstStyle/>
+          <a:p>
+            <a:pPr indent="0" marL="0">
+              <a:buNone/>
+            </a:pPr>
+            <a:r>
+              <a:rPr lang="en-US" sz="1350" b="1" dirty="0">
+                <a:solidFill>
+                  <a:srgbClr val="EEF3EE"/>
+                </a:solidFill>
+                <a:latin typeface="Arial" pitchFamily="34" charset="0"/>
+                <a:ea typeface="Arial" pitchFamily="34" charset="-122"/>
+                <a:cs typeface="Arial" pitchFamily="34" charset="-120"/>
+              </a:rPr>
+              <a:t>Haqdarshak or myScheme</a:t>
+            </a:r>
+            <a:endParaRPr lang="en-US" sz="1350" dirty="0"/>
+          </a:p>
+        </p:txBody>
+      </p:sp>
+      <p:sp>
+        <p:nvSpPr>
+          <p:cNvPr id="25" name="Text 23"/>
+          <p:cNvSpPr/>
+          <p:nvPr/>
+        </p:nvSpPr>
+        <p:spPr>
+          <a:xfrm>
+            <a:off x="5120640" y="4636008"/>
+            <a:ext cx="4663440" cy="694944"/>
+          </a:xfrm>
+          <a:prstGeom prst="rect">
+            <a:avLst/>
+          </a:prstGeom>
+          <a:noFill/>
+          <a:ln/>
+        </p:spPr>
+        <p:txBody>
+          <a:bodyPr wrap="square" lIns="0" tIns="0" rIns="0" bIns="0" rtlCol="0" anchor="ctr"/>
+          <a:lstStyle/>
+          <a:p>
+            <a:pPr indent="0" marL="0">
+              <a:buNone/>
+            </a:pPr>
+            <a:r>
+              <a:rPr lang="en-US" sz="1200" dirty="0">
                 <a:solidFill>
                   <a:srgbClr val="9DB0A4"/>
                 </a:solidFill>
@@ -5381,7 +5405,112 @@
                 <a:ea typeface="Calibri" pitchFamily="34" charset="-122"/>
                 <a:cs typeface="Calibri" pitchFamily="34" charset="-120"/>
               </a:rPr>
-              <a:t>A rural NGO: field testing and Hindi review</a:t>
+              <a:t>scheme content beyond 12 central schemes; Sahayak is the offline front door</a:t>
+            </a:r>
+            <a:endParaRPr lang="en-US" sz="1200" dirty="0"/>
+          </a:p>
+        </p:txBody>
+      </p:sp>
+      <p:sp>
+        <p:nvSpPr>
+          <p:cNvPr id="26" name="Shape 24"/>
+          <p:cNvSpPr/>
+          <p:nvPr/>
+        </p:nvSpPr>
+        <p:spPr>
+          <a:xfrm>
+            <a:off x="9921240" y="4800600"/>
+            <a:ext cx="1463040" cy="365760"/>
+          </a:xfrm>
+          <a:prstGeom prst="roundRect">
+            <a:avLst>
+              <a:gd name="adj" fmla="val 20000"/>
+            </a:avLst>
+          </a:prstGeom>
+          <a:solidFill>
+            <a:srgbClr val="1B2A20"/>
+          </a:solidFill>
+          <a:ln w="12700">
+            <a:solidFill>
+              <a:srgbClr val="FF9E3D"/>
+            </a:solidFill>
+            <a:prstDash val="solid"/>
+          </a:ln>
+        </p:spPr>
+      </p:sp>
+      <p:sp>
+        <p:nvSpPr>
+          <p:cNvPr id="27" name="Text 25"/>
+          <p:cNvSpPr/>
+          <p:nvPr/>
+        </p:nvSpPr>
+        <p:spPr>
+          <a:xfrm>
+            <a:off x="9921240" y="4800600"/>
+            <a:ext cx="1463040" cy="365760"/>
+          </a:xfrm>
+          <a:prstGeom prst="rect">
+            <a:avLst/>
+          </a:prstGeom>
+          <a:noFill/>
+          <a:ln/>
+        </p:spPr>
+        <p:txBody>
+          <a:bodyPr wrap="square" lIns="0" tIns="0" rIns="0" bIns="0" rtlCol="0" anchor="ctr"/>
+          <a:lstStyle/>
+          <a:p>
+            <a:pPr algn="ctr" indent="0" marL="0">
+              <a:buNone/>
+            </a:pPr>
+            <a:r>
+              <a:rPr lang="en-US" sz="1100" b="1" dirty="0">
+                <a:solidFill>
+                  <a:srgbClr val="FF9E3D"/>
+                </a:solidFill>
+                <a:latin typeface="Calibri" pitchFamily="34" charset="0"/>
+                <a:ea typeface="Calibri" pitchFamily="34" charset="-122"/>
+                <a:cs typeface="Calibri" pitchFamily="34" charset="-120"/>
+              </a:rPr>
+              <a:t>seeking</a:t>
+            </a:r>
+            <a:endParaRPr lang="en-US" sz="1100" dirty="0"/>
+          </a:p>
+        </p:txBody>
+      </p:sp>
+      <p:sp>
+        <p:nvSpPr>
+          <p:cNvPr id="28" name="Text 26"/>
+          <p:cNvSpPr/>
+          <p:nvPr/>
+        </p:nvSpPr>
+        <p:spPr>
+          <a:xfrm>
+            <a:off x="548640" y="5577840"/>
+            <a:ext cx="11064240" cy="548640"/>
+          </a:xfrm>
+          <a:prstGeom prst="rect">
+            <a:avLst/>
+          </a:prstGeom>
+          <a:noFill/>
+          <a:ln/>
+        </p:spPr>
+        <p:txBody>
+          <a:bodyPr wrap="square" lIns="0" tIns="0" rIns="0" bIns="0" rtlCol="0" anchor="ctr"/>
+          <a:lstStyle/>
+          <a:p>
+            <a:pPr indent="0" marL="0">
+              <a:buNone/>
+            </a:pPr>
+            <a:r>
+              <a:rPr lang="en-US" sz="1250" dirty="0">
+                <a:solidFill>
+                  <a:srgbClr val="EEF3EE"/>
+                </a:solidFill>
+                <a:latin typeface="Calibri" pitchFamily="34" charset="0"/>
+                <a:ea typeface="Calibri" pitchFamily="34" charset="-122"/>
+                <a:cs typeface="Calibri" pitchFamily="34" charset="-120"/>
+              </a:rPr>
+              <a:t>Ready for each partner: a one-morning field protocol with consent in Hindi and English, a scoring script, and letters of intent. The code is MIT-licensed and open.</a:t>
             </a:r>
             <a:endParaRPr lang="en-US" sz="1250" dirty="0"/>
           </a:p>
@@ -5532,6 +5661,643 @@
                 <a:ea typeface="Arial" pitchFamily="34" charset="-122"/>
                 <a:cs typeface="Arial" pitchFamily="34" charset="-120"/>
               </a:rPr>
+              <a:t>TEAM AND THE ASK</a:t>
+            </a:r>
+            <a:endParaRPr lang="en-US" sz="1250" dirty="0"/>
+          </a:p>
+        </p:txBody>
+      </p:sp>
+      <p:sp>
+        <p:nvSpPr>
+          <p:cNvPr id="7" name="Text 5"/>
+          <p:cNvSpPr/>
+          <p:nvPr/>
+        </p:nvSpPr>
+        <p:spPr>
+          <a:xfrm>
+            <a:off x="548640" y="868680"/>
+            <a:ext cx="11064240" cy="914400"/>
+          </a:xfrm>
+          <a:prstGeom prst="rect">
+            <a:avLst/>
+          </a:prstGeom>
+          <a:noFill/>
+          <a:ln/>
+        </p:spPr>
+        <p:txBody>
+          <a:bodyPr wrap="square" lIns="0" tIns="0" rIns="0" bIns="0" rtlCol="0" anchor="ctr"/>
+          <a:lstStyle/>
+          <a:p>
+            <a:pPr indent="0" marL="0">
+              <a:buNone/>
+            </a:pPr>
+            <a:r>
+              <a:rPr lang="en-US" sz="3000" b="1" dirty="0">
+                <a:solidFill>
+                  <a:srgbClr val="EEF3EE"/>
+                </a:solidFill>
+                <a:latin typeface="Arial" pitchFamily="34" charset="0"/>
+                <a:ea typeface="Arial" pitchFamily="34" charset="-122"/>
+                <a:cs typeface="Arial" pitchFamily="34" charset="-120"/>
+              </a:rPr>
+              <a:t>Builders who ship, asking for one district</a:t>
+            </a:r>
+            <a:endParaRPr lang="en-US" sz="3000" dirty="0"/>
+          </a:p>
+        </p:txBody>
+      </p:sp>
+      <p:sp>
+        <p:nvSpPr>
+          <p:cNvPr id="8" name="Shape 6"/>
+          <p:cNvSpPr/>
+          <p:nvPr/>
+        </p:nvSpPr>
+        <p:spPr>
+          <a:xfrm>
+            <a:off x="548640" y="1828800"/>
+            <a:ext cx="5074920" cy="4023360"/>
+          </a:xfrm>
+          <a:prstGeom prst="roundRect">
+            <a:avLst>
+              <a:gd name="adj" fmla="val 2273"/>
+            </a:avLst>
+          </a:prstGeom>
+          <a:solidFill>
+            <a:srgbClr val="152017"/>
+          </a:solidFill>
+          <a:ln w="12700">
+            <a:solidFill>
+              <a:srgbClr val="2C4636"/>
+            </a:solidFill>
+            <a:prstDash val="solid"/>
+          </a:ln>
+          <a:effectLst>
+            <a:outerShdw sx="100000" sy="100000" kx="0" ky="0" algn="bl" rotWithShape="0" blurRad="127000" dist="38100" dir="5400000">
+              <a:srgbClr val="000000">
+                <a:alpha val="40000"/>
+              </a:srgbClr>
+            </a:outerShdw>
+          </a:effectLst>
+        </p:spPr>
+      </p:sp>
+      <p:sp>
+        <p:nvSpPr>
+          <p:cNvPr id="9" name="Text 7"/>
+          <p:cNvSpPr/>
+          <p:nvPr/>
+        </p:nvSpPr>
+        <p:spPr>
+          <a:xfrm>
+            <a:off x="868680" y="2057400"/>
+            <a:ext cx="4572000" cy="457200"/>
+          </a:xfrm>
+          <a:prstGeom prst="rect">
+            <a:avLst/>
+          </a:prstGeom>
+          <a:noFill/>
+          <a:ln/>
+        </p:spPr>
+        <p:txBody>
+          <a:bodyPr wrap="square" lIns="0" tIns="0" rIns="0" bIns="0" rtlCol="0" anchor="ctr"/>
+          <a:lstStyle/>
+          <a:p>
+            <a:pPr indent="0" marL="0">
+              <a:buNone/>
+            </a:pPr>
+            <a:r>
+              <a:rPr lang="en-US" sz="2100" b="1" dirty="0">
+                <a:solidFill>
+                  <a:srgbClr val="EEF3EE"/>
+                </a:solidFill>
+                <a:latin typeface="Arial" pitchFamily="34" charset="0"/>
+                <a:ea typeface="Arial" pitchFamily="34" charset="-122"/>
+                <a:cs typeface="Arial" pitchFamily="34" charset="-120"/>
+              </a:rPr>
+              <a:t>Roshan Raj</a:t>
+            </a:r>
+            <a:endParaRPr lang="en-US" sz="2100" dirty="0"/>
+          </a:p>
+        </p:txBody>
+      </p:sp>
+      <p:sp>
+        <p:nvSpPr>
+          <p:cNvPr id="10" name="Text 8"/>
+          <p:cNvSpPr/>
+          <p:nvPr/>
+        </p:nvSpPr>
+        <p:spPr>
+          <a:xfrm>
+            <a:off x="868680" y="2514600"/>
+            <a:ext cx="4572000" cy="548640"/>
+          </a:xfrm>
+          <a:prstGeom prst="rect">
+            <a:avLst/>
+          </a:prstGeom>
+          <a:noFill/>
+          <a:ln/>
+        </p:spPr>
+        <p:txBody>
+          <a:bodyPr wrap="square" lIns="0" tIns="0" rIns="0" bIns="0" rtlCol="0" anchor="ctr"/>
+          <a:lstStyle/>
+          <a:p>
+            <a:pPr indent="0" marL="0">
+              <a:buNone/>
+            </a:pPr>
+            <a:r>
+              <a:rPr lang="en-US" sz="1250" dirty="0">
+                <a:solidFill>
+                  <a:srgbClr val="27C08A"/>
+                </a:solidFill>
+                <a:latin typeface="Calibri" pitchFamily="34" charset="0"/>
+                <a:ea typeface="Calibri" pitchFamily="34" charset="-122"/>
+                <a:cs typeface="Calibri" pitchFamily="34" charset="-120"/>
+              </a:rPr>
+              <a:t>Systems and AI-infrastructure engineer · Manipal Institute of Technology</a:t>
+            </a:r>
+            <a:endParaRPr lang="en-US" sz="1250" dirty="0"/>
+          </a:p>
+        </p:txBody>
+      </p:sp>
+      <p:sp>
+        <p:nvSpPr>
+          <p:cNvPr id="11" name="Text 9"/>
+          <p:cNvSpPr/>
+          <p:nvPr/>
+        </p:nvSpPr>
+        <p:spPr>
+          <a:xfrm>
+            <a:off x="868680" y="3291840"/>
+            <a:ext cx="4572000" cy="457200"/>
+          </a:xfrm>
+          <a:prstGeom prst="rect">
+            <a:avLst/>
+          </a:prstGeom>
+          <a:noFill/>
+          <a:ln/>
+        </p:spPr>
+        <p:txBody>
+          <a:bodyPr wrap="square" lIns="0" tIns="0" rIns="0" bIns="0" rtlCol="0" anchor="ctr"/>
+          <a:lstStyle/>
+          <a:p>
+            <a:pPr indent="0" marL="0">
+              <a:buNone/>
+            </a:pPr>
+            <a:r>
+              <a:rPr lang="en-US" sz="2100" b="1" dirty="0">
+                <a:solidFill>
+                  <a:srgbClr val="EEF3EE"/>
+                </a:solidFill>
+                <a:latin typeface="Arial" pitchFamily="34" charset="0"/>
+                <a:ea typeface="Arial" pitchFamily="34" charset="-122"/>
+                <a:cs typeface="Arial" pitchFamily="34" charset="-120"/>
+              </a:rPr>
+              <a:t>Ishmiit Singh</a:t>
+            </a:r>
+            <a:endParaRPr lang="en-US" sz="2100" dirty="0"/>
+          </a:p>
+        </p:txBody>
+      </p:sp>
+      <p:sp>
+        <p:nvSpPr>
+          <p:cNvPr id="12" name="Text 10"/>
+          <p:cNvSpPr/>
+          <p:nvPr/>
+        </p:nvSpPr>
+        <p:spPr>
+          <a:xfrm>
+            <a:off x="868680" y="3749040"/>
+            <a:ext cx="4572000" cy="365760"/>
+          </a:xfrm>
+          <a:prstGeom prst="rect">
+            <a:avLst/>
+          </a:prstGeom>
+          <a:noFill/>
+          <a:ln/>
+        </p:spPr>
+        <p:txBody>
+          <a:bodyPr wrap="square" lIns="0" tIns="0" rIns="0" bIns="0" rtlCol="0" anchor="ctr"/>
+          <a:lstStyle/>
+          <a:p>
+            <a:pPr indent="0" marL="0">
+              <a:buNone/>
+            </a:pPr>
+            <a:r>
+              <a:rPr lang="en-US" sz="1250" dirty="0">
+                <a:solidFill>
+                  <a:srgbClr val="27C08A"/>
+                </a:solidFill>
+                <a:latin typeface="Calibri" pitchFamily="34" charset="0"/>
+                <a:ea typeface="Calibri" pitchFamily="34" charset="-122"/>
+                <a:cs typeface="Calibri" pitchFamily="34" charset="-120"/>
+              </a:rPr>
+              <a:t>Co-builder: product, content and evidence</a:t>
+            </a:r>
+            <a:endParaRPr lang="en-US" sz="1250" dirty="0"/>
+          </a:p>
+        </p:txBody>
+      </p:sp>
+      <p:sp>
+        <p:nvSpPr>
+          <p:cNvPr id="13" name="Text 11"/>
+          <p:cNvSpPr/>
+          <p:nvPr/>
+        </p:nvSpPr>
+        <p:spPr>
+          <a:xfrm>
+            <a:off x="868680" y="4297680"/>
+            <a:ext cx="4572000" cy="1371600"/>
+          </a:xfrm>
+          <a:prstGeom prst="rect">
+            <a:avLst/>
+          </a:prstGeom>
+          <a:noFill/>
+          <a:ln/>
+        </p:spPr>
+        <p:txBody>
+          <a:bodyPr wrap="square" lIns="0" tIns="0" rIns="0" bIns="0" rtlCol="0" anchor="t"/>
+          <a:lstStyle/>
+          <a:p>
+            <a:pPr indent="0" marL="0">
+              <a:buNone/>
+            </a:pPr>
+            <a:r>
+              <a:rPr lang="en-US" sz="1250" dirty="0">
+                <a:solidFill>
+                  <a:srgbClr val="9DB0A4"/>
+                </a:solidFill>
+                <a:latin typeface="Calibri" pitchFamily="34" charset="0"/>
+                <a:ea typeface="Calibri" pitchFamily="34" charset="-122"/>
+                <a:cs typeface="Calibri" pitchFamily="34" charset="-120"/>
+              </a:rPr>
+              <a:t>Together: the node, the scam shield, the scheme navigator, offline voice, the phone engine, the operator console and the benchmarks behind every number in this deck.</a:t>
+            </a:r>
+            <a:endParaRPr lang="en-US" sz="1250" dirty="0"/>
+          </a:p>
+        </p:txBody>
+      </p:sp>
+      <p:sp>
+        <p:nvSpPr>
+          <p:cNvPr id="14" name="Shape 12"/>
+          <p:cNvSpPr/>
+          <p:nvPr/>
+        </p:nvSpPr>
+        <p:spPr>
+          <a:xfrm>
+            <a:off x="5852160" y="1828800"/>
+            <a:ext cx="5760720" cy="4023360"/>
+          </a:xfrm>
+          <a:prstGeom prst="roundRect">
+            <a:avLst>
+              <a:gd name="adj" fmla="val 2273"/>
+            </a:avLst>
+          </a:prstGeom>
+          <a:solidFill>
+            <a:srgbClr val="1B2A20"/>
+          </a:solidFill>
+          <a:ln w="12700">
+            <a:solidFill>
+              <a:srgbClr val="2C4636"/>
+            </a:solidFill>
+            <a:prstDash val="solid"/>
+          </a:ln>
+          <a:effectLst>
+            <a:outerShdw sx="100000" sy="100000" kx="0" ky="0" algn="bl" rotWithShape="0" blurRad="127000" dist="38100" dir="5400000">
+              <a:srgbClr val="000000">
+                <a:alpha val="40000"/>
+              </a:srgbClr>
+            </a:outerShdw>
+          </a:effectLst>
+        </p:spPr>
+      </p:sp>
+      <p:sp>
+        <p:nvSpPr>
+          <p:cNvPr id="15" name="Text 13"/>
+          <p:cNvSpPr/>
+          <p:nvPr/>
+        </p:nvSpPr>
+        <p:spPr>
+          <a:xfrm>
+            <a:off x="6172200" y="2057400"/>
+            <a:ext cx="5212080" cy="365760"/>
+          </a:xfrm>
+          <a:prstGeom prst="rect">
+            <a:avLst/>
+          </a:prstGeom>
+          <a:noFill/>
+          <a:ln/>
+        </p:spPr>
+        <p:txBody>
+          <a:bodyPr wrap="square" lIns="0" tIns="0" rIns="0" bIns="0" rtlCol="0" anchor="ctr"/>
+          <a:lstStyle/>
+          <a:p>
+            <a:pPr indent="0" marL="0">
+              <a:buNone/>
+            </a:pPr>
+            <a:r>
+              <a:rPr lang="en-US" sz="1400" b="1" spc="200" kern="0" dirty="0">
+                <a:solidFill>
+                  <a:srgbClr val="FF9E3D"/>
+                </a:solidFill>
+                <a:latin typeface="Arial" pitchFamily="34" charset="0"/>
+                <a:ea typeface="Arial" pitchFamily="34" charset="-122"/>
+                <a:cs typeface="Arial" pitchFamily="34" charset="-120"/>
+              </a:rPr>
+              <a:t>The ask</a:t>
+            </a:r>
+            <a:endParaRPr lang="en-US" sz="1400" dirty="0"/>
+          </a:p>
+        </p:txBody>
+      </p:sp>
+      <p:sp>
+        <p:nvSpPr>
+          <p:cNvPr id="16" name="Text 14"/>
+          <p:cNvSpPr/>
+          <p:nvPr/>
+        </p:nvSpPr>
+        <p:spPr>
+          <a:xfrm>
+            <a:off x="6172200" y="2468880"/>
+            <a:ext cx="5212080" cy="640080"/>
+          </a:xfrm>
+          <a:prstGeom prst="rect">
+            <a:avLst/>
+          </a:prstGeom>
+          <a:noFill/>
+          <a:ln/>
+        </p:spPr>
+        <p:txBody>
+          <a:bodyPr wrap="square" lIns="0" tIns="0" rIns="0" bIns="0" rtlCol="0" anchor="ctr"/>
+          <a:lstStyle/>
+          <a:p>
+            <a:pPr indent="0" marL="0">
+              <a:buNone/>
+            </a:pPr>
+            <a:r>
+              <a:rPr lang="en-US" sz="1300" dirty="0">
+                <a:solidFill>
+                  <a:srgbClr val="EEF3EE"/>
+                </a:solidFill>
+                <a:latin typeface="Calibri" pitchFamily="34" charset="0"/>
+                <a:ea typeface="Calibri" pitchFamily="34" charset="-122"/>
+                <a:cs typeface="Calibri" pitchFamily="34" charset="-120"/>
+              </a:rPr>
+              <a:t>A six-month, single-district pilot (about 20 villages, 50 counters, roughly ₹35–40 lakh) with:</a:t>
+            </a:r>
+            <a:endParaRPr lang="en-US" sz="1300" dirty="0"/>
+          </a:p>
+        </p:txBody>
+      </p:sp>
+      <p:sp>
+        <p:nvSpPr>
+          <p:cNvPr id="17" name="Text 15"/>
+          <p:cNvSpPr/>
+          <p:nvPr/>
+        </p:nvSpPr>
+        <p:spPr>
+          <a:xfrm>
+            <a:off x="6309360" y="3200400"/>
+            <a:ext cx="5074920" cy="2468880"/>
+          </a:xfrm>
+          <a:prstGeom prst="rect">
+            <a:avLst/>
+          </a:prstGeom>
+          <a:noFill/>
+          <a:ln/>
+        </p:spPr>
+        <p:txBody>
+          <a:bodyPr wrap="square" lIns="0" tIns="0" rIns="0" bIns="0" rtlCol="0" anchor="t"/>
+          <a:lstStyle/>
+          <a:p>
+            <a:pPr marL="342900" indent="-342900">
+              <a:spcAft>
+                <a:spcPts val="600"/>
+              </a:spcAft>
+              <a:buSzPct val="100000"/>
+              <a:buChar char="•"/>
+            </a:pPr>
+            <a:r>
+              <a:rPr lang="en-US" sz="1250" dirty="0">
+                <a:solidFill>
+                  <a:srgbClr val="9DB0A4"/>
+                </a:solidFill>
+                <a:latin typeface="Calibri" pitchFamily="34" charset="0"/>
+                <a:ea typeface="Calibri" pitchFamily="34" charset="-122"/>
+                <a:cs typeface="Calibri" pitchFamily="34" charset="-120"/>
+              </a:rPr>
+              <a:t>CSC e-Governance or the State IT department: the counters</a:t>
+            </a:r>
+            <a:endParaRPr lang="en-US" sz="1250" dirty="0"/>
+          </a:p>
+          <a:p>
+            <a:pPr marL="342900" indent="-342900">
+              <a:spcAft>
+                <a:spcPts val="600"/>
+              </a:spcAft>
+              <a:buSzPct val="100000"/>
+              <a:buChar char="•"/>
+            </a:pPr>
+            <a:r>
+              <a:rPr lang="en-US" sz="1250" dirty="0">
+                <a:solidFill>
+                  <a:srgbClr val="9DB0A4"/>
+                </a:solidFill>
+                <a:latin typeface="Calibri" pitchFamily="34" charset="0"/>
+                <a:ea typeface="Calibri" pitchFamily="34" charset="-122"/>
+                <a:cs typeface="Calibri" pitchFamily="34" charset="-120"/>
+              </a:rPr>
+              <a:t>A bank BC network or SLBC: reach, and real messages for ScamBench v1</a:t>
+            </a:r>
+            <a:endParaRPr lang="en-US" sz="1250" dirty="0"/>
+          </a:p>
+          <a:p>
+            <a:pPr marL="342900" indent="-342900">
+              <a:spcAft>
+                <a:spcPts val="600"/>
+              </a:spcAft>
+              <a:buSzPct val="100000"/>
+              <a:buChar char="•"/>
+            </a:pPr>
+            <a:r>
+              <a:rPr lang="en-US" sz="1250" dirty="0">
+                <a:solidFill>
+                  <a:srgbClr val="9DB0A4"/>
+                </a:solidFill>
+                <a:latin typeface="Calibri" pitchFamily="34" charset="0"/>
+                <a:ea typeface="Calibri" pitchFamily="34" charset="-122"/>
+                <a:cs typeface="Calibri" pitchFamily="34" charset="-120"/>
+              </a:rPr>
+              <a:t>NHA or the state health agency: Vay Vandana cards made at the counter</a:t>
+            </a:r>
+            <a:endParaRPr lang="en-US" sz="1250" dirty="0"/>
+          </a:p>
+          <a:p>
+            <a:pPr marL="342900" indent="-342900">
+              <a:spcAft>
+                <a:spcPts val="600"/>
+              </a:spcAft>
+              <a:buSzPct val="100000"/>
+              <a:buChar char="•"/>
+            </a:pPr>
+            <a:r>
+              <a:rPr lang="en-US" sz="1250" dirty="0">
+                <a:solidFill>
+                  <a:srgbClr val="9DB0A4"/>
+                </a:solidFill>
+                <a:latin typeface="Calibri" pitchFamily="34" charset="0"/>
+                <a:ea typeface="Calibri" pitchFamily="34" charset="-122"/>
+                <a:cs typeface="Calibri" pitchFamily="34" charset="-120"/>
+              </a:rPr>
+              <a:t>A rural NGO: field testing and Hindi review</a:t>
+            </a:r>
+            <a:endParaRPr lang="en-US" sz="1250" dirty="0"/>
+          </a:p>
+        </p:txBody>
+      </p:sp>
+    </p:spTree>
+  </p:cSld>
+  <p:clrMapOvr>
+    <a:masterClrMapping/>
+  </p:clrMapOvr>
+</p:sld>
+</file>
+
+<file path=ppt/slides/slide15.xml><?xml version="1.0" encoding="utf-8"?>
+<p:sld xmlns:a="http://schemas.openxmlformats.org/drawingml/2006/main" xmlns:r="http://schemas.openxmlformats.org/officeDocument/2006/relationships" xmlns:p="http://schemas.openxmlformats.org/presentationml/2006/main">
+  <p:cSld name="Slide 15">
+    <p:bg>
+      <p:bgPr>
+        <a:solidFill>
+          <a:srgbClr val="0B0F14"/>
+        </a:solidFill>
+      </p:bgPr>
+    </p:bg>
+    <p:spTree>
+      <p:nvGrpSpPr>
+        <p:cNvPr id="1" name=""/>
+        <p:cNvGrpSpPr/>
+        <p:nvPr/>
+      </p:nvGrpSpPr>
+      <p:grpSpPr>
+        <a:xfrm>
+          <a:off x="0" y="0"/>
+          <a:ext cx="0" cy="0"/>
+          <a:chOff x="0" y="0"/>
+          <a:chExt cx="0" cy="0"/>
+        </a:xfrm>
+      </p:grpSpPr>
+      <p:sp>
+        <p:nvSpPr>
+          <p:cNvPr id="2" name="Shape 0"/>
+          <p:cNvSpPr/>
+          <p:nvPr/>
+        </p:nvSpPr>
+        <p:spPr>
+          <a:xfrm>
+            <a:off x="11475720" y="384048"/>
+            <a:ext cx="109728" cy="109728"/>
+          </a:xfrm>
+          <a:prstGeom prst="ellipse">
+            <a:avLst/>
+          </a:prstGeom>
+          <a:solidFill>
+            <a:srgbClr val="FF9E3D"/>
+          </a:solidFill>
+          <a:ln/>
+        </p:spPr>
+      </p:sp>
+      <p:sp>
+        <p:nvSpPr>
+          <p:cNvPr id="3" name="Shape 1"/>
+          <p:cNvSpPr/>
+          <p:nvPr/>
+        </p:nvSpPr>
+        <p:spPr>
+          <a:xfrm>
+            <a:off x="11658600" y="384048"/>
+            <a:ext cx="109728" cy="109728"/>
+          </a:xfrm>
+          <a:prstGeom prst="ellipse">
+            <a:avLst/>
+          </a:prstGeom>
+          <a:solidFill>
+            <a:srgbClr val="EEF3EE"/>
+          </a:solidFill>
+          <a:ln/>
+        </p:spPr>
+      </p:sp>
+      <p:sp>
+        <p:nvSpPr>
+          <p:cNvPr id="4" name="Shape 2"/>
+          <p:cNvSpPr/>
+          <p:nvPr/>
+        </p:nvSpPr>
+        <p:spPr>
+          <a:xfrm>
+            <a:off x="11841480" y="384048"/>
+            <a:ext cx="109728" cy="109728"/>
+          </a:xfrm>
+          <a:prstGeom prst="ellipse">
+            <a:avLst/>
+          </a:prstGeom>
+          <a:solidFill>
+            <a:srgbClr val="27C08A"/>
+          </a:solidFill>
+          <a:ln/>
+        </p:spPr>
+      </p:sp>
+      <p:sp>
+        <p:nvSpPr>
+          <p:cNvPr id="5" name="Shape 3"/>
+          <p:cNvSpPr/>
+          <p:nvPr/>
+        </p:nvSpPr>
+        <p:spPr>
+          <a:xfrm>
+            <a:off x="566928" y="603504"/>
+            <a:ext cx="128016" cy="128016"/>
+          </a:xfrm>
+          <a:prstGeom prst="ellipse">
+            <a:avLst/>
+          </a:prstGeom>
+          <a:solidFill>
+            <a:srgbClr val="27C08A"/>
+          </a:solidFill>
+          <a:ln/>
+        </p:spPr>
+      </p:sp>
+      <p:sp>
+        <p:nvSpPr>
+          <p:cNvPr id="6" name="Text 4"/>
+          <p:cNvSpPr/>
+          <p:nvPr/>
+        </p:nvSpPr>
+        <p:spPr>
+          <a:xfrm>
+            <a:off x="777240" y="457200"/>
+            <a:ext cx="10058400" cy="411480"/>
+          </a:xfrm>
+          <a:prstGeom prst="rect">
+            <a:avLst/>
+          </a:prstGeom>
+          <a:noFill/>
+          <a:ln/>
+        </p:spPr>
+        <p:txBody>
+          <a:bodyPr wrap="square" lIns="0" tIns="0" rIns="0" bIns="0" rtlCol="0" anchor="ctr"/>
+          <a:lstStyle/>
+          <a:p>
+            <a:pPr indent="0" marL="0">
+              <a:buNone/>
+            </a:pPr>
+            <a:r>
+              <a:rPr lang="en-US" sz="1250" b="1" spc="200" kern="0" dirty="0">
+                <a:solidFill>
+                  <a:srgbClr val="27C08A"/>
+                </a:solidFill>
+                <a:latin typeface="Arial" pitchFamily="34" charset="0"/>
+                <a:ea typeface="Arial" pitchFamily="34" charset="-122"/>
+                <a:cs typeface="Arial" pitchFamily="34" charset="-120"/>
+              </a:rPr>
               <a:t>ELEVATOR PITCH</a:t>
             </a:r>
             <a:endParaRPr lang="en-US" sz="1250" dirty="0"/>
@@ -6509,7 +7275,7 @@
                 <a:ea typeface="Calibri" pitchFamily="34" charset="-122"/>
                 <a:cs typeface="Calibri" pitchFamily="34" charset="-120"/>
               </a:rPr>
-              <a:t>And every safety tool assumes the internet, a smartphone, English and the cloud: the four things the people most at risk are least likely to have, or trust.</a:t>
+              <a:t>And most safety tools assume the internet, English, an app account and the cloud, and a person who already knows what a scam looks like: what the people most at risk are least likely to have, or trust.</a:t>
             </a:r>
             <a:endParaRPr lang="en-US" sz="1400" dirty="0"/>
           </a:p>
@@ -6777,7 +7543,7 @@
                 <a:ea typeface="Calibri" pitchFamily="34" charset="-122"/>
                 <a:cs typeface="Calibri" pitchFamily="34" charset="-120"/>
               </a:rPr>
-              <a:t>One small computer at a CSC or bank-agent counter. Phones join its Wi-Fi, which has no internet; after one visit, the same checks run on the phone itself.</a:t>
+              <a:t>One small computer at a CSC or bank-agent counter; phones join its Wi-Fi, which has no internet. A phone that has opened Sahayak's secure web address once (the public site today; the node's own after a one-time HTTPS setup) runs the same checks with no node at all.</a:t>
             </a:r>
             <a:endParaRPr lang="en-US" sz="1500" dirty="0"/>
           </a:p>
@@ -8251,7 +9017,7 @@
                 <a:ea typeface="Calibri" pitchFamily="34" charset="-122"/>
                 <a:cs typeface="Calibri" pitchFamily="34" charset="-120"/>
               </a:rPr>
-              <a:t>51 named signals in a signed content pack, a pattern matcher and a small classifier decide. Vetted templates explain; an optional local model may add a line, only through a safety gate.</a:t>
+              <a:t>59 named signals in a signed content pack, a pattern matcher and a small classifier decide. Vetted templates explain; an optional local model may add a line, only through a safety gate.</a:t>
             </a:r>
             <a:endParaRPr lang="en-US" sz="1150" dirty="0"/>
           </a:p>
@@ -8963,7 +9729,7 @@
                 <a:ea typeface="Calibri" pitchFamily="34" charset="-122"/>
                 <a:cs typeface="Calibri" pitchFamily="34" charset="-120"/>
               </a:rPr>
-              <a:t>The phone runs the same rules from the same signed packs: identical results to the node on 1,453 messages and 7,983 interviews.</a:t>
+              <a:t>The phone runs the same rules from the same signed packs: identical results to the node on 1,490 messages and 7,983 interviews.</a:t>
             </a:r>
             <a:endParaRPr lang="en-US" sz="1150" dirty="0"/>
           </a:p>
@@ -9114,7 +9880,7 @@
                 <a:ea typeface="Arial" pitchFamily="34" charset="-122"/>
                 <a:cs typeface="Arial" pitchFamily="34" charset="-120"/>
               </a:rPr>
-              <a:t>TECHNOLOGY DIFFERENTIATION</a:t>
+              <a:t>WHAT CHANGED SINCE ROUND 1, AND WHY</a:t>
             </a:r>
             <a:endParaRPr lang="en-US" sz="1250" dirty="0"/>
           </a:p>
@@ -9153,6 +9919,646 @@
                 <a:ea typeface="Arial" pitchFamily="34" charset="-122"/>
                 <a:cs typeface="Arial" pitchFamily="34" charset="-120"/>
               </a:rPr>
+              <a:t>We tested the big-model idea, and chose rules</a:t>
+            </a:r>
+            <a:endParaRPr lang="en-US" sz="3000" dirty="0"/>
+          </a:p>
+        </p:txBody>
+      </p:sp>
+      <p:sp>
+        <p:nvSpPr>
+          <p:cNvPr id="8" name="Shape 6"/>
+          <p:cNvSpPr/>
+          <p:nvPr/>
+        </p:nvSpPr>
+        <p:spPr>
+          <a:xfrm>
+            <a:off x="548640" y="1783080"/>
+            <a:ext cx="3520440" cy="3246120"/>
+          </a:xfrm>
+          <a:prstGeom prst="roundRect">
+            <a:avLst>
+              <a:gd name="adj" fmla="val 2817"/>
+            </a:avLst>
+          </a:prstGeom>
+          <a:solidFill>
+            <a:srgbClr val="152017"/>
+          </a:solidFill>
+          <a:ln w="12700">
+            <a:solidFill>
+              <a:srgbClr val="2C4636"/>
+            </a:solidFill>
+            <a:prstDash val="solid"/>
+          </a:ln>
+          <a:effectLst>
+            <a:outerShdw sx="100000" sy="100000" kx="0" ky="0" algn="bl" rotWithShape="0" blurRad="127000" dist="38100" dir="5400000">
+              <a:srgbClr val="000000">
+                <a:alpha val="40000"/>
+              </a:srgbClr>
+            </a:outerShdw>
+          </a:effectLst>
+        </p:spPr>
+      </p:sp>
+      <p:sp>
+        <p:nvSpPr>
+          <p:cNvPr id="9" name="Text 7"/>
+          <p:cNvSpPr/>
+          <p:nvPr/>
+        </p:nvSpPr>
+        <p:spPr>
+          <a:xfrm>
+            <a:off x="850392" y="2039112"/>
+            <a:ext cx="2926080" cy="731520"/>
+          </a:xfrm>
+          <a:prstGeom prst="rect">
+            <a:avLst/>
+          </a:prstGeom>
+          <a:noFill/>
+          <a:ln/>
+        </p:spPr>
+        <p:txBody>
+          <a:bodyPr wrap="square" lIns="0" tIns="0" rIns="0" bIns="0" rtlCol="0" anchor="t"/>
+          <a:lstStyle/>
+          <a:p>
+            <a:pPr indent="0" marL="0">
+              <a:buNone/>
+            </a:pPr>
+            <a:r>
+              <a:rPr lang="en-US" sz="1600" b="1" dirty="0">
+                <a:solidFill>
+                  <a:srgbClr val="FF9E3D"/>
+                </a:solidFill>
+                <a:latin typeface="Arial" pitchFamily="34" charset="0"/>
+                <a:ea typeface="Arial" pitchFamily="34" charset="-122"/>
+                <a:cs typeface="Arial" pitchFamily="34" charset="-120"/>
+              </a:rPr>
+              <a:t>Round 1 proposed</a:t>
+            </a:r>
+            <a:endParaRPr lang="en-US" sz="1600" dirty="0"/>
+          </a:p>
+        </p:txBody>
+      </p:sp>
+      <p:sp>
+        <p:nvSpPr>
+          <p:cNvPr id="10" name="Text 8"/>
+          <p:cNvSpPr/>
+          <p:nvPr/>
+        </p:nvSpPr>
+        <p:spPr>
+          <a:xfrm>
+            <a:off x="850392" y="2807208"/>
+            <a:ext cx="2971800" cy="2057400"/>
+          </a:xfrm>
+          <a:prstGeom prst="rect">
+            <a:avLst/>
+          </a:prstGeom>
+          <a:noFill/>
+          <a:ln/>
+        </p:spPr>
+        <p:txBody>
+          <a:bodyPr wrap="square" lIns="0" tIns="0" rIns="0" bIns="0" rtlCol="0" anchor="t"/>
+          <a:lstStyle/>
+          <a:p>
+            <a:pPr indent="0" marL="0">
+              <a:buNone/>
+            </a:pPr>
+            <a:r>
+              <a:rPr lang="en-US" sz="1250" dirty="0">
+                <a:solidFill>
+                  <a:srgbClr val="9DB0A4"/>
+                </a:solidFill>
+                <a:latin typeface="Calibri" pitchFamily="34" charset="0"/>
+                <a:ea typeface="Calibri" pitchFamily="34" charset="-122"/>
+                <a:cs typeface="Calibri" pitchFamily="34" charset="-120"/>
+              </a:rPr>
+              <a:t>A 14-billion-parameter language model, offline on a GPU server, deciding whether a message is a scam, with a fine-tuned finance model behind it.</a:t>
+            </a:r>
+            <a:endParaRPr lang="en-US" sz="1250" dirty="0"/>
+          </a:p>
+        </p:txBody>
+      </p:sp>
+      <p:sp>
+        <p:nvSpPr>
+          <p:cNvPr id="11" name="Shape 9"/>
+          <p:cNvSpPr/>
+          <p:nvPr/>
+        </p:nvSpPr>
+        <p:spPr>
+          <a:xfrm>
+            <a:off x="4315968" y="1783080"/>
+            <a:ext cx="3520440" cy="3246120"/>
+          </a:xfrm>
+          <a:prstGeom prst="roundRect">
+            <a:avLst>
+              <a:gd name="adj" fmla="val 2817"/>
+            </a:avLst>
+          </a:prstGeom>
+          <a:solidFill>
+            <a:srgbClr val="152017"/>
+          </a:solidFill>
+          <a:ln w="12700">
+            <a:solidFill>
+              <a:srgbClr val="2C4636"/>
+            </a:solidFill>
+            <a:prstDash val="solid"/>
+          </a:ln>
+          <a:effectLst>
+            <a:outerShdw sx="100000" sy="100000" kx="0" ky="0" algn="bl" rotWithShape="0" blurRad="127000" dist="38100" dir="5400000">
+              <a:srgbClr val="000000">
+                <a:alpha val="40000"/>
+              </a:srgbClr>
+            </a:outerShdw>
+          </a:effectLst>
+        </p:spPr>
+      </p:sp>
+      <p:sp>
+        <p:nvSpPr>
+          <p:cNvPr id="12" name="Text 10"/>
+          <p:cNvSpPr/>
+          <p:nvPr/>
+        </p:nvSpPr>
+        <p:spPr>
+          <a:xfrm>
+            <a:off x="4617720" y="2039112"/>
+            <a:ext cx="2926080" cy="731520"/>
+          </a:xfrm>
+          <a:prstGeom prst="rect">
+            <a:avLst/>
+          </a:prstGeom>
+          <a:noFill/>
+          <a:ln/>
+        </p:spPr>
+        <p:txBody>
+          <a:bodyPr wrap="square" lIns="0" tIns="0" rIns="0" bIns="0" rtlCol="0" anchor="t"/>
+          <a:lstStyle/>
+          <a:p>
+            <a:pPr indent="0" marL="0">
+              <a:buNone/>
+            </a:pPr>
+            <a:r>
+              <a:rPr lang="en-US" sz="1600" b="1" dirty="0">
+                <a:solidFill>
+                  <a:srgbClr val="27C08A"/>
+                </a:solidFill>
+                <a:latin typeface="Arial" pitchFamily="34" charset="0"/>
+                <a:ea typeface="Arial" pitchFamily="34" charset="-122"/>
+                <a:cs typeface="Arial" pitchFamily="34" charset="-120"/>
+              </a:rPr>
+              <a:t>We built</a:t>
+            </a:r>
+            <a:endParaRPr lang="en-US" sz="1600" dirty="0"/>
+          </a:p>
+        </p:txBody>
+      </p:sp>
+      <p:sp>
+        <p:nvSpPr>
+          <p:cNvPr id="13" name="Text 11"/>
+          <p:cNvSpPr/>
+          <p:nvPr/>
+        </p:nvSpPr>
+        <p:spPr>
+          <a:xfrm>
+            <a:off x="4617720" y="2807208"/>
+            <a:ext cx="2971800" cy="2057400"/>
+          </a:xfrm>
+          <a:prstGeom prst="rect">
+            <a:avLst/>
+          </a:prstGeom>
+          <a:noFill/>
+          <a:ln/>
+        </p:spPr>
+        <p:txBody>
+          <a:bodyPr wrap="square" lIns="0" tIns="0" rIns="0" bIns="0" rtlCol="0" anchor="t"/>
+          <a:lstStyle/>
+          <a:p>
+            <a:pPr indent="0" marL="0">
+              <a:buNone/>
+            </a:pPr>
+            <a:r>
+              <a:rPr lang="en-US" sz="1250" dirty="0">
+                <a:solidFill>
+                  <a:srgbClr val="9DB0A4"/>
+                </a:solidFill>
+                <a:latin typeface="Calibri" pitchFamily="34" charset="0"/>
+                <a:ea typeface="Calibri" pitchFamily="34" charset="-122"/>
+                <a:cs typeface="Calibri" pitchFamily="34" charset="-120"/>
+              </a:rPr>
+              <a:t>59 named signals, a pattern matcher and a small classifier decide, in about 2 ms on a laptop CPU, and name their reasons. A language model is optional: it may reword the explanation, through a safety gate, and never decides.</a:t>
+            </a:r>
+            <a:endParaRPr lang="en-US" sz="1250" dirty="0"/>
+          </a:p>
+        </p:txBody>
+      </p:sp>
+      <p:sp>
+        <p:nvSpPr>
+          <p:cNvPr id="14" name="Shape 12"/>
+          <p:cNvSpPr/>
+          <p:nvPr/>
+        </p:nvSpPr>
+        <p:spPr>
+          <a:xfrm>
+            <a:off x="8083296" y="1783080"/>
+            <a:ext cx="3520440" cy="3246120"/>
+          </a:xfrm>
+          <a:prstGeom prst="roundRect">
+            <a:avLst>
+              <a:gd name="adj" fmla="val 2817"/>
+            </a:avLst>
+          </a:prstGeom>
+          <a:solidFill>
+            <a:srgbClr val="152017"/>
+          </a:solidFill>
+          <a:ln w="12700">
+            <a:solidFill>
+              <a:srgbClr val="2C4636"/>
+            </a:solidFill>
+            <a:prstDash val="solid"/>
+          </a:ln>
+          <a:effectLst>
+            <a:outerShdw sx="100000" sy="100000" kx="0" ky="0" algn="bl" rotWithShape="0" blurRad="127000" dist="38100" dir="5400000">
+              <a:srgbClr val="000000">
+                <a:alpha val="40000"/>
+              </a:srgbClr>
+            </a:outerShdw>
+          </a:effectLst>
+        </p:spPr>
+      </p:sp>
+      <p:sp>
+        <p:nvSpPr>
+          <p:cNvPr id="15" name="Text 13"/>
+          <p:cNvSpPr/>
+          <p:nvPr/>
+        </p:nvSpPr>
+        <p:spPr>
+          <a:xfrm>
+            <a:off x="8385048" y="2039112"/>
+            <a:ext cx="2926080" cy="731520"/>
+          </a:xfrm>
+          <a:prstGeom prst="rect">
+            <a:avLst/>
+          </a:prstGeom>
+          <a:noFill/>
+          <a:ln/>
+        </p:spPr>
+        <p:txBody>
+          <a:bodyPr wrap="square" lIns="0" tIns="0" rIns="0" bIns="0" rtlCol="0" anchor="t"/>
+          <a:lstStyle/>
+          <a:p>
+            <a:pPr indent="0" marL="0">
+              <a:buNone/>
+            </a:pPr>
+            <a:r>
+              <a:rPr lang="en-US" sz="1600" b="1" dirty="0">
+                <a:solidFill>
+                  <a:srgbClr val="4FE3B0"/>
+                </a:solidFill>
+                <a:latin typeface="Arial" pitchFamily="34" charset="0"/>
+                <a:ea typeface="Arial" pitchFamily="34" charset="-122"/>
+                <a:cs typeface="Arial" pitchFamily="34" charset="-120"/>
+              </a:rPr>
+              <a:t>Because we measured</a:t>
+            </a:r>
+            <a:endParaRPr lang="en-US" sz="1600" dirty="0"/>
+          </a:p>
+        </p:txBody>
+      </p:sp>
+      <p:sp>
+        <p:nvSpPr>
+          <p:cNvPr id="16" name="Text 14"/>
+          <p:cNvSpPr/>
+          <p:nvPr/>
+        </p:nvSpPr>
+        <p:spPr>
+          <a:xfrm>
+            <a:off x="8385048" y="2807208"/>
+            <a:ext cx="2971800" cy="2057400"/>
+          </a:xfrm>
+          <a:prstGeom prst="rect">
+            <a:avLst/>
+          </a:prstGeom>
+          <a:noFill/>
+          <a:ln/>
+        </p:spPr>
+        <p:txBody>
+          <a:bodyPr wrap="square" lIns="0" tIns="0" rIns="0" bIns="0" rtlCol="0" anchor="t"/>
+          <a:lstStyle/>
+          <a:p>
+            <a:pPr indent="0" marL="0">
+              <a:buNone/>
+            </a:pPr>
+            <a:r>
+              <a:rPr lang="en-US" sz="1250" dirty="0">
+                <a:solidFill>
+                  <a:srgbClr val="9DB0A4"/>
+                </a:solidFill>
+                <a:latin typeface="Calibri" pitchFamily="34" charset="0"/>
+                <a:ea typeface="Calibri" pitchFamily="34" charset="-122"/>
+                <a:cs typeface="Calibri" pitchFamily="34" charset="-120"/>
+              </a:rPr>
+              <a:t>A qwen2.5 3b model, asked zero-shot on 137 real published messages, caught 99 of 103 scams (Sahayak 67) but flagged 21 of 34 genuine ones (Sahayak 11), at 2.13 s a message on a GPU. Blind set: 24 of 64 genuine flagged (Sahayak 15).</a:t>
+            </a:r>
+            <a:endParaRPr lang="en-US" sz="1250" dirty="0"/>
+          </a:p>
+        </p:txBody>
+      </p:sp>
+      <p:sp>
+        <p:nvSpPr>
+          <p:cNvPr id="17" name="Shape 15"/>
+          <p:cNvSpPr/>
+          <p:nvPr/>
+        </p:nvSpPr>
+        <p:spPr>
+          <a:xfrm>
+            <a:off x="548640" y="5257800"/>
+            <a:ext cx="11064240" cy="960120"/>
+          </a:xfrm>
+          <a:prstGeom prst="roundRect">
+            <a:avLst>
+              <a:gd name="adj" fmla="val 9524"/>
+            </a:avLst>
+          </a:prstGeom>
+          <a:solidFill>
+            <a:srgbClr val="1B2A20"/>
+          </a:solidFill>
+          <a:ln w="12700">
+            <a:solidFill>
+              <a:srgbClr val="2C4636"/>
+            </a:solidFill>
+            <a:prstDash val="solid"/>
+          </a:ln>
+          <a:effectLst>
+            <a:outerShdw sx="100000" sy="100000" kx="0" ky="0" algn="bl" rotWithShape="0" blurRad="127000" dist="38100" dir="5400000">
+              <a:srgbClr val="000000">
+                <a:alpha val="40000"/>
+              </a:srgbClr>
+            </a:outerShdw>
+          </a:effectLst>
+        </p:spPr>
+      </p:sp>
+      <p:sp>
+        <p:nvSpPr>
+          <p:cNvPr id="18" name="Text 16"/>
+          <p:cNvSpPr/>
+          <p:nvPr/>
+        </p:nvSpPr>
+        <p:spPr>
+          <a:xfrm>
+            <a:off x="822960" y="5330952"/>
+            <a:ext cx="10515600" cy="822960"/>
+          </a:xfrm>
+          <a:prstGeom prst="rect">
+            <a:avLst/>
+          </a:prstGeom>
+          <a:noFill/>
+          <a:ln/>
+        </p:spPr>
+        <p:txBody>
+          <a:bodyPr wrap="square" lIns="0" tIns="0" rIns="0" bIns="0" rtlCol="0" anchor="ctr">
+            <a:normAutofit/>
+          </a:bodyPr>
+          <a:lstStyle/>
+          <a:p>
+            <a:pPr indent="0" marL="0">
+              <a:buNone/>
+            </a:pPr>
+            <a:r>
+              <a:rPr lang="en-US" sz="1300" dirty="0">
+                <a:solidFill>
+                  <a:srgbClr val="EEF3EE"/>
+                </a:solidFill>
+                <a:latin typeface="Calibri" pitchFamily="34" charset="0"/>
+                <a:ea typeface="Calibri" pitchFamily="34" charset="-122"/>
+                <a:cs typeface="Calibri" pitchFamily="34" charset="-120"/>
+              </a:rPr>
+              <a:t>A warning that fires on 6 in 10 real genuine messages teaches people to ignore warnings, and the model cannot say what made it decide. Where a model earns its place: it caught 14 of 15 blind-test scams in languages Sahayak cannot read yet, so next it becomes a raise-only second opinion there.</a:t>
+            </a:r>
+            <a:endParaRPr lang="en-US" sz="1300" dirty="0"/>
+          </a:p>
+        </p:txBody>
+      </p:sp>
+      <p:sp>
+        <p:nvSpPr>
+          <p:cNvPr id="19" name="Text 17"/>
+          <p:cNvSpPr/>
+          <p:nvPr/>
+        </p:nvSpPr>
+        <p:spPr>
+          <a:xfrm>
+            <a:off x="548640" y="6355080"/>
+            <a:ext cx="11064240" cy="320040"/>
+          </a:xfrm>
+          <a:prstGeom prst="rect">
+            <a:avLst/>
+          </a:prstGeom>
+          <a:noFill/>
+          <a:ln/>
+        </p:spPr>
+        <p:txBody>
+          <a:bodyPr wrap="square" lIns="0" tIns="0" rIns="0" bIns="0" rtlCol="0" anchor="t"/>
+          <a:lstStyle/>
+          <a:p>
+            <a:pPr indent="0" marL="0">
+              <a:buNone/>
+            </a:pPr>
+            <a:r>
+              <a:rPr lang="en-US" sz="950" dirty="0">
+                <a:solidFill>
+                  <a:srgbClr val="6E8579"/>
+                </a:solidFill>
+                <a:latin typeface="Calibri" pitchFamily="34" charset="0"/>
+                <a:ea typeface="Calibri" pitchFamily="34" charset="-122"/>
+                <a:cs typeface="Calibri" pitchFamily="34" charset="-120"/>
+              </a:rPr>
+              <a:t>Sources: bench/results/llm_baseline.md, redteam_v1_blind.md (first runs, 7 Oct 2026); docs/APPLICATION_TO_PROTOTYPE.md</a:t>
+            </a:r>
+            <a:endParaRPr lang="en-US" sz="950" dirty="0"/>
+          </a:p>
+        </p:txBody>
+      </p:sp>
+    </p:spTree>
+  </p:cSld>
+  <p:clrMapOvr>
+    <a:masterClrMapping/>
+  </p:clrMapOvr>
+</p:sld>
+</file>
+
+<file path=ppt/slides/slide7.xml><?xml version="1.0" encoding="utf-8"?>
+<p:sld xmlns:a="http://schemas.openxmlformats.org/drawingml/2006/main" xmlns:r="http://schemas.openxmlformats.org/officeDocument/2006/relationships" xmlns:p="http://schemas.openxmlformats.org/presentationml/2006/main">
+  <p:cSld name="Slide 7">
+    <p:bg>
+      <p:bgPr>
+        <a:solidFill>
+          <a:srgbClr val="0B0F14"/>
+        </a:solidFill>
+      </p:bgPr>
+    </p:bg>
+    <p:spTree>
+      <p:nvGrpSpPr>
+        <p:cNvPr id="1" name=""/>
+        <p:cNvGrpSpPr/>
+        <p:nvPr/>
+      </p:nvGrpSpPr>
+      <p:grpSpPr>
+        <a:xfrm>
+          <a:off x="0" y="0"/>
+          <a:ext cx="0" cy="0"/>
+          <a:chOff x="0" y="0"/>
+          <a:chExt cx="0" cy="0"/>
+        </a:xfrm>
+      </p:grpSpPr>
+      <p:sp>
+        <p:nvSpPr>
+          <p:cNvPr id="2" name="Shape 0"/>
+          <p:cNvSpPr/>
+          <p:nvPr/>
+        </p:nvSpPr>
+        <p:spPr>
+          <a:xfrm>
+            <a:off x="11475720" y="384048"/>
+            <a:ext cx="109728" cy="109728"/>
+          </a:xfrm>
+          <a:prstGeom prst="ellipse">
+            <a:avLst/>
+          </a:prstGeom>
+          <a:solidFill>
+            <a:srgbClr val="FF9E3D"/>
+          </a:solidFill>
+          <a:ln/>
+        </p:spPr>
+      </p:sp>
+      <p:sp>
+        <p:nvSpPr>
+          <p:cNvPr id="3" name="Shape 1"/>
+          <p:cNvSpPr/>
+          <p:nvPr/>
+        </p:nvSpPr>
+        <p:spPr>
+          <a:xfrm>
+            <a:off x="11658600" y="384048"/>
+            <a:ext cx="109728" cy="109728"/>
+          </a:xfrm>
+          <a:prstGeom prst="ellipse">
+            <a:avLst/>
+          </a:prstGeom>
+          <a:solidFill>
+            <a:srgbClr val="EEF3EE"/>
+          </a:solidFill>
+          <a:ln/>
+        </p:spPr>
+      </p:sp>
+      <p:sp>
+        <p:nvSpPr>
+          <p:cNvPr id="4" name="Shape 2"/>
+          <p:cNvSpPr/>
+          <p:nvPr/>
+        </p:nvSpPr>
+        <p:spPr>
+          <a:xfrm>
+            <a:off x="11841480" y="384048"/>
+            <a:ext cx="109728" cy="109728"/>
+          </a:xfrm>
+          <a:prstGeom prst="ellipse">
+            <a:avLst/>
+          </a:prstGeom>
+          <a:solidFill>
+            <a:srgbClr val="27C08A"/>
+          </a:solidFill>
+          <a:ln/>
+        </p:spPr>
+      </p:sp>
+      <p:sp>
+        <p:nvSpPr>
+          <p:cNvPr id="5" name="Shape 3"/>
+          <p:cNvSpPr/>
+          <p:nvPr/>
+        </p:nvSpPr>
+        <p:spPr>
+          <a:xfrm>
+            <a:off x="566928" y="603504"/>
+            <a:ext cx="128016" cy="128016"/>
+          </a:xfrm>
+          <a:prstGeom prst="ellipse">
+            <a:avLst/>
+          </a:prstGeom>
+          <a:solidFill>
+            <a:srgbClr val="27C08A"/>
+          </a:solidFill>
+          <a:ln/>
+        </p:spPr>
+      </p:sp>
+      <p:sp>
+        <p:nvSpPr>
+          <p:cNvPr id="6" name="Text 4"/>
+          <p:cNvSpPr/>
+          <p:nvPr/>
+        </p:nvSpPr>
+        <p:spPr>
+          <a:xfrm>
+            <a:off x="777240" y="457200"/>
+            <a:ext cx="10058400" cy="411480"/>
+          </a:xfrm>
+          <a:prstGeom prst="rect">
+            <a:avLst/>
+          </a:prstGeom>
+          <a:noFill/>
+          <a:ln/>
+        </p:spPr>
+        <p:txBody>
+          <a:bodyPr wrap="square" lIns="0" tIns="0" rIns="0" bIns="0" rtlCol="0" anchor="ctr"/>
+          <a:lstStyle/>
+          <a:p>
+            <a:pPr indent="0" marL="0">
+              <a:buNone/>
+            </a:pPr>
+            <a:r>
+              <a:rPr lang="en-US" sz="1250" b="1" spc="200" kern="0" dirty="0">
+                <a:solidFill>
+                  <a:srgbClr val="27C08A"/>
+                </a:solidFill>
+                <a:latin typeface="Arial" pitchFamily="34" charset="0"/>
+                <a:ea typeface="Arial" pitchFamily="34" charset="-122"/>
+                <a:cs typeface="Arial" pitchFamily="34" charset="-120"/>
+              </a:rPr>
+              <a:t>TECHNOLOGY DIFFERENTIATION</a:t>
+            </a:r>
+            <a:endParaRPr lang="en-US" sz="1250" dirty="0"/>
+          </a:p>
+        </p:txBody>
+      </p:sp>
+      <p:sp>
+        <p:nvSpPr>
+          <p:cNvPr id="7" name="Text 5"/>
+          <p:cNvSpPr/>
+          <p:nvPr/>
+        </p:nvSpPr>
+        <p:spPr>
+          <a:xfrm>
+            <a:off x="548640" y="868680"/>
+            <a:ext cx="11064240" cy="914400"/>
+          </a:xfrm>
+          <a:prstGeom prst="rect">
+            <a:avLst/>
+          </a:prstGeom>
+          <a:noFill/>
+          <a:ln/>
+        </p:spPr>
+        <p:txBody>
+          <a:bodyPr wrap="square" lIns="0" tIns="0" rIns="0" bIns="0" rtlCol="0" anchor="ctr"/>
+          <a:lstStyle/>
+          <a:p>
+            <a:pPr indent="0" marL="0">
+              <a:buNone/>
+            </a:pPr>
+            <a:r>
+              <a:rPr lang="en-US" sz="3000" b="1" dirty="0">
+                <a:solidFill>
+                  <a:srgbClr val="EEF3EE"/>
+                </a:solidFill>
+                <a:latin typeface="Arial" pitchFamily="34" charset="0"/>
+                <a:ea typeface="Arial" pitchFamily="34" charset="-122"/>
+                <a:cs typeface="Arial" pitchFamily="34" charset="-120"/>
+              </a:rPr>
               <a:t>What already exists, and what Sahayak adds</a:t>
             </a:r>
             <a:endParaRPr lang="en-US" sz="3000" dirty="0"/>
@@ -9161,7 +10567,7 @@
       </p:sp>
       <p:graphicFrame>
         <p:nvGraphicFramePr>
-          <p:cNvPr id="7" name="Table 0"/>
+          <p:cNvPr id="8" name="Table 0"/>
           <p:cNvGraphicFramePr>
             <a:graphicFrameLocks noGrp="1"/>
           </p:cNvGraphicFramePr>
@@ -10679,744 +12085,6 @@
 </p:sld>
 </file>
 
-<file path=ppt/slides/slide7.xml><?xml version="1.0" encoding="utf-8"?>
-<p:sld xmlns:a="http://schemas.openxmlformats.org/drawingml/2006/main" xmlns:r="http://schemas.openxmlformats.org/officeDocument/2006/relationships" xmlns:p="http://schemas.openxmlformats.org/presentationml/2006/main">
-  <p:cSld name="Slide 7">
-    <p:bg>
-      <p:bgPr>
-        <a:solidFill>
-          <a:srgbClr val="0B0F14"/>
-        </a:solidFill>
-      </p:bgPr>
-    </p:bg>
-    <p:spTree>
-      <p:nvGrpSpPr>
-        <p:cNvPr id="1" name=""/>
-        <p:cNvGrpSpPr/>
-        <p:nvPr/>
-      </p:nvGrpSpPr>
-      <p:grpSpPr>
-        <a:xfrm>
-          <a:off x="0" y="0"/>
-          <a:ext cx="0" cy="0"/>
-          <a:chOff x="0" y="0"/>
-          <a:chExt cx="0" cy="0"/>
-        </a:xfrm>
-      </p:grpSpPr>
-      <p:sp>
-        <p:nvSpPr>
-          <p:cNvPr id="2" name="Shape 0"/>
-          <p:cNvSpPr/>
-          <p:nvPr/>
-        </p:nvSpPr>
-        <p:spPr>
-          <a:xfrm>
-            <a:off x="11475720" y="384048"/>
-            <a:ext cx="109728" cy="109728"/>
-          </a:xfrm>
-          <a:prstGeom prst="ellipse">
-            <a:avLst/>
-          </a:prstGeom>
-          <a:solidFill>
-            <a:srgbClr val="FF9E3D"/>
-          </a:solidFill>
-          <a:ln/>
-        </p:spPr>
-      </p:sp>
-      <p:sp>
-        <p:nvSpPr>
-          <p:cNvPr id="3" name="Shape 1"/>
-          <p:cNvSpPr/>
-          <p:nvPr/>
-        </p:nvSpPr>
-        <p:spPr>
-          <a:xfrm>
-            <a:off x="11658600" y="384048"/>
-            <a:ext cx="109728" cy="109728"/>
-          </a:xfrm>
-          <a:prstGeom prst="ellipse">
-            <a:avLst/>
-          </a:prstGeom>
-          <a:solidFill>
-            <a:srgbClr val="EEF3EE"/>
-          </a:solidFill>
-          <a:ln/>
-        </p:spPr>
-      </p:sp>
-      <p:sp>
-        <p:nvSpPr>
-          <p:cNvPr id="4" name="Shape 2"/>
-          <p:cNvSpPr/>
-          <p:nvPr/>
-        </p:nvSpPr>
-        <p:spPr>
-          <a:xfrm>
-            <a:off x="11841480" y="384048"/>
-            <a:ext cx="109728" cy="109728"/>
-          </a:xfrm>
-          <a:prstGeom prst="ellipse">
-            <a:avLst/>
-          </a:prstGeom>
-          <a:solidFill>
-            <a:srgbClr val="27C08A"/>
-          </a:solidFill>
-          <a:ln/>
-        </p:spPr>
-      </p:sp>
-      <p:sp>
-        <p:nvSpPr>
-          <p:cNvPr id="5" name="Shape 3"/>
-          <p:cNvSpPr/>
-          <p:nvPr/>
-        </p:nvSpPr>
-        <p:spPr>
-          <a:xfrm>
-            <a:off x="566928" y="603504"/>
-            <a:ext cx="128016" cy="128016"/>
-          </a:xfrm>
-          <a:prstGeom prst="ellipse">
-            <a:avLst/>
-          </a:prstGeom>
-          <a:solidFill>
-            <a:srgbClr val="27C08A"/>
-          </a:solidFill>
-          <a:ln/>
-        </p:spPr>
-      </p:sp>
-      <p:sp>
-        <p:nvSpPr>
-          <p:cNvPr id="6" name="Text 4"/>
-          <p:cNvSpPr/>
-          <p:nvPr/>
-        </p:nvSpPr>
-        <p:spPr>
-          <a:xfrm>
-            <a:off x="777240" y="457200"/>
-            <a:ext cx="10058400" cy="411480"/>
-          </a:xfrm>
-          <a:prstGeom prst="rect">
-            <a:avLst/>
-          </a:prstGeom>
-          <a:noFill/>
-          <a:ln/>
-        </p:spPr>
-        <p:txBody>
-          <a:bodyPr wrap="square" lIns="0" tIns="0" rIns="0" bIns="0" rtlCol="0" anchor="ctr"/>
-          <a:lstStyle/>
-          <a:p>
-            <a:pPr indent="0" marL="0">
-              <a:buNone/>
-            </a:pPr>
-            <a:r>
-              <a:rPr lang="en-US" sz="1250" b="1" spc="200" kern="0" dirty="0">
-                <a:solidFill>
-                  <a:srgbClr val="27C08A"/>
-                </a:solidFill>
-                <a:latin typeface="Arial" pitchFamily="34" charset="0"/>
-                <a:ea typeface="Arial" pitchFamily="34" charset="-122"/>
-                <a:cs typeface="Arial" pitchFamily="34" charset="-120"/>
-              </a:rPr>
-              <a:t>TESTING AND VALIDATION</a:t>
-            </a:r>
-            <a:endParaRPr lang="en-US" sz="1250" dirty="0"/>
-          </a:p>
-        </p:txBody>
-      </p:sp>
-      <p:sp>
-        <p:nvSpPr>
-          <p:cNvPr id="7" name="Text 5"/>
-          <p:cNvSpPr/>
-          <p:nvPr/>
-        </p:nvSpPr>
-        <p:spPr>
-          <a:xfrm>
-            <a:off x="548640" y="868680"/>
-            <a:ext cx="11064240" cy="914400"/>
-          </a:xfrm>
-          <a:prstGeom prst="rect">
-            <a:avLst/>
-          </a:prstGeom>
-          <a:noFill/>
-          <a:ln/>
-        </p:spPr>
-        <p:txBody>
-          <a:bodyPr wrap="square" lIns="0" tIns="0" rIns="0" bIns="0" rtlCol="0" anchor="ctr"/>
-          <a:lstStyle/>
-          <a:p>
-            <a:pPr indent="0" marL="0">
-              <a:buNone/>
-            </a:pPr>
-            <a:r>
-              <a:rPr lang="en-US" sz="3000" b="1" dirty="0">
-                <a:solidFill>
-                  <a:srgbClr val="EEF3EE"/>
-                </a:solidFill>
-                <a:latin typeface="Arial" pitchFamily="34" charset="0"/>
-                <a:ea typeface="Arial" pitchFamily="34" charset="-122"/>
-                <a:cs typeface="Arial" pitchFamily="34" charset="-120"/>
-              </a:rPr>
-              <a:t>It already works, and we measured it</a:t>
-            </a:r>
-            <a:endParaRPr lang="en-US" sz="3000" dirty="0"/>
-          </a:p>
-        </p:txBody>
-      </p:sp>
-      <p:sp>
-        <p:nvSpPr>
-          <p:cNvPr id="8" name="Shape 6"/>
-          <p:cNvSpPr/>
-          <p:nvPr/>
-        </p:nvSpPr>
-        <p:spPr>
-          <a:xfrm>
-            <a:off x="548640" y="1783080"/>
-            <a:ext cx="11064240" cy="1828800"/>
-          </a:xfrm>
-          <a:prstGeom prst="roundRect">
-            <a:avLst>
-              <a:gd name="adj" fmla="val 5000"/>
-            </a:avLst>
-          </a:prstGeom>
-          <a:solidFill>
-            <a:srgbClr val="152017"/>
-          </a:solidFill>
-          <a:ln w="12700">
-            <a:solidFill>
-              <a:srgbClr val="2C4636"/>
-            </a:solidFill>
-            <a:prstDash val="solid"/>
-          </a:ln>
-          <a:effectLst>
-            <a:outerShdw sx="100000" sy="100000" kx="0" ky="0" algn="bl" rotWithShape="0" blurRad="127000" dist="38100" dir="5400000">
-              <a:srgbClr val="000000">
-                <a:alpha val="40000"/>
-              </a:srgbClr>
-            </a:outerShdw>
-          </a:effectLst>
-        </p:spPr>
-      </p:sp>
-      <p:sp>
-        <p:nvSpPr>
-          <p:cNvPr id="9" name="Text 7"/>
-          <p:cNvSpPr/>
-          <p:nvPr/>
-        </p:nvSpPr>
-        <p:spPr>
-          <a:xfrm>
-            <a:off x="868680" y="2057400"/>
-            <a:ext cx="2103120" cy="731520"/>
-          </a:xfrm>
-          <a:prstGeom prst="rect">
-            <a:avLst/>
-          </a:prstGeom>
-          <a:noFill/>
-          <a:ln/>
-        </p:spPr>
-        <p:txBody>
-          <a:bodyPr wrap="square" lIns="0" tIns="0" rIns="0" bIns="0" rtlCol="0" anchor="b">
-            <a:normAutofit/>
-          </a:bodyPr>
-          <a:lstStyle/>
-          <a:p>
-            <a:pPr indent="0" marL="0">
-              <a:buNone/>
-            </a:pPr>
-            <a:r>
-              <a:rPr lang="en-US" sz="2800" b="1" dirty="0">
-                <a:solidFill>
-                  <a:srgbClr val="27C08A"/>
-                </a:solidFill>
-                <a:latin typeface="Arial" pitchFamily="34" charset="0"/>
-                <a:ea typeface="Arial" pitchFamily="34" charset="-122"/>
-                <a:cs typeface="Arial" pitchFamily="34" charset="-120"/>
-              </a:rPr>
-              <a:t>91.9%</a:t>
-            </a:r>
-            <a:endParaRPr lang="en-US" sz="2800" dirty="0"/>
-          </a:p>
-        </p:txBody>
-      </p:sp>
-      <p:sp>
-        <p:nvSpPr>
-          <p:cNvPr id="10" name="Text 8"/>
-          <p:cNvSpPr/>
-          <p:nvPr/>
-        </p:nvSpPr>
-        <p:spPr>
-          <a:xfrm>
-            <a:off x="868680" y="2834640"/>
-            <a:ext cx="2057400" cy="640080"/>
-          </a:xfrm>
-          <a:prstGeom prst="rect">
-            <a:avLst/>
-          </a:prstGeom>
-          <a:noFill/>
-          <a:ln/>
-        </p:spPr>
-        <p:txBody>
-          <a:bodyPr wrap="square" lIns="0" tIns="0" rIns="0" bIns="0" rtlCol="0" anchor="t"/>
-          <a:lstStyle/>
-          <a:p>
-            <a:pPr indent="0" marL="0">
-              <a:buNone/>
-            </a:pPr>
-            <a:r>
-              <a:rPr lang="en-US" sz="1150" dirty="0">
-                <a:solidFill>
-                  <a:srgbClr val="9DB0A4"/>
-                </a:solidFill>
-                <a:latin typeface="Calibri" pitchFamily="34" charset="0"/>
-                <a:ea typeface="Calibri" pitchFamily="34" charset="-122"/>
-                <a:cs typeface="Calibri" pitchFamily="34" charset="-120"/>
-              </a:rPr>
-              <a:t>scams caught (blocklist: 51.4%)</a:t>
-            </a:r>
-            <a:endParaRPr lang="en-US" sz="1150" dirty="0"/>
-          </a:p>
-        </p:txBody>
-      </p:sp>
-      <p:sp>
-        <p:nvSpPr>
-          <p:cNvPr id="11" name="Text 9"/>
-          <p:cNvSpPr/>
-          <p:nvPr/>
-        </p:nvSpPr>
-        <p:spPr>
-          <a:xfrm>
-            <a:off x="3044952" y="2057400"/>
-            <a:ext cx="2103120" cy="731520"/>
-          </a:xfrm>
-          <a:prstGeom prst="rect">
-            <a:avLst/>
-          </a:prstGeom>
-          <a:noFill/>
-          <a:ln/>
-        </p:spPr>
-        <p:txBody>
-          <a:bodyPr wrap="square" lIns="0" tIns="0" rIns="0" bIns="0" rtlCol="0" anchor="b">
-            <a:normAutofit/>
-          </a:bodyPr>
-          <a:lstStyle/>
-          <a:p>
-            <a:pPr indent="0" marL="0">
-              <a:buNone/>
-            </a:pPr>
-            <a:r>
-              <a:rPr lang="en-US" sz="2800" b="1" dirty="0">
-                <a:solidFill>
-                  <a:srgbClr val="FF9E3D"/>
-                </a:solidFill>
-                <a:latin typeface="Arial" pitchFamily="34" charset="0"/>
-                <a:ea typeface="Arial" pitchFamily="34" charset="-122"/>
-                <a:cs typeface="Arial" pitchFamily="34" charset="-120"/>
-              </a:rPr>
-              <a:t>2 ms</a:t>
-            </a:r>
-            <a:endParaRPr lang="en-US" sz="2800" dirty="0"/>
-          </a:p>
-        </p:txBody>
-      </p:sp>
-      <p:sp>
-        <p:nvSpPr>
-          <p:cNvPr id="12" name="Text 10"/>
-          <p:cNvSpPr/>
-          <p:nvPr/>
-        </p:nvSpPr>
-        <p:spPr>
-          <a:xfrm>
-            <a:off x="3044952" y="2834640"/>
-            <a:ext cx="2057400" cy="640080"/>
-          </a:xfrm>
-          <a:prstGeom prst="rect">
-            <a:avLst/>
-          </a:prstGeom>
-          <a:noFill/>
-          <a:ln/>
-        </p:spPr>
-        <p:txBody>
-          <a:bodyPr wrap="square" lIns="0" tIns="0" rIns="0" bIns="0" rtlCol="0" anchor="t"/>
-          <a:lstStyle/>
-          <a:p>
-            <a:pPr indent="0" marL="0">
-              <a:buNone/>
-            </a:pPr>
-            <a:r>
-              <a:rPr lang="en-US" sz="1150" dirty="0">
-                <a:solidFill>
-                  <a:srgbClr val="9DB0A4"/>
-                </a:solidFill>
-                <a:latin typeface="Calibri" pitchFamily="34" charset="0"/>
-                <a:ea typeface="Calibri" pitchFamily="34" charset="-122"/>
-                <a:cs typeface="Calibri" pitchFamily="34" charset="-120"/>
-              </a:rPr>
-              <a:t>per verdict on a laptop CPU</a:t>
-            </a:r>
-            <a:endParaRPr lang="en-US" sz="1150" dirty="0"/>
-          </a:p>
-        </p:txBody>
-      </p:sp>
-      <p:sp>
-        <p:nvSpPr>
-          <p:cNvPr id="13" name="Text 11"/>
-          <p:cNvSpPr/>
-          <p:nvPr/>
-        </p:nvSpPr>
-        <p:spPr>
-          <a:xfrm>
-            <a:off x="5221224" y="2057400"/>
-            <a:ext cx="2103120" cy="731520"/>
-          </a:xfrm>
-          <a:prstGeom prst="rect">
-            <a:avLst/>
-          </a:prstGeom>
-          <a:noFill/>
-          <a:ln/>
-        </p:spPr>
-        <p:txBody>
-          <a:bodyPr wrap="square" lIns="0" tIns="0" rIns="0" bIns="0" rtlCol="0" anchor="b">
-            <a:normAutofit/>
-          </a:bodyPr>
-          <a:lstStyle/>
-          <a:p>
-            <a:pPr indent="0" marL="0">
-              <a:buNone/>
-            </a:pPr>
-            <a:r>
-              <a:rPr lang="en-US" sz="2800" b="1" dirty="0">
-                <a:solidFill>
-                  <a:srgbClr val="4FE3B0"/>
-                </a:solidFill>
-                <a:latin typeface="Arial" pitchFamily="34" charset="0"/>
-                <a:ea typeface="Arial" pitchFamily="34" charset="-122"/>
-                <a:cs typeface="Arial" pitchFamily="34" charset="-120"/>
-              </a:rPr>
-              <a:t>15.4%</a:t>
-            </a:r>
-            <a:endParaRPr lang="en-US" sz="2800" dirty="0"/>
-          </a:p>
-        </p:txBody>
-      </p:sp>
-      <p:sp>
-        <p:nvSpPr>
-          <p:cNvPr id="14" name="Text 12"/>
-          <p:cNvSpPr/>
-          <p:nvPr/>
-        </p:nvSpPr>
-        <p:spPr>
-          <a:xfrm>
-            <a:off x="5221224" y="2834640"/>
-            <a:ext cx="2057400" cy="640080"/>
-          </a:xfrm>
-          <a:prstGeom prst="rect">
-            <a:avLst/>
-          </a:prstGeom>
-          <a:noFill/>
-          <a:ln/>
-        </p:spPr>
-        <p:txBody>
-          <a:bodyPr wrap="square" lIns="0" tIns="0" rIns="0" bIns="0" rtlCol="0" anchor="t"/>
-          <a:lstStyle/>
-          <a:p>
-            <a:pPr indent="0" marL="0">
-              <a:buNone/>
-            </a:pPr>
-            <a:r>
-              <a:rPr lang="en-US" sz="1150" dirty="0">
-                <a:solidFill>
-                  <a:srgbClr val="9DB0A4"/>
-                </a:solidFill>
-                <a:latin typeface="Calibri" pitchFamily="34" charset="0"/>
-                <a:ea typeface="Calibri" pitchFamily="34" charset="-122"/>
-                <a:cs typeface="Calibri" pitchFamily="34" charset="-120"/>
-              </a:rPr>
-              <a:t>Hindi word error, real speakers</a:t>
-            </a:r>
-            <a:endParaRPr lang="en-US" sz="1150" dirty="0"/>
-          </a:p>
-        </p:txBody>
-      </p:sp>
-      <p:sp>
-        <p:nvSpPr>
-          <p:cNvPr id="15" name="Text 13"/>
-          <p:cNvSpPr/>
-          <p:nvPr/>
-        </p:nvSpPr>
-        <p:spPr>
-          <a:xfrm>
-            <a:off x="7397496" y="2057400"/>
-            <a:ext cx="2103120" cy="731520"/>
-          </a:xfrm>
-          <a:prstGeom prst="rect">
-            <a:avLst/>
-          </a:prstGeom>
-          <a:noFill/>
-          <a:ln/>
-        </p:spPr>
-        <p:txBody>
-          <a:bodyPr wrap="square" lIns="0" tIns="0" rIns="0" bIns="0" rtlCol="0" anchor="b">
-            <a:normAutofit/>
-          </a:bodyPr>
-          <a:lstStyle/>
-          <a:p>
-            <a:pPr indent="0" marL="0">
-              <a:buNone/>
-            </a:pPr>
-            <a:r>
-              <a:rPr lang="en-US" sz="2800" b="1" dirty="0">
-                <a:solidFill>
-                  <a:srgbClr val="27C08A"/>
-                </a:solidFill>
-                <a:latin typeface="Arial" pitchFamily="34" charset="0"/>
-                <a:ea typeface="Arial" pitchFamily="34" charset="-122"/>
-                <a:cs typeface="Arial" pitchFamily="34" charset="-120"/>
-              </a:rPr>
-              <a:t>0.65 s</a:t>
-            </a:r>
-            <a:endParaRPr lang="en-US" sz="2800" dirty="0"/>
-          </a:p>
-        </p:txBody>
-      </p:sp>
-      <p:sp>
-        <p:nvSpPr>
-          <p:cNvPr id="16" name="Text 14"/>
-          <p:cNvSpPr/>
-          <p:nvPr/>
-        </p:nvSpPr>
-        <p:spPr>
-          <a:xfrm>
-            <a:off x="7397496" y="2834640"/>
-            <a:ext cx="2057400" cy="640080"/>
-          </a:xfrm>
-          <a:prstGeom prst="rect">
-            <a:avLst/>
-          </a:prstGeom>
-          <a:noFill/>
-          <a:ln/>
-        </p:spPr>
-        <p:txBody>
-          <a:bodyPr wrap="square" lIns="0" tIns="0" rIns="0" bIns="0" rtlCol="0" anchor="t"/>
-          <a:lstStyle/>
-          <a:p>
-            <a:pPr indent="0" marL="0">
-              <a:buNone/>
-            </a:pPr>
-            <a:r>
-              <a:rPr lang="en-US" sz="1150" dirty="0">
-                <a:solidFill>
-                  <a:srgbClr val="9DB0A4"/>
-                </a:solidFill>
-                <a:latin typeface="Calibri" pitchFamily="34" charset="0"/>
-                <a:ea typeface="Calibri" pitchFamily="34" charset="-122"/>
-                <a:cs typeface="Calibri" pitchFamily="34" charset="-120"/>
-              </a:rPr>
-              <a:t>from mic release to spoken reply</a:t>
-            </a:r>
-            <a:endParaRPr lang="en-US" sz="1150" dirty="0"/>
-          </a:p>
-        </p:txBody>
-      </p:sp>
-      <p:sp>
-        <p:nvSpPr>
-          <p:cNvPr id="17" name="Text 15"/>
-          <p:cNvSpPr/>
-          <p:nvPr/>
-        </p:nvSpPr>
-        <p:spPr>
-          <a:xfrm>
-            <a:off x="9573768" y="2057400"/>
-            <a:ext cx="2103120" cy="731520"/>
-          </a:xfrm>
-          <a:prstGeom prst="rect">
-            <a:avLst/>
-          </a:prstGeom>
-          <a:noFill/>
-          <a:ln/>
-        </p:spPr>
-        <p:txBody>
-          <a:bodyPr wrap="square" lIns="0" tIns="0" rIns="0" bIns="0" rtlCol="0" anchor="b">
-            <a:normAutofit/>
-          </a:bodyPr>
-          <a:lstStyle/>
-          <a:p>
-            <a:pPr indent="0" marL="0">
-              <a:buNone/>
-            </a:pPr>
-            <a:r>
-              <a:rPr lang="en-US" sz="2800" b="1" dirty="0">
-                <a:solidFill>
-                  <a:srgbClr val="FF9E3D"/>
-                </a:solidFill>
-                <a:latin typeface="Arial" pitchFamily="34" charset="0"/>
-                <a:ea typeface="Arial" pitchFamily="34" charset="-122"/>
-                <a:cs typeface="Arial" pitchFamily="34" charset="-120"/>
-              </a:rPr>
-              <a:t>100%</a:t>
-            </a:r>
-            <a:endParaRPr lang="en-US" sz="2800" dirty="0"/>
-          </a:p>
-        </p:txBody>
-      </p:sp>
-      <p:sp>
-        <p:nvSpPr>
-          <p:cNvPr id="18" name="Text 16"/>
-          <p:cNvSpPr/>
-          <p:nvPr/>
-        </p:nvSpPr>
-        <p:spPr>
-          <a:xfrm>
-            <a:off x="9573768" y="2834640"/>
-            <a:ext cx="2057400" cy="640080"/>
-          </a:xfrm>
-          <a:prstGeom prst="rect">
-            <a:avLst/>
-          </a:prstGeom>
-          <a:noFill/>
-          <a:ln/>
-        </p:spPr>
-        <p:txBody>
-          <a:bodyPr wrap="square" lIns="0" tIns="0" rIns="0" bIns="0" rtlCol="0" anchor="t"/>
-          <a:lstStyle/>
-          <a:p>
-            <a:pPr indent="0" marL="0">
-              <a:buNone/>
-            </a:pPr>
-            <a:r>
-              <a:rPr lang="en-US" sz="1150" dirty="0">
-                <a:solidFill>
-                  <a:srgbClr val="9DB0A4"/>
-                </a:solidFill>
-                <a:latin typeface="Calibri" pitchFamily="34" charset="0"/>
-                <a:ea typeface="Calibri" pitchFamily="34" charset="-122"/>
-                <a:cs typeface="Calibri" pitchFamily="34" charset="-120"/>
-              </a:rPr>
-              <a:t>of 1,453 messages: the phone gives the node's exact answer</a:t>
-            </a:r>
-            <a:endParaRPr lang="en-US" sz="1150" dirty="0"/>
-          </a:p>
-        </p:txBody>
-      </p:sp>
-      <p:sp>
-        <p:nvSpPr>
-          <p:cNvPr id="19" name="Shape 17"/>
-          <p:cNvSpPr/>
-          <p:nvPr/>
-        </p:nvSpPr>
-        <p:spPr>
-          <a:xfrm>
-            <a:off x="548640" y="3840480"/>
-            <a:ext cx="11064240" cy="1463040"/>
-          </a:xfrm>
-          <a:prstGeom prst="roundRect">
-            <a:avLst>
-              <a:gd name="adj" fmla="val 6250"/>
-            </a:avLst>
-          </a:prstGeom>
-          <a:solidFill>
-            <a:srgbClr val="1B2A20"/>
-          </a:solidFill>
-          <a:ln w="12700">
-            <a:solidFill>
-              <a:srgbClr val="2C4636"/>
-            </a:solidFill>
-            <a:prstDash val="solid"/>
-          </a:ln>
-          <a:effectLst>
-            <a:outerShdw sx="100000" sy="100000" kx="0" ky="0" algn="bl" rotWithShape="0" blurRad="127000" dist="38100" dir="5400000">
-              <a:srgbClr val="000000">
-                <a:alpha val="40000"/>
-              </a:srgbClr>
-            </a:outerShdw>
-          </a:effectLst>
-        </p:spPr>
-      </p:sp>
-      <p:sp>
-        <p:nvSpPr>
-          <p:cNvPr id="20" name="Text 18"/>
-          <p:cNvSpPr/>
-          <p:nvPr/>
-        </p:nvSpPr>
-        <p:spPr>
-          <a:xfrm>
-            <a:off x="822960" y="3950208"/>
-            <a:ext cx="10515600" cy="365760"/>
-          </a:xfrm>
-          <a:prstGeom prst="rect">
-            <a:avLst/>
-          </a:prstGeom>
-          <a:noFill/>
-          <a:ln/>
-        </p:spPr>
-        <p:txBody>
-          <a:bodyPr wrap="square" lIns="0" tIns="0" rIns="0" bIns="0" rtlCol="0" anchor="ctr"/>
-          <a:lstStyle/>
-          <a:p>
-            <a:pPr indent="0" marL="0">
-              <a:buNone/>
-            </a:pPr>
-            <a:r>
-              <a:rPr lang="en-US" sz="1450" b="1" dirty="0">
-                <a:solidFill>
-                  <a:srgbClr val="EEF3EE"/>
-                </a:solidFill>
-                <a:latin typeface="Arial" pitchFamily="34" charset="0"/>
-                <a:ea typeface="Arial" pitchFamily="34" charset="-122"/>
-                <a:cs typeface="Arial" pitchFamily="34" charset="-120"/>
-              </a:rPr>
-              <a:t>How we know, and what it does not show</a:t>
-            </a:r>
-            <a:endParaRPr lang="en-US" sz="1450" dirty="0"/>
-          </a:p>
-        </p:txBody>
-      </p:sp>
-      <p:sp>
-        <p:nvSpPr>
-          <p:cNvPr id="21" name="Text 19"/>
-          <p:cNvSpPr/>
-          <p:nvPr/>
-        </p:nvSpPr>
-        <p:spPr>
-          <a:xfrm>
-            <a:off x="822960" y="4343400"/>
-            <a:ext cx="10515600" cy="868680"/>
-          </a:xfrm>
-          <a:prstGeom prst="rect">
-            <a:avLst/>
-          </a:prstGeom>
-          <a:noFill/>
-          <a:ln/>
-        </p:spPr>
-        <p:txBody>
-          <a:bodyPr wrap="square" lIns="0" tIns="0" rIns="0" bIns="0" rtlCol="0" anchor="t">
-            <a:normAutofit/>
-          </a:bodyPr>
-          <a:lstStyle/>
-          <a:p>
-            <a:pPr indent="0" marL="0">
-              <a:buNone/>
-            </a:pPr>
-            <a:r>
-              <a:rPr lang="en-US" sz="1200" dirty="0">
-                <a:solidFill>
-                  <a:srgbClr val="9DB0A4"/>
-                </a:solidFill>
-                <a:latin typeface="Calibri" pitchFamily="34" charset="0"/>
-                <a:ea typeface="Calibri" pitchFamily="34" charset="-122"/>
-                <a:cs typeface="Calibri" pitchFamily="34" charset="-120"/>
-              </a:rPr>
-              <a:t>ScamBench v0 frozen test split (60 messages, 95% CI 82.1%–100.0%); SchemeBench: 2,400 of 2,400 decisions match an independent re-derivation; Google FLEURS Hindi (418 recordings). Red team: 46 of 52 disguised scams caught on the first run (blocklist 33). v0 messages were written by our team, so those numbers are optimistic; real messages collected with consent come next.</a:t>
-            </a:r>
-            <a:endParaRPr lang="en-US" sz="1200" dirty="0"/>
-          </a:p>
-        </p:txBody>
-      </p:sp>
-    </p:spTree>
-  </p:cSld>
-  <p:clrMapOvr>
-    <a:masterClrMapping/>
-  </p:clrMapOvr>
-</p:sld>
-</file>
-
 <file path=ppt/slides/slide8.xml><?xml version="1.0" encoding="utf-8"?>
 <p:sld xmlns:a="http://schemas.openxmlformats.org/drawingml/2006/main" xmlns:r="http://schemas.openxmlformats.org/officeDocument/2006/relationships" xmlns:p="http://schemas.openxmlformats.org/presentationml/2006/main">
   <p:cSld name="Slide 8">
@@ -11554,7 +12222,7 @@
                 <a:ea typeface="Arial" pitchFamily="34" charset="-122"/>
                 <a:cs typeface="Arial" pitchFamily="34" charset="-120"/>
               </a:rPr>
-              <a:t>HEALTH FIRST</a:t>
+              <a:t>TESTING AND VALIDATION</a:t>
             </a:r>
             <a:endParaRPr lang="en-US" sz="1250" dirty="0"/>
           </a:p>
@@ -11593,7 +12261,7 @@
                 <a:ea typeface="Arial" pitchFamily="34" charset="-122"/>
                 <a:cs typeface="Arial" pitchFamily="34" charset="-120"/>
               </a:rPr>
-              <a:t>₹5 lakh of health cover most seniors have not claimed</a:t>
+              <a:t>Measured on real messages, not just our own</a:t>
             </a:r>
             <a:endParaRPr lang="en-US" sz="3000" dirty="0"/>
           </a:p>
@@ -11608,11 +12276,445 @@
         <p:spPr>
           <a:xfrm>
             <a:off x="548640" y="1783080"/>
-            <a:ext cx="6949440" cy="1463040"/>
+            <a:ext cx="11064240" cy="1828800"/>
           </a:xfrm>
           <a:prstGeom prst="roundRect">
             <a:avLst>
-              <a:gd name="adj" fmla="val 6250"/>
+              <a:gd name="adj" fmla="val 5000"/>
+            </a:avLst>
+          </a:prstGeom>
+          <a:solidFill>
+            <a:srgbClr val="152017"/>
+          </a:solidFill>
+          <a:ln w="12700">
+            <a:solidFill>
+              <a:srgbClr val="2C4636"/>
+            </a:solidFill>
+            <a:prstDash val="solid"/>
+          </a:ln>
+          <a:effectLst>
+            <a:outerShdw sx="100000" sy="100000" kx="0" ky="0" algn="bl" rotWithShape="0" blurRad="127000" dist="38100" dir="5400000">
+              <a:srgbClr val="000000">
+                <a:alpha val="40000"/>
+              </a:srgbClr>
+            </a:outerShdw>
+          </a:effectLst>
+        </p:spPr>
+      </p:sp>
+      <p:sp>
+        <p:nvSpPr>
+          <p:cNvPr id="9" name="Text 7"/>
+          <p:cNvSpPr/>
+          <p:nvPr/>
+        </p:nvSpPr>
+        <p:spPr>
+          <a:xfrm>
+            <a:off x="868680" y="2057400"/>
+            <a:ext cx="2103120" cy="731520"/>
+          </a:xfrm>
+          <a:prstGeom prst="rect">
+            <a:avLst/>
+          </a:prstGeom>
+          <a:noFill/>
+          <a:ln/>
+        </p:spPr>
+        <p:txBody>
+          <a:bodyPr wrap="square" lIns="0" tIns="0" rIns="0" bIns="0" rtlCol="0" anchor="b">
+            <a:normAutofit/>
+          </a:bodyPr>
+          <a:lstStyle/>
+          <a:p>
+            <a:pPr indent="0" marL="0">
+              <a:buNone/>
+            </a:pPr>
+            <a:r>
+              <a:rPr lang="en-US" sz="2800" b="1" dirty="0">
+                <a:solidFill>
+                  <a:srgbClr val="FF9E3D"/>
+                </a:solidFill>
+                <a:latin typeface="Arial" pitchFamily="34" charset="0"/>
+                <a:ea typeface="Arial" pitchFamily="34" charset="-122"/>
+                <a:cs typeface="Arial" pitchFamily="34" charset="-120"/>
+              </a:rPr>
+              <a:t>69%</a:t>
+            </a:r>
+            <a:endParaRPr lang="en-US" sz="2800" dirty="0"/>
+          </a:p>
+        </p:txBody>
+      </p:sp>
+      <p:sp>
+        <p:nvSpPr>
+          <p:cNvPr id="10" name="Text 8"/>
+          <p:cNvSpPr/>
+          <p:nvPr/>
+        </p:nvSpPr>
+        <p:spPr>
+          <a:xfrm>
+            <a:off x="868680" y="2834640"/>
+            <a:ext cx="2057400" cy="685800"/>
+          </a:xfrm>
+          <a:prstGeom prst="rect">
+            <a:avLst/>
+          </a:prstGeom>
+          <a:noFill/>
+          <a:ln/>
+        </p:spPr>
+        <p:txBody>
+          <a:bodyPr wrap="square" lIns="0" tIns="0" rIns="0" bIns="0" rtlCol="0" anchor="t"/>
+          <a:lstStyle/>
+          <a:p>
+            <a:pPr indent="0" marL="0">
+              <a:buNone/>
+            </a:pPr>
+            <a:r>
+              <a:rPr lang="en-US" sz="1150" dirty="0">
+                <a:solidFill>
+                  <a:srgbClr val="9DB0A4"/>
+                </a:solidFill>
+                <a:latin typeface="Calibri" pitchFamily="34" charset="0"/>
+                <a:ea typeface="Calibri" pitchFamily="34" charset="-122"/>
+                <a:cs typeface="Calibri" pitchFamily="34" charset="-120"/>
+              </a:rPr>
+              <a:t>of 97 real published scams caught, first run (keyword blocklist 64%)</a:t>
+            </a:r>
+            <a:endParaRPr lang="en-US" sz="1150" dirty="0"/>
+          </a:p>
+        </p:txBody>
+      </p:sp>
+      <p:sp>
+        <p:nvSpPr>
+          <p:cNvPr id="11" name="Text 9"/>
+          <p:cNvSpPr/>
+          <p:nvPr/>
+        </p:nvSpPr>
+        <p:spPr>
+          <a:xfrm>
+            <a:off x="3044952" y="2057400"/>
+            <a:ext cx="2103120" cy="731520"/>
+          </a:xfrm>
+          <a:prstGeom prst="rect">
+            <a:avLst/>
+          </a:prstGeom>
+          <a:noFill/>
+          <a:ln/>
+        </p:spPr>
+        <p:txBody>
+          <a:bodyPr wrap="square" lIns="0" tIns="0" rIns="0" bIns="0" rtlCol="0" anchor="b">
+            <a:normAutofit/>
+          </a:bodyPr>
+          <a:lstStyle/>
+          <a:p>
+            <a:pPr indent="0" marL="0">
+              <a:buNone/>
+            </a:pPr>
+            <a:r>
+              <a:rPr lang="en-US" sz="2800" b="1" dirty="0">
+                <a:solidFill>
+                  <a:srgbClr val="4FE3B0"/>
+                </a:solidFill>
+                <a:latin typeface="Arial" pitchFamily="34" charset="0"/>
+                <a:ea typeface="Arial" pitchFamily="34" charset="-122"/>
+                <a:cs typeface="Arial" pitchFamily="34" charset="-120"/>
+              </a:rPr>
+              <a:t>89%</a:t>
+            </a:r>
+            <a:endParaRPr lang="en-US" sz="2800" dirty="0"/>
+          </a:p>
+        </p:txBody>
+      </p:sp>
+      <p:sp>
+        <p:nvSpPr>
+          <p:cNvPr id="12" name="Text 10"/>
+          <p:cNvSpPr/>
+          <p:nvPr/>
+        </p:nvSpPr>
+        <p:spPr>
+          <a:xfrm>
+            <a:off x="3044952" y="2834640"/>
+            <a:ext cx="2057400" cy="685800"/>
+          </a:xfrm>
+          <a:prstGeom prst="rect">
+            <a:avLst/>
+          </a:prstGeom>
+          <a:noFill/>
+          <a:ln/>
+        </p:spPr>
+        <p:txBody>
+          <a:bodyPr wrap="square" lIns="0" tIns="0" rIns="0" bIns="0" rtlCol="0" anchor="t"/>
+          <a:lstStyle/>
+          <a:p>
+            <a:pPr indent="0" marL="0">
+              <a:buNone/>
+            </a:pPr>
+            <a:r>
+              <a:rPr lang="en-US" sz="1150" dirty="0">
+                <a:solidFill>
+                  <a:srgbClr val="9DB0A4"/>
+                </a:solidFill>
+                <a:latin typeface="Calibri" pitchFamily="34" charset="0"/>
+                <a:ea typeface="Calibri" pitchFamily="34" charset="-122"/>
+                <a:cs typeface="Calibri" pitchFamily="34" charset="-120"/>
+              </a:rPr>
+              <a:t>of scams caught in a blind test written by a separate AI model (blocklist 50%)</a:t>
+            </a:r>
+            <a:endParaRPr lang="en-US" sz="1150" dirty="0"/>
+          </a:p>
+        </p:txBody>
+      </p:sp>
+      <p:sp>
+        <p:nvSpPr>
+          <p:cNvPr id="13" name="Text 11"/>
+          <p:cNvSpPr/>
+          <p:nvPr/>
+        </p:nvSpPr>
+        <p:spPr>
+          <a:xfrm>
+            <a:off x="5221224" y="2057400"/>
+            <a:ext cx="2103120" cy="731520"/>
+          </a:xfrm>
+          <a:prstGeom prst="rect">
+            <a:avLst/>
+          </a:prstGeom>
+          <a:noFill/>
+          <a:ln/>
+        </p:spPr>
+        <p:txBody>
+          <a:bodyPr wrap="square" lIns="0" tIns="0" rIns="0" bIns="0" rtlCol="0" anchor="b">
+            <a:normAutofit/>
+          </a:bodyPr>
+          <a:lstStyle/>
+          <a:p>
+            <a:pPr indent="0" marL="0">
+              <a:buNone/>
+            </a:pPr>
+            <a:r>
+              <a:rPr lang="en-US" sz="2800" b="1" dirty="0">
+                <a:solidFill>
+                  <a:srgbClr val="27C08A"/>
+                </a:solidFill>
+                <a:latin typeface="Arial" pitchFamily="34" charset="0"/>
+                <a:ea typeface="Arial" pitchFamily="34" charset="-122"/>
+                <a:cs typeface="Arial" pitchFamily="34" charset="-120"/>
+              </a:rPr>
+              <a:t>92%</a:t>
+            </a:r>
+            <a:endParaRPr lang="en-US" sz="2800" dirty="0"/>
+          </a:p>
+        </p:txBody>
+      </p:sp>
+      <p:sp>
+        <p:nvSpPr>
+          <p:cNvPr id="14" name="Text 12"/>
+          <p:cNvSpPr/>
+          <p:nvPr/>
+        </p:nvSpPr>
+        <p:spPr>
+          <a:xfrm>
+            <a:off x="5221224" y="2834640"/>
+            <a:ext cx="2057400" cy="685800"/>
+          </a:xfrm>
+          <a:prstGeom prst="rect">
+            <a:avLst/>
+          </a:prstGeom>
+          <a:noFill/>
+          <a:ln/>
+        </p:spPr>
+        <p:txBody>
+          <a:bodyPr wrap="square" lIns="0" tIns="0" rIns="0" bIns="0" rtlCol="0" anchor="t"/>
+          <a:lstStyle/>
+          <a:p>
+            <a:pPr indent="0" marL="0">
+              <a:buNone/>
+            </a:pPr>
+            <a:r>
+              <a:rPr lang="en-US" sz="1150" dirty="0">
+                <a:solidFill>
+                  <a:srgbClr val="9DB0A4"/>
+                </a:solidFill>
+                <a:latin typeface="Calibri" pitchFamily="34" charset="0"/>
+                <a:ea typeface="Calibri" pitchFamily="34" charset="-122"/>
+                <a:cs typeface="Calibri" pitchFamily="34" charset="-120"/>
+              </a:rPr>
+              <a:t>of our own test scams caught (blocklist 51%)</a:t>
+            </a:r>
+            <a:endParaRPr lang="en-US" sz="1150" dirty="0"/>
+          </a:p>
+        </p:txBody>
+      </p:sp>
+      <p:sp>
+        <p:nvSpPr>
+          <p:cNvPr id="15" name="Text 13"/>
+          <p:cNvSpPr/>
+          <p:nvPr/>
+        </p:nvSpPr>
+        <p:spPr>
+          <a:xfrm>
+            <a:off x="7397496" y="2057400"/>
+            <a:ext cx="2103120" cy="731520"/>
+          </a:xfrm>
+          <a:prstGeom prst="rect">
+            <a:avLst/>
+          </a:prstGeom>
+          <a:noFill/>
+          <a:ln/>
+        </p:spPr>
+        <p:txBody>
+          <a:bodyPr wrap="square" lIns="0" tIns="0" rIns="0" bIns="0" rtlCol="0" anchor="b">
+            <a:normAutofit/>
+          </a:bodyPr>
+          <a:lstStyle/>
+          <a:p>
+            <a:pPr indent="0" marL="0">
+              <a:buNone/>
+            </a:pPr>
+            <a:r>
+              <a:rPr lang="en-US" sz="2800" b="1" dirty="0">
+                <a:solidFill>
+                  <a:srgbClr val="FF9E3D"/>
+                </a:solidFill>
+                <a:latin typeface="Arial" pitchFamily="34" charset="0"/>
+                <a:ea typeface="Arial" pitchFamily="34" charset="-122"/>
+                <a:cs typeface="Arial" pitchFamily="34" charset="-120"/>
+              </a:rPr>
+              <a:t>2 ms</a:t>
+            </a:r>
+            <a:endParaRPr lang="en-US" sz="2800" dirty="0"/>
+          </a:p>
+        </p:txBody>
+      </p:sp>
+      <p:sp>
+        <p:nvSpPr>
+          <p:cNvPr id="16" name="Text 14"/>
+          <p:cNvSpPr/>
+          <p:nvPr/>
+        </p:nvSpPr>
+        <p:spPr>
+          <a:xfrm>
+            <a:off x="7397496" y="2834640"/>
+            <a:ext cx="2057400" cy="685800"/>
+          </a:xfrm>
+          <a:prstGeom prst="rect">
+            <a:avLst/>
+          </a:prstGeom>
+          <a:noFill/>
+          <a:ln/>
+        </p:spPr>
+        <p:txBody>
+          <a:bodyPr wrap="square" lIns="0" tIns="0" rIns="0" bIns="0" rtlCol="0" anchor="t"/>
+          <a:lstStyle/>
+          <a:p>
+            <a:pPr indent="0" marL="0">
+              <a:buNone/>
+            </a:pPr>
+            <a:r>
+              <a:rPr lang="en-US" sz="1150" dirty="0">
+                <a:solidFill>
+                  <a:srgbClr val="9DB0A4"/>
+                </a:solidFill>
+                <a:latin typeface="Calibri" pitchFamily="34" charset="0"/>
+                <a:ea typeface="Calibri" pitchFamily="34" charset="-122"/>
+                <a:cs typeface="Calibri" pitchFamily="34" charset="-120"/>
+              </a:rPr>
+              <a:t>per verdict on a laptop CPU</a:t>
+            </a:r>
+            <a:endParaRPr lang="en-US" sz="1150" dirty="0"/>
+          </a:p>
+        </p:txBody>
+      </p:sp>
+      <p:sp>
+        <p:nvSpPr>
+          <p:cNvPr id="17" name="Text 15"/>
+          <p:cNvSpPr/>
+          <p:nvPr/>
+        </p:nvSpPr>
+        <p:spPr>
+          <a:xfrm>
+            <a:off x="9573768" y="2057400"/>
+            <a:ext cx="2103120" cy="731520"/>
+          </a:xfrm>
+          <a:prstGeom prst="rect">
+            <a:avLst/>
+          </a:prstGeom>
+          <a:noFill/>
+          <a:ln/>
+        </p:spPr>
+        <p:txBody>
+          <a:bodyPr wrap="square" lIns="0" tIns="0" rIns="0" bIns="0" rtlCol="0" anchor="b">
+            <a:normAutofit/>
+          </a:bodyPr>
+          <a:lstStyle/>
+          <a:p>
+            <a:pPr indent="0" marL="0">
+              <a:buNone/>
+            </a:pPr>
+            <a:r>
+              <a:rPr lang="en-US" sz="2800" b="1" dirty="0">
+                <a:solidFill>
+                  <a:srgbClr val="4FE3B0"/>
+                </a:solidFill>
+                <a:latin typeface="Arial" pitchFamily="34" charset="0"/>
+                <a:ea typeface="Arial" pitchFamily="34" charset="-122"/>
+                <a:cs typeface="Arial" pitchFamily="34" charset="-120"/>
+              </a:rPr>
+              <a:t>15.4%</a:t>
+            </a:r>
+            <a:endParaRPr lang="en-US" sz="2800" dirty="0"/>
+          </a:p>
+        </p:txBody>
+      </p:sp>
+      <p:sp>
+        <p:nvSpPr>
+          <p:cNvPr id="18" name="Text 16"/>
+          <p:cNvSpPr/>
+          <p:nvPr/>
+        </p:nvSpPr>
+        <p:spPr>
+          <a:xfrm>
+            <a:off x="9573768" y="2834640"/>
+            <a:ext cx="2057400" cy="685800"/>
+          </a:xfrm>
+          <a:prstGeom prst="rect">
+            <a:avLst/>
+          </a:prstGeom>
+          <a:noFill/>
+          <a:ln/>
+        </p:spPr>
+        <p:txBody>
+          <a:bodyPr wrap="square" lIns="0" tIns="0" rIns="0" bIns="0" rtlCol="0" anchor="t"/>
+          <a:lstStyle/>
+          <a:p>
+            <a:pPr indent="0" marL="0">
+              <a:buNone/>
+            </a:pPr>
+            <a:r>
+              <a:rPr lang="en-US" sz="1150" dirty="0">
+                <a:solidFill>
+                  <a:srgbClr val="9DB0A4"/>
+                </a:solidFill>
+                <a:latin typeface="Calibri" pitchFamily="34" charset="0"/>
+                <a:ea typeface="Calibri" pitchFamily="34" charset="-122"/>
+                <a:cs typeface="Calibri" pitchFamily="34" charset="-120"/>
+              </a:rPr>
+              <a:t>Hindi word error, adults reading aloud</a:t>
+            </a:r>
+            <a:endParaRPr lang="en-US" sz="1150" dirty="0"/>
+          </a:p>
+        </p:txBody>
+      </p:sp>
+      <p:sp>
+        <p:nvSpPr>
+          <p:cNvPr id="19" name="Shape 17"/>
+          <p:cNvSpPr/>
+          <p:nvPr/>
+        </p:nvSpPr>
+        <p:spPr>
+          <a:xfrm>
+            <a:off x="548640" y="3840480"/>
+            <a:ext cx="11064240" cy="2286000"/>
+          </a:xfrm>
+          <a:prstGeom prst="roundRect">
+            <a:avLst>
+              <a:gd name="adj" fmla="val 4000"/>
             </a:avLst>
           </a:prstGeom>
           <a:solidFill>
@@ -11635,250 +12737,81 @@
       </p:sp>
       <p:sp>
         <p:nvSpPr>
-          <p:cNvPr id="9" name="Text 7"/>
-          <p:cNvSpPr/>
-          <p:nvPr/>
-        </p:nvSpPr>
-        <p:spPr>
-          <a:xfrm>
-            <a:off x="822960" y="1874520"/>
-            <a:ext cx="6492240" cy="685800"/>
-          </a:xfrm>
-          <a:prstGeom prst="rect">
-            <a:avLst/>
-          </a:prstGeom>
-          <a:noFill/>
-          <a:ln/>
-        </p:spPr>
-        <p:txBody>
-          <a:bodyPr wrap="square" lIns="0" tIns="0" rIns="0" bIns="0" rtlCol="0" anchor="ctr">
-            <a:normAutofit/>
-          </a:bodyPr>
+          <p:cNvPr id="20" name="Text 18"/>
+          <p:cNvSpPr/>
+          <p:nvPr/>
+        </p:nvSpPr>
+        <p:spPr>
+          <a:xfrm>
+            <a:off x="822960" y="3950208"/>
+            <a:ext cx="10515600" cy="365760"/>
+          </a:xfrm>
+          <a:prstGeom prst="rect">
+            <a:avLst/>
+          </a:prstGeom>
+          <a:noFill/>
+          <a:ln/>
+        </p:spPr>
+        <p:txBody>
+          <a:bodyPr wrap="square" lIns="0" tIns="0" rIns="0" bIns="0" rtlCol="0" anchor="ctr"/>
           <a:lstStyle/>
           <a:p>
             <a:pPr indent="0" marL="0">
               <a:buNone/>
             </a:pPr>
             <a:r>
-              <a:rPr lang="en-US" sz="3000" b="1" dirty="0">
-                <a:solidFill>
-                  <a:srgbClr val="FF9E3D"/>
+              <a:rPr lang="en-US" sz="1450" b="1" dirty="0">
+                <a:solidFill>
+                  <a:srgbClr val="EEF3EE"/>
                 </a:solidFill>
                 <a:latin typeface="Arial" pitchFamily="34" charset="0"/>
                 <a:ea typeface="Arial" pitchFamily="34" charset="-122"/>
                 <a:cs typeface="Arial" pitchFamily="34" charset="-120"/>
               </a:rPr>
-              <a:t>1.1 crore of ~6 crore</a:t>
-            </a:r>
-            <a:endParaRPr lang="en-US" sz="3000" dirty="0"/>
-          </a:p>
-        </p:txBody>
-      </p:sp>
-      <p:sp>
-        <p:nvSpPr>
-          <p:cNvPr id="10" name="Text 8"/>
-          <p:cNvSpPr/>
-          <p:nvPr/>
-        </p:nvSpPr>
-        <p:spPr>
-          <a:xfrm>
-            <a:off x="822960" y="2560320"/>
-            <a:ext cx="6492240" cy="548640"/>
-          </a:xfrm>
-          <a:prstGeom prst="rect">
-            <a:avLst/>
-          </a:prstGeom>
-          <a:noFill/>
-          <a:ln/>
-        </p:spPr>
-        <p:txBody>
-          <a:bodyPr wrap="square" lIns="0" tIns="0" rIns="0" bIns="0" rtlCol="0" anchor="ctr"/>
+              <a:t>How we know, and what it does not show</a:t>
+            </a:r>
+            <a:endParaRPr lang="en-US" sz="1450" dirty="0"/>
+          </a:p>
+        </p:txBody>
+      </p:sp>
+      <p:sp>
+        <p:nvSpPr>
+          <p:cNvPr id="21" name="Text 19"/>
+          <p:cNvSpPr/>
+          <p:nvPr/>
+        </p:nvSpPr>
+        <p:spPr>
+          <a:xfrm>
+            <a:off x="822960" y="4343400"/>
+            <a:ext cx="10515600" cy="1691640"/>
+          </a:xfrm>
+          <a:prstGeom prst="rect">
+            <a:avLst/>
+          </a:prstGeom>
+          <a:noFill/>
+          <a:ln/>
+        </p:spPr>
+        <p:txBody>
+          <a:bodyPr wrap="square" lIns="0" tIns="0" rIns="0" bIns="0" rtlCol="0" anchor="t">
+            <a:normAutofit/>
+          </a:bodyPr>
           <a:lstStyle/>
           <a:p>
             <a:pPr indent="0" marL="0">
               <a:buNone/>
             </a:pPr>
             <a:r>
-              <a:rPr lang="en-US" sz="1350" dirty="0">
-                <a:solidFill>
-                  <a:srgbClr val="EEF3EE"/>
+              <a:rPr lang="en-US" sz="1300" dirty="0">
+                <a:solidFill>
+                  <a:srgbClr val="9DB0A4"/>
                 </a:solidFill>
                 <a:latin typeface="Calibri" pitchFamily="34" charset="0"/>
                 <a:ea typeface="Calibri" pitchFamily="34" charset="-122"/>
                 <a:cs typeface="Calibri" pitchFamily="34" charset="-120"/>
               </a:rPr>
-              <a:t>seniors aged 70+ had their Ayushman Vay Vandana card by Feb 2026</a:t>
-            </a:r>
-            <a:endParaRPr lang="en-US" sz="1350" dirty="0"/>
-          </a:p>
-        </p:txBody>
-      </p:sp>
-      <p:sp>
-        <p:nvSpPr>
-          <p:cNvPr id="11" name="Text 9"/>
-          <p:cNvSpPr/>
-          <p:nvPr/>
-        </p:nvSpPr>
-        <p:spPr>
-          <a:xfrm>
-            <a:off x="640080" y="3474720"/>
-            <a:ext cx="6766560" cy="2651760"/>
-          </a:xfrm>
-          <a:prstGeom prst="rect">
-            <a:avLst/>
-          </a:prstGeom>
-          <a:noFill/>
-          <a:ln/>
-        </p:spPr>
-        <p:txBody>
-          <a:bodyPr wrap="square" lIns="0" tIns="0" rIns="0" bIns="0" rtlCol="0" anchor="t"/>
-          <a:lstStyle/>
-          <a:p>
-            <a:pPr marL="342900" indent="-342900">
-              <a:spcAft>
-                <a:spcPts val="600"/>
-              </a:spcAft>
-              <a:buSzPct val="100000"/>
-              <a:buChar char="•"/>
-            </a:pPr>
-            <a:r>
-              <a:rPr lang="en-US" sz="1250" dirty="0">
-                <a:solidFill>
-                  <a:srgbClr val="9DB0A4"/>
-                </a:solidFill>
-                <a:latin typeface="Calibri" pitchFamily="34" charset="0"/>
-                <a:ea typeface="Calibri" pitchFamily="34" charset="-122"/>
-                <a:cs typeface="Calibri" pitchFamily="34" charset="-120"/>
-              </a:rPr>
-              <a:t>Every benefits result leads with Ayushman Bharat; for anyone 70 or older it is the Vay Vandana card, ₹5 lakh of treatment a year whatever their income.</a:t>
-            </a:r>
-            <a:endParaRPr lang="en-US" sz="1250" dirty="0"/>
-          </a:p>
-          <a:p>
-            <a:pPr marL="342900" indent="-342900">
-              <a:spcAft>
-                <a:spcPts val="600"/>
-              </a:spcAft>
-              <a:buSzPct val="100000"/>
-              <a:buChar char="•"/>
-            </a:pPr>
-            <a:r>
-              <a:rPr lang="en-US" sz="1250" dirty="0">
-                <a:solidFill>
-                  <a:srgbClr val="9DB0A4"/>
-                </a:solidFill>
-                <a:latin typeface="Calibri" pitchFamily="34" charset="0"/>
-                <a:ea typeface="Calibri" pitchFamily="34" charset="-122"/>
-                <a:cs typeface="Calibri" pitchFamily="34" charset="-120"/>
-              </a:rPr>
-              <a:t>One question, their age, finds them; the slip tells the operator what to make.</a:t>
-            </a:r>
-            <a:endParaRPr lang="en-US" sz="1250" dirty="0"/>
-          </a:p>
-          <a:p>
-            <a:pPr marL="342900" indent="-342900">
-              <a:spcAft>
-                <a:spcPts val="600"/>
-              </a:spcAft>
-              <a:buSzPct val="100000"/>
-              <a:buChar char="•"/>
-            </a:pPr>
-            <a:r>
-              <a:rPr lang="en-US" sz="1250" dirty="0">
-                <a:solidFill>
-                  <a:srgbClr val="9DB0A4"/>
-                </a:solidFill>
-                <a:latin typeface="Calibri" pitchFamily="34" charset="0"/>
-                <a:ea typeface="Calibri" pitchFamily="34" charset="-122"/>
-                <a:cs typeface="Calibri" pitchFamily="34" charset="-120"/>
-              </a:rPr>
-              <a:t>The CSC makes the card at the counter, and is paid ₹20 per first-time card; the citizen pays nothing.</a:t>
-            </a:r>
-            <a:endParaRPr lang="en-US" sz="1250" dirty="0"/>
-          </a:p>
-          <a:p>
-            <a:pPr marL="342900" indent="-342900">
-              <a:spcAft>
-                <a:spcPts val="600"/>
-              </a:spcAft>
-              <a:buSzPct val="100000"/>
-              <a:buChar char="•"/>
-            </a:pPr>
-            <a:r>
-              <a:rPr lang="en-US" sz="1250" dirty="0">
-                <a:solidFill>
-                  <a:srgbClr val="9DB0A4"/>
-                </a:solidFill>
-                <a:latin typeface="Calibri" pitchFamily="34" charset="0"/>
-                <a:ea typeface="Calibri" pitchFamily="34" charset="-122"/>
-                <a:cs typeface="Calibri" pitchFamily="34" charset="-120"/>
-              </a:rPr>
-              <a:t>The scam check flags "pay to get your Ayushman card" messages; the node counts seniors found, every month, with no personal data.</a:t>
-            </a:r>
-            <a:endParaRPr lang="en-US" sz="1250" dirty="0"/>
-          </a:p>
-        </p:txBody>
-      </p:sp>
-      <p:pic>
-        <p:nvPicPr>
-          <p:cNvPr id="12" name="Image 0" descr="/Users/rosh/Personal/Hackathons/Optum - Inclusive Innovation for Bharat Hackathon/Project/Sahayak/docs/deck/img/21_health_first_senior_hi.png">    </p:cNvPr>
-          <p:cNvPicPr>
-            <a:picLocks noChangeAspect="1"/>
-          </p:cNvPicPr>
-          <p:nvPr/>
-        </p:nvPicPr>
-        <p:blipFill>
-          <a:blip r:embed="rId1"/>
-          <a:stretch>
-            <a:fillRect/>
-          </a:stretch>
-        </p:blipFill>
-        <p:spPr>
-          <a:xfrm>
-            <a:off x="8366760" y="1783080"/>
-            <a:ext cx="2514600" cy="4443984"/>
-          </a:xfrm>
-          <a:prstGeom prst="rect">
-            <a:avLst/>
-          </a:prstGeom>
-        </p:spPr>
-      </p:pic>
-      <p:sp>
-        <p:nvSpPr>
-          <p:cNvPr id="13" name="Text 10"/>
-          <p:cNvSpPr/>
-          <p:nvPr/>
-        </p:nvSpPr>
-        <p:spPr>
-          <a:xfrm>
-            <a:off x="548640" y="6355080"/>
-            <a:ext cx="11064240" cy="320040"/>
-          </a:xfrm>
-          <a:prstGeom prst="rect">
-            <a:avLst/>
-          </a:prstGeom>
-          <a:noFill/>
-          <a:ln/>
-        </p:spPr>
-        <p:txBody>
-          <a:bodyPr wrap="square" lIns="0" tIns="0" rIns="0" bIns="0" rtlCol="0" anchor="t"/>
-          <a:lstStyle/>
-          <a:p>
-            <a:pPr indent="0" marL="0">
-              <a:buNone/>
-            </a:pPr>
-            <a:r>
-              <a:rPr lang="en-US" sz="950" dirty="0">
-                <a:solidFill>
-                  <a:srgbClr val="6E8579"/>
-                </a:solidFill>
-                <a:latin typeface="Calibri" pitchFamily="34" charset="0"/>
-                <a:ea typeface="Calibri" pitchFamily="34" charset="-122"/>
-                <a:cs typeface="Calibri" pitchFamily="34" charset="-120"/>
-              </a:rPr>
-              <a:t>Sources: MoHFW, Feb 2026; Cabinet, Sep 2024; NHA–CSC MoU, 2021; Ministry of Labour</a:t>
-            </a:r>
-            <a:endParaRPr lang="en-US" sz="950" dirty="0"/>
+              <a:t>Real messages: 137 that people received, published by the Income Tax portal, PIB Fact Check, courts and fact-checkers, scored once: 67 of 97 scams caught, 11 of 34 genuine flagged (blocklist 17). Fixes then learned from half of them; on the other half, never read, scams caught went from 28 to 30 of 44 and genuine flagged from 6 to 6 of 20. Blind red team, 182 messages: 92 of 103 caught, 14 of 59 hard genuine flagged; other languages get "could not check", never a false green. Our own test split: 34 of 37 (95% Wilson CI 79%–97%). Not yet: messages from people's own phones, and real users.</a:t>
+            </a:r>
+            <a:endParaRPr lang="en-US" sz="1300" dirty="0"/>
           </a:p>
         </p:txBody>
       </p:sp>
@@ -12027,7 +12960,7 @@
                 <a:ea typeface="Arial" pitchFamily="34" charset="-122"/>
                 <a:cs typeface="Arial" pitchFamily="34" charset="-120"/>
               </a:rPr>
-              <a:t>IMPACT METRICS</a:t>
+              <a:t>HEALTH FIRST</a:t>
             </a:r>
             <a:endParaRPr lang="en-US" sz="1250" dirty="0"/>
           </a:p>
@@ -12066,7 +12999,7 @@
                 <a:ea typeface="Arial" pitchFamily="34" charset="-122"/>
                 <a:cs typeface="Arial" pitchFamily="34" charset="-120"/>
               </a:rPr>
-              <a:t>From "account opened" to "citizen safe"</a:t>
+              <a:t>₹5 lakh of health cover most seniors have not claimed</a:t>
             </a:r>
             <a:endParaRPr lang="en-US" sz="3000" dirty="0"/>
           </a:p>
@@ -12080,348 +13013,12 @@
         </p:nvSpPr>
         <p:spPr>
           <a:xfrm>
-            <a:off x="548640" y="1828800"/>
-            <a:ext cx="3520440" cy="2514600"/>
+            <a:off x="548640" y="1783080"/>
+            <a:ext cx="6949440" cy="1463040"/>
           </a:xfrm>
           <a:prstGeom prst="roundRect">
             <a:avLst>
-              <a:gd name="adj" fmla="val 3636"/>
-            </a:avLst>
-          </a:prstGeom>
-          <a:solidFill>
-            <a:srgbClr val="152017"/>
-          </a:solidFill>
-          <a:ln w="12700">
-            <a:solidFill>
-              <a:srgbClr val="2C4636"/>
-            </a:solidFill>
-            <a:prstDash val="solid"/>
-          </a:ln>
-          <a:effectLst>
-            <a:outerShdw sx="100000" sy="100000" kx="0" ky="0" algn="bl" rotWithShape="0" blurRad="127000" dist="38100" dir="5400000">
-              <a:srgbClr val="000000">
-                <a:alpha val="40000"/>
-              </a:srgbClr>
-            </a:outerShdw>
-          </a:effectLst>
-        </p:spPr>
-      </p:sp>
-      <p:sp>
-        <p:nvSpPr>
-          <p:cNvPr id="9" name="Text 7"/>
-          <p:cNvSpPr/>
-          <p:nvPr/>
-        </p:nvSpPr>
-        <p:spPr>
-          <a:xfrm>
-            <a:off x="850392" y="2084832"/>
-            <a:ext cx="2926080" cy="731520"/>
-          </a:xfrm>
-          <a:prstGeom prst="rect">
-            <a:avLst/>
-          </a:prstGeom>
-          <a:noFill/>
-          <a:ln/>
-        </p:spPr>
-        <p:txBody>
-          <a:bodyPr wrap="square" lIns="0" tIns="0" rIns="0" bIns="0" rtlCol="0" anchor="t"/>
-          <a:lstStyle/>
-          <a:p>
-            <a:pPr indent="0" marL="0">
-              <a:buNone/>
-            </a:pPr>
-            <a:r>
-              <a:rPr lang="en-US" sz="1700" b="1" dirty="0">
-                <a:solidFill>
-                  <a:srgbClr val="FF9E3D"/>
-                </a:solidFill>
-                <a:latin typeface="Arial" pitchFamily="34" charset="0"/>
-                <a:ea typeface="Arial" pitchFamily="34" charset="-122"/>
-                <a:cs typeface="Arial" pitchFamily="34" charset="-120"/>
-              </a:rPr>
-              <a:t>Rupees at risk</a:t>
-            </a:r>
-            <a:endParaRPr lang="en-US" sz="1700" dirty="0"/>
-          </a:p>
-        </p:txBody>
-      </p:sp>
-      <p:sp>
-        <p:nvSpPr>
-          <p:cNvPr id="10" name="Text 8"/>
-          <p:cNvSpPr/>
-          <p:nvPr/>
-        </p:nvSpPr>
-        <p:spPr>
-          <a:xfrm>
-            <a:off x="850392" y="2852928"/>
-            <a:ext cx="2971800" cy="1325880"/>
-          </a:xfrm>
-          <a:prstGeom prst="rect">
-            <a:avLst/>
-          </a:prstGeom>
-          <a:noFill/>
-          <a:ln/>
-        </p:spPr>
-        <p:txBody>
-          <a:bodyPr wrap="square" lIns="0" tIns="0" rIns="0" bIns="0" rtlCol="0" anchor="t"/>
-          <a:lstStyle/>
-          <a:p>
-            <a:pPr indent="0" marL="0">
-              <a:buNone/>
-            </a:pPr>
-            <a:r>
-              <a:rPr lang="en-US" sz="1250" dirty="0">
-                <a:solidFill>
-                  <a:srgbClr val="9DB0A4"/>
-                </a:solidFill>
-                <a:latin typeface="Calibri" pitchFamily="34" charset="0"/>
-                <a:ea typeface="Calibri" pitchFamily="34" charset="-122"/>
-                <a:cs typeface="Calibri" pitchFamily="34" charset="-120"/>
-              </a:rPr>
-              <a:t>The node adds up the money asked for in messages it flags, every month: never called "saved", always shown to the district without personal data.</a:t>
-            </a:r>
-            <a:endParaRPr lang="en-US" sz="1250" dirty="0"/>
-          </a:p>
-        </p:txBody>
-      </p:sp>
-      <p:sp>
-        <p:nvSpPr>
-          <p:cNvPr id="11" name="Shape 9"/>
-          <p:cNvSpPr/>
-          <p:nvPr/>
-        </p:nvSpPr>
-        <p:spPr>
-          <a:xfrm>
-            <a:off x="4315968" y="1828800"/>
-            <a:ext cx="3520440" cy="2514600"/>
-          </a:xfrm>
-          <a:prstGeom prst="roundRect">
-            <a:avLst>
-              <a:gd name="adj" fmla="val 3636"/>
-            </a:avLst>
-          </a:prstGeom>
-          <a:solidFill>
-            <a:srgbClr val="152017"/>
-          </a:solidFill>
-          <a:ln w="12700">
-            <a:solidFill>
-              <a:srgbClr val="2C4636"/>
-            </a:solidFill>
-            <a:prstDash val="solid"/>
-          </a:ln>
-          <a:effectLst>
-            <a:outerShdw sx="100000" sy="100000" kx="0" ky="0" algn="bl" rotWithShape="0" blurRad="127000" dist="38100" dir="5400000">
-              <a:srgbClr val="000000">
-                <a:alpha val="40000"/>
-              </a:srgbClr>
-            </a:outerShdw>
-          </a:effectLst>
-        </p:spPr>
-      </p:sp>
-      <p:sp>
-        <p:nvSpPr>
-          <p:cNvPr id="12" name="Text 10"/>
-          <p:cNvSpPr/>
-          <p:nvPr/>
-        </p:nvSpPr>
-        <p:spPr>
-          <a:xfrm>
-            <a:off x="4617720" y="2084832"/>
-            <a:ext cx="2926080" cy="731520"/>
-          </a:xfrm>
-          <a:prstGeom prst="rect">
-            <a:avLst/>
-          </a:prstGeom>
-          <a:noFill/>
-          <a:ln/>
-        </p:spPr>
-        <p:txBody>
-          <a:bodyPr wrap="square" lIns="0" tIns="0" rIns="0" bIns="0" rtlCol="0" anchor="t"/>
-          <a:lstStyle/>
-          <a:p>
-            <a:pPr indent="0" marL="0">
-              <a:buNone/>
-            </a:pPr>
-            <a:r>
-              <a:rPr lang="en-US" sz="1700" b="1" dirty="0">
-                <a:solidFill>
-                  <a:srgbClr val="27C08A"/>
-                </a:solidFill>
-                <a:latin typeface="Arial" pitchFamily="34" charset="0"/>
-                <a:ea typeface="Arial" pitchFamily="34" charset="-122"/>
-                <a:cs typeface="Arial" pitchFamily="34" charset="-120"/>
-              </a:rPr>
-              <a:t>People found, health first</a:t>
-            </a:r>
-            <a:endParaRPr lang="en-US" sz="1700" dirty="0"/>
-          </a:p>
-        </p:txBody>
-      </p:sp>
-      <p:sp>
-        <p:nvSpPr>
-          <p:cNvPr id="13" name="Text 11"/>
-          <p:cNvSpPr/>
-          <p:nvPr/>
-        </p:nvSpPr>
-        <p:spPr>
-          <a:xfrm>
-            <a:off x="4617720" y="2852928"/>
-            <a:ext cx="2971800" cy="1325880"/>
-          </a:xfrm>
-          <a:prstGeom prst="rect">
-            <a:avLst/>
-          </a:prstGeom>
-          <a:noFill/>
-          <a:ln/>
-        </p:spPr>
-        <p:txBody>
-          <a:bodyPr wrap="square" lIns="0" tIns="0" rIns="0" bIns="0" rtlCol="0" anchor="t"/>
-          <a:lstStyle/>
-          <a:p>
-            <a:pPr indent="0" marL="0">
-              <a:buNone/>
-            </a:pPr>
-            <a:r>
-              <a:rPr lang="en-US" sz="1250" dirty="0">
-                <a:solidFill>
-                  <a:srgbClr val="9DB0A4"/>
-                </a:solidFill>
-                <a:latin typeface="Calibri" pitchFamily="34" charset="0"/>
-                <a:ea typeface="Calibri" pitchFamily="34" charset="-122"/>
-                <a:cs typeface="Calibri" pitchFamily="34" charset="-120"/>
-              </a:rPr>
-              <a:t>People found eligible, by scheme, with seniors found for Ayushman Vay Vandana counted on their own; each slip lets the operator finish the form.</a:t>
-            </a:r>
-            <a:endParaRPr lang="en-US" sz="1250" dirty="0"/>
-          </a:p>
-        </p:txBody>
-      </p:sp>
-      <p:sp>
-        <p:nvSpPr>
-          <p:cNvPr id="14" name="Shape 12"/>
-          <p:cNvSpPr/>
-          <p:nvPr/>
-        </p:nvSpPr>
-        <p:spPr>
-          <a:xfrm>
-            <a:off x="8083296" y="1828800"/>
-            <a:ext cx="3520440" cy="2514600"/>
-          </a:xfrm>
-          <a:prstGeom prst="roundRect">
-            <a:avLst>
-              <a:gd name="adj" fmla="val 3636"/>
-            </a:avLst>
-          </a:prstGeom>
-          <a:solidFill>
-            <a:srgbClr val="152017"/>
-          </a:solidFill>
-          <a:ln w="12700">
-            <a:solidFill>
-              <a:srgbClr val="2C4636"/>
-            </a:solidFill>
-            <a:prstDash val="solid"/>
-          </a:ln>
-          <a:effectLst>
-            <a:outerShdw sx="100000" sy="100000" kx="0" ky="0" algn="bl" rotWithShape="0" blurRad="127000" dist="38100" dir="5400000">
-              <a:srgbClr val="000000">
-                <a:alpha val="40000"/>
-              </a:srgbClr>
-            </a:outerShdw>
-          </a:effectLst>
-        </p:spPr>
-      </p:sp>
-      <p:sp>
-        <p:nvSpPr>
-          <p:cNvPr id="15" name="Text 13"/>
-          <p:cNvSpPr/>
-          <p:nvPr/>
-        </p:nvSpPr>
-        <p:spPr>
-          <a:xfrm>
-            <a:off x="8385048" y="2084832"/>
-            <a:ext cx="2926080" cy="731520"/>
-          </a:xfrm>
-          <a:prstGeom prst="rect">
-            <a:avLst/>
-          </a:prstGeom>
-          <a:noFill/>
-          <a:ln/>
-        </p:spPr>
-        <p:txBody>
-          <a:bodyPr wrap="square" lIns="0" tIns="0" rIns="0" bIns="0" rtlCol="0" anchor="t"/>
-          <a:lstStyle/>
-          <a:p>
-            <a:pPr indent="0" marL="0">
-              <a:buNone/>
-            </a:pPr>
-            <a:r>
-              <a:rPr lang="en-US" sz="1700" b="1" dirty="0">
-                <a:solidFill>
-                  <a:srgbClr val="4FE3B0"/>
-                </a:solidFill>
-                <a:latin typeface="Arial" pitchFamily="34" charset="0"/>
-                <a:ea typeface="Arial" pitchFamily="34" charset="-122"/>
-                <a:cs typeface="Arial" pitchFamily="34" charset="-120"/>
-              </a:rPr>
-              <a:t>Reported in time</a:t>
-            </a:r>
-            <a:endParaRPr lang="en-US" sz="1700" dirty="0"/>
-          </a:p>
-        </p:txBody>
-      </p:sp>
-      <p:sp>
-        <p:nvSpPr>
-          <p:cNvPr id="16" name="Text 14"/>
-          <p:cNvSpPr/>
-          <p:nvPr/>
-        </p:nvSpPr>
-        <p:spPr>
-          <a:xfrm>
-            <a:off x="8385048" y="2852928"/>
-            <a:ext cx="2971800" cy="1325880"/>
-          </a:xfrm>
-          <a:prstGeom prst="rect">
-            <a:avLst/>
-          </a:prstGeom>
-          <a:noFill/>
-          <a:ln/>
-        </p:spPr>
-        <p:txBody>
-          <a:bodyPr wrap="square" lIns="0" tIns="0" rIns="0" bIns="0" rtlCol="0" anchor="t"/>
-          <a:lstStyle/>
-          <a:p>
-            <a:pPr indent="0" marL="0">
-              <a:buNone/>
-            </a:pPr>
-            <a:r>
-              <a:rPr lang="en-US" sz="1250" dirty="0">
-                <a:solidFill>
-                  <a:srgbClr val="9DB0A4"/>
-                </a:solidFill>
-                <a:latin typeface="Calibri" pitchFamily="34" charset="0"/>
-                <a:ea typeface="Calibri" pitchFamily="34" charset="-122"/>
-                <a:cs typeface="Calibri" pitchFamily="34" charset="-120"/>
-              </a:rPr>
-              <a:t>RBI compensation from 1 Jan 2027 needs a report within 5 days. Every scam verdict ends in a ready 1930 complaint, on the spot.</a:t>
-            </a:r>
-            <a:endParaRPr lang="en-US" sz="1250" dirty="0"/>
-          </a:p>
-        </p:txBody>
-      </p:sp>
-      <p:sp>
-        <p:nvSpPr>
-          <p:cNvPr id="17" name="Shape 15"/>
-          <p:cNvSpPr/>
-          <p:nvPr/>
-        </p:nvSpPr>
-        <p:spPr>
-          <a:xfrm>
-            <a:off x="548640" y="4572000"/>
-            <a:ext cx="11064240" cy="1600200"/>
-          </a:xfrm>
-          <a:prstGeom prst="roundRect">
-            <a:avLst>
-              <a:gd name="adj" fmla="val 5714"/>
+              <a:gd name="adj" fmla="val 6250"/>
             </a:avLst>
           </a:prstGeom>
           <a:solidFill>
@@ -12444,92 +13041,94 @@
       </p:sp>
       <p:sp>
         <p:nvSpPr>
-          <p:cNvPr id="18" name="Text 16"/>
-          <p:cNvSpPr/>
-          <p:nvPr/>
-        </p:nvSpPr>
-        <p:spPr>
-          <a:xfrm>
-            <a:off x="822960" y="4681728"/>
-            <a:ext cx="10515600" cy="365760"/>
-          </a:xfrm>
-          <a:prstGeom prst="rect">
-            <a:avLst/>
-          </a:prstGeom>
-          <a:noFill/>
-          <a:ln/>
-        </p:spPr>
-        <p:txBody>
-          <a:bodyPr wrap="square" lIns="0" tIns="0" rIns="0" bIns="0" rtlCol="0" anchor="ctr"/>
+          <p:cNvPr id="9" name="Text 7"/>
+          <p:cNvSpPr/>
+          <p:nvPr/>
+        </p:nvSpPr>
+        <p:spPr>
+          <a:xfrm>
+            <a:off x="822960" y="1874520"/>
+            <a:ext cx="6492240" cy="685800"/>
+          </a:xfrm>
+          <a:prstGeom prst="rect">
+            <a:avLst/>
+          </a:prstGeom>
+          <a:noFill/>
+          <a:ln/>
+        </p:spPr>
+        <p:txBody>
+          <a:bodyPr wrap="square" lIns="0" tIns="0" rIns="0" bIns="0" rtlCol="0" anchor="ctr">
+            <a:normAutofit/>
+          </a:bodyPr>
           <a:lstStyle/>
           <a:p>
             <a:pPr indent="0" marL="0">
               <a:buNone/>
             </a:pPr>
             <a:r>
-              <a:rPr lang="en-US" sz="1450" b="1" dirty="0">
-                <a:solidFill>
-                  <a:srgbClr val="EEF3EE"/>
+              <a:rPr lang="en-US" sz="3000" b="1" dirty="0">
+                <a:solidFill>
+                  <a:srgbClr val="FF9E3D"/>
                 </a:solidFill>
                 <a:latin typeface="Arial" pitchFamily="34" charset="0"/>
                 <a:ea typeface="Arial" pitchFamily="34" charset="-122"/>
                 <a:cs typeface="Arial" pitchFamily="34" charset="-120"/>
               </a:rPr>
-              <a:t>Pilot target, not a result</a:t>
-            </a:r>
-            <a:endParaRPr lang="en-US" sz="1450" dirty="0"/>
-          </a:p>
-        </p:txBody>
-      </p:sp>
-      <p:sp>
-        <p:nvSpPr>
-          <p:cNvPr id="19" name="Text 17"/>
-          <p:cNvSpPr/>
-          <p:nvPr/>
-        </p:nvSpPr>
-        <p:spPr>
-          <a:xfrm>
-            <a:off x="822960" y="5074920"/>
-            <a:ext cx="10515600" cy="1005840"/>
-          </a:xfrm>
-          <a:prstGeom prst="rect">
-            <a:avLst/>
-          </a:prstGeom>
-          <a:noFill/>
-          <a:ln/>
-        </p:spPr>
-        <p:txBody>
-          <a:bodyPr wrap="square" lIns="0" tIns="0" rIns="0" bIns="0" rtlCol="0" anchor="t"/>
+              <a:t>1.1 crore of ~6 crore</a:t>
+            </a:r>
+            <a:endParaRPr lang="en-US" sz="3000" dirty="0"/>
+          </a:p>
+        </p:txBody>
+      </p:sp>
+      <p:sp>
+        <p:nvSpPr>
+          <p:cNvPr id="10" name="Text 8"/>
+          <p:cNvSpPr/>
+          <p:nvPr/>
+        </p:nvSpPr>
+        <p:spPr>
+          <a:xfrm>
+            <a:off x="822960" y="2560320"/>
+            <a:ext cx="6492240" cy="548640"/>
+          </a:xfrm>
+          <a:prstGeom prst="rect">
+            <a:avLst/>
+          </a:prstGeom>
+          <a:noFill/>
+          <a:ln/>
+        </p:spPr>
+        <p:txBody>
+          <a:bodyPr wrap="square" lIns="0" tIns="0" rIns="0" bIns="0" rtlCol="0" anchor="ctr"/>
           <a:lstStyle/>
           <a:p>
             <a:pPr indent="0" marL="0">
               <a:buNone/>
             </a:pPr>
             <a:r>
-              <a:rPr lang="en-US" sz="1250" dirty="0">
-                <a:solidFill>
-                  <a:srgbClr val="9DB0A4"/>
+              <a:rPr lang="en-US" sz="1350" dirty="0">
+                <a:solidFill>
+                  <a:srgbClr val="EEF3EE"/>
                 </a:solidFill>
                 <a:latin typeface="Calibri" pitchFamily="34" charset="0"/>
                 <a:ea typeface="Calibri" pitchFamily="34" charset="-122"/>
                 <a:cs typeface="Calibri" pitchFamily="34" charset="-120"/>
               </a:rPr>
-              <a:t>One district: about 20 villages and 50 CSC and bank-agent points, six months. Scams flagged and reported, people found eligible and cards made, all from the node's counters. A one-morning field test at a CSC (protocol and consent ready) comes first.</a:t>
-            </a:r>
-            <a:endParaRPr lang="en-US" sz="1250" dirty="0"/>
-          </a:p>
-        </p:txBody>
-      </p:sp>
-      <p:sp>
-        <p:nvSpPr>
-          <p:cNvPr id="20" name="Text 18"/>
-          <p:cNvSpPr/>
-          <p:nvPr/>
-        </p:nvSpPr>
-        <p:spPr>
-          <a:xfrm>
-            <a:off x="548640" y="6355080"/>
-            <a:ext cx="11064240" cy="320040"/>
+              <a:t>seniors aged 70+ had their Ayushman Vay Vandana card by Feb 2026</a:t>
+            </a:r>
+            <a:endParaRPr lang="en-US" sz="1350" dirty="0"/>
+          </a:p>
+        </p:txBody>
+      </p:sp>
+      <p:sp>
+        <p:nvSpPr>
+          <p:cNvPr id="11" name="Text 9"/>
+          <p:cNvSpPr/>
+          <p:nvPr/>
+        </p:nvSpPr>
+        <p:spPr>
+          <a:xfrm>
+            <a:off x="640080" y="3474720"/>
+            <a:ext cx="6766560" cy="2651760"/>
           </a:xfrm>
           <a:prstGeom prst="rect">
             <a:avLst/>
@@ -12541,19 +13140,149 @@
           <a:bodyPr wrap="square" lIns="0" tIns="0" rIns="0" bIns="0" rtlCol="0" anchor="t"/>
           <a:lstStyle/>
           <a:p>
-            <a:pPr indent="0" marL="0">
-              <a:buNone/>
-            </a:pPr>
-            <a:r>
-              <a:rPr lang="en-US" sz="950" dirty="0">
-                <a:solidFill>
-                  <a:srgbClr val="6E8579"/>
+            <a:pPr marL="342900" indent="-342900">
+              <a:spcAft>
+                <a:spcPts val="600"/>
+              </a:spcAft>
+              <a:buSzPct val="100000"/>
+              <a:buChar char="•"/>
+            </a:pPr>
+            <a:r>
+              <a:rPr lang="en-US" sz="1250" dirty="0">
+                <a:solidFill>
+                  <a:srgbClr val="9DB0A4"/>
                 </a:solidFill>
                 <a:latin typeface="Calibri" pitchFamily="34" charset="0"/>
                 <a:ea typeface="Calibri" pitchFamily="34" charset="-122"/>
                 <a:cs typeface="Calibri" pitchFamily="34" charset="-120"/>
               </a:rPr>
-              <a:t>Sources: RBI Directions, 24 Jun 2026</a:t>
+              <a:t>Every benefits result leads with Ayushman Bharat; for anyone 70 or older it is the Vay Vandana card: up to ₹5 lakh a year of hospital care whatever their income (shared with a spouse who is also 70 or more; not for outpatient visits).</a:t>
+            </a:r>
+            <a:endParaRPr lang="en-US" sz="1250" dirty="0"/>
+          </a:p>
+          <a:p>
+            <a:pPr marL="342900" indent="-342900">
+              <a:spcAft>
+                <a:spcPts val="600"/>
+              </a:spcAft>
+              <a:buSzPct val="100000"/>
+              <a:buChar char="•"/>
+            </a:pPr>
+            <a:r>
+              <a:rPr lang="en-US" sz="1250" dirty="0">
+                <a:solidFill>
+                  <a:srgbClr val="9DB0A4"/>
+                </a:solidFill>
+                <a:latin typeface="Calibri" pitchFamily="34" charset="0"/>
+                <a:ea typeface="Calibri" pitchFamily="34" charset="-122"/>
+                <a:cs typeface="Calibri" pitchFamily="34" charset="-120"/>
+              </a:rPr>
+              <a:t>One question, their age, finds them; the slip tells the operator what to make.</a:t>
+            </a:r>
+            <a:endParaRPr lang="en-US" sz="1250" dirty="0"/>
+          </a:p>
+          <a:p>
+            <a:pPr marL="342900" indent="-342900">
+              <a:spcAft>
+                <a:spcPts val="600"/>
+              </a:spcAft>
+              <a:buSzPct val="100000"/>
+              <a:buChar char="•"/>
+            </a:pPr>
+            <a:r>
+              <a:rPr lang="en-US" sz="1250" dirty="0">
+                <a:solidFill>
+                  <a:srgbClr val="9DB0A4"/>
+                </a:solidFill>
+                <a:latin typeface="Calibri" pitchFamily="34" charset="0"/>
+                <a:ea typeface="Calibri" pitchFamily="34" charset="-122"/>
+                <a:cs typeface="Calibri" pitchFamily="34" charset="-120"/>
+              </a:rPr>
+              <a:t>The CSC makes the card at the counter, and is paid ₹20 per first-time card; the citizen pays nothing.</a:t>
+            </a:r>
+            <a:endParaRPr lang="en-US" sz="1250" dirty="0"/>
+          </a:p>
+          <a:p>
+            <a:pPr marL="342900" indent="-342900">
+              <a:spcAft>
+                <a:spcPts val="600"/>
+              </a:spcAft>
+              <a:buSzPct val="100000"/>
+              <a:buChar char="•"/>
+            </a:pPr>
+            <a:r>
+              <a:rPr lang="en-US" sz="1250" dirty="0">
+                <a:solidFill>
+                  <a:srgbClr val="9DB0A4"/>
+                </a:solidFill>
+                <a:latin typeface="Calibri" pitchFamily="34" charset="0"/>
+                <a:ea typeface="Calibri" pitchFamily="34" charset="-122"/>
+                <a:cs typeface="Calibri" pitchFamily="34" charset="-120"/>
+              </a:rPr>
+              <a:t>The scam check flags "pay to get your Ayushman card" messages; the node counts seniors found, every month, with no personal data.</a:t>
+            </a:r>
+            <a:endParaRPr lang="en-US" sz="1250" dirty="0"/>
+          </a:p>
+        </p:txBody>
+      </p:sp>
+      <p:pic>
+        <p:nvPicPr>
+          <p:cNvPr id="12" name="Image 0" descr="/Users/rosh/Personal/Hackathons/Optum - Inclusive Innovation for Bharat Hackathon/Project/Sahayak/docs/deck/img/21_health_first_senior_hi.png">    </p:cNvPr>
+          <p:cNvPicPr>
+            <a:picLocks noChangeAspect="1"/>
+          </p:cNvPicPr>
+          <p:nvPr/>
+        </p:nvPicPr>
+        <p:blipFill>
+          <a:blip r:embed="rId1"/>
+          <a:stretch>
+            <a:fillRect/>
+          </a:stretch>
+        </p:blipFill>
+        <p:spPr>
+          <a:xfrm>
+            <a:off x="8366760" y="1783080"/>
+            <a:ext cx="2514600" cy="4443984"/>
+          </a:xfrm>
+          <a:prstGeom prst="rect">
+            <a:avLst/>
+          </a:prstGeom>
+        </p:spPr>
+      </p:pic>
+      <p:sp>
+        <p:nvSpPr>
+          <p:cNvPr id="13" name="Text 10"/>
+          <p:cNvSpPr/>
+          <p:nvPr/>
+        </p:nvSpPr>
+        <p:spPr>
+          <a:xfrm>
+            <a:off x="548640" y="6355080"/>
+            <a:ext cx="11064240" cy="320040"/>
+          </a:xfrm>
+          <a:prstGeom prst="rect">
+            <a:avLst/>
+          </a:prstGeom>
+          <a:noFill/>
+          <a:ln/>
+        </p:spPr>
+        <p:txBody>
+          <a:bodyPr wrap="square" lIns="0" tIns="0" rIns="0" bIns="0" rtlCol="0" anchor="t"/>
+          <a:lstStyle/>
+          <a:p>
+            <a:pPr indent="0" marL="0">
+              <a:buNone/>
+            </a:pPr>
+            <a:r>
+              <a:rPr lang="en-US" sz="950" dirty="0">
+                <a:solidFill>
+                  <a:srgbClr val="6E8579"/>
+                </a:solidFill>
+                <a:latin typeface="Calibri" pitchFamily="34" charset="0"/>
+                <a:ea typeface="Calibri" pitchFamily="34" charset="-122"/>
+                <a:cs typeface="Calibri" pitchFamily="34" charset="-120"/>
+              </a:rPr>
+              <a:t>Sources: MoHFW, Feb 2026; Cabinet, Sep 2024; NHA–CSC MoU, 2021; Ministry of Labour</a:t>
             </a:r>
             <a:endParaRPr lang="en-US" sz="950" dirty="0"/>
           </a:p>

--- a/docs/deck/Sahayak_Pitch_Deck_v3.pptx
+++ b/docs/deck/Sahayak_Pitch_Deck_v3.pptx
@@ -9017,7 +9017,7 @@
                 <a:ea typeface="Calibri" pitchFamily="34" charset="-122"/>
                 <a:cs typeface="Calibri" pitchFamily="34" charset="-120"/>
               </a:rPr>
-              <a:t>59 named signals in a signed content pack, a pattern matcher and a small classifier decide. Vetted templates explain; an optional local model may add a line, only through a safety gate.</a:t>
+              <a:t>64 named signals in a signed content pack, a pattern matcher and a small classifier decide. Vetted templates explain; an optional local model may add a line, only through a safety gate.</a:t>
             </a:r>
             <a:endParaRPr lang="en-US" sz="1150" dirty="0"/>
           </a:p>
@@ -9729,7 +9729,7 @@
                 <a:ea typeface="Calibri" pitchFamily="34" charset="-122"/>
                 <a:cs typeface="Calibri" pitchFamily="34" charset="-120"/>
               </a:rPr>
-              <a:t>The phone runs the same rules from the same signed packs: identical results to the node on 1,490 messages and 7,983 interviews.</a:t>
+              <a:t>The phone runs the same rules from the same signed packs: identical results to the node on 1,841 messages and 7,983 interviews.</a:t>
             </a:r>
             <a:endParaRPr lang="en-US" sz="1150" dirty="0"/>
           </a:p>
@@ -10143,7 +10143,7 @@
                 <a:ea typeface="Calibri" pitchFamily="34" charset="-122"/>
                 <a:cs typeface="Calibri" pitchFamily="34" charset="-120"/>
               </a:rPr>
-              <a:t>59 named signals, a pattern matcher and a small classifier decide, in about 2 ms on a laptop CPU, and name their reasons. A language model is optional: it may reword the explanation, through a safety gate, and never decides.</a:t>
+              <a:t>64 named signals, a pattern matcher and a small classifier decide, in about 2 ms on a laptop CPU, and name their reasons. A language model is optional: it may reword the explanation, through a safety gate, and never decides.</a:t>
             </a:r>
             <a:endParaRPr lang="en-US" sz="1250" dirty="0"/>
           </a:p>
@@ -12809,7 +12809,7 @@
                 <a:ea typeface="Calibri" pitchFamily="34" charset="-122"/>
                 <a:cs typeface="Calibri" pitchFamily="34" charset="-120"/>
               </a:rPr>
-              <a:t>Real messages: 137 that people received, published by the Income Tax portal, PIB Fact Check, courts and fact-checkers, scored once: 67 of 97 scams caught, 11 of 34 genuine flagged (blocklist 17). Fixes then learned from half of them; on the other half, never read, scams caught went from 28 to 30 of 44 and genuine flagged from 6 to 6 of 20. Blind red team, 182 messages: 92 of 103 caught, 14 of 59 hard genuine flagged; other languages get "could not check", never a false green. Our own test split: 34 of 37 (95% Wilson CI 79%–97%). Not yet: messages from people's own phones, and real users.</a:t>
+              <a:t>Real messages: 137 that people received, published by the Income Tax portal, PIB Fact Check, courts and fact-checkers, scored once: 67 of 97 scams caught, 11 of 34 genuine flagged (blocklist 17). Fixes then learned from half of them; on the other half, never read, scams caught went from 28 to 31 of 44 and genuine flagged from 6 to 6 of 20. Blind red team, 182 messages: 92 of 103 caught, 14 of 59 hard genuine flagged; other languages get "could not check", never a false green. Our own test split: 34 of 37 (95% Wilson CI 79%–97%). Not yet: messages from people's own phones, and real users.</a:t>
             </a:r>
             <a:endParaRPr lang="en-US" sz="1300" dirty="0"/>
           </a:p>

--- a/docs/deck/Sahayak_Pitch_Deck_v3.pptx
+++ b/docs/deck/Sahayak_Pitch_Deck_v3.pptx
@@ -2103,7 +2103,7 @@
     <p:bg>
       <p:bgPr>
         <a:solidFill>
-          <a:srgbClr val="0B0F14"/>
+          <a:srgbClr val="101010"/>
         </a:solidFill>
       </p:bgPr>
     </p:bg>
@@ -2136,7 +2136,7 @@
             <a:avLst/>
           </a:prstGeom>
           <a:solidFill>
-            <a:srgbClr val="FF9E3D"/>
+            <a:srgbClr val="FF9933"/>
           </a:solidFill>
           <a:ln/>
         </p:spPr>
@@ -2156,7 +2156,7 @@
             <a:avLst/>
           </a:prstGeom>
           <a:solidFill>
-            <a:srgbClr val="EEF3EE"/>
+            <a:srgbClr val="FFFFFF"/>
           </a:solidFill>
           <a:ln/>
         </p:spPr>
@@ -2176,7 +2176,7 @@
             <a:avLst/>
           </a:prstGeom>
           <a:solidFill>
-            <a:srgbClr val="27C08A"/>
+            <a:srgbClr val="138808"/>
           </a:solidFill>
           <a:ln/>
         </p:spPr>
@@ -2208,7 +2208,7 @@
             <a:r>
               <a:rPr lang="en-US" sz="6200" b="1" spc="100" kern="0" dirty="0">
                 <a:solidFill>
-                  <a:srgbClr val="EEF3EE"/>
+                  <a:srgbClr val="F5F5F7"/>
                 </a:solidFill>
                 <a:latin typeface="Arial" pitchFamily="34" charset="0"/>
                 <a:ea typeface="Arial" pitchFamily="34" charset="-122"/>
@@ -2247,7 +2247,7 @@
             <a:r>
               <a:rPr lang="en-US" sz="2200" b="1" dirty="0">
                 <a:solidFill>
-                  <a:srgbClr val="27C08A"/>
+                  <a:srgbClr val="6FA8FF"/>
                 </a:solidFill>
                 <a:latin typeface="Arial" pitchFamily="34" charset="0"/>
                 <a:ea typeface="Arial" pitchFamily="34" charset="-122"/>
@@ -2286,7 +2286,7 @@
             <a:r>
               <a:rPr lang="en-US" sz="1500" dirty="0">
                 <a:solidFill>
-                  <a:srgbClr val="9DB0A4"/>
+                  <a:srgbClr val="B4B4B8"/>
                 </a:solidFill>
                 <a:latin typeface="Calibri" pitchFamily="34" charset="0"/>
                 <a:ea typeface="Calibri" pitchFamily="34" charset="-122"/>
@@ -2325,7 +2325,7 @@
             <a:r>
               <a:rPr lang="en-US" sz="1300" b="1" dirty="0">
                 <a:solidFill>
-                  <a:srgbClr val="EEF3EE"/>
+                  <a:srgbClr val="F5F5F7"/>
                 </a:solidFill>
                 <a:latin typeface="Calibri" pitchFamily="34" charset="0"/>
                 <a:ea typeface="Calibri" pitchFamily="34" charset="-122"/>
@@ -2339,7 +2339,7 @@
             <a:r>
               <a:rPr lang="en-US" sz="1300" dirty="0">
                 <a:solidFill>
-                  <a:srgbClr val="9DB0A4"/>
+                  <a:srgbClr val="B4B4B8"/>
                 </a:solidFill>
                 <a:latin typeface="Calibri" pitchFamily="34" charset="0"/>
                 <a:ea typeface="Calibri" pitchFamily="34" charset="-122"/>
@@ -2378,7 +2378,7 @@
             <a:r>
               <a:rPr lang="en-US" sz="1300" dirty="0">
                 <a:solidFill>
-                  <a:srgbClr val="6E8579"/>
+                  <a:srgbClr val="7E7E84"/>
                 </a:solidFill>
                 <a:latin typeface="Calibri" pitchFamily="34" charset="0"/>
                 <a:ea typeface="Calibri" pitchFamily="34" charset="-122"/>
@@ -2404,7 +2404,7 @@
     <p:bg>
       <p:bgPr>
         <a:solidFill>
-          <a:srgbClr val="0B0F14"/>
+          <a:srgbClr val="101010"/>
         </a:solidFill>
       </p:bgPr>
     </p:bg>
@@ -2437,7 +2437,7 @@
             <a:avLst/>
           </a:prstGeom>
           <a:solidFill>
-            <a:srgbClr val="FF9E3D"/>
+            <a:srgbClr val="FF9933"/>
           </a:solidFill>
           <a:ln/>
         </p:spPr>
@@ -2457,7 +2457,7 @@
             <a:avLst/>
           </a:prstGeom>
           <a:solidFill>
-            <a:srgbClr val="EEF3EE"/>
+            <a:srgbClr val="FFFFFF"/>
           </a:solidFill>
           <a:ln/>
         </p:spPr>
@@ -2477,7 +2477,7 @@
             <a:avLst/>
           </a:prstGeom>
           <a:solidFill>
-            <a:srgbClr val="27C08A"/>
+            <a:srgbClr val="138808"/>
           </a:solidFill>
           <a:ln/>
         </p:spPr>
@@ -2497,7 +2497,7 @@
             <a:avLst/>
           </a:prstGeom>
           <a:solidFill>
-            <a:srgbClr val="27C08A"/>
+            <a:srgbClr val="6FA8FF"/>
           </a:solidFill>
           <a:ln/>
         </p:spPr>
@@ -2529,7 +2529,7 @@
             <a:r>
               <a:rPr lang="en-US" sz="1250" b="1" spc="200" kern="0" dirty="0">
                 <a:solidFill>
-                  <a:srgbClr val="27C08A"/>
+                  <a:srgbClr val="6FA8FF"/>
                 </a:solidFill>
                 <a:latin typeface="Arial" pitchFamily="34" charset="0"/>
                 <a:ea typeface="Arial" pitchFamily="34" charset="-122"/>
@@ -2568,7 +2568,7 @@
             <a:r>
               <a:rPr lang="en-US" sz="3000" b="1" dirty="0">
                 <a:solidFill>
-                  <a:srgbClr val="EEF3EE"/>
+                  <a:srgbClr val="F5F5F7"/>
                 </a:solidFill>
                 <a:latin typeface="Arial" pitchFamily="34" charset="0"/>
                 <a:ea typeface="Arial" pitchFamily="34" charset="-122"/>
@@ -2597,11 +2597,11 @@
             </a:avLst>
           </a:prstGeom>
           <a:solidFill>
-            <a:srgbClr val="152017"/>
+            <a:srgbClr val="1C1C20"/>
           </a:solidFill>
           <a:ln w="12700">
             <a:solidFill>
-              <a:srgbClr val="2C4636"/>
+              <a:srgbClr val="34343A"/>
             </a:solidFill>
             <a:prstDash val="solid"/>
           </a:ln>
@@ -2641,7 +2641,7 @@
             <a:r>
               <a:rPr lang="en-US" sz="1700" b="1" dirty="0">
                 <a:solidFill>
-                  <a:srgbClr val="FF9E3D"/>
+                  <a:srgbClr val="E2C28A"/>
                 </a:solidFill>
                 <a:latin typeface="Arial" pitchFamily="34" charset="0"/>
                 <a:ea typeface="Arial" pitchFamily="34" charset="-122"/>
@@ -2680,7 +2680,7 @@
             <a:r>
               <a:rPr lang="en-US" sz="1250" dirty="0">
                 <a:solidFill>
-                  <a:srgbClr val="9DB0A4"/>
+                  <a:srgbClr val="B4B4B8"/>
                 </a:solidFill>
                 <a:latin typeface="Calibri" pitchFamily="34" charset="0"/>
                 <a:ea typeface="Calibri" pitchFamily="34" charset="-122"/>
@@ -2709,11 +2709,11 @@
             </a:avLst>
           </a:prstGeom>
           <a:solidFill>
-            <a:srgbClr val="152017"/>
+            <a:srgbClr val="1C1C20"/>
           </a:solidFill>
           <a:ln w="12700">
             <a:solidFill>
-              <a:srgbClr val="2C4636"/>
+              <a:srgbClr val="34343A"/>
             </a:solidFill>
             <a:prstDash val="solid"/>
           </a:ln>
@@ -2753,7 +2753,7 @@
             <a:r>
               <a:rPr lang="en-US" sz="1700" b="1" dirty="0">
                 <a:solidFill>
-                  <a:srgbClr val="27C08A"/>
+                  <a:srgbClr val="6FA8FF"/>
                 </a:solidFill>
                 <a:latin typeface="Arial" pitchFamily="34" charset="0"/>
                 <a:ea typeface="Arial" pitchFamily="34" charset="-122"/>
@@ -2792,7 +2792,7 @@
             <a:r>
               <a:rPr lang="en-US" sz="1250" dirty="0">
                 <a:solidFill>
-                  <a:srgbClr val="9DB0A4"/>
+                  <a:srgbClr val="B4B4B8"/>
                 </a:solidFill>
                 <a:latin typeface="Calibri" pitchFamily="34" charset="0"/>
                 <a:ea typeface="Calibri" pitchFamily="34" charset="-122"/>
@@ -2821,11 +2821,11 @@
             </a:avLst>
           </a:prstGeom>
           <a:solidFill>
-            <a:srgbClr val="152017"/>
+            <a:srgbClr val="1C1C20"/>
           </a:solidFill>
           <a:ln w="12700">
             <a:solidFill>
-              <a:srgbClr val="2C4636"/>
+              <a:srgbClr val="34343A"/>
             </a:solidFill>
             <a:prstDash val="solid"/>
           </a:ln>
@@ -2865,7 +2865,7 @@
             <a:r>
               <a:rPr lang="en-US" sz="1700" b="1" dirty="0">
                 <a:solidFill>
-                  <a:srgbClr val="4FE3B0"/>
+                  <a:srgbClr val="4FD68A"/>
                 </a:solidFill>
                 <a:latin typeface="Arial" pitchFamily="34" charset="0"/>
                 <a:ea typeface="Arial" pitchFamily="34" charset="-122"/>
@@ -2904,7 +2904,7 @@
             <a:r>
               <a:rPr lang="en-US" sz="1250" dirty="0">
                 <a:solidFill>
-                  <a:srgbClr val="9DB0A4"/>
+                  <a:srgbClr val="B4B4B8"/>
                 </a:solidFill>
                 <a:latin typeface="Calibri" pitchFamily="34" charset="0"/>
                 <a:ea typeface="Calibri" pitchFamily="34" charset="-122"/>
@@ -2933,11 +2933,11 @@
             </a:avLst>
           </a:prstGeom>
           <a:solidFill>
-            <a:srgbClr val="1B2A20"/>
+            <a:srgbClr val="26262B"/>
           </a:solidFill>
           <a:ln w="12700">
             <a:solidFill>
-              <a:srgbClr val="2C4636"/>
+              <a:srgbClr val="34343A"/>
             </a:solidFill>
             <a:prstDash val="solid"/>
           </a:ln>
@@ -2977,7 +2977,7 @@
             <a:r>
               <a:rPr lang="en-US" sz="1450" b="1" dirty="0">
                 <a:solidFill>
-                  <a:srgbClr val="EEF3EE"/>
+                  <a:srgbClr val="F5F5F7"/>
                 </a:solidFill>
                 <a:latin typeface="Arial" pitchFamily="34" charset="0"/>
                 <a:ea typeface="Arial" pitchFamily="34" charset="-122"/>
@@ -3016,7 +3016,7 @@
             <a:r>
               <a:rPr lang="en-US" sz="1250" dirty="0">
                 <a:solidFill>
-                  <a:srgbClr val="9DB0A4"/>
+                  <a:srgbClr val="B4B4B8"/>
                 </a:solidFill>
                 <a:latin typeface="Calibri" pitchFamily="34" charset="0"/>
                 <a:ea typeface="Calibri" pitchFamily="34" charset="-122"/>
@@ -3055,7 +3055,7 @@
             <a:r>
               <a:rPr lang="en-US" sz="950" dirty="0">
                 <a:solidFill>
-                  <a:srgbClr val="6E8579"/>
+                  <a:srgbClr val="7E7E84"/>
                 </a:solidFill>
                 <a:latin typeface="Calibri" pitchFamily="34" charset="0"/>
                 <a:ea typeface="Calibri" pitchFamily="34" charset="-122"/>
@@ -3081,7 +3081,7 @@
     <p:bg>
       <p:bgPr>
         <a:solidFill>
-          <a:srgbClr val="0B0F14"/>
+          <a:srgbClr val="101010"/>
         </a:solidFill>
       </p:bgPr>
     </p:bg>
@@ -3114,7 +3114,7 @@
             <a:avLst/>
           </a:prstGeom>
           <a:solidFill>
-            <a:srgbClr val="FF9E3D"/>
+            <a:srgbClr val="FF9933"/>
           </a:solidFill>
           <a:ln/>
         </p:spPr>
@@ -3134,7 +3134,7 @@
             <a:avLst/>
           </a:prstGeom>
           <a:solidFill>
-            <a:srgbClr val="EEF3EE"/>
+            <a:srgbClr val="FFFFFF"/>
           </a:solidFill>
           <a:ln/>
         </p:spPr>
@@ -3154,7 +3154,7 @@
             <a:avLst/>
           </a:prstGeom>
           <a:solidFill>
-            <a:srgbClr val="27C08A"/>
+            <a:srgbClr val="138808"/>
           </a:solidFill>
           <a:ln/>
         </p:spPr>
@@ -3174,7 +3174,7 @@
             <a:avLst/>
           </a:prstGeom>
           <a:solidFill>
-            <a:srgbClr val="27C08A"/>
+            <a:srgbClr val="6FA8FF"/>
           </a:solidFill>
           <a:ln/>
         </p:spPr>
@@ -3206,7 +3206,7 @@
             <a:r>
               <a:rPr lang="en-US" sz="1250" b="1" spc="200" kern="0" dirty="0">
                 <a:solidFill>
-                  <a:srgbClr val="27C08A"/>
+                  <a:srgbClr val="6FA8FF"/>
                 </a:solidFill>
                 <a:latin typeface="Arial" pitchFamily="34" charset="0"/>
                 <a:ea typeface="Arial" pitchFamily="34" charset="-122"/>
@@ -3245,7 +3245,7 @@
             <a:r>
               <a:rPr lang="en-US" sz="3000" b="1" dirty="0">
                 <a:solidFill>
-                  <a:srgbClr val="EEF3EE"/>
+                  <a:srgbClr val="F5F5F7"/>
                 </a:solidFill>
                 <a:latin typeface="Arial" pitchFamily="34" charset="0"/>
                 <a:ea typeface="Arial" pitchFamily="34" charset="-122"/>
@@ -3274,11 +3274,11 @@
             </a:avLst>
           </a:prstGeom>
           <a:solidFill>
-            <a:srgbClr val="152017"/>
+            <a:srgbClr val="1C1C20"/>
           </a:solidFill>
           <a:ln w="12700">
             <a:solidFill>
-              <a:srgbClr val="2C4636"/>
+              <a:srgbClr val="34343A"/>
             </a:solidFill>
             <a:prstDash val="solid"/>
           </a:ln>
@@ -3318,7 +3318,7 @@
             <a:r>
               <a:rPr lang="en-US" sz="1600" b="1" dirty="0">
                 <a:solidFill>
-                  <a:srgbClr val="27C08A"/>
+                  <a:srgbClr val="6FA8FF"/>
                 </a:solidFill>
                 <a:latin typeface="Arial" pitchFamily="34" charset="0"/>
                 <a:ea typeface="Arial" pitchFamily="34" charset="-122"/>
@@ -3361,7 +3361,7 @@
             <a:r>
               <a:rPr lang="en-US" sz="1250" dirty="0">
                 <a:solidFill>
-                  <a:srgbClr val="9DB0A4"/>
+                  <a:srgbClr val="B4B4B8"/>
                 </a:solidFill>
                 <a:latin typeface="Calibri" pitchFamily="34" charset="0"/>
                 <a:ea typeface="Calibri" pitchFamily="34" charset="-122"/>
@@ -3382,7 +3382,7 @@
             <a:r>
               <a:rPr lang="en-US" sz="1250" dirty="0">
                 <a:solidFill>
-                  <a:srgbClr val="9DB0A4"/>
+                  <a:srgbClr val="B4B4B8"/>
                 </a:solidFill>
                 <a:latin typeface="Calibri" pitchFamily="34" charset="0"/>
                 <a:ea typeface="Calibri" pitchFamily="34" charset="-122"/>
@@ -3403,7 +3403,7 @@
             <a:r>
               <a:rPr lang="en-US" sz="1250" dirty="0">
                 <a:solidFill>
-                  <a:srgbClr val="9DB0A4"/>
+                  <a:srgbClr val="B4B4B8"/>
                 </a:solidFill>
                 <a:latin typeface="Calibri" pitchFamily="34" charset="0"/>
                 <a:ea typeface="Calibri" pitchFamily="34" charset="-122"/>
@@ -3424,7 +3424,7 @@
             <a:r>
               <a:rPr lang="en-US" sz="1250" dirty="0">
                 <a:solidFill>
-                  <a:srgbClr val="9DB0A4"/>
+                  <a:srgbClr val="B4B4B8"/>
                 </a:solidFill>
                 <a:latin typeface="Calibri" pitchFamily="34" charset="0"/>
                 <a:ea typeface="Calibri" pitchFamily="34" charset="-122"/>
@@ -3453,11 +3453,11 @@
             </a:avLst>
           </a:prstGeom>
           <a:solidFill>
-            <a:srgbClr val="1B2A20"/>
+            <a:srgbClr val="26262B"/>
           </a:solidFill>
           <a:ln w="12700">
             <a:solidFill>
-              <a:srgbClr val="2C4636"/>
+              <a:srgbClr val="34343A"/>
             </a:solidFill>
             <a:prstDash val="solid"/>
           </a:ln>
@@ -3497,7 +3497,7 @@
             <a:r>
               <a:rPr lang="en-US" sz="1600" b="1" dirty="0">
                 <a:solidFill>
-                  <a:srgbClr val="FF9E3D"/>
+                  <a:srgbClr val="E2C28A"/>
                 </a:solidFill>
                 <a:latin typeface="Arial" pitchFamily="34" charset="0"/>
                 <a:ea typeface="Arial" pitchFamily="34" charset="-122"/>
@@ -3538,7 +3538,7 @@
             <a:r>
               <a:rPr lang="en-US" sz="2400" b="1" dirty="0">
                 <a:solidFill>
-                  <a:srgbClr val="EEF3EE"/>
+                  <a:srgbClr val="F5F5F7"/>
                 </a:solidFill>
                 <a:latin typeface="Arial" pitchFamily="34" charset="0"/>
                 <a:ea typeface="Arial" pitchFamily="34" charset="-122"/>
@@ -3577,7 +3577,7 @@
             <a:r>
               <a:rPr lang="en-US" sz="1200" dirty="0">
                 <a:solidFill>
-                  <a:srgbClr val="9DB0A4"/>
+                  <a:srgbClr val="B4B4B8"/>
                 </a:solidFill>
                 <a:latin typeface="Calibri" pitchFamily="34" charset="0"/>
                 <a:ea typeface="Calibri" pitchFamily="34" charset="-122"/>
@@ -3620,7 +3620,7 @@
             <a:r>
               <a:rPr lang="en-US" sz="1250" dirty="0">
                 <a:solidFill>
-                  <a:srgbClr val="9DB0A4"/>
+                  <a:srgbClr val="B4B4B8"/>
                 </a:solidFill>
                 <a:latin typeface="Calibri" pitchFamily="34" charset="0"/>
                 <a:ea typeface="Calibri" pitchFamily="34" charset="-122"/>
@@ -3641,7 +3641,7 @@
             <a:r>
               <a:rPr lang="en-US" sz="1250" dirty="0">
                 <a:solidFill>
-                  <a:srgbClr val="9DB0A4"/>
+                  <a:srgbClr val="B4B4B8"/>
                 </a:solidFill>
                 <a:latin typeface="Calibri" pitchFamily="34" charset="0"/>
                 <a:ea typeface="Calibri" pitchFamily="34" charset="-122"/>
@@ -3662,7 +3662,7 @@
             <a:r>
               <a:rPr lang="en-US" sz="1250" dirty="0">
                 <a:solidFill>
-                  <a:srgbClr val="9DB0A4"/>
+                  <a:srgbClr val="B4B4B8"/>
                 </a:solidFill>
                 <a:latin typeface="Calibri" pitchFamily="34" charset="0"/>
                 <a:ea typeface="Calibri" pitchFamily="34" charset="-122"/>
@@ -3701,7 +3701,7 @@
             <a:r>
               <a:rPr lang="en-US" sz="950" dirty="0">
                 <a:solidFill>
-                  <a:srgbClr val="6E8579"/>
+                  <a:srgbClr val="7E7E84"/>
                 </a:solidFill>
                 <a:latin typeface="Calibri" pitchFamily="34" charset="0"/>
                 <a:ea typeface="Calibri" pitchFamily="34" charset="-122"/>
@@ -3727,7 +3727,7 @@
     <p:bg>
       <p:bgPr>
         <a:solidFill>
-          <a:srgbClr val="0B0F14"/>
+          <a:srgbClr val="101010"/>
         </a:solidFill>
       </p:bgPr>
     </p:bg>
@@ -3760,7 +3760,7 @@
             <a:avLst/>
           </a:prstGeom>
           <a:solidFill>
-            <a:srgbClr val="FF9E3D"/>
+            <a:srgbClr val="FF9933"/>
           </a:solidFill>
           <a:ln/>
         </p:spPr>
@@ -3780,7 +3780,7 @@
             <a:avLst/>
           </a:prstGeom>
           <a:solidFill>
-            <a:srgbClr val="EEF3EE"/>
+            <a:srgbClr val="FFFFFF"/>
           </a:solidFill>
           <a:ln/>
         </p:spPr>
@@ -3800,7 +3800,7 @@
             <a:avLst/>
           </a:prstGeom>
           <a:solidFill>
-            <a:srgbClr val="27C08A"/>
+            <a:srgbClr val="138808"/>
           </a:solidFill>
           <a:ln/>
         </p:spPr>
@@ -3820,7 +3820,7 @@
             <a:avLst/>
           </a:prstGeom>
           <a:solidFill>
-            <a:srgbClr val="27C08A"/>
+            <a:srgbClr val="6FA8FF"/>
           </a:solidFill>
           <a:ln/>
         </p:spPr>
@@ -3852,7 +3852,7 @@
             <a:r>
               <a:rPr lang="en-US" sz="1250" b="1" spc="200" kern="0" dirty="0">
                 <a:solidFill>
-                  <a:srgbClr val="27C08A"/>
+                  <a:srgbClr val="6FA8FF"/>
                 </a:solidFill>
                 <a:latin typeface="Arial" pitchFamily="34" charset="0"/>
                 <a:ea typeface="Arial" pitchFamily="34" charset="-122"/>
@@ -3891,7 +3891,7 @@
             <a:r>
               <a:rPr lang="en-US" sz="3000" b="1" dirty="0">
                 <a:solidFill>
-                  <a:srgbClr val="EEF3EE"/>
+                  <a:srgbClr val="F5F5F7"/>
                 </a:solidFill>
                 <a:latin typeface="Arial" pitchFamily="34" charset="0"/>
                 <a:ea typeface="Arial" pitchFamily="34" charset="-122"/>
@@ -3920,11 +3920,11 @@
             </a:avLst>
           </a:prstGeom>
           <a:solidFill>
-            <a:srgbClr val="152017"/>
+            <a:srgbClr val="1C1C20"/>
           </a:solidFill>
           <a:ln w="12700">
             <a:solidFill>
-              <a:srgbClr val="2C4636"/>
+              <a:srgbClr val="34343A"/>
             </a:solidFill>
             <a:prstDash val="solid"/>
           </a:ln>
@@ -3964,7 +3964,7 @@
             <a:r>
               <a:rPr lang="en-US" sz="1450" b="1" dirty="0">
                 <a:solidFill>
-                  <a:srgbClr val="27C08A"/>
+                  <a:srgbClr val="6FA8FF"/>
                 </a:solidFill>
                 <a:latin typeface="Arial" pitchFamily="34" charset="0"/>
                 <a:ea typeface="Arial" pitchFamily="34" charset="-122"/>
@@ -4003,7 +4003,7 @@
             <a:r>
               <a:rPr lang="en-US" sz="1200" dirty="0">
                 <a:solidFill>
-                  <a:srgbClr val="9DB0A4"/>
+                  <a:srgbClr val="B4B4B8"/>
                 </a:solidFill>
                 <a:latin typeface="Calibri" pitchFamily="34" charset="0"/>
                 <a:ea typeface="Calibri" pitchFamily="34" charset="-122"/>
@@ -4032,11 +4032,11 @@
             </a:avLst>
           </a:prstGeom>
           <a:solidFill>
-            <a:srgbClr val="152017"/>
+            <a:srgbClr val="1C1C20"/>
           </a:solidFill>
           <a:ln w="12700">
             <a:solidFill>
-              <a:srgbClr val="2C4636"/>
+              <a:srgbClr val="34343A"/>
             </a:solidFill>
             <a:prstDash val="solid"/>
           </a:ln>
@@ -4076,7 +4076,7 @@
             <a:r>
               <a:rPr lang="en-US" sz="1450" b="1" dirty="0">
                 <a:solidFill>
-                  <a:srgbClr val="27C08A"/>
+                  <a:srgbClr val="6FA8FF"/>
                 </a:solidFill>
                 <a:latin typeface="Arial" pitchFamily="34" charset="0"/>
                 <a:ea typeface="Arial" pitchFamily="34" charset="-122"/>
@@ -4115,7 +4115,7 @@
             <a:r>
               <a:rPr lang="en-US" sz="1200" dirty="0">
                 <a:solidFill>
-                  <a:srgbClr val="9DB0A4"/>
+                  <a:srgbClr val="B4B4B8"/>
                 </a:solidFill>
                 <a:latin typeface="Calibri" pitchFamily="34" charset="0"/>
                 <a:ea typeface="Calibri" pitchFamily="34" charset="-122"/>
@@ -4144,11 +4144,11 @@
             </a:avLst>
           </a:prstGeom>
           <a:solidFill>
-            <a:srgbClr val="152017"/>
+            <a:srgbClr val="1C1C20"/>
           </a:solidFill>
           <a:ln w="12700">
             <a:solidFill>
-              <a:srgbClr val="2C4636"/>
+              <a:srgbClr val="34343A"/>
             </a:solidFill>
             <a:prstDash val="solid"/>
           </a:ln>
@@ -4188,7 +4188,7 @@
             <a:r>
               <a:rPr lang="en-US" sz="1450" b="1" dirty="0">
                 <a:solidFill>
-                  <a:srgbClr val="27C08A"/>
+                  <a:srgbClr val="6FA8FF"/>
                 </a:solidFill>
                 <a:latin typeface="Arial" pitchFamily="34" charset="0"/>
                 <a:ea typeface="Arial" pitchFamily="34" charset="-122"/>
@@ -4227,7 +4227,7 @@
             <a:r>
               <a:rPr lang="en-US" sz="1200" dirty="0">
                 <a:solidFill>
-                  <a:srgbClr val="9DB0A4"/>
+                  <a:srgbClr val="B4B4B8"/>
                 </a:solidFill>
                 <a:latin typeface="Calibri" pitchFamily="34" charset="0"/>
                 <a:ea typeface="Calibri" pitchFamily="34" charset="-122"/>
@@ -4256,11 +4256,11 @@
             </a:avLst>
           </a:prstGeom>
           <a:solidFill>
-            <a:srgbClr val="152017"/>
+            <a:srgbClr val="1C1C20"/>
           </a:solidFill>
           <a:ln w="12700">
             <a:solidFill>
-              <a:srgbClr val="2C4636"/>
+              <a:srgbClr val="34343A"/>
             </a:solidFill>
             <a:prstDash val="solid"/>
           </a:ln>
@@ -4300,7 +4300,7 @@
             <a:r>
               <a:rPr lang="en-US" sz="1450" b="1" dirty="0">
                 <a:solidFill>
-                  <a:srgbClr val="27C08A"/>
+                  <a:srgbClr val="6FA8FF"/>
                 </a:solidFill>
                 <a:latin typeface="Arial" pitchFamily="34" charset="0"/>
                 <a:ea typeface="Arial" pitchFamily="34" charset="-122"/>
@@ -4339,7 +4339,7 @@
             <a:r>
               <a:rPr lang="en-US" sz="1200" dirty="0">
                 <a:solidFill>
-                  <a:srgbClr val="9DB0A4"/>
+                  <a:srgbClr val="B4B4B8"/>
                 </a:solidFill>
                 <a:latin typeface="Calibri" pitchFamily="34" charset="0"/>
                 <a:ea typeface="Calibri" pitchFamily="34" charset="-122"/>
@@ -4368,11 +4368,11 @@
             </a:avLst>
           </a:prstGeom>
           <a:solidFill>
-            <a:srgbClr val="152017"/>
+            <a:srgbClr val="1C1C20"/>
           </a:solidFill>
           <a:ln w="12700">
             <a:solidFill>
-              <a:srgbClr val="2C4636"/>
+              <a:srgbClr val="34343A"/>
             </a:solidFill>
             <a:prstDash val="solid"/>
           </a:ln>
@@ -4412,7 +4412,7 @@
             <a:r>
               <a:rPr lang="en-US" sz="1450" b="1" dirty="0">
                 <a:solidFill>
-                  <a:srgbClr val="27C08A"/>
+                  <a:srgbClr val="6FA8FF"/>
                 </a:solidFill>
                 <a:latin typeface="Arial" pitchFamily="34" charset="0"/>
                 <a:ea typeface="Arial" pitchFamily="34" charset="-122"/>
@@ -4451,7 +4451,7 @@
             <a:r>
               <a:rPr lang="en-US" sz="1200" dirty="0">
                 <a:solidFill>
-                  <a:srgbClr val="9DB0A4"/>
+                  <a:srgbClr val="B4B4B8"/>
                 </a:solidFill>
                 <a:latin typeface="Calibri" pitchFamily="34" charset="0"/>
                 <a:ea typeface="Calibri" pitchFamily="34" charset="-122"/>
@@ -4480,11 +4480,11 @@
             </a:avLst>
           </a:prstGeom>
           <a:solidFill>
-            <a:srgbClr val="152017"/>
+            <a:srgbClr val="1C1C20"/>
           </a:solidFill>
           <a:ln w="12700">
             <a:solidFill>
-              <a:srgbClr val="2C4636"/>
+              <a:srgbClr val="34343A"/>
             </a:solidFill>
             <a:prstDash val="solid"/>
           </a:ln>
@@ -4524,7 +4524,7 @@
             <a:r>
               <a:rPr lang="en-US" sz="1450" b="1" dirty="0">
                 <a:solidFill>
-                  <a:srgbClr val="27C08A"/>
+                  <a:srgbClr val="6FA8FF"/>
                 </a:solidFill>
                 <a:latin typeface="Arial" pitchFamily="34" charset="0"/>
                 <a:ea typeface="Arial" pitchFamily="34" charset="-122"/>
@@ -4563,7 +4563,7 @@
             <a:r>
               <a:rPr lang="en-US" sz="1200" dirty="0">
                 <a:solidFill>
-                  <a:srgbClr val="9DB0A4"/>
+                  <a:srgbClr val="B4B4B8"/>
                 </a:solidFill>
                 <a:latin typeface="Calibri" pitchFamily="34" charset="0"/>
                 <a:ea typeface="Calibri" pitchFamily="34" charset="-122"/>
@@ -4589,7 +4589,7 @@
     <p:bg>
       <p:bgPr>
         <a:solidFill>
-          <a:srgbClr val="0B0F14"/>
+          <a:srgbClr val="101010"/>
         </a:solidFill>
       </p:bgPr>
     </p:bg>
@@ -4622,7 +4622,7 @@
             <a:avLst/>
           </a:prstGeom>
           <a:solidFill>
-            <a:srgbClr val="FF9E3D"/>
+            <a:srgbClr val="FF9933"/>
           </a:solidFill>
           <a:ln/>
         </p:spPr>
@@ -4642,7 +4642,7 @@
             <a:avLst/>
           </a:prstGeom>
           <a:solidFill>
-            <a:srgbClr val="EEF3EE"/>
+            <a:srgbClr val="FFFFFF"/>
           </a:solidFill>
           <a:ln/>
         </p:spPr>
@@ -4662,7 +4662,7 @@
             <a:avLst/>
           </a:prstGeom>
           <a:solidFill>
-            <a:srgbClr val="27C08A"/>
+            <a:srgbClr val="138808"/>
           </a:solidFill>
           <a:ln/>
         </p:spPr>
@@ -4682,7 +4682,7 @@
             <a:avLst/>
           </a:prstGeom>
           <a:solidFill>
-            <a:srgbClr val="27C08A"/>
+            <a:srgbClr val="6FA8FF"/>
           </a:solidFill>
           <a:ln/>
         </p:spPr>
@@ -4714,7 +4714,7 @@
             <a:r>
               <a:rPr lang="en-US" sz="1250" b="1" spc="200" kern="0" dirty="0">
                 <a:solidFill>
-                  <a:srgbClr val="27C08A"/>
+                  <a:srgbClr val="6FA8FF"/>
                 </a:solidFill>
                 <a:latin typeface="Arial" pitchFamily="34" charset="0"/>
                 <a:ea typeface="Arial" pitchFamily="34" charset="-122"/>
@@ -4753,7 +4753,7 @@
             <a:r>
               <a:rPr lang="en-US" sz="3000" b="1" dirty="0">
                 <a:solidFill>
-                  <a:srgbClr val="EEF3EE"/>
+                  <a:srgbClr val="F5F5F7"/>
                 </a:solidFill>
                 <a:latin typeface="Arial" pitchFamily="34" charset="0"/>
                 <a:ea typeface="Arial" pitchFamily="34" charset="-122"/>
@@ -4782,11 +4782,11 @@
             </a:avLst>
           </a:prstGeom>
           <a:solidFill>
-            <a:srgbClr val="152017"/>
+            <a:srgbClr val="1C1C20"/>
           </a:solidFill>
           <a:ln w="12700">
             <a:solidFill>
-              <a:srgbClr val="2C4636"/>
+              <a:srgbClr val="34343A"/>
             </a:solidFill>
             <a:prstDash val="solid"/>
           </a:ln>
@@ -4826,7 +4826,7 @@
             <a:r>
               <a:rPr lang="en-US" sz="1350" b="1" dirty="0">
                 <a:solidFill>
-                  <a:srgbClr val="EEF3EE"/>
+                  <a:srgbClr val="F5F5F7"/>
                 </a:solidFill>
                 <a:latin typeface="Arial" pitchFamily="34" charset="0"/>
                 <a:ea typeface="Arial" pitchFamily="34" charset="-122"/>
@@ -4865,7 +4865,7 @@
             <a:r>
               <a:rPr lang="en-US" sz="1200" dirty="0">
                 <a:solidFill>
-                  <a:srgbClr val="9DB0A4"/>
+                  <a:srgbClr val="B4B4B8"/>
                 </a:solidFill>
                 <a:latin typeface="Calibri" pitchFamily="34" charset="0"/>
                 <a:ea typeface="Calibri" pitchFamily="34" charset="-122"/>
@@ -4894,11 +4894,11 @@
             </a:avLst>
           </a:prstGeom>
           <a:solidFill>
-            <a:srgbClr val="1B2A20"/>
+            <a:srgbClr val="26262B"/>
           </a:solidFill>
           <a:ln w="12700">
             <a:solidFill>
-              <a:srgbClr val="FF9E3D"/>
+              <a:srgbClr val="E2C28A"/>
             </a:solidFill>
             <a:prstDash val="solid"/>
           </a:ln>
@@ -4931,7 +4931,7 @@
             <a:r>
               <a:rPr lang="en-US" sz="1100" b="1" dirty="0">
                 <a:solidFill>
-                  <a:srgbClr val="FF9E3D"/>
+                  <a:srgbClr val="E2C28A"/>
                 </a:solidFill>
                 <a:latin typeface="Calibri" pitchFamily="34" charset="0"/>
                 <a:ea typeface="Calibri" pitchFamily="34" charset="-122"/>
@@ -4960,11 +4960,11 @@
             </a:avLst>
           </a:prstGeom>
           <a:solidFill>
-            <a:srgbClr val="152017"/>
+            <a:srgbClr val="1C1C20"/>
           </a:solidFill>
           <a:ln w="12700">
             <a:solidFill>
-              <a:srgbClr val="2C4636"/>
+              <a:srgbClr val="34343A"/>
             </a:solidFill>
             <a:prstDash val="solid"/>
           </a:ln>
@@ -5004,7 +5004,7 @@
             <a:r>
               <a:rPr lang="en-US" sz="1350" b="1" dirty="0">
                 <a:solidFill>
-                  <a:srgbClr val="EEF3EE"/>
+                  <a:srgbClr val="F5F5F7"/>
                 </a:solidFill>
                 <a:latin typeface="Arial" pitchFamily="34" charset="0"/>
                 <a:ea typeface="Arial" pitchFamily="34" charset="-122"/>
@@ -5043,7 +5043,7 @@
             <a:r>
               <a:rPr lang="en-US" sz="1200" dirty="0">
                 <a:solidFill>
-                  <a:srgbClr val="9DB0A4"/>
+                  <a:srgbClr val="B4B4B8"/>
                 </a:solidFill>
                 <a:latin typeface="Calibri" pitchFamily="34" charset="0"/>
                 <a:ea typeface="Calibri" pitchFamily="34" charset="-122"/>
@@ -5072,11 +5072,11 @@
             </a:avLst>
           </a:prstGeom>
           <a:solidFill>
-            <a:srgbClr val="1B2A20"/>
+            <a:srgbClr val="26262B"/>
           </a:solidFill>
           <a:ln w="12700">
             <a:solidFill>
-              <a:srgbClr val="FF9E3D"/>
+              <a:srgbClr val="E2C28A"/>
             </a:solidFill>
             <a:prstDash val="solid"/>
           </a:ln>
@@ -5109,7 +5109,7 @@
             <a:r>
               <a:rPr lang="en-US" sz="1100" b="1" dirty="0">
                 <a:solidFill>
-                  <a:srgbClr val="FF9E3D"/>
+                  <a:srgbClr val="E2C28A"/>
                 </a:solidFill>
                 <a:latin typeface="Calibri" pitchFamily="34" charset="0"/>
                 <a:ea typeface="Calibri" pitchFamily="34" charset="-122"/>
@@ -5138,11 +5138,11 @@
             </a:avLst>
           </a:prstGeom>
           <a:solidFill>
-            <a:srgbClr val="152017"/>
+            <a:srgbClr val="1C1C20"/>
           </a:solidFill>
           <a:ln w="12700">
             <a:solidFill>
-              <a:srgbClr val="2C4636"/>
+              <a:srgbClr val="34343A"/>
             </a:solidFill>
             <a:prstDash val="solid"/>
           </a:ln>
@@ -5182,7 +5182,7 @@
             <a:r>
               <a:rPr lang="en-US" sz="1350" b="1" dirty="0">
                 <a:solidFill>
-                  <a:srgbClr val="EEF3EE"/>
+                  <a:srgbClr val="F5F5F7"/>
                 </a:solidFill>
                 <a:latin typeface="Arial" pitchFamily="34" charset="0"/>
                 <a:ea typeface="Arial" pitchFamily="34" charset="-122"/>
@@ -5221,7 +5221,7 @@
             <a:r>
               <a:rPr lang="en-US" sz="1200" dirty="0">
                 <a:solidFill>
-                  <a:srgbClr val="9DB0A4"/>
+                  <a:srgbClr val="B4B4B8"/>
                 </a:solidFill>
                 <a:latin typeface="Calibri" pitchFamily="34" charset="0"/>
                 <a:ea typeface="Calibri" pitchFamily="34" charset="-122"/>
@@ -5250,11 +5250,11 @@
             </a:avLst>
           </a:prstGeom>
           <a:solidFill>
-            <a:srgbClr val="1B2A20"/>
+            <a:srgbClr val="26262B"/>
           </a:solidFill>
           <a:ln w="12700">
             <a:solidFill>
-              <a:srgbClr val="FF9E3D"/>
+              <a:srgbClr val="E2C28A"/>
             </a:solidFill>
             <a:prstDash val="solid"/>
           </a:ln>
@@ -5287,7 +5287,7 @@
             <a:r>
               <a:rPr lang="en-US" sz="1100" b="1" dirty="0">
                 <a:solidFill>
-                  <a:srgbClr val="FF9E3D"/>
+                  <a:srgbClr val="E2C28A"/>
                 </a:solidFill>
                 <a:latin typeface="Calibri" pitchFamily="34" charset="0"/>
                 <a:ea typeface="Calibri" pitchFamily="34" charset="-122"/>
@@ -5316,11 +5316,11 @@
             </a:avLst>
           </a:prstGeom>
           <a:solidFill>
-            <a:srgbClr val="152017"/>
+            <a:srgbClr val="1C1C20"/>
           </a:solidFill>
           <a:ln w="12700">
             <a:solidFill>
-              <a:srgbClr val="2C4636"/>
+              <a:srgbClr val="34343A"/>
             </a:solidFill>
             <a:prstDash val="solid"/>
           </a:ln>
@@ -5360,7 +5360,7 @@
             <a:r>
               <a:rPr lang="en-US" sz="1350" b="1" dirty="0">
                 <a:solidFill>
-                  <a:srgbClr val="EEF3EE"/>
+                  <a:srgbClr val="F5F5F7"/>
                 </a:solidFill>
                 <a:latin typeface="Arial" pitchFamily="34" charset="0"/>
                 <a:ea typeface="Arial" pitchFamily="34" charset="-122"/>
@@ -5399,7 +5399,7 @@
             <a:r>
               <a:rPr lang="en-US" sz="1200" dirty="0">
                 <a:solidFill>
-                  <a:srgbClr val="9DB0A4"/>
+                  <a:srgbClr val="B4B4B8"/>
                 </a:solidFill>
                 <a:latin typeface="Calibri" pitchFamily="34" charset="0"/>
                 <a:ea typeface="Calibri" pitchFamily="34" charset="-122"/>
@@ -5428,11 +5428,11 @@
             </a:avLst>
           </a:prstGeom>
           <a:solidFill>
-            <a:srgbClr val="1B2A20"/>
+            <a:srgbClr val="26262B"/>
           </a:solidFill>
           <a:ln w="12700">
             <a:solidFill>
-              <a:srgbClr val="FF9E3D"/>
+              <a:srgbClr val="E2C28A"/>
             </a:solidFill>
             <a:prstDash val="solid"/>
           </a:ln>
@@ -5465,7 +5465,7 @@
             <a:r>
               <a:rPr lang="en-US" sz="1100" b="1" dirty="0">
                 <a:solidFill>
-                  <a:srgbClr val="FF9E3D"/>
+                  <a:srgbClr val="E2C28A"/>
                 </a:solidFill>
                 <a:latin typeface="Calibri" pitchFamily="34" charset="0"/>
                 <a:ea typeface="Calibri" pitchFamily="34" charset="-122"/>
@@ -5504,7 +5504,7 @@
             <a:r>
               <a:rPr lang="en-US" sz="1250" dirty="0">
                 <a:solidFill>
-                  <a:srgbClr val="EEF3EE"/>
+                  <a:srgbClr val="F5F5F7"/>
                 </a:solidFill>
                 <a:latin typeface="Calibri" pitchFamily="34" charset="0"/>
                 <a:ea typeface="Calibri" pitchFamily="34" charset="-122"/>
@@ -5530,7 +5530,7 @@
     <p:bg>
       <p:bgPr>
         <a:solidFill>
-          <a:srgbClr val="0B0F14"/>
+          <a:srgbClr val="101010"/>
         </a:solidFill>
       </p:bgPr>
     </p:bg>
@@ -5563,7 +5563,7 @@
             <a:avLst/>
           </a:prstGeom>
           <a:solidFill>
-            <a:srgbClr val="FF9E3D"/>
+            <a:srgbClr val="FF9933"/>
           </a:solidFill>
           <a:ln/>
         </p:spPr>
@@ -5583,7 +5583,7 @@
             <a:avLst/>
           </a:prstGeom>
           <a:solidFill>
-            <a:srgbClr val="EEF3EE"/>
+            <a:srgbClr val="FFFFFF"/>
           </a:solidFill>
           <a:ln/>
         </p:spPr>
@@ -5603,7 +5603,7 @@
             <a:avLst/>
           </a:prstGeom>
           <a:solidFill>
-            <a:srgbClr val="27C08A"/>
+            <a:srgbClr val="138808"/>
           </a:solidFill>
           <a:ln/>
         </p:spPr>
@@ -5623,7 +5623,7 @@
             <a:avLst/>
           </a:prstGeom>
           <a:solidFill>
-            <a:srgbClr val="27C08A"/>
+            <a:srgbClr val="6FA8FF"/>
           </a:solidFill>
           <a:ln/>
         </p:spPr>
@@ -5655,7 +5655,7 @@
             <a:r>
               <a:rPr lang="en-US" sz="1250" b="1" spc="200" kern="0" dirty="0">
                 <a:solidFill>
-                  <a:srgbClr val="27C08A"/>
+                  <a:srgbClr val="6FA8FF"/>
                 </a:solidFill>
                 <a:latin typeface="Arial" pitchFamily="34" charset="0"/>
                 <a:ea typeface="Arial" pitchFamily="34" charset="-122"/>
@@ -5694,7 +5694,7 @@
             <a:r>
               <a:rPr lang="en-US" sz="3000" b="1" dirty="0">
                 <a:solidFill>
-                  <a:srgbClr val="EEF3EE"/>
+                  <a:srgbClr val="F5F5F7"/>
                 </a:solidFill>
                 <a:latin typeface="Arial" pitchFamily="34" charset="0"/>
                 <a:ea typeface="Arial" pitchFamily="34" charset="-122"/>
@@ -5723,11 +5723,11 @@
             </a:avLst>
           </a:prstGeom>
           <a:solidFill>
-            <a:srgbClr val="152017"/>
+            <a:srgbClr val="1C1C20"/>
           </a:solidFill>
           <a:ln w="12700">
             <a:solidFill>
-              <a:srgbClr val="2C4636"/>
+              <a:srgbClr val="34343A"/>
             </a:solidFill>
             <a:prstDash val="solid"/>
           </a:ln>
@@ -5767,7 +5767,7 @@
             <a:r>
               <a:rPr lang="en-US" sz="2100" b="1" dirty="0">
                 <a:solidFill>
-                  <a:srgbClr val="EEF3EE"/>
+                  <a:srgbClr val="F5F5F7"/>
                 </a:solidFill>
                 <a:latin typeface="Arial" pitchFamily="34" charset="0"/>
                 <a:ea typeface="Arial" pitchFamily="34" charset="-122"/>
@@ -5806,7 +5806,7 @@
             <a:r>
               <a:rPr lang="en-US" sz="1250" dirty="0">
                 <a:solidFill>
-                  <a:srgbClr val="27C08A"/>
+                  <a:srgbClr val="6FA8FF"/>
                 </a:solidFill>
                 <a:latin typeface="Calibri" pitchFamily="34" charset="0"/>
                 <a:ea typeface="Calibri" pitchFamily="34" charset="-122"/>
@@ -5845,7 +5845,7 @@
             <a:r>
               <a:rPr lang="en-US" sz="2100" b="1" dirty="0">
                 <a:solidFill>
-                  <a:srgbClr val="EEF3EE"/>
+                  <a:srgbClr val="F5F5F7"/>
                 </a:solidFill>
                 <a:latin typeface="Arial" pitchFamily="34" charset="0"/>
                 <a:ea typeface="Arial" pitchFamily="34" charset="-122"/>
@@ -5884,7 +5884,7 @@
             <a:r>
               <a:rPr lang="en-US" sz="1250" dirty="0">
                 <a:solidFill>
-                  <a:srgbClr val="27C08A"/>
+                  <a:srgbClr val="6FA8FF"/>
                 </a:solidFill>
                 <a:latin typeface="Calibri" pitchFamily="34" charset="0"/>
                 <a:ea typeface="Calibri" pitchFamily="34" charset="-122"/>
@@ -5923,7 +5923,7 @@
             <a:r>
               <a:rPr lang="en-US" sz="1250" dirty="0">
                 <a:solidFill>
-                  <a:srgbClr val="9DB0A4"/>
+                  <a:srgbClr val="B4B4B8"/>
                 </a:solidFill>
                 <a:latin typeface="Calibri" pitchFamily="34" charset="0"/>
                 <a:ea typeface="Calibri" pitchFamily="34" charset="-122"/>
@@ -5952,11 +5952,11 @@
             </a:avLst>
           </a:prstGeom>
           <a:solidFill>
-            <a:srgbClr val="1B2A20"/>
+            <a:srgbClr val="26262B"/>
           </a:solidFill>
           <a:ln w="12700">
             <a:solidFill>
-              <a:srgbClr val="2C4636"/>
+              <a:srgbClr val="34343A"/>
             </a:solidFill>
             <a:prstDash val="solid"/>
           </a:ln>
@@ -5996,7 +5996,7 @@
             <a:r>
               <a:rPr lang="en-US" sz="1400" b="1" spc="200" kern="0" dirty="0">
                 <a:solidFill>
-                  <a:srgbClr val="FF9E3D"/>
+                  <a:srgbClr val="E2C28A"/>
                 </a:solidFill>
                 <a:latin typeface="Arial" pitchFamily="34" charset="0"/>
                 <a:ea typeface="Arial" pitchFamily="34" charset="-122"/>
@@ -6035,7 +6035,7 @@
             <a:r>
               <a:rPr lang="en-US" sz="1300" dirty="0">
                 <a:solidFill>
-                  <a:srgbClr val="EEF3EE"/>
+                  <a:srgbClr val="F5F5F7"/>
                 </a:solidFill>
                 <a:latin typeface="Calibri" pitchFamily="34" charset="0"/>
                 <a:ea typeface="Calibri" pitchFamily="34" charset="-122"/>
@@ -6078,7 +6078,7 @@
             <a:r>
               <a:rPr lang="en-US" sz="1250" dirty="0">
                 <a:solidFill>
-                  <a:srgbClr val="9DB0A4"/>
+                  <a:srgbClr val="B4B4B8"/>
                 </a:solidFill>
                 <a:latin typeface="Calibri" pitchFamily="34" charset="0"/>
                 <a:ea typeface="Calibri" pitchFamily="34" charset="-122"/>
@@ -6099,7 +6099,7 @@
             <a:r>
               <a:rPr lang="en-US" sz="1250" dirty="0">
                 <a:solidFill>
-                  <a:srgbClr val="9DB0A4"/>
+                  <a:srgbClr val="B4B4B8"/>
                 </a:solidFill>
                 <a:latin typeface="Calibri" pitchFamily="34" charset="0"/>
                 <a:ea typeface="Calibri" pitchFamily="34" charset="-122"/>
@@ -6120,7 +6120,7 @@
             <a:r>
               <a:rPr lang="en-US" sz="1250" dirty="0">
                 <a:solidFill>
-                  <a:srgbClr val="9DB0A4"/>
+                  <a:srgbClr val="B4B4B8"/>
                 </a:solidFill>
                 <a:latin typeface="Calibri" pitchFamily="34" charset="0"/>
                 <a:ea typeface="Calibri" pitchFamily="34" charset="-122"/>
@@ -6141,7 +6141,7 @@
             <a:r>
               <a:rPr lang="en-US" sz="1250" dirty="0">
                 <a:solidFill>
-                  <a:srgbClr val="9DB0A4"/>
+                  <a:srgbClr val="B4B4B8"/>
                 </a:solidFill>
                 <a:latin typeface="Calibri" pitchFamily="34" charset="0"/>
                 <a:ea typeface="Calibri" pitchFamily="34" charset="-122"/>
@@ -6167,7 +6167,7 @@
     <p:bg>
       <p:bgPr>
         <a:solidFill>
-          <a:srgbClr val="0B0F14"/>
+          <a:srgbClr val="101010"/>
         </a:solidFill>
       </p:bgPr>
     </p:bg>
@@ -6200,7 +6200,7 @@
             <a:avLst/>
           </a:prstGeom>
           <a:solidFill>
-            <a:srgbClr val="FF9E3D"/>
+            <a:srgbClr val="FF9933"/>
           </a:solidFill>
           <a:ln/>
         </p:spPr>
@@ -6220,7 +6220,7 @@
             <a:avLst/>
           </a:prstGeom>
           <a:solidFill>
-            <a:srgbClr val="EEF3EE"/>
+            <a:srgbClr val="FFFFFF"/>
           </a:solidFill>
           <a:ln/>
         </p:spPr>
@@ -6240,7 +6240,7 @@
             <a:avLst/>
           </a:prstGeom>
           <a:solidFill>
-            <a:srgbClr val="27C08A"/>
+            <a:srgbClr val="138808"/>
           </a:solidFill>
           <a:ln/>
         </p:spPr>
@@ -6260,7 +6260,7 @@
             <a:avLst/>
           </a:prstGeom>
           <a:solidFill>
-            <a:srgbClr val="27C08A"/>
+            <a:srgbClr val="6FA8FF"/>
           </a:solidFill>
           <a:ln/>
         </p:spPr>
@@ -6292,7 +6292,7 @@
             <a:r>
               <a:rPr lang="en-US" sz="1250" b="1" spc="200" kern="0" dirty="0">
                 <a:solidFill>
-                  <a:srgbClr val="27C08A"/>
+                  <a:srgbClr val="6FA8FF"/>
                 </a:solidFill>
                 <a:latin typeface="Arial" pitchFamily="34" charset="0"/>
                 <a:ea typeface="Arial" pitchFamily="34" charset="-122"/>
@@ -6331,7 +6331,7 @@
             <a:r>
               <a:rPr lang="en-US" sz="2600" b="1" dirty="0">
                 <a:solidFill>
-                  <a:srgbClr val="EEF3EE"/>
+                  <a:srgbClr val="F5F5F7"/>
                 </a:solidFill>
                 <a:latin typeface="Arial" pitchFamily="34" charset="0"/>
                 <a:ea typeface="Arial" pitchFamily="34" charset="-122"/>
@@ -6370,7 +6370,7 @@
             <a:r>
               <a:rPr lang="en-US" sz="2600" b="1" dirty="0">
                 <a:solidFill>
-                  <a:srgbClr val="27C08A"/>
+                  <a:srgbClr val="6FA8FF"/>
                 </a:solidFill>
                 <a:latin typeface="Arial" pitchFamily="34" charset="0"/>
                 <a:ea typeface="Arial" pitchFamily="34" charset="-122"/>
@@ -6409,7 +6409,7 @@
             <a:r>
               <a:rPr lang="en-US" sz="1500" dirty="0">
                 <a:solidFill>
-                  <a:srgbClr val="9DB0A4"/>
+                  <a:srgbClr val="B4B4B8"/>
                 </a:solidFill>
                 <a:latin typeface="Calibri" pitchFamily="34" charset="0"/>
                 <a:ea typeface="Calibri" pitchFamily="34" charset="-122"/>
@@ -6448,7 +6448,7 @@
             <a:r>
               <a:rPr lang="en-US" sz="1350" b="1" dirty="0">
                 <a:solidFill>
-                  <a:srgbClr val="EEF3EE"/>
+                  <a:srgbClr val="F5F5F7"/>
                 </a:solidFill>
                 <a:latin typeface="Calibri" pitchFamily="34" charset="0"/>
                 <a:ea typeface="Calibri" pitchFamily="34" charset="-122"/>
@@ -6511,7 +6511,7 @@
             <a:r>
               <a:rPr lang="en-US" sz="1100" dirty="0">
                 <a:solidFill>
-                  <a:srgbClr val="9DB0A4"/>
+                  <a:srgbClr val="B4B4B8"/>
                 </a:solidFill>
                 <a:latin typeface="Calibri" pitchFamily="34" charset="0"/>
                 <a:ea typeface="Calibri" pitchFamily="34" charset="-122"/>
@@ -6537,7 +6537,7 @@
     <p:bg>
       <p:bgPr>
         <a:solidFill>
-          <a:srgbClr val="0B0F14"/>
+          <a:srgbClr val="101010"/>
         </a:solidFill>
       </p:bgPr>
     </p:bg>
@@ -6570,7 +6570,7 @@
             <a:avLst/>
           </a:prstGeom>
           <a:solidFill>
-            <a:srgbClr val="FF9E3D"/>
+            <a:srgbClr val="FF9933"/>
           </a:solidFill>
           <a:ln/>
         </p:spPr>
@@ -6590,7 +6590,7 @@
             <a:avLst/>
           </a:prstGeom>
           <a:solidFill>
-            <a:srgbClr val="EEF3EE"/>
+            <a:srgbClr val="FFFFFF"/>
           </a:solidFill>
           <a:ln/>
         </p:spPr>
@@ -6610,7 +6610,7 @@
             <a:avLst/>
           </a:prstGeom>
           <a:solidFill>
-            <a:srgbClr val="27C08A"/>
+            <a:srgbClr val="138808"/>
           </a:solidFill>
           <a:ln/>
         </p:spPr>
@@ -6630,7 +6630,7 @@
             <a:avLst/>
           </a:prstGeom>
           <a:solidFill>
-            <a:srgbClr val="27C08A"/>
+            <a:srgbClr val="6FA8FF"/>
           </a:solidFill>
           <a:ln/>
         </p:spPr>
@@ -6662,7 +6662,7 @@
             <a:r>
               <a:rPr lang="en-US" sz="1250" b="1" spc="200" kern="0" dirty="0">
                 <a:solidFill>
-                  <a:srgbClr val="27C08A"/>
+                  <a:srgbClr val="6FA8FF"/>
                 </a:solidFill>
                 <a:latin typeface="Arial" pitchFamily="34" charset="0"/>
                 <a:ea typeface="Arial" pitchFamily="34" charset="-122"/>
@@ -6701,7 +6701,7 @@
             <a:r>
               <a:rPr lang="en-US" sz="3000" b="1" dirty="0">
                 <a:solidFill>
-                  <a:srgbClr val="EEF3EE"/>
+                  <a:srgbClr val="F5F5F7"/>
                 </a:solidFill>
                 <a:latin typeface="Arial" pitchFamily="34" charset="0"/>
                 <a:ea typeface="Arial" pitchFamily="34" charset="-122"/>
@@ -6740,7 +6740,7 @@
             <a:r>
               <a:rPr lang="en-US" sz="1500" dirty="0">
                 <a:solidFill>
-                  <a:srgbClr val="9DB0A4"/>
+                  <a:srgbClr val="B4B4B8"/>
                 </a:solidFill>
                 <a:latin typeface="Calibri" pitchFamily="34" charset="0"/>
                 <a:ea typeface="Calibri" pitchFamily="34" charset="-122"/>
@@ -6769,11 +6769,11 @@
             </a:avLst>
           </a:prstGeom>
           <a:solidFill>
-            <a:srgbClr val="152017"/>
+            <a:srgbClr val="1C1C20"/>
           </a:solidFill>
           <a:ln w="12700">
             <a:solidFill>
-              <a:srgbClr val="2C4636"/>
+              <a:srgbClr val="34343A"/>
             </a:solidFill>
             <a:prstDash val="solid"/>
           </a:ln>
@@ -6815,7 +6815,7 @@
             <a:r>
               <a:rPr lang="en-US" sz="2400" b="1" dirty="0">
                 <a:solidFill>
-                  <a:srgbClr val="FF9E3D"/>
+                  <a:srgbClr val="E2C28A"/>
                 </a:solidFill>
                 <a:latin typeface="Arial" pitchFamily="34" charset="0"/>
                 <a:ea typeface="Arial" pitchFamily="34" charset="-122"/>
@@ -6854,7 +6854,7 @@
             <a:r>
               <a:rPr lang="en-US" sz="1250" dirty="0">
                 <a:solidFill>
-                  <a:srgbClr val="9DB0A4"/>
+                  <a:srgbClr val="B4B4B8"/>
                 </a:solidFill>
                 <a:latin typeface="Calibri" pitchFamily="34" charset="0"/>
                 <a:ea typeface="Calibri" pitchFamily="34" charset="-122"/>
@@ -6883,11 +6883,11 @@
             </a:avLst>
           </a:prstGeom>
           <a:solidFill>
-            <a:srgbClr val="152017"/>
+            <a:srgbClr val="1C1C20"/>
           </a:solidFill>
           <a:ln w="12700">
             <a:solidFill>
-              <a:srgbClr val="2C4636"/>
+              <a:srgbClr val="34343A"/>
             </a:solidFill>
             <a:prstDash val="solid"/>
           </a:ln>
@@ -6929,7 +6929,7 @@
             <a:r>
               <a:rPr lang="en-US" sz="2400" b="1" dirty="0">
                 <a:solidFill>
-                  <a:srgbClr val="FF9E3D"/>
+                  <a:srgbClr val="E2C28A"/>
                 </a:solidFill>
                 <a:latin typeface="Arial" pitchFamily="34" charset="0"/>
                 <a:ea typeface="Arial" pitchFamily="34" charset="-122"/>
@@ -6968,7 +6968,7 @@
             <a:r>
               <a:rPr lang="en-US" sz="1250" dirty="0">
                 <a:solidFill>
-                  <a:srgbClr val="9DB0A4"/>
+                  <a:srgbClr val="B4B4B8"/>
                 </a:solidFill>
                 <a:latin typeface="Calibri" pitchFamily="34" charset="0"/>
                 <a:ea typeface="Calibri" pitchFamily="34" charset="-122"/>
@@ -6997,11 +6997,11 @@
             </a:avLst>
           </a:prstGeom>
           <a:solidFill>
-            <a:srgbClr val="152017"/>
+            <a:srgbClr val="1C1C20"/>
           </a:solidFill>
           <a:ln w="12700">
             <a:solidFill>
-              <a:srgbClr val="2C4636"/>
+              <a:srgbClr val="34343A"/>
             </a:solidFill>
             <a:prstDash val="solid"/>
           </a:ln>
@@ -7043,7 +7043,7 @@
             <a:r>
               <a:rPr lang="en-US" sz="2400" b="1" dirty="0">
                 <a:solidFill>
-                  <a:srgbClr val="4FE3B0"/>
+                  <a:srgbClr val="4FD68A"/>
                 </a:solidFill>
                 <a:latin typeface="Arial" pitchFamily="34" charset="0"/>
                 <a:ea typeface="Arial" pitchFamily="34" charset="-122"/>
@@ -7082,7 +7082,7 @@
             <a:r>
               <a:rPr lang="en-US" sz="1250" dirty="0">
                 <a:solidFill>
-                  <a:srgbClr val="9DB0A4"/>
+                  <a:srgbClr val="B4B4B8"/>
                 </a:solidFill>
                 <a:latin typeface="Calibri" pitchFamily="34" charset="0"/>
                 <a:ea typeface="Calibri" pitchFamily="34" charset="-122"/>
@@ -7111,11 +7111,11 @@
             </a:avLst>
           </a:prstGeom>
           <a:solidFill>
-            <a:srgbClr val="152017"/>
+            <a:srgbClr val="1C1C20"/>
           </a:solidFill>
           <a:ln w="12700">
             <a:solidFill>
-              <a:srgbClr val="2C4636"/>
+              <a:srgbClr val="34343A"/>
             </a:solidFill>
             <a:prstDash val="solid"/>
           </a:ln>
@@ -7157,7 +7157,7 @@
             <a:r>
               <a:rPr lang="en-US" sz="2400" b="1" dirty="0">
                 <a:solidFill>
-                  <a:srgbClr val="27C08A"/>
+                  <a:srgbClr val="6FA8FF"/>
                 </a:solidFill>
                 <a:latin typeface="Arial" pitchFamily="34" charset="0"/>
                 <a:ea typeface="Arial" pitchFamily="34" charset="-122"/>
@@ -7196,7 +7196,7 @@
             <a:r>
               <a:rPr lang="en-US" sz="1250" dirty="0">
                 <a:solidFill>
-                  <a:srgbClr val="9DB0A4"/>
+                  <a:srgbClr val="B4B4B8"/>
                 </a:solidFill>
                 <a:latin typeface="Calibri" pitchFamily="34" charset="0"/>
                 <a:ea typeface="Calibri" pitchFamily="34" charset="-122"/>
@@ -7225,11 +7225,11 @@
             </a:avLst>
           </a:prstGeom>
           <a:solidFill>
-            <a:srgbClr val="1B2A20"/>
+            <a:srgbClr val="26262B"/>
           </a:solidFill>
           <a:ln w="12700">
             <a:solidFill>
-              <a:srgbClr val="2C4636"/>
+              <a:srgbClr val="34343A"/>
             </a:solidFill>
             <a:prstDash val="solid"/>
           </a:ln>
@@ -7269,7 +7269,7 @@
             <a:r>
               <a:rPr lang="en-US" sz="1400" dirty="0">
                 <a:solidFill>
-                  <a:srgbClr val="EEF3EE"/>
+                  <a:srgbClr val="F5F5F7"/>
                 </a:solidFill>
                 <a:latin typeface="Calibri" pitchFamily="34" charset="0"/>
                 <a:ea typeface="Calibri" pitchFamily="34" charset="-122"/>
@@ -7308,7 +7308,7 @@
             <a:r>
               <a:rPr lang="en-US" sz="950" dirty="0">
                 <a:solidFill>
-                  <a:srgbClr val="6E8579"/>
+                  <a:srgbClr val="7E7E84"/>
                 </a:solidFill>
                 <a:latin typeface="Calibri" pitchFamily="34" charset="0"/>
                 <a:ea typeface="Calibri" pitchFamily="34" charset="-122"/>
@@ -7334,7 +7334,7 @@
     <p:bg>
       <p:bgPr>
         <a:solidFill>
-          <a:srgbClr val="0B0F14"/>
+          <a:srgbClr val="101010"/>
         </a:solidFill>
       </p:bgPr>
     </p:bg>
@@ -7367,7 +7367,7 @@
             <a:avLst/>
           </a:prstGeom>
           <a:solidFill>
-            <a:srgbClr val="FF9E3D"/>
+            <a:srgbClr val="FF9933"/>
           </a:solidFill>
           <a:ln/>
         </p:spPr>
@@ -7387,7 +7387,7 @@
             <a:avLst/>
           </a:prstGeom>
           <a:solidFill>
-            <a:srgbClr val="EEF3EE"/>
+            <a:srgbClr val="FFFFFF"/>
           </a:solidFill>
           <a:ln/>
         </p:spPr>
@@ -7407,7 +7407,7 @@
             <a:avLst/>
           </a:prstGeom>
           <a:solidFill>
-            <a:srgbClr val="27C08A"/>
+            <a:srgbClr val="138808"/>
           </a:solidFill>
           <a:ln/>
         </p:spPr>
@@ -7427,7 +7427,7 @@
             <a:avLst/>
           </a:prstGeom>
           <a:solidFill>
-            <a:srgbClr val="27C08A"/>
+            <a:srgbClr val="6FA8FF"/>
           </a:solidFill>
           <a:ln/>
         </p:spPr>
@@ -7459,7 +7459,7 @@
             <a:r>
               <a:rPr lang="en-US" sz="1250" b="1" spc="200" kern="0" dirty="0">
                 <a:solidFill>
-                  <a:srgbClr val="27C08A"/>
+                  <a:srgbClr val="6FA8FF"/>
                 </a:solidFill>
                 <a:latin typeface="Arial" pitchFamily="34" charset="0"/>
                 <a:ea typeface="Arial" pitchFamily="34" charset="-122"/>
@@ -7498,7 +7498,7 @@
             <a:r>
               <a:rPr lang="en-US" sz="3000" b="1" dirty="0">
                 <a:solidFill>
-                  <a:srgbClr val="EEF3EE"/>
+                  <a:srgbClr val="F5F5F7"/>
                 </a:solidFill>
                 <a:latin typeface="Arial" pitchFamily="34" charset="0"/>
                 <a:ea typeface="Arial" pitchFamily="34" charset="-122"/>
@@ -7537,7 +7537,7 @@
             <a:r>
               <a:rPr lang="en-US" sz="1500" dirty="0">
                 <a:solidFill>
-                  <a:srgbClr val="9DB0A4"/>
+                  <a:srgbClr val="B4B4B8"/>
                 </a:solidFill>
                 <a:latin typeface="Calibri" pitchFamily="34" charset="0"/>
                 <a:ea typeface="Calibri" pitchFamily="34" charset="-122"/>
@@ -7566,11 +7566,11 @@
             </a:avLst>
           </a:prstGeom>
           <a:solidFill>
-            <a:srgbClr val="152017"/>
+            <a:srgbClr val="1C1C20"/>
           </a:solidFill>
           <a:ln w="12700">
             <a:solidFill>
-              <a:srgbClr val="2C4636"/>
+              <a:srgbClr val="34343A"/>
             </a:solidFill>
             <a:prstDash val="solid"/>
           </a:ln>
@@ -7610,7 +7610,7 @@
             <a:r>
               <a:rPr lang="en-US" sz="1700" b="1" dirty="0">
                 <a:solidFill>
-                  <a:srgbClr val="FF9E3D"/>
+                  <a:srgbClr val="E2C28A"/>
                 </a:solidFill>
                 <a:latin typeface="Arial" pitchFamily="34" charset="0"/>
                 <a:ea typeface="Arial" pitchFamily="34" charset="-122"/>
@@ -7649,7 +7649,7 @@
             <a:r>
               <a:rPr lang="en-US" sz="1250" dirty="0">
                 <a:solidFill>
-                  <a:srgbClr val="9DB0A4"/>
+                  <a:srgbClr val="B4B4B8"/>
                 </a:solidFill>
                 <a:latin typeface="Calibri" pitchFamily="34" charset="0"/>
                 <a:ea typeface="Calibri" pitchFamily="34" charset="-122"/>
@@ -7678,11 +7678,11 @@
             </a:avLst>
           </a:prstGeom>
           <a:solidFill>
-            <a:srgbClr val="152017"/>
+            <a:srgbClr val="1C1C20"/>
           </a:solidFill>
           <a:ln w="12700">
             <a:solidFill>
-              <a:srgbClr val="2C4636"/>
+              <a:srgbClr val="34343A"/>
             </a:solidFill>
             <a:prstDash val="solid"/>
           </a:ln>
@@ -7722,7 +7722,7 @@
             <a:r>
               <a:rPr lang="en-US" sz="1700" b="1" dirty="0">
                 <a:solidFill>
-                  <a:srgbClr val="27C08A"/>
+                  <a:srgbClr val="6FA8FF"/>
                 </a:solidFill>
                 <a:latin typeface="Arial" pitchFamily="34" charset="0"/>
                 <a:ea typeface="Arial" pitchFamily="34" charset="-122"/>
@@ -7761,7 +7761,7 @@
             <a:r>
               <a:rPr lang="en-US" sz="1250" dirty="0">
                 <a:solidFill>
-                  <a:srgbClr val="9DB0A4"/>
+                  <a:srgbClr val="B4B4B8"/>
                 </a:solidFill>
                 <a:latin typeface="Calibri" pitchFamily="34" charset="0"/>
                 <a:ea typeface="Calibri" pitchFamily="34" charset="-122"/>
@@ -7790,11 +7790,11 @@
             </a:avLst>
           </a:prstGeom>
           <a:solidFill>
-            <a:srgbClr val="152017"/>
+            <a:srgbClr val="1C1C20"/>
           </a:solidFill>
           <a:ln w="12700">
             <a:solidFill>
-              <a:srgbClr val="2C4636"/>
+              <a:srgbClr val="34343A"/>
             </a:solidFill>
             <a:prstDash val="solid"/>
           </a:ln>
@@ -7834,7 +7834,7 @@
             <a:r>
               <a:rPr lang="en-US" sz="1700" b="1" dirty="0">
                 <a:solidFill>
-                  <a:srgbClr val="4FE3B0"/>
+                  <a:srgbClr val="4FD68A"/>
                 </a:solidFill>
                 <a:latin typeface="Arial" pitchFamily="34" charset="0"/>
                 <a:ea typeface="Arial" pitchFamily="34" charset="-122"/>
@@ -7873,7 +7873,7 @@
             <a:r>
               <a:rPr lang="en-US" sz="1250" dirty="0">
                 <a:solidFill>
-                  <a:srgbClr val="9DB0A4"/>
+                  <a:srgbClr val="B4B4B8"/>
                 </a:solidFill>
                 <a:latin typeface="Calibri" pitchFamily="34" charset="0"/>
                 <a:ea typeface="Calibri" pitchFamily="34" charset="-122"/>
@@ -7902,11 +7902,11 @@
             </a:avLst>
           </a:prstGeom>
           <a:solidFill>
-            <a:srgbClr val="1B2A20"/>
+            <a:srgbClr val="26262B"/>
           </a:solidFill>
           <a:ln w="12700">
             <a:solidFill>
-              <a:srgbClr val="2C4636"/>
+              <a:srgbClr val="34343A"/>
             </a:solidFill>
             <a:prstDash val="solid"/>
           </a:ln>
@@ -7970,7 +7970,7 @@
             <a:r>
               <a:rPr lang="en-US" sz="1500" b="1" dirty="0">
                 <a:solidFill>
-                  <a:srgbClr val="EEF3EE"/>
+                  <a:srgbClr val="F5F5F7"/>
                 </a:solidFill>
                 <a:latin typeface="Calibri" pitchFamily="34" charset="0"/>
                 <a:ea typeface="Calibri" pitchFamily="34" charset="-122"/>
@@ -7984,7 +7984,7 @@
             <a:r>
               <a:rPr lang="en-US" sz="1500" b="1" dirty="0">
                 <a:solidFill>
-                  <a:srgbClr val="27C08A"/>
+                  <a:srgbClr val="6FA8FF"/>
                 </a:solidFill>
                 <a:latin typeface="Calibri" pitchFamily="34" charset="0"/>
                 <a:ea typeface="Calibri" pitchFamily="34" charset="-122"/>
@@ -8023,7 +8023,7 @@
             <a:r>
               <a:rPr lang="en-US" sz="1250" dirty="0">
                 <a:solidFill>
-                  <a:srgbClr val="9DB0A4"/>
+                  <a:srgbClr val="B4B4B8"/>
                 </a:solidFill>
                 <a:latin typeface="Calibri" pitchFamily="34" charset="0"/>
                 <a:ea typeface="Calibri" pitchFamily="34" charset="-122"/>
@@ -8049,7 +8049,7 @@
     <p:bg>
       <p:bgPr>
         <a:solidFill>
-          <a:srgbClr val="0B0F14"/>
+          <a:srgbClr val="101010"/>
         </a:solidFill>
       </p:bgPr>
     </p:bg>
@@ -8082,7 +8082,7 @@
             <a:avLst/>
           </a:prstGeom>
           <a:solidFill>
-            <a:srgbClr val="FF9E3D"/>
+            <a:srgbClr val="FF9933"/>
           </a:solidFill>
           <a:ln/>
         </p:spPr>
@@ -8102,7 +8102,7 @@
             <a:avLst/>
           </a:prstGeom>
           <a:solidFill>
-            <a:srgbClr val="EEF3EE"/>
+            <a:srgbClr val="FFFFFF"/>
           </a:solidFill>
           <a:ln/>
         </p:spPr>
@@ -8122,7 +8122,7 @@
             <a:avLst/>
           </a:prstGeom>
           <a:solidFill>
-            <a:srgbClr val="27C08A"/>
+            <a:srgbClr val="138808"/>
           </a:solidFill>
           <a:ln/>
         </p:spPr>
@@ -8142,7 +8142,7 @@
             <a:avLst/>
           </a:prstGeom>
           <a:solidFill>
-            <a:srgbClr val="27C08A"/>
+            <a:srgbClr val="6FA8FF"/>
           </a:solidFill>
           <a:ln/>
         </p:spPr>
@@ -8174,7 +8174,7 @@
             <a:r>
               <a:rPr lang="en-US" sz="1250" b="1" spc="200" kern="0" dirty="0">
                 <a:solidFill>
-                  <a:srgbClr val="27C08A"/>
+                  <a:srgbClr val="6FA8FF"/>
                 </a:solidFill>
                 <a:latin typeface="Arial" pitchFamily="34" charset="0"/>
                 <a:ea typeface="Arial" pitchFamily="34" charset="-122"/>
@@ -8213,7 +8213,7 @@
             <a:r>
               <a:rPr lang="en-US" sz="3000" b="1" dirty="0">
                 <a:solidFill>
-                  <a:srgbClr val="EEF3EE"/>
+                  <a:srgbClr val="F5F5F7"/>
                 </a:solidFill>
                 <a:latin typeface="Arial" pitchFamily="34" charset="0"/>
                 <a:ea typeface="Arial" pitchFamily="34" charset="-122"/>
@@ -8276,7 +8276,7 @@
             <a:r>
               <a:rPr lang="en-US" sz="1250" b="1" dirty="0">
                 <a:solidFill>
-                  <a:srgbClr val="EEF3EE"/>
+                  <a:srgbClr val="F5F5F7"/>
                 </a:solidFill>
                 <a:latin typeface="Calibri" pitchFamily="34" charset="0"/>
                 <a:ea typeface="Calibri" pitchFamily="34" charset="-122"/>
@@ -8339,7 +8339,7 @@
             <a:r>
               <a:rPr lang="en-US" sz="1250" b="1" dirty="0">
                 <a:solidFill>
-                  <a:srgbClr val="EEF3EE"/>
+                  <a:srgbClr val="F5F5F7"/>
                 </a:solidFill>
                 <a:latin typeface="Calibri" pitchFamily="34" charset="0"/>
                 <a:ea typeface="Calibri" pitchFamily="34" charset="-122"/>
@@ -8402,7 +8402,7 @@
             <a:r>
               <a:rPr lang="en-US" sz="1250" b="1" dirty="0">
                 <a:solidFill>
-                  <a:srgbClr val="EEF3EE"/>
+                  <a:srgbClr val="F5F5F7"/>
                 </a:solidFill>
                 <a:latin typeface="Calibri" pitchFamily="34" charset="0"/>
                 <a:ea typeface="Calibri" pitchFamily="34" charset="-122"/>
@@ -8465,7 +8465,7 @@
             <a:r>
               <a:rPr lang="en-US" sz="1250" b="1" dirty="0">
                 <a:solidFill>
-                  <a:srgbClr val="EEF3EE"/>
+                  <a:srgbClr val="F5F5F7"/>
                 </a:solidFill>
                 <a:latin typeface="Calibri" pitchFamily="34" charset="0"/>
                 <a:ea typeface="Calibri" pitchFamily="34" charset="-122"/>
@@ -8491,7 +8491,7 @@
     <p:bg>
       <p:bgPr>
         <a:solidFill>
-          <a:srgbClr val="0B0F14"/>
+          <a:srgbClr val="101010"/>
         </a:solidFill>
       </p:bgPr>
     </p:bg>
@@ -8524,7 +8524,7 @@
             <a:avLst/>
           </a:prstGeom>
           <a:solidFill>
-            <a:srgbClr val="FF9E3D"/>
+            <a:srgbClr val="FF9933"/>
           </a:solidFill>
           <a:ln/>
         </p:spPr>
@@ -8544,7 +8544,7 @@
             <a:avLst/>
           </a:prstGeom>
           <a:solidFill>
-            <a:srgbClr val="EEF3EE"/>
+            <a:srgbClr val="FFFFFF"/>
           </a:solidFill>
           <a:ln/>
         </p:spPr>
@@ -8564,7 +8564,7 @@
             <a:avLst/>
           </a:prstGeom>
           <a:solidFill>
-            <a:srgbClr val="27C08A"/>
+            <a:srgbClr val="138808"/>
           </a:solidFill>
           <a:ln/>
         </p:spPr>
@@ -8584,7 +8584,7 @@
             <a:avLst/>
           </a:prstGeom>
           <a:solidFill>
-            <a:srgbClr val="27C08A"/>
+            <a:srgbClr val="6FA8FF"/>
           </a:solidFill>
           <a:ln/>
         </p:spPr>
@@ -8616,7 +8616,7 @@
             <a:r>
               <a:rPr lang="en-US" sz="1250" b="1" spc="200" kern="0" dirty="0">
                 <a:solidFill>
-                  <a:srgbClr val="27C08A"/>
+                  <a:srgbClr val="6FA8FF"/>
                 </a:solidFill>
                 <a:latin typeface="Arial" pitchFamily="34" charset="0"/>
                 <a:ea typeface="Arial" pitchFamily="34" charset="-122"/>
@@ -8655,7 +8655,7 @@
             <a:r>
               <a:rPr lang="en-US" sz="3000" b="1" dirty="0">
                 <a:solidFill>
-                  <a:srgbClr val="EEF3EE"/>
+                  <a:srgbClr val="F5F5F7"/>
                 </a:solidFill>
                 <a:latin typeface="Arial" pitchFamily="34" charset="0"/>
                 <a:ea typeface="Arial" pitchFamily="34" charset="-122"/>
@@ -8684,11 +8684,11 @@
             </a:avLst>
           </a:prstGeom>
           <a:solidFill>
-            <a:srgbClr val="152017"/>
+            <a:srgbClr val="1C1C20"/>
           </a:solidFill>
           <a:ln w="12700">
             <a:solidFill>
-              <a:srgbClr val="2C4636"/>
+              <a:srgbClr val="34343A"/>
             </a:solidFill>
             <a:prstDash val="solid"/>
           </a:ln>
@@ -8718,11 +8718,11 @@
             </a:avLst>
           </a:prstGeom>
           <a:solidFill>
-            <a:srgbClr val="1B2A20"/>
+            <a:srgbClr val="26262B"/>
           </a:solidFill>
           <a:ln w="12700">
             <a:solidFill>
-              <a:srgbClr val="27C08A"/>
+              <a:srgbClr val="6FA8FF"/>
             </a:solidFill>
             <a:prstDash val="solid"/>
           </a:ln>
@@ -8755,7 +8755,7 @@
             <a:r>
               <a:rPr lang="en-US" sz="1400" b="1" dirty="0">
                 <a:solidFill>
-                  <a:srgbClr val="27C08A"/>
+                  <a:srgbClr val="6FA8FF"/>
                 </a:solidFill>
                 <a:latin typeface="Arial" pitchFamily="34" charset="0"/>
                 <a:ea typeface="Arial" pitchFamily="34" charset="-122"/>
@@ -8794,7 +8794,7 @@
             <a:r>
               <a:rPr lang="en-US" sz="1400" b="1" dirty="0">
                 <a:solidFill>
-                  <a:srgbClr val="EEF3EE"/>
+                  <a:srgbClr val="F5F5F7"/>
                 </a:solidFill>
                 <a:latin typeface="Arial" pitchFamily="34" charset="0"/>
                 <a:ea typeface="Arial" pitchFamily="34" charset="-122"/>
@@ -8833,7 +8833,7 @@
             <a:r>
               <a:rPr lang="en-US" sz="1150" dirty="0">
                 <a:solidFill>
-                  <a:srgbClr val="9DB0A4"/>
+                  <a:srgbClr val="B4B4B8"/>
                 </a:solidFill>
                 <a:latin typeface="Calibri" pitchFamily="34" charset="0"/>
                 <a:ea typeface="Calibri" pitchFamily="34" charset="-122"/>
@@ -8862,11 +8862,11 @@
             </a:avLst>
           </a:prstGeom>
           <a:solidFill>
-            <a:srgbClr val="152017"/>
+            <a:srgbClr val="1C1C20"/>
           </a:solidFill>
           <a:ln w="12700">
             <a:solidFill>
-              <a:srgbClr val="2C4636"/>
+              <a:srgbClr val="34343A"/>
             </a:solidFill>
             <a:prstDash val="solid"/>
           </a:ln>
@@ -8896,11 +8896,11 @@
             </a:avLst>
           </a:prstGeom>
           <a:solidFill>
-            <a:srgbClr val="1B2A20"/>
+            <a:srgbClr val="26262B"/>
           </a:solidFill>
           <a:ln w="12700">
             <a:solidFill>
-              <a:srgbClr val="27C08A"/>
+              <a:srgbClr val="6FA8FF"/>
             </a:solidFill>
             <a:prstDash val="solid"/>
           </a:ln>
@@ -8933,7 +8933,7 @@
             <a:r>
               <a:rPr lang="en-US" sz="1400" b="1" dirty="0">
                 <a:solidFill>
-                  <a:srgbClr val="27C08A"/>
+                  <a:srgbClr val="6FA8FF"/>
                 </a:solidFill>
                 <a:latin typeface="Arial" pitchFamily="34" charset="0"/>
                 <a:ea typeface="Arial" pitchFamily="34" charset="-122"/>
@@ -8972,7 +8972,7 @@
             <a:r>
               <a:rPr lang="en-US" sz="1400" b="1" dirty="0">
                 <a:solidFill>
-                  <a:srgbClr val="EEF3EE"/>
+                  <a:srgbClr val="F5F5F7"/>
                 </a:solidFill>
                 <a:latin typeface="Arial" pitchFamily="34" charset="0"/>
                 <a:ea typeface="Arial" pitchFamily="34" charset="-122"/>
@@ -9011,7 +9011,7 @@
             <a:r>
               <a:rPr lang="en-US" sz="1150" dirty="0">
                 <a:solidFill>
-                  <a:srgbClr val="9DB0A4"/>
+                  <a:srgbClr val="B4B4B8"/>
                 </a:solidFill>
                 <a:latin typeface="Calibri" pitchFamily="34" charset="0"/>
                 <a:ea typeface="Calibri" pitchFamily="34" charset="-122"/>
@@ -9040,11 +9040,11 @@
             </a:avLst>
           </a:prstGeom>
           <a:solidFill>
-            <a:srgbClr val="152017"/>
+            <a:srgbClr val="1C1C20"/>
           </a:solidFill>
           <a:ln w="12700">
             <a:solidFill>
-              <a:srgbClr val="2C4636"/>
+              <a:srgbClr val="34343A"/>
             </a:solidFill>
             <a:prstDash val="solid"/>
           </a:ln>
@@ -9074,11 +9074,11 @@
             </a:avLst>
           </a:prstGeom>
           <a:solidFill>
-            <a:srgbClr val="1B2A20"/>
+            <a:srgbClr val="26262B"/>
           </a:solidFill>
           <a:ln w="12700">
             <a:solidFill>
-              <a:srgbClr val="27C08A"/>
+              <a:srgbClr val="6FA8FF"/>
             </a:solidFill>
             <a:prstDash val="solid"/>
           </a:ln>
@@ -9111,7 +9111,7 @@
             <a:r>
               <a:rPr lang="en-US" sz="1400" b="1" dirty="0">
                 <a:solidFill>
-                  <a:srgbClr val="27C08A"/>
+                  <a:srgbClr val="6FA8FF"/>
                 </a:solidFill>
                 <a:latin typeface="Arial" pitchFamily="34" charset="0"/>
                 <a:ea typeface="Arial" pitchFamily="34" charset="-122"/>
@@ -9150,7 +9150,7 @@
             <a:r>
               <a:rPr lang="en-US" sz="1400" b="1" dirty="0">
                 <a:solidFill>
-                  <a:srgbClr val="EEF3EE"/>
+                  <a:srgbClr val="F5F5F7"/>
                 </a:solidFill>
                 <a:latin typeface="Arial" pitchFamily="34" charset="0"/>
                 <a:ea typeface="Arial" pitchFamily="34" charset="-122"/>
@@ -9189,7 +9189,7 @@
             <a:r>
               <a:rPr lang="en-US" sz="1150" dirty="0">
                 <a:solidFill>
-                  <a:srgbClr val="9DB0A4"/>
+                  <a:srgbClr val="B4B4B8"/>
                 </a:solidFill>
                 <a:latin typeface="Calibri" pitchFamily="34" charset="0"/>
                 <a:ea typeface="Calibri" pitchFamily="34" charset="-122"/>
@@ -9218,11 +9218,11 @@
             </a:avLst>
           </a:prstGeom>
           <a:solidFill>
-            <a:srgbClr val="152017"/>
+            <a:srgbClr val="1C1C20"/>
           </a:solidFill>
           <a:ln w="12700">
             <a:solidFill>
-              <a:srgbClr val="2C4636"/>
+              <a:srgbClr val="34343A"/>
             </a:solidFill>
             <a:prstDash val="solid"/>
           </a:ln>
@@ -9252,11 +9252,11 @@
             </a:avLst>
           </a:prstGeom>
           <a:solidFill>
-            <a:srgbClr val="1B2A20"/>
+            <a:srgbClr val="26262B"/>
           </a:solidFill>
           <a:ln w="12700">
             <a:solidFill>
-              <a:srgbClr val="27C08A"/>
+              <a:srgbClr val="6FA8FF"/>
             </a:solidFill>
             <a:prstDash val="solid"/>
           </a:ln>
@@ -9289,7 +9289,7 @@
             <a:r>
               <a:rPr lang="en-US" sz="1400" b="1" dirty="0">
                 <a:solidFill>
-                  <a:srgbClr val="27C08A"/>
+                  <a:srgbClr val="6FA8FF"/>
                 </a:solidFill>
                 <a:latin typeface="Arial" pitchFamily="34" charset="0"/>
                 <a:ea typeface="Arial" pitchFamily="34" charset="-122"/>
@@ -9328,7 +9328,7 @@
             <a:r>
               <a:rPr lang="en-US" sz="1400" b="1" dirty="0">
                 <a:solidFill>
-                  <a:srgbClr val="EEF3EE"/>
+                  <a:srgbClr val="F5F5F7"/>
                 </a:solidFill>
                 <a:latin typeface="Arial" pitchFamily="34" charset="0"/>
                 <a:ea typeface="Arial" pitchFamily="34" charset="-122"/>
@@ -9367,7 +9367,7 @@
             <a:r>
               <a:rPr lang="en-US" sz="1150" dirty="0">
                 <a:solidFill>
-                  <a:srgbClr val="9DB0A4"/>
+                  <a:srgbClr val="B4B4B8"/>
                 </a:solidFill>
                 <a:latin typeface="Calibri" pitchFamily="34" charset="0"/>
                 <a:ea typeface="Calibri" pitchFamily="34" charset="-122"/>
@@ -9396,11 +9396,11 @@
             </a:avLst>
           </a:prstGeom>
           <a:solidFill>
-            <a:srgbClr val="152017"/>
+            <a:srgbClr val="1C1C20"/>
           </a:solidFill>
           <a:ln w="12700">
             <a:solidFill>
-              <a:srgbClr val="2C4636"/>
+              <a:srgbClr val="34343A"/>
             </a:solidFill>
             <a:prstDash val="solid"/>
           </a:ln>
@@ -9430,11 +9430,11 @@
             </a:avLst>
           </a:prstGeom>
           <a:solidFill>
-            <a:srgbClr val="1B2A20"/>
+            <a:srgbClr val="26262B"/>
           </a:solidFill>
           <a:ln w="12700">
             <a:solidFill>
-              <a:srgbClr val="27C08A"/>
+              <a:srgbClr val="6FA8FF"/>
             </a:solidFill>
             <a:prstDash val="solid"/>
           </a:ln>
@@ -9467,7 +9467,7 @@
             <a:r>
               <a:rPr lang="en-US" sz="1400" b="1" dirty="0">
                 <a:solidFill>
-                  <a:srgbClr val="27C08A"/>
+                  <a:srgbClr val="6FA8FF"/>
                 </a:solidFill>
                 <a:latin typeface="Arial" pitchFamily="34" charset="0"/>
                 <a:ea typeface="Arial" pitchFamily="34" charset="-122"/>
@@ -9506,7 +9506,7 @@
             <a:r>
               <a:rPr lang="en-US" sz="1400" b="1" dirty="0">
                 <a:solidFill>
-                  <a:srgbClr val="EEF3EE"/>
+                  <a:srgbClr val="F5F5F7"/>
                 </a:solidFill>
                 <a:latin typeface="Arial" pitchFamily="34" charset="0"/>
                 <a:ea typeface="Arial" pitchFamily="34" charset="-122"/>
@@ -9545,7 +9545,7 @@
             <a:r>
               <a:rPr lang="en-US" sz="1150" dirty="0">
                 <a:solidFill>
-                  <a:srgbClr val="9DB0A4"/>
+                  <a:srgbClr val="B4B4B8"/>
                 </a:solidFill>
                 <a:latin typeface="Calibri" pitchFamily="34" charset="0"/>
                 <a:ea typeface="Calibri" pitchFamily="34" charset="-122"/>
@@ -9574,11 +9574,11 @@
             </a:avLst>
           </a:prstGeom>
           <a:solidFill>
-            <a:srgbClr val="152017"/>
+            <a:srgbClr val="1C1C20"/>
           </a:solidFill>
           <a:ln w="12700">
             <a:solidFill>
-              <a:srgbClr val="2C4636"/>
+              <a:srgbClr val="34343A"/>
             </a:solidFill>
             <a:prstDash val="solid"/>
           </a:ln>
@@ -9608,11 +9608,11 @@
             </a:avLst>
           </a:prstGeom>
           <a:solidFill>
-            <a:srgbClr val="1B2A20"/>
+            <a:srgbClr val="26262B"/>
           </a:solidFill>
           <a:ln w="12700">
             <a:solidFill>
-              <a:srgbClr val="27C08A"/>
+              <a:srgbClr val="6FA8FF"/>
             </a:solidFill>
             <a:prstDash val="solid"/>
           </a:ln>
@@ -9645,7 +9645,7 @@
             <a:r>
               <a:rPr lang="en-US" sz="1400" b="1" dirty="0">
                 <a:solidFill>
-                  <a:srgbClr val="27C08A"/>
+                  <a:srgbClr val="6FA8FF"/>
                 </a:solidFill>
                 <a:latin typeface="Arial" pitchFamily="34" charset="0"/>
                 <a:ea typeface="Arial" pitchFamily="34" charset="-122"/>
@@ -9684,7 +9684,7 @@
             <a:r>
               <a:rPr lang="en-US" sz="1400" b="1" dirty="0">
                 <a:solidFill>
-                  <a:srgbClr val="EEF3EE"/>
+                  <a:srgbClr val="F5F5F7"/>
                 </a:solidFill>
                 <a:latin typeface="Arial" pitchFamily="34" charset="0"/>
                 <a:ea typeface="Arial" pitchFamily="34" charset="-122"/>
@@ -9723,7 +9723,7 @@
             <a:r>
               <a:rPr lang="en-US" sz="1150" dirty="0">
                 <a:solidFill>
-                  <a:srgbClr val="9DB0A4"/>
+                  <a:srgbClr val="B4B4B8"/>
                 </a:solidFill>
                 <a:latin typeface="Calibri" pitchFamily="34" charset="0"/>
                 <a:ea typeface="Calibri" pitchFamily="34" charset="-122"/>
@@ -9749,7 +9749,7 @@
     <p:bg>
       <p:bgPr>
         <a:solidFill>
-          <a:srgbClr val="0B0F14"/>
+          <a:srgbClr val="101010"/>
         </a:solidFill>
       </p:bgPr>
     </p:bg>
@@ -9782,7 +9782,7 @@
             <a:avLst/>
           </a:prstGeom>
           <a:solidFill>
-            <a:srgbClr val="FF9E3D"/>
+            <a:srgbClr val="FF9933"/>
           </a:solidFill>
           <a:ln/>
         </p:spPr>
@@ -9802,7 +9802,7 @@
             <a:avLst/>
           </a:prstGeom>
           <a:solidFill>
-            <a:srgbClr val="EEF3EE"/>
+            <a:srgbClr val="FFFFFF"/>
           </a:solidFill>
           <a:ln/>
         </p:spPr>
@@ -9822,7 +9822,7 @@
             <a:avLst/>
           </a:prstGeom>
           <a:solidFill>
-            <a:srgbClr val="27C08A"/>
+            <a:srgbClr val="138808"/>
           </a:solidFill>
           <a:ln/>
         </p:spPr>
@@ -9842,7 +9842,7 @@
             <a:avLst/>
           </a:prstGeom>
           <a:solidFill>
-            <a:srgbClr val="27C08A"/>
+            <a:srgbClr val="6FA8FF"/>
           </a:solidFill>
           <a:ln/>
         </p:spPr>
@@ -9874,7 +9874,7 @@
             <a:r>
               <a:rPr lang="en-US" sz="1250" b="1" spc="200" kern="0" dirty="0">
                 <a:solidFill>
-                  <a:srgbClr val="27C08A"/>
+                  <a:srgbClr val="6FA8FF"/>
                 </a:solidFill>
                 <a:latin typeface="Arial" pitchFamily="34" charset="0"/>
                 <a:ea typeface="Arial" pitchFamily="34" charset="-122"/>
@@ -9913,7 +9913,7 @@
             <a:r>
               <a:rPr lang="en-US" sz="3000" b="1" dirty="0">
                 <a:solidFill>
-                  <a:srgbClr val="EEF3EE"/>
+                  <a:srgbClr val="F5F5F7"/>
                 </a:solidFill>
                 <a:latin typeface="Arial" pitchFamily="34" charset="0"/>
                 <a:ea typeface="Arial" pitchFamily="34" charset="-122"/>
@@ -9942,11 +9942,11 @@
             </a:avLst>
           </a:prstGeom>
           <a:solidFill>
-            <a:srgbClr val="152017"/>
+            <a:srgbClr val="1C1C20"/>
           </a:solidFill>
           <a:ln w="12700">
             <a:solidFill>
-              <a:srgbClr val="2C4636"/>
+              <a:srgbClr val="34343A"/>
             </a:solidFill>
             <a:prstDash val="solid"/>
           </a:ln>
@@ -9986,7 +9986,7 @@
             <a:r>
               <a:rPr lang="en-US" sz="1600" b="1" dirty="0">
                 <a:solidFill>
-                  <a:srgbClr val="FF9E3D"/>
+                  <a:srgbClr val="E2C28A"/>
                 </a:solidFill>
                 <a:latin typeface="Arial" pitchFamily="34" charset="0"/>
                 <a:ea typeface="Arial" pitchFamily="34" charset="-122"/>
@@ -10025,7 +10025,7 @@
             <a:r>
               <a:rPr lang="en-US" sz="1250" dirty="0">
                 <a:solidFill>
-                  <a:srgbClr val="9DB0A4"/>
+                  <a:srgbClr val="B4B4B8"/>
                 </a:solidFill>
                 <a:latin typeface="Calibri" pitchFamily="34" charset="0"/>
                 <a:ea typeface="Calibri" pitchFamily="34" charset="-122"/>
@@ -10054,11 +10054,11 @@
             </a:avLst>
           </a:prstGeom>
           <a:solidFill>
-            <a:srgbClr val="152017"/>
+            <a:srgbClr val="1C1C20"/>
           </a:solidFill>
           <a:ln w="12700">
             <a:solidFill>
-              <a:srgbClr val="2C4636"/>
+              <a:srgbClr val="34343A"/>
             </a:solidFill>
             <a:prstDash val="solid"/>
           </a:ln>
@@ -10098,7 +10098,7 @@
             <a:r>
               <a:rPr lang="en-US" sz="1600" b="1" dirty="0">
                 <a:solidFill>
-                  <a:srgbClr val="27C08A"/>
+                  <a:srgbClr val="6FA8FF"/>
                 </a:solidFill>
                 <a:latin typeface="Arial" pitchFamily="34" charset="0"/>
                 <a:ea typeface="Arial" pitchFamily="34" charset="-122"/>
@@ -10137,7 +10137,7 @@
             <a:r>
               <a:rPr lang="en-US" sz="1250" dirty="0">
                 <a:solidFill>
-                  <a:srgbClr val="9DB0A4"/>
+                  <a:srgbClr val="B4B4B8"/>
                 </a:solidFill>
                 <a:latin typeface="Calibri" pitchFamily="34" charset="0"/>
                 <a:ea typeface="Calibri" pitchFamily="34" charset="-122"/>
@@ -10166,11 +10166,11 @@
             </a:avLst>
           </a:prstGeom>
           <a:solidFill>
-            <a:srgbClr val="152017"/>
+            <a:srgbClr val="1C1C20"/>
           </a:solidFill>
           <a:ln w="12700">
             <a:solidFill>
-              <a:srgbClr val="2C4636"/>
+              <a:srgbClr val="34343A"/>
             </a:solidFill>
             <a:prstDash val="solid"/>
           </a:ln>
@@ -10210,7 +10210,7 @@
             <a:r>
               <a:rPr lang="en-US" sz="1600" b="1" dirty="0">
                 <a:solidFill>
-                  <a:srgbClr val="4FE3B0"/>
+                  <a:srgbClr val="4FD68A"/>
                 </a:solidFill>
                 <a:latin typeface="Arial" pitchFamily="34" charset="0"/>
                 <a:ea typeface="Arial" pitchFamily="34" charset="-122"/>
@@ -10249,7 +10249,7 @@
             <a:r>
               <a:rPr lang="en-US" sz="1250" dirty="0">
                 <a:solidFill>
-                  <a:srgbClr val="9DB0A4"/>
+                  <a:srgbClr val="B4B4B8"/>
                 </a:solidFill>
                 <a:latin typeface="Calibri" pitchFamily="34" charset="0"/>
                 <a:ea typeface="Calibri" pitchFamily="34" charset="-122"/>
@@ -10278,11 +10278,11 @@
             </a:avLst>
           </a:prstGeom>
           <a:solidFill>
-            <a:srgbClr val="1B2A20"/>
+            <a:srgbClr val="26262B"/>
           </a:solidFill>
           <a:ln w="12700">
             <a:solidFill>
-              <a:srgbClr val="2C4636"/>
+              <a:srgbClr val="34343A"/>
             </a:solidFill>
             <a:prstDash val="solid"/>
           </a:ln>
@@ -10324,7 +10324,7 @@
             <a:r>
               <a:rPr lang="en-US" sz="1300" dirty="0">
                 <a:solidFill>
-                  <a:srgbClr val="EEF3EE"/>
+                  <a:srgbClr val="F5F5F7"/>
                 </a:solidFill>
                 <a:latin typeface="Calibri" pitchFamily="34" charset="0"/>
                 <a:ea typeface="Calibri" pitchFamily="34" charset="-122"/>
@@ -10363,7 +10363,7 @@
             <a:r>
               <a:rPr lang="en-US" sz="950" dirty="0">
                 <a:solidFill>
-                  <a:srgbClr val="6E8579"/>
+                  <a:srgbClr val="7E7E84"/>
                 </a:solidFill>
                 <a:latin typeface="Calibri" pitchFamily="34" charset="0"/>
                 <a:ea typeface="Calibri" pitchFamily="34" charset="-122"/>
@@ -10389,7 +10389,7 @@
     <p:bg>
       <p:bgPr>
         <a:solidFill>
-          <a:srgbClr val="0B0F14"/>
+          <a:srgbClr val="101010"/>
         </a:solidFill>
       </p:bgPr>
     </p:bg>
@@ -10422,7 +10422,7 @@
             <a:avLst/>
           </a:prstGeom>
           <a:solidFill>
-            <a:srgbClr val="FF9E3D"/>
+            <a:srgbClr val="FF9933"/>
           </a:solidFill>
           <a:ln/>
         </p:spPr>
@@ -10442,7 +10442,7 @@
             <a:avLst/>
           </a:prstGeom>
           <a:solidFill>
-            <a:srgbClr val="EEF3EE"/>
+            <a:srgbClr val="FFFFFF"/>
           </a:solidFill>
           <a:ln/>
         </p:spPr>
@@ -10462,7 +10462,7 @@
             <a:avLst/>
           </a:prstGeom>
           <a:solidFill>
-            <a:srgbClr val="27C08A"/>
+            <a:srgbClr val="138808"/>
           </a:solidFill>
           <a:ln/>
         </p:spPr>
@@ -10482,7 +10482,7 @@
             <a:avLst/>
           </a:prstGeom>
           <a:solidFill>
-            <a:srgbClr val="27C08A"/>
+            <a:srgbClr val="6FA8FF"/>
           </a:solidFill>
           <a:ln/>
         </p:spPr>
@@ -10514,7 +10514,7 @@
             <a:r>
               <a:rPr lang="en-US" sz="1250" b="1" spc="200" kern="0" dirty="0">
                 <a:solidFill>
-                  <a:srgbClr val="27C08A"/>
+                  <a:srgbClr val="6FA8FF"/>
                 </a:solidFill>
                 <a:latin typeface="Arial" pitchFamily="34" charset="0"/>
                 <a:ea typeface="Arial" pitchFamily="34" charset="-122"/>
@@ -10553,7 +10553,7 @@
             <a:r>
               <a:rPr lang="en-US" sz="3000" b="1" dirty="0">
                 <a:solidFill>
-                  <a:srgbClr val="EEF3EE"/>
+                  <a:srgbClr val="F5F5F7"/>
                 </a:solidFill>
                 <a:latin typeface="Arial" pitchFamily="34" charset="0"/>
                 <a:ea typeface="Arial" pitchFamily="34" charset="-122"/>
@@ -10604,7 +10604,7 @@
                       <a:r>
                         <a:rPr lang="en-US" sz="1200" b="1" dirty="0">
                           <a:solidFill>
-                            <a:srgbClr val="EEF3EE"/>
+                            <a:srgbClr val="F5F5F7"/>
                           </a:solidFill>
                           <a:latin typeface="Arial" pitchFamily="34" charset="0"/>
                           <a:ea typeface="Arial" pitchFamily="34" charset="-122"/>
@@ -10622,7 +10622,7 @@
                   <a:tcPr marL="73152" marR="73152" marT="73152" marB="73152" anchor="ctr">
                     <a:lnL w="12700" cap="flat" cmpd="sng" algn="ctr">
                       <a:solidFill>
-                        <a:srgbClr val="2C4636"/>
+                        <a:srgbClr val="34343A"/>
                       </a:solidFill>
                       <a:prstDash val="solid"/>
                       <a:round/>
@@ -10631,7 +10631,7 @@
                     </a:lnL>
                     <a:lnR w="12700" cap="flat" cmpd="sng" algn="ctr">
                       <a:solidFill>
-                        <a:srgbClr val="2C4636"/>
+                        <a:srgbClr val="34343A"/>
                       </a:solidFill>
                       <a:prstDash val="solid"/>
                       <a:round/>
@@ -10640,7 +10640,7 @@
                     </a:lnR>
                     <a:lnT w="12700" cap="flat" cmpd="sng" algn="ctr">
                       <a:solidFill>
-                        <a:srgbClr val="2C4636"/>
+                        <a:srgbClr val="34343A"/>
                       </a:solidFill>
                       <a:prstDash val="solid"/>
                       <a:round/>
@@ -10649,7 +10649,7 @@
                     </a:lnT>
                     <a:lnB w="12700" cap="flat" cmpd="sng" algn="ctr">
                       <a:solidFill>
-                        <a:srgbClr val="2C4636"/>
+                        <a:srgbClr val="34343A"/>
                       </a:solidFill>
                       <a:prstDash val="solid"/>
                       <a:round/>
@@ -10657,7 +10657,7 @@
                       <a:tailEnd type="none" w="med" len="med"/>
                     </a:lnB>
                     <a:solidFill>
-                      <a:srgbClr val="1B2A20"/>
+                      <a:srgbClr val="26262B"/>
                     </a:solidFill>
                   </a:tcPr>
                 </a:tc>
@@ -10672,7 +10672,7 @@
                       <a:r>
                         <a:rPr lang="en-US" sz="1200" b="1" dirty="0">
                           <a:solidFill>
-                            <a:srgbClr val="EEF3EE"/>
+                            <a:srgbClr val="F5F5F7"/>
                           </a:solidFill>
                           <a:latin typeface="Arial" pitchFamily="34" charset="0"/>
                           <a:ea typeface="Arial" pitchFamily="34" charset="-122"/>
@@ -10690,7 +10690,7 @@
                   <a:tcPr marL="73152" marR="73152" marT="73152" marB="73152" anchor="ctr">
                     <a:lnL w="12700" cap="flat" cmpd="sng" algn="ctr">
                       <a:solidFill>
-                        <a:srgbClr val="2C4636"/>
+                        <a:srgbClr val="34343A"/>
                       </a:solidFill>
                       <a:prstDash val="solid"/>
                       <a:round/>
@@ -10699,7 +10699,7 @@
                     </a:lnL>
                     <a:lnR w="12700" cap="flat" cmpd="sng" algn="ctr">
                       <a:solidFill>
-                        <a:srgbClr val="2C4636"/>
+                        <a:srgbClr val="34343A"/>
                       </a:solidFill>
                       <a:prstDash val="solid"/>
                       <a:round/>
@@ -10708,7 +10708,7 @@
                     </a:lnR>
                     <a:lnT w="12700" cap="flat" cmpd="sng" algn="ctr">
                       <a:solidFill>
-                        <a:srgbClr val="2C4636"/>
+                        <a:srgbClr val="34343A"/>
                       </a:solidFill>
                       <a:prstDash val="solid"/>
                       <a:round/>
@@ -10717,7 +10717,7 @@
                     </a:lnT>
                     <a:lnB w="12700" cap="flat" cmpd="sng" algn="ctr">
                       <a:solidFill>
-                        <a:srgbClr val="2C4636"/>
+                        <a:srgbClr val="34343A"/>
                       </a:solidFill>
                       <a:prstDash val="solid"/>
                       <a:round/>
@@ -10725,7 +10725,7 @@
                       <a:tailEnd type="none" w="med" len="med"/>
                     </a:lnB>
                     <a:solidFill>
-                      <a:srgbClr val="1B2A20"/>
+                      <a:srgbClr val="26262B"/>
                     </a:solidFill>
                   </a:tcPr>
                 </a:tc>
@@ -10740,7 +10740,7 @@
                       <a:r>
                         <a:rPr lang="en-US" sz="1200" b="1" dirty="0">
                           <a:solidFill>
-                            <a:srgbClr val="EEF3EE"/>
+                            <a:srgbClr val="F5F5F7"/>
                           </a:solidFill>
                           <a:latin typeface="Arial" pitchFamily="34" charset="0"/>
                           <a:ea typeface="Arial" pitchFamily="34" charset="-122"/>
@@ -10758,7 +10758,7 @@
                   <a:tcPr marL="73152" marR="73152" marT="73152" marB="73152" anchor="ctr">
                     <a:lnL w="12700" cap="flat" cmpd="sng" algn="ctr">
                       <a:solidFill>
-                        <a:srgbClr val="2C4636"/>
+                        <a:srgbClr val="34343A"/>
                       </a:solidFill>
                       <a:prstDash val="solid"/>
                       <a:round/>
@@ -10767,7 +10767,7 @@
                     </a:lnL>
                     <a:lnR w="12700" cap="flat" cmpd="sng" algn="ctr">
                       <a:solidFill>
-                        <a:srgbClr val="2C4636"/>
+                        <a:srgbClr val="34343A"/>
                       </a:solidFill>
                       <a:prstDash val="solid"/>
                       <a:round/>
@@ -10776,7 +10776,7 @@
                     </a:lnR>
                     <a:lnT w="12700" cap="flat" cmpd="sng" algn="ctr">
                       <a:solidFill>
-                        <a:srgbClr val="2C4636"/>
+                        <a:srgbClr val="34343A"/>
                       </a:solidFill>
                       <a:prstDash val="solid"/>
                       <a:round/>
@@ -10785,7 +10785,7 @@
                     </a:lnT>
                     <a:lnB w="12700" cap="flat" cmpd="sng" algn="ctr">
                       <a:solidFill>
-                        <a:srgbClr val="2C4636"/>
+                        <a:srgbClr val="34343A"/>
                       </a:solidFill>
                       <a:prstDash val="solid"/>
                       <a:round/>
@@ -10793,7 +10793,7 @@
                       <a:tailEnd type="none" w="med" len="med"/>
                     </a:lnB>
                     <a:solidFill>
-                      <a:srgbClr val="1B2A20"/>
+                      <a:srgbClr val="26262B"/>
                     </a:solidFill>
                   </a:tcPr>
                 </a:tc>
@@ -10810,7 +10810,7 @@
                       <a:r>
                         <a:rPr lang="en-US" sz="1150" dirty="0">
                           <a:solidFill>
-                            <a:srgbClr val="EEF3EE"/>
+                            <a:srgbClr val="F5F5F7"/>
                           </a:solidFill>
                           <a:latin typeface="Calibri" pitchFamily="34" charset="0"/>
                           <a:ea typeface="Calibri" pitchFamily="34" charset="-122"/>
@@ -10828,7 +10828,7 @@
                   <a:tcPr marL="73152" marR="73152" marT="73152" marB="73152" anchor="ctr">
                     <a:lnL w="12700" cap="flat" cmpd="sng" algn="ctr">
                       <a:solidFill>
-                        <a:srgbClr val="2C4636"/>
+                        <a:srgbClr val="34343A"/>
                       </a:solidFill>
                       <a:prstDash val="solid"/>
                       <a:round/>
@@ -10837,7 +10837,7 @@
                     </a:lnL>
                     <a:lnR w="12700" cap="flat" cmpd="sng" algn="ctr">
                       <a:solidFill>
-                        <a:srgbClr val="2C4636"/>
+                        <a:srgbClr val="34343A"/>
                       </a:solidFill>
                       <a:prstDash val="solid"/>
                       <a:round/>
@@ -10846,7 +10846,7 @@
                     </a:lnR>
                     <a:lnT w="12700" cap="flat" cmpd="sng" algn="ctr">
                       <a:solidFill>
-                        <a:srgbClr val="2C4636"/>
+                        <a:srgbClr val="34343A"/>
                       </a:solidFill>
                       <a:prstDash val="solid"/>
                       <a:round/>
@@ -10855,7 +10855,7 @@
                     </a:lnT>
                     <a:lnB w="12700" cap="flat" cmpd="sng" algn="ctr">
                       <a:solidFill>
-                        <a:srgbClr val="2C4636"/>
+                        <a:srgbClr val="34343A"/>
                       </a:solidFill>
                       <a:prstDash val="solid"/>
                       <a:round/>
@@ -10863,7 +10863,7 @@
                       <a:tailEnd type="none" w="med" len="med"/>
                     </a:lnB>
                     <a:solidFill>
-                      <a:srgbClr val="152017"/>
+                      <a:srgbClr val="1C1C20"/>
                     </a:solidFill>
                   </a:tcPr>
                 </a:tc>
@@ -10878,7 +10878,7 @@
                       <a:r>
                         <a:rPr lang="en-US" sz="1150" dirty="0">
                           <a:solidFill>
-                            <a:srgbClr val="9DB0A4"/>
+                            <a:srgbClr val="B4B4B8"/>
                           </a:solidFill>
                           <a:latin typeface="Calibri" pitchFamily="34" charset="0"/>
                           <a:ea typeface="Calibri" pitchFamily="34" charset="-122"/>
@@ -10896,7 +10896,7 @@
                   <a:tcPr marL="73152" marR="73152" marT="73152" marB="73152" anchor="ctr">
                     <a:lnL w="12700" cap="flat" cmpd="sng" algn="ctr">
                       <a:solidFill>
-                        <a:srgbClr val="2C4636"/>
+                        <a:srgbClr val="34343A"/>
                       </a:solidFill>
                       <a:prstDash val="solid"/>
                       <a:round/>
@@ -10905,7 +10905,7 @@
                     </a:lnL>
                     <a:lnR w="12700" cap="flat" cmpd="sng" algn="ctr">
                       <a:solidFill>
-                        <a:srgbClr val="2C4636"/>
+                        <a:srgbClr val="34343A"/>
                       </a:solidFill>
                       <a:prstDash val="solid"/>
                       <a:round/>
@@ -10914,7 +10914,7 @@
                     </a:lnR>
                     <a:lnT w="12700" cap="flat" cmpd="sng" algn="ctr">
                       <a:solidFill>
-                        <a:srgbClr val="2C4636"/>
+                        <a:srgbClr val="34343A"/>
                       </a:solidFill>
                       <a:prstDash val="solid"/>
                       <a:round/>
@@ -10923,7 +10923,7 @@
                     </a:lnT>
                     <a:lnB w="12700" cap="flat" cmpd="sng" algn="ctr">
                       <a:solidFill>
-                        <a:srgbClr val="2C4636"/>
+                        <a:srgbClr val="34343A"/>
                       </a:solidFill>
                       <a:prstDash val="solid"/>
                       <a:round/>
@@ -10931,7 +10931,7 @@
                       <a:tailEnd type="none" w="med" len="med"/>
                     </a:lnB>
                     <a:solidFill>
-                      <a:srgbClr val="152017"/>
+                      <a:srgbClr val="1C1C20"/>
                     </a:solidFill>
                   </a:tcPr>
                 </a:tc>
@@ -10946,7 +10946,7 @@
                       <a:r>
                         <a:rPr lang="en-US" sz="1150" dirty="0">
                           <a:solidFill>
-                            <a:srgbClr val="9DB0A4"/>
+                            <a:srgbClr val="B4B4B8"/>
                           </a:solidFill>
                           <a:latin typeface="Calibri" pitchFamily="34" charset="0"/>
                           <a:ea typeface="Calibri" pitchFamily="34" charset="-122"/>
@@ -10964,7 +10964,7 @@
                   <a:tcPr marL="73152" marR="73152" marT="73152" marB="73152" anchor="ctr">
                     <a:lnL w="12700" cap="flat" cmpd="sng" algn="ctr">
                       <a:solidFill>
-                        <a:srgbClr val="2C4636"/>
+                        <a:srgbClr val="34343A"/>
                       </a:solidFill>
                       <a:prstDash val="solid"/>
                       <a:round/>
@@ -10973,7 +10973,7 @@
                     </a:lnL>
                     <a:lnR w="12700" cap="flat" cmpd="sng" algn="ctr">
                       <a:solidFill>
-                        <a:srgbClr val="2C4636"/>
+                        <a:srgbClr val="34343A"/>
                       </a:solidFill>
                       <a:prstDash val="solid"/>
                       <a:round/>
@@ -10982,7 +10982,7 @@
                     </a:lnR>
                     <a:lnT w="12700" cap="flat" cmpd="sng" algn="ctr">
                       <a:solidFill>
-                        <a:srgbClr val="2C4636"/>
+                        <a:srgbClr val="34343A"/>
                       </a:solidFill>
                       <a:prstDash val="solid"/>
                       <a:round/>
@@ -10991,7 +10991,7 @@
                     </a:lnT>
                     <a:lnB w="12700" cap="flat" cmpd="sng" algn="ctr">
                       <a:solidFill>
-                        <a:srgbClr val="2C4636"/>
+                        <a:srgbClr val="34343A"/>
                       </a:solidFill>
                       <a:prstDash val="solid"/>
                       <a:round/>
@@ -10999,7 +10999,7 @@
                       <a:tailEnd type="none" w="med" len="med"/>
                     </a:lnB>
                     <a:solidFill>
-                      <a:srgbClr val="152017"/>
+                      <a:srgbClr val="1C1C20"/>
                     </a:solidFill>
                   </a:tcPr>
                 </a:tc>
@@ -11016,7 +11016,7 @@
                       <a:r>
                         <a:rPr lang="en-US" sz="1150" dirty="0">
                           <a:solidFill>
-                            <a:srgbClr val="EEF3EE"/>
+                            <a:srgbClr val="F5F5F7"/>
                           </a:solidFill>
                           <a:latin typeface="Calibri" pitchFamily="34" charset="0"/>
                           <a:ea typeface="Calibri" pitchFamily="34" charset="-122"/>
@@ -11034,7 +11034,7 @@
                   <a:tcPr marL="73152" marR="73152" marT="73152" marB="73152" anchor="ctr">
                     <a:lnL w="12700" cap="flat" cmpd="sng" algn="ctr">
                       <a:solidFill>
-                        <a:srgbClr val="2C4636"/>
+                        <a:srgbClr val="34343A"/>
                       </a:solidFill>
                       <a:prstDash val="solid"/>
                       <a:round/>
@@ -11043,7 +11043,7 @@
                     </a:lnL>
                     <a:lnR w="12700" cap="flat" cmpd="sng" algn="ctr">
                       <a:solidFill>
-                        <a:srgbClr val="2C4636"/>
+                        <a:srgbClr val="34343A"/>
                       </a:solidFill>
                       <a:prstDash val="solid"/>
                       <a:round/>
@@ -11052,7 +11052,7 @@
                     </a:lnR>
                     <a:lnT w="12700" cap="flat" cmpd="sng" algn="ctr">
                       <a:solidFill>
-                        <a:srgbClr val="2C4636"/>
+                        <a:srgbClr val="34343A"/>
                       </a:solidFill>
                       <a:prstDash val="solid"/>
                       <a:round/>
@@ -11061,7 +11061,7 @@
                     </a:lnT>
                     <a:lnB w="12700" cap="flat" cmpd="sng" algn="ctr">
                       <a:solidFill>
-                        <a:srgbClr val="2C4636"/>
+                        <a:srgbClr val="34343A"/>
                       </a:solidFill>
                       <a:prstDash val="solid"/>
                       <a:round/>
@@ -11069,7 +11069,7 @@
                       <a:tailEnd type="none" w="med" len="med"/>
                     </a:lnB>
                     <a:solidFill>
-                      <a:srgbClr val="152017"/>
+                      <a:srgbClr val="1C1C20"/>
                     </a:solidFill>
                   </a:tcPr>
                 </a:tc>
@@ -11084,7 +11084,7 @@
                       <a:r>
                         <a:rPr lang="en-US" sz="1150" dirty="0">
                           <a:solidFill>
-                            <a:srgbClr val="9DB0A4"/>
+                            <a:srgbClr val="B4B4B8"/>
                           </a:solidFill>
                           <a:latin typeface="Calibri" pitchFamily="34" charset="0"/>
                           <a:ea typeface="Calibri" pitchFamily="34" charset="-122"/>
@@ -11102,7 +11102,7 @@
                   <a:tcPr marL="73152" marR="73152" marT="73152" marB="73152" anchor="ctr">
                     <a:lnL w="12700" cap="flat" cmpd="sng" algn="ctr">
                       <a:solidFill>
-                        <a:srgbClr val="2C4636"/>
+                        <a:srgbClr val="34343A"/>
                       </a:solidFill>
                       <a:prstDash val="solid"/>
                       <a:round/>
@@ -11111,7 +11111,7 @@
                     </a:lnL>
                     <a:lnR w="12700" cap="flat" cmpd="sng" algn="ctr">
                       <a:solidFill>
-                        <a:srgbClr val="2C4636"/>
+                        <a:srgbClr val="34343A"/>
                       </a:solidFill>
                       <a:prstDash val="solid"/>
                       <a:round/>
@@ -11120,7 +11120,7 @@
                     </a:lnR>
                     <a:lnT w="12700" cap="flat" cmpd="sng" algn="ctr">
                       <a:solidFill>
-                        <a:srgbClr val="2C4636"/>
+                        <a:srgbClr val="34343A"/>
                       </a:solidFill>
                       <a:prstDash val="solid"/>
                       <a:round/>
@@ -11129,7 +11129,7 @@
                     </a:lnT>
                     <a:lnB w="12700" cap="flat" cmpd="sng" algn="ctr">
                       <a:solidFill>
-                        <a:srgbClr val="2C4636"/>
+                        <a:srgbClr val="34343A"/>
                       </a:solidFill>
                       <a:prstDash val="solid"/>
                       <a:round/>
@@ -11137,7 +11137,7 @@
                       <a:tailEnd type="none" w="med" len="med"/>
                     </a:lnB>
                     <a:solidFill>
-                      <a:srgbClr val="152017"/>
+                      <a:srgbClr val="1C1C20"/>
                     </a:solidFill>
                   </a:tcPr>
                 </a:tc>
@@ -11152,7 +11152,7 @@
                       <a:r>
                         <a:rPr lang="en-US" sz="1150" dirty="0">
                           <a:solidFill>
-                            <a:srgbClr val="9DB0A4"/>
+                            <a:srgbClr val="B4B4B8"/>
                           </a:solidFill>
                           <a:latin typeface="Calibri" pitchFamily="34" charset="0"/>
                           <a:ea typeface="Calibri" pitchFamily="34" charset="-122"/>
@@ -11170,7 +11170,7 @@
                   <a:tcPr marL="73152" marR="73152" marT="73152" marB="73152" anchor="ctr">
                     <a:lnL w="12700" cap="flat" cmpd="sng" algn="ctr">
                       <a:solidFill>
-                        <a:srgbClr val="2C4636"/>
+                        <a:srgbClr val="34343A"/>
                       </a:solidFill>
                       <a:prstDash val="solid"/>
                       <a:round/>
@@ -11179,7 +11179,7 @@
                     </a:lnL>
                     <a:lnR w="12700" cap="flat" cmpd="sng" algn="ctr">
                       <a:solidFill>
-                        <a:srgbClr val="2C4636"/>
+                        <a:srgbClr val="34343A"/>
                       </a:solidFill>
                       <a:prstDash val="solid"/>
                       <a:round/>
@@ -11188,7 +11188,7 @@
                     </a:lnR>
                     <a:lnT w="12700" cap="flat" cmpd="sng" algn="ctr">
                       <a:solidFill>
-                        <a:srgbClr val="2C4636"/>
+                        <a:srgbClr val="34343A"/>
                       </a:solidFill>
                       <a:prstDash val="solid"/>
                       <a:round/>
@@ -11197,7 +11197,7 @@
                     </a:lnT>
                     <a:lnB w="12700" cap="flat" cmpd="sng" algn="ctr">
                       <a:solidFill>
-                        <a:srgbClr val="2C4636"/>
+                        <a:srgbClr val="34343A"/>
                       </a:solidFill>
                       <a:prstDash val="solid"/>
                       <a:round/>
@@ -11205,7 +11205,7 @@
                       <a:tailEnd type="none" w="med" len="med"/>
                     </a:lnB>
                     <a:solidFill>
-                      <a:srgbClr val="152017"/>
+                      <a:srgbClr val="1C1C20"/>
                     </a:solidFill>
                   </a:tcPr>
                 </a:tc>
@@ -11222,7 +11222,7 @@
                       <a:r>
                         <a:rPr lang="en-US" sz="1150" dirty="0">
                           <a:solidFill>
-                            <a:srgbClr val="EEF3EE"/>
+                            <a:srgbClr val="F5F5F7"/>
                           </a:solidFill>
                           <a:latin typeface="Calibri" pitchFamily="34" charset="0"/>
                           <a:ea typeface="Calibri" pitchFamily="34" charset="-122"/>
@@ -11240,7 +11240,7 @@
                   <a:tcPr marL="73152" marR="73152" marT="73152" marB="73152" anchor="ctr">
                     <a:lnL w="12700" cap="flat" cmpd="sng" algn="ctr">
                       <a:solidFill>
-                        <a:srgbClr val="2C4636"/>
+                        <a:srgbClr val="34343A"/>
                       </a:solidFill>
                       <a:prstDash val="solid"/>
                       <a:round/>
@@ -11249,7 +11249,7 @@
                     </a:lnL>
                     <a:lnR w="12700" cap="flat" cmpd="sng" algn="ctr">
                       <a:solidFill>
-                        <a:srgbClr val="2C4636"/>
+                        <a:srgbClr val="34343A"/>
                       </a:solidFill>
                       <a:prstDash val="solid"/>
                       <a:round/>
@@ -11258,7 +11258,7 @@
                     </a:lnR>
                     <a:lnT w="12700" cap="flat" cmpd="sng" algn="ctr">
                       <a:solidFill>
-                        <a:srgbClr val="2C4636"/>
+                        <a:srgbClr val="34343A"/>
                       </a:solidFill>
                       <a:prstDash val="solid"/>
                       <a:round/>
@@ -11267,7 +11267,7 @@
                     </a:lnT>
                     <a:lnB w="12700" cap="flat" cmpd="sng" algn="ctr">
                       <a:solidFill>
-                        <a:srgbClr val="2C4636"/>
+                        <a:srgbClr val="34343A"/>
                       </a:solidFill>
                       <a:prstDash val="solid"/>
                       <a:round/>
@@ -11275,7 +11275,7 @@
                       <a:tailEnd type="none" w="med" len="med"/>
                     </a:lnB>
                     <a:solidFill>
-                      <a:srgbClr val="152017"/>
+                      <a:srgbClr val="1C1C20"/>
                     </a:solidFill>
                   </a:tcPr>
                 </a:tc>
@@ -11290,7 +11290,7 @@
                       <a:r>
                         <a:rPr lang="en-US" sz="1150" dirty="0">
                           <a:solidFill>
-                            <a:srgbClr val="9DB0A4"/>
+                            <a:srgbClr val="B4B4B8"/>
                           </a:solidFill>
                           <a:latin typeface="Calibri" pitchFamily="34" charset="0"/>
                           <a:ea typeface="Calibri" pitchFamily="34" charset="-122"/>
@@ -11308,7 +11308,7 @@
                   <a:tcPr marL="73152" marR="73152" marT="73152" marB="73152" anchor="ctr">
                     <a:lnL w="12700" cap="flat" cmpd="sng" algn="ctr">
                       <a:solidFill>
-                        <a:srgbClr val="2C4636"/>
+                        <a:srgbClr val="34343A"/>
                       </a:solidFill>
                       <a:prstDash val="solid"/>
                       <a:round/>
@@ -11317,7 +11317,7 @@
                     </a:lnL>
                     <a:lnR w="12700" cap="flat" cmpd="sng" algn="ctr">
                       <a:solidFill>
-                        <a:srgbClr val="2C4636"/>
+                        <a:srgbClr val="34343A"/>
                       </a:solidFill>
                       <a:prstDash val="solid"/>
                       <a:round/>
@@ -11326,7 +11326,7 @@
                     </a:lnR>
                     <a:lnT w="12700" cap="flat" cmpd="sng" algn="ctr">
                       <a:solidFill>
-                        <a:srgbClr val="2C4636"/>
+                        <a:srgbClr val="34343A"/>
                       </a:solidFill>
                       <a:prstDash val="solid"/>
                       <a:round/>
@@ -11335,7 +11335,7 @@
                     </a:lnT>
                     <a:lnB w="12700" cap="flat" cmpd="sng" algn="ctr">
                       <a:solidFill>
-                        <a:srgbClr val="2C4636"/>
+                        <a:srgbClr val="34343A"/>
                       </a:solidFill>
                       <a:prstDash val="solid"/>
                       <a:round/>
@@ -11343,7 +11343,7 @@
                       <a:tailEnd type="none" w="med" len="med"/>
                     </a:lnB>
                     <a:solidFill>
-                      <a:srgbClr val="152017"/>
+                      <a:srgbClr val="1C1C20"/>
                     </a:solidFill>
                   </a:tcPr>
                 </a:tc>
@@ -11358,7 +11358,7 @@
                       <a:r>
                         <a:rPr lang="en-US" sz="1150" dirty="0">
                           <a:solidFill>
-                            <a:srgbClr val="9DB0A4"/>
+                            <a:srgbClr val="B4B4B8"/>
                           </a:solidFill>
                           <a:latin typeface="Calibri" pitchFamily="34" charset="0"/>
                           <a:ea typeface="Calibri" pitchFamily="34" charset="-122"/>
@@ -11376,7 +11376,7 @@
                   <a:tcPr marL="73152" marR="73152" marT="73152" marB="73152" anchor="ctr">
                     <a:lnL w="12700" cap="flat" cmpd="sng" algn="ctr">
                       <a:solidFill>
-                        <a:srgbClr val="2C4636"/>
+                        <a:srgbClr val="34343A"/>
                       </a:solidFill>
                       <a:prstDash val="solid"/>
                       <a:round/>
@@ -11385,7 +11385,7 @@
                     </a:lnL>
                     <a:lnR w="12700" cap="flat" cmpd="sng" algn="ctr">
                       <a:solidFill>
-                        <a:srgbClr val="2C4636"/>
+                        <a:srgbClr val="34343A"/>
                       </a:solidFill>
                       <a:prstDash val="solid"/>
                       <a:round/>
@@ -11394,7 +11394,7 @@
                     </a:lnR>
                     <a:lnT w="12700" cap="flat" cmpd="sng" algn="ctr">
                       <a:solidFill>
-                        <a:srgbClr val="2C4636"/>
+                        <a:srgbClr val="34343A"/>
                       </a:solidFill>
                       <a:prstDash val="solid"/>
                       <a:round/>
@@ -11403,7 +11403,7 @@
                     </a:lnT>
                     <a:lnB w="12700" cap="flat" cmpd="sng" algn="ctr">
                       <a:solidFill>
-                        <a:srgbClr val="2C4636"/>
+                        <a:srgbClr val="34343A"/>
                       </a:solidFill>
                       <a:prstDash val="solid"/>
                       <a:round/>
@@ -11411,7 +11411,7 @@
                       <a:tailEnd type="none" w="med" len="med"/>
                     </a:lnB>
                     <a:solidFill>
-                      <a:srgbClr val="152017"/>
+                      <a:srgbClr val="1C1C20"/>
                     </a:solidFill>
                   </a:tcPr>
                 </a:tc>
@@ -11428,7 +11428,7 @@
                       <a:r>
                         <a:rPr lang="en-US" sz="1150" dirty="0">
                           <a:solidFill>
-                            <a:srgbClr val="EEF3EE"/>
+                            <a:srgbClr val="F5F5F7"/>
                           </a:solidFill>
                           <a:latin typeface="Calibri" pitchFamily="34" charset="0"/>
                           <a:ea typeface="Calibri" pitchFamily="34" charset="-122"/>
@@ -11446,7 +11446,7 @@
                   <a:tcPr marL="73152" marR="73152" marT="73152" marB="73152" anchor="ctr">
                     <a:lnL w="12700" cap="flat" cmpd="sng" algn="ctr">
                       <a:solidFill>
-                        <a:srgbClr val="2C4636"/>
+                        <a:srgbClr val="34343A"/>
                       </a:solidFill>
                       <a:prstDash val="solid"/>
                       <a:round/>
@@ -11455,7 +11455,7 @@
                     </a:lnL>
                     <a:lnR w="12700" cap="flat" cmpd="sng" algn="ctr">
                       <a:solidFill>
-                        <a:srgbClr val="2C4636"/>
+                        <a:srgbClr val="34343A"/>
                       </a:solidFill>
                       <a:prstDash val="solid"/>
                       <a:round/>
@@ -11464,7 +11464,7 @@
                     </a:lnR>
                     <a:lnT w="12700" cap="flat" cmpd="sng" algn="ctr">
                       <a:solidFill>
-                        <a:srgbClr val="2C4636"/>
+                        <a:srgbClr val="34343A"/>
                       </a:solidFill>
                       <a:prstDash val="solid"/>
                       <a:round/>
@@ -11473,7 +11473,7 @@
                     </a:lnT>
                     <a:lnB w="12700" cap="flat" cmpd="sng" algn="ctr">
                       <a:solidFill>
-                        <a:srgbClr val="2C4636"/>
+                        <a:srgbClr val="34343A"/>
                       </a:solidFill>
                       <a:prstDash val="solid"/>
                       <a:round/>
@@ -11481,7 +11481,7 @@
                       <a:tailEnd type="none" w="med" len="med"/>
                     </a:lnB>
                     <a:solidFill>
-                      <a:srgbClr val="152017"/>
+                      <a:srgbClr val="1C1C20"/>
                     </a:solidFill>
                   </a:tcPr>
                 </a:tc>
@@ -11496,7 +11496,7 @@
                       <a:r>
                         <a:rPr lang="en-US" sz="1150" dirty="0">
                           <a:solidFill>
-                            <a:srgbClr val="9DB0A4"/>
+                            <a:srgbClr val="B4B4B8"/>
                           </a:solidFill>
                           <a:latin typeface="Calibri" pitchFamily="34" charset="0"/>
                           <a:ea typeface="Calibri" pitchFamily="34" charset="-122"/>
@@ -11514,7 +11514,7 @@
                   <a:tcPr marL="73152" marR="73152" marT="73152" marB="73152" anchor="ctr">
                     <a:lnL w="12700" cap="flat" cmpd="sng" algn="ctr">
                       <a:solidFill>
-                        <a:srgbClr val="2C4636"/>
+                        <a:srgbClr val="34343A"/>
                       </a:solidFill>
                       <a:prstDash val="solid"/>
                       <a:round/>
@@ -11523,7 +11523,7 @@
                     </a:lnL>
                     <a:lnR w="12700" cap="flat" cmpd="sng" algn="ctr">
                       <a:solidFill>
-                        <a:srgbClr val="2C4636"/>
+                        <a:srgbClr val="34343A"/>
                       </a:solidFill>
                       <a:prstDash val="solid"/>
                       <a:round/>
@@ -11532,7 +11532,7 @@
                     </a:lnR>
                     <a:lnT w="12700" cap="flat" cmpd="sng" algn="ctr">
                       <a:solidFill>
-                        <a:srgbClr val="2C4636"/>
+                        <a:srgbClr val="34343A"/>
                       </a:solidFill>
                       <a:prstDash val="solid"/>
                       <a:round/>
@@ -11541,7 +11541,7 @@
                     </a:lnT>
                     <a:lnB w="12700" cap="flat" cmpd="sng" algn="ctr">
                       <a:solidFill>
-                        <a:srgbClr val="2C4636"/>
+                        <a:srgbClr val="34343A"/>
                       </a:solidFill>
                       <a:prstDash val="solid"/>
                       <a:round/>
@@ -11549,7 +11549,7 @@
                       <a:tailEnd type="none" w="med" len="med"/>
                     </a:lnB>
                     <a:solidFill>
-                      <a:srgbClr val="152017"/>
+                      <a:srgbClr val="1C1C20"/>
                     </a:solidFill>
                   </a:tcPr>
                 </a:tc>
@@ -11564,7 +11564,7 @@
                       <a:r>
                         <a:rPr lang="en-US" sz="1150" dirty="0">
                           <a:solidFill>
-                            <a:srgbClr val="9DB0A4"/>
+                            <a:srgbClr val="B4B4B8"/>
                           </a:solidFill>
                           <a:latin typeface="Calibri" pitchFamily="34" charset="0"/>
                           <a:ea typeface="Calibri" pitchFamily="34" charset="-122"/>
@@ -11582,7 +11582,7 @@
                   <a:tcPr marL="73152" marR="73152" marT="73152" marB="73152" anchor="ctr">
                     <a:lnL w="12700" cap="flat" cmpd="sng" algn="ctr">
                       <a:solidFill>
-                        <a:srgbClr val="2C4636"/>
+                        <a:srgbClr val="34343A"/>
                       </a:solidFill>
                       <a:prstDash val="solid"/>
                       <a:round/>
@@ -11591,7 +11591,7 @@
                     </a:lnL>
                     <a:lnR w="12700" cap="flat" cmpd="sng" algn="ctr">
                       <a:solidFill>
-                        <a:srgbClr val="2C4636"/>
+                        <a:srgbClr val="34343A"/>
                       </a:solidFill>
                       <a:prstDash val="solid"/>
                       <a:round/>
@@ -11600,7 +11600,7 @@
                     </a:lnR>
                     <a:lnT w="12700" cap="flat" cmpd="sng" algn="ctr">
                       <a:solidFill>
-                        <a:srgbClr val="2C4636"/>
+                        <a:srgbClr val="34343A"/>
                       </a:solidFill>
                       <a:prstDash val="solid"/>
                       <a:round/>
@@ -11609,7 +11609,7 @@
                     </a:lnT>
                     <a:lnB w="12700" cap="flat" cmpd="sng" algn="ctr">
                       <a:solidFill>
-                        <a:srgbClr val="2C4636"/>
+                        <a:srgbClr val="34343A"/>
                       </a:solidFill>
                       <a:prstDash val="solid"/>
                       <a:round/>
@@ -11617,7 +11617,7 @@
                       <a:tailEnd type="none" w="med" len="med"/>
                     </a:lnB>
                     <a:solidFill>
-                      <a:srgbClr val="152017"/>
+                      <a:srgbClr val="1C1C20"/>
                     </a:solidFill>
                   </a:tcPr>
                 </a:tc>
@@ -11634,7 +11634,7 @@
                       <a:r>
                         <a:rPr lang="en-US" sz="1150" dirty="0">
                           <a:solidFill>
-                            <a:srgbClr val="EEF3EE"/>
+                            <a:srgbClr val="F5F5F7"/>
                           </a:solidFill>
                           <a:latin typeface="Calibri" pitchFamily="34" charset="0"/>
                           <a:ea typeface="Calibri" pitchFamily="34" charset="-122"/>
@@ -11652,7 +11652,7 @@
                   <a:tcPr marL="73152" marR="73152" marT="73152" marB="73152" anchor="ctr">
                     <a:lnL w="12700" cap="flat" cmpd="sng" algn="ctr">
                       <a:solidFill>
-                        <a:srgbClr val="2C4636"/>
+                        <a:srgbClr val="34343A"/>
                       </a:solidFill>
                       <a:prstDash val="solid"/>
                       <a:round/>
@@ -11661,7 +11661,7 @@
                     </a:lnL>
                     <a:lnR w="12700" cap="flat" cmpd="sng" algn="ctr">
                       <a:solidFill>
-                        <a:srgbClr val="2C4636"/>
+                        <a:srgbClr val="34343A"/>
                       </a:solidFill>
                       <a:prstDash val="solid"/>
                       <a:round/>
@@ -11670,7 +11670,7 @@
                     </a:lnR>
                     <a:lnT w="12700" cap="flat" cmpd="sng" algn="ctr">
                       <a:solidFill>
-                        <a:srgbClr val="2C4636"/>
+                        <a:srgbClr val="34343A"/>
                       </a:solidFill>
                       <a:prstDash val="solid"/>
                       <a:round/>
@@ -11679,7 +11679,7 @@
                     </a:lnT>
                     <a:lnB w="12700" cap="flat" cmpd="sng" algn="ctr">
                       <a:solidFill>
-                        <a:srgbClr val="2C4636"/>
+                        <a:srgbClr val="34343A"/>
                       </a:solidFill>
                       <a:prstDash val="solid"/>
                       <a:round/>
@@ -11687,7 +11687,7 @@
                       <a:tailEnd type="none" w="med" len="med"/>
                     </a:lnB>
                     <a:solidFill>
-                      <a:srgbClr val="152017"/>
+                      <a:srgbClr val="1C1C20"/>
                     </a:solidFill>
                   </a:tcPr>
                 </a:tc>
@@ -11702,7 +11702,7 @@
                       <a:r>
                         <a:rPr lang="en-US" sz="1150" dirty="0">
                           <a:solidFill>
-                            <a:srgbClr val="9DB0A4"/>
+                            <a:srgbClr val="B4B4B8"/>
                           </a:solidFill>
                           <a:latin typeface="Calibri" pitchFamily="34" charset="0"/>
                           <a:ea typeface="Calibri" pitchFamily="34" charset="-122"/>
@@ -11720,7 +11720,7 @@
                   <a:tcPr marL="73152" marR="73152" marT="73152" marB="73152" anchor="ctr">
                     <a:lnL w="12700" cap="flat" cmpd="sng" algn="ctr">
                       <a:solidFill>
-                        <a:srgbClr val="2C4636"/>
+                        <a:srgbClr val="34343A"/>
                       </a:solidFill>
                       <a:prstDash val="solid"/>
                       <a:round/>
@@ -11729,7 +11729,7 @@
                     </a:lnL>
                     <a:lnR w="12700" cap="flat" cmpd="sng" algn="ctr">
                       <a:solidFill>
-                        <a:srgbClr val="2C4636"/>
+                        <a:srgbClr val="34343A"/>
                       </a:solidFill>
                       <a:prstDash val="solid"/>
                       <a:round/>
@@ -11738,7 +11738,7 @@
                     </a:lnR>
                     <a:lnT w="12700" cap="flat" cmpd="sng" algn="ctr">
                       <a:solidFill>
-                        <a:srgbClr val="2C4636"/>
+                        <a:srgbClr val="34343A"/>
                       </a:solidFill>
                       <a:prstDash val="solid"/>
                       <a:round/>
@@ -11747,7 +11747,7 @@
                     </a:lnT>
                     <a:lnB w="12700" cap="flat" cmpd="sng" algn="ctr">
                       <a:solidFill>
-                        <a:srgbClr val="2C4636"/>
+                        <a:srgbClr val="34343A"/>
                       </a:solidFill>
                       <a:prstDash val="solid"/>
                       <a:round/>
@@ -11755,7 +11755,7 @@
                       <a:tailEnd type="none" w="med" len="med"/>
                     </a:lnB>
                     <a:solidFill>
-                      <a:srgbClr val="152017"/>
+                      <a:srgbClr val="1C1C20"/>
                     </a:solidFill>
                   </a:tcPr>
                 </a:tc>
@@ -11770,7 +11770,7 @@
                       <a:r>
                         <a:rPr lang="en-US" sz="1150" dirty="0">
                           <a:solidFill>
-                            <a:srgbClr val="9DB0A4"/>
+                            <a:srgbClr val="B4B4B8"/>
                           </a:solidFill>
                           <a:latin typeface="Calibri" pitchFamily="34" charset="0"/>
                           <a:ea typeface="Calibri" pitchFamily="34" charset="-122"/>
@@ -11788,7 +11788,7 @@
                   <a:tcPr marL="73152" marR="73152" marT="73152" marB="73152" anchor="ctr">
                     <a:lnL w="12700" cap="flat" cmpd="sng" algn="ctr">
                       <a:solidFill>
-                        <a:srgbClr val="2C4636"/>
+                        <a:srgbClr val="34343A"/>
                       </a:solidFill>
                       <a:prstDash val="solid"/>
                       <a:round/>
@@ -11797,7 +11797,7 @@
                     </a:lnL>
                     <a:lnR w="12700" cap="flat" cmpd="sng" algn="ctr">
                       <a:solidFill>
-                        <a:srgbClr val="2C4636"/>
+                        <a:srgbClr val="34343A"/>
                       </a:solidFill>
                       <a:prstDash val="solid"/>
                       <a:round/>
@@ -11806,7 +11806,7 @@
                     </a:lnR>
                     <a:lnT w="12700" cap="flat" cmpd="sng" algn="ctr">
                       <a:solidFill>
-                        <a:srgbClr val="2C4636"/>
+                        <a:srgbClr val="34343A"/>
                       </a:solidFill>
                       <a:prstDash val="solid"/>
                       <a:round/>
@@ -11815,7 +11815,7 @@
                     </a:lnT>
                     <a:lnB w="12700" cap="flat" cmpd="sng" algn="ctr">
                       <a:solidFill>
-                        <a:srgbClr val="2C4636"/>
+                        <a:srgbClr val="34343A"/>
                       </a:solidFill>
                       <a:prstDash val="solid"/>
                       <a:round/>
@@ -11823,7 +11823,7 @@
                       <a:tailEnd type="none" w="med" len="med"/>
                     </a:lnB>
                     <a:solidFill>
-                      <a:srgbClr val="152017"/>
+                      <a:srgbClr val="1C1C20"/>
                     </a:solidFill>
                   </a:tcPr>
                 </a:tc>
@@ -11840,7 +11840,7 @@
                       <a:r>
                         <a:rPr lang="en-US" sz="1150" dirty="0">
                           <a:solidFill>
-                            <a:srgbClr val="EEF3EE"/>
+                            <a:srgbClr val="F5F5F7"/>
                           </a:solidFill>
                           <a:latin typeface="Calibri" pitchFamily="34" charset="0"/>
                           <a:ea typeface="Calibri" pitchFamily="34" charset="-122"/>
@@ -11858,7 +11858,7 @@
                   <a:tcPr marL="73152" marR="73152" marT="73152" marB="73152" anchor="ctr">
                     <a:lnL w="12700" cap="flat" cmpd="sng" algn="ctr">
                       <a:solidFill>
-                        <a:srgbClr val="2C4636"/>
+                        <a:srgbClr val="34343A"/>
                       </a:solidFill>
                       <a:prstDash val="solid"/>
                       <a:round/>
@@ -11867,7 +11867,7 @@
                     </a:lnL>
                     <a:lnR w="12700" cap="flat" cmpd="sng" algn="ctr">
                       <a:solidFill>
-                        <a:srgbClr val="2C4636"/>
+                        <a:srgbClr val="34343A"/>
                       </a:solidFill>
                       <a:prstDash val="solid"/>
                       <a:round/>
@@ -11876,7 +11876,7 @@
                     </a:lnR>
                     <a:lnT w="12700" cap="flat" cmpd="sng" algn="ctr">
                       <a:solidFill>
-                        <a:srgbClr val="2C4636"/>
+                        <a:srgbClr val="34343A"/>
                       </a:solidFill>
                       <a:prstDash val="solid"/>
                       <a:round/>
@@ -11885,7 +11885,7 @@
                     </a:lnT>
                     <a:lnB w="12700" cap="flat" cmpd="sng" algn="ctr">
                       <a:solidFill>
-                        <a:srgbClr val="2C4636"/>
+                        <a:srgbClr val="34343A"/>
                       </a:solidFill>
                       <a:prstDash val="solid"/>
                       <a:round/>
@@ -11893,7 +11893,7 @@
                       <a:tailEnd type="none" w="med" len="med"/>
                     </a:lnB>
                     <a:solidFill>
-                      <a:srgbClr val="152017"/>
+                      <a:srgbClr val="1C1C20"/>
                     </a:solidFill>
                   </a:tcPr>
                 </a:tc>
@@ -11908,7 +11908,7 @@
                       <a:r>
                         <a:rPr lang="en-US" sz="1150" dirty="0">
                           <a:solidFill>
-                            <a:srgbClr val="9DB0A4"/>
+                            <a:srgbClr val="B4B4B8"/>
                           </a:solidFill>
                           <a:latin typeface="Calibri" pitchFamily="34" charset="0"/>
                           <a:ea typeface="Calibri" pitchFamily="34" charset="-122"/>
@@ -11926,7 +11926,7 @@
                   <a:tcPr marL="73152" marR="73152" marT="73152" marB="73152" anchor="ctr">
                     <a:lnL w="12700" cap="flat" cmpd="sng" algn="ctr">
                       <a:solidFill>
-                        <a:srgbClr val="2C4636"/>
+                        <a:srgbClr val="34343A"/>
                       </a:solidFill>
                       <a:prstDash val="solid"/>
                       <a:round/>
@@ -11935,7 +11935,7 @@
                     </a:lnL>
                     <a:lnR w="12700" cap="flat" cmpd="sng" algn="ctr">
                       <a:solidFill>
-                        <a:srgbClr val="2C4636"/>
+                        <a:srgbClr val="34343A"/>
                       </a:solidFill>
                       <a:prstDash val="solid"/>
                       <a:round/>
@@ -11944,7 +11944,7 @@
                     </a:lnR>
                     <a:lnT w="12700" cap="flat" cmpd="sng" algn="ctr">
                       <a:solidFill>
-                        <a:srgbClr val="2C4636"/>
+                        <a:srgbClr val="34343A"/>
                       </a:solidFill>
                       <a:prstDash val="solid"/>
                       <a:round/>
@@ -11953,7 +11953,7 @@
                     </a:lnT>
                     <a:lnB w="12700" cap="flat" cmpd="sng" algn="ctr">
                       <a:solidFill>
-                        <a:srgbClr val="2C4636"/>
+                        <a:srgbClr val="34343A"/>
                       </a:solidFill>
                       <a:prstDash val="solid"/>
                       <a:round/>
@@ -11961,7 +11961,7 @@
                       <a:tailEnd type="none" w="med" len="med"/>
                     </a:lnB>
                     <a:solidFill>
-                      <a:srgbClr val="152017"/>
+                      <a:srgbClr val="1C1C20"/>
                     </a:solidFill>
                   </a:tcPr>
                 </a:tc>
@@ -11976,7 +11976,7 @@
                       <a:r>
                         <a:rPr lang="en-US" sz="1150" dirty="0">
                           <a:solidFill>
-                            <a:srgbClr val="9DB0A4"/>
+                            <a:srgbClr val="B4B4B8"/>
                           </a:solidFill>
                           <a:latin typeface="Calibri" pitchFamily="34" charset="0"/>
                           <a:ea typeface="Calibri" pitchFamily="34" charset="-122"/>
@@ -11994,7 +11994,7 @@
                   <a:tcPr marL="73152" marR="73152" marT="73152" marB="73152" anchor="ctr">
                     <a:lnL w="12700" cap="flat" cmpd="sng" algn="ctr">
                       <a:solidFill>
-                        <a:srgbClr val="2C4636"/>
+                        <a:srgbClr val="34343A"/>
                       </a:solidFill>
                       <a:prstDash val="solid"/>
                       <a:round/>
@@ -12003,7 +12003,7 @@
                     </a:lnL>
                     <a:lnR w="12700" cap="flat" cmpd="sng" algn="ctr">
                       <a:solidFill>
-                        <a:srgbClr val="2C4636"/>
+                        <a:srgbClr val="34343A"/>
                       </a:solidFill>
                       <a:prstDash val="solid"/>
                       <a:round/>
@@ -12012,7 +12012,7 @@
                     </a:lnR>
                     <a:lnT w="12700" cap="flat" cmpd="sng" algn="ctr">
                       <a:solidFill>
-                        <a:srgbClr val="2C4636"/>
+                        <a:srgbClr val="34343A"/>
                       </a:solidFill>
                       <a:prstDash val="solid"/>
                       <a:round/>
@@ -12021,7 +12021,7 @@
                     </a:lnT>
                     <a:lnB w="12700" cap="flat" cmpd="sng" algn="ctr">
                       <a:solidFill>
-                        <a:srgbClr val="2C4636"/>
+                        <a:srgbClr val="34343A"/>
                       </a:solidFill>
                       <a:prstDash val="solid"/>
                       <a:round/>
@@ -12029,7 +12029,7 @@
                       <a:tailEnd type="none" w="med" len="med"/>
                     </a:lnB>
                     <a:solidFill>
-                      <a:srgbClr val="152017"/>
+                      <a:srgbClr val="1C1C20"/>
                     </a:solidFill>
                   </a:tcPr>
                 </a:tc>
@@ -12065,7 +12065,7 @@
             <a:r>
               <a:rPr lang="en-US" sz="950" dirty="0">
                 <a:solidFill>
-                  <a:srgbClr val="6E8579"/>
+                  <a:srgbClr val="7E7E84"/>
                 </a:solidFill>
                 <a:latin typeface="Calibri" pitchFamily="34" charset="0"/>
                 <a:ea typeface="Calibri" pitchFamily="34" charset="-122"/>
@@ -12091,7 +12091,7 @@
     <p:bg>
       <p:bgPr>
         <a:solidFill>
-          <a:srgbClr val="0B0F14"/>
+          <a:srgbClr val="101010"/>
         </a:solidFill>
       </p:bgPr>
     </p:bg>
@@ -12124,7 +12124,7 @@
             <a:avLst/>
           </a:prstGeom>
           <a:solidFill>
-            <a:srgbClr val="FF9E3D"/>
+            <a:srgbClr val="FF9933"/>
           </a:solidFill>
           <a:ln/>
         </p:spPr>
@@ -12144,7 +12144,7 @@
             <a:avLst/>
           </a:prstGeom>
           <a:solidFill>
-            <a:srgbClr val="EEF3EE"/>
+            <a:srgbClr val="FFFFFF"/>
           </a:solidFill>
           <a:ln/>
         </p:spPr>
@@ -12164,7 +12164,7 @@
             <a:avLst/>
           </a:prstGeom>
           <a:solidFill>
-            <a:srgbClr val="27C08A"/>
+            <a:srgbClr val="138808"/>
           </a:solidFill>
           <a:ln/>
         </p:spPr>
@@ -12184,7 +12184,7 @@
             <a:avLst/>
           </a:prstGeom>
           <a:solidFill>
-            <a:srgbClr val="27C08A"/>
+            <a:srgbClr val="6FA8FF"/>
           </a:solidFill>
           <a:ln/>
         </p:spPr>
@@ -12216,7 +12216,7 @@
             <a:r>
               <a:rPr lang="en-US" sz="1250" b="1" spc="200" kern="0" dirty="0">
                 <a:solidFill>
-                  <a:srgbClr val="27C08A"/>
+                  <a:srgbClr val="6FA8FF"/>
                 </a:solidFill>
                 <a:latin typeface="Arial" pitchFamily="34" charset="0"/>
                 <a:ea typeface="Arial" pitchFamily="34" charset="-122"/>
@@ -12255,7 +12255,7 @@
             <a:r>
               <a:rPr lang="en-US" sz="3000" b="1" dirty="0">
                 <a:solidFill>
-                  <a:srgbClr val="EEF3EE"/>
+                  <a:srgbClr val="F5F5F7"/>
                 </a:solidFill>
                 <a:latin typeface="Arial" pitchFamily="34" charset="0"/>
                 <a:ea typeface="Arial" pitchFamily="34" charset="-122"/>
@@ -12284,11 +12284,11 @@
             </a:avLst>
           </a:prstGeom>
           <a:solidFill>
-            <a:srgbClr val="152017"/>
+            <a:srgbClr val="1C1C20"/>
           </a:solidFill>
           <a:ln w="12700">
             <a:solidFill>
-              <a:srgbClr val="2C4636"/>
+              <a:srgbClr val="34343A"/>
             </a:solidFill>
             <a:prstDash val="solid"/>
           </a:ln>
@@ -12330,7 +12330,7 @@
             <a:r>
               <a:rPr lang="en-US" sz="2800" b="1" dirty="0">
                 <a:solidFill>
-                  <a:srgbClr val="FF9E3D"/>
+                  <a:srgbClr val="E2C28A"/>
                 </a:solidFill>
                 <a:latin typeface="Arial" pitchFamily="34" charset="0"/>
                 <a:ea typeface="Arial" pitchFamily="34" charset="-122"/>
@@ -12369,7 +12369,7 @@
             <a:r>
               <a:rPr lang="en-US" sz="1150" dirty="0">
                 <a:solidFill>
-                  <a:srgbClr val="9DB0A4"/>
+                  <a:srgbClr val="B4B4B8"/>
                 </a:solidFill>
                 <a:latin typeface="Calibri" pitchFamily="34" charset="0"/>
                 <a:ea typeface="Calibri" pitchFamily="34" charset="-122"/>
@@ -12410,7 +12410,7 @@
             <a:r>
               <a:rPr lang="en-US" sz="2800" b="1" dirty="0">
                 <a:solidFill>
-                  <a:srgbClr val="4FE3B0"/>
+                  <a:srgbClr val="4FD68A"/>
                 </a:solidFill>
                 <a:latin typeface="Arial" pitchFamily="34" charset="0"/>
                 <a:ea typeface="Arial" pitchFamily="34" charset="-122"/>
@@ -12449,7 +12449,7 @@
             <a:r>
               <a:rPr lang="en-US" sz="1150" dirty="0">
                 <a:solidFill>
-                  <a:srgbClr val="9DB0A4"/>
+                  <a:srgbClr val="B4B4B8"/>
                 </a:solidFill>
                 <a:latin typeface="Calibri" pitchFamily="34" charset="0"/>
                 <a:ea typeface="Calibri" pitchFamily="34" charset="-122"/>
@@ -12490,7 +12490,7 @@
             <a:r>
               <a:rPr lang="en-US" sz="2800" b="1" dirty="0">
                 <a:solidFill>
-                  <a:srgbClr val="27C08A"/>
+                  <a:srgbClr val="6FA8FF"/>
                 </a:solidFill>
                 <a:latin typeface="Arial" pitchFamily="34" charset="0"/>
                 <a:ea typeface="Arial" pitchFamily="34" charset="-122"/>
@@ -12529,7 +12529,7 @@
             <a:r>
               <a:rPr lang="en-US" sz="1150" dirty="0">
                 <a:solidFill>
-                  <a:srgbClr val="9DB0A4"/>
+                  <a:srgbClr val="B4B4B8"/>
                 </a:solidFill>
                 <a:latin typeface="Calibri" pitchFamily="34" charset="0"/>
                 <a:ea typeface="Calibri" pitchFamily="34" charset="-122"/>
@@ -12570,7 +12570,7 @@
             <a:r>
               <a:rPr lang="en-US" sz="2800" b="1" dirty="0">
                 <a:solidFill>
-                  <a:srgbClr val="FF9E3D"/>
+                  <a:srgbClr val="E2C28A"/>
                 </a:solidFill>
                 <a:latin typeface="Arial" pitchFamily="34" charset="0"/>
                 <a:ea typeface="Arial" pitchFamily="34" charset="-122"/>
@@ -12609,7 +12609,7 @@
             <a:r>
               <a:rPr lang="en-US" sz="1150" dirty="0">
                 <a:solidFill>
-                  <a:srgbClr val="9DB0A4"/>
+                  <a:srgbClr val="B4B4B8"/>
                 </a:solidFill>
                 <a:latin typeface="Calibri" pitchFamily="34" charset="0"/>
                 <a:ea typeface="Calibri" pitchFamily="34" charset="-122"/>
@@ -12650,7 +12650,7 @@
             <a:r>
               <a:rPr lang="en-US" sz="2800" b="1" dirty="0">
                 <a:solidFill>
-                  <a:srgbClr val="4FE3B0"/>
+                  <a:srgbClr val="4FD68A"/>
                 </a:solidFill>
                 <a:latin typeface="Arial" pitchFamily="34" charset="0"/>
                 <a:ea typeface="Arial" pitchFamily="34" charset="-122"/>
@@ -12689,7 +12689,7 @@
             <a:r>
               <a:rPr lang="en-US" sz="1150" dirty="0">
                 <a:solidFill>
-                  <a:srgbClr val="9DB0A4"/>
+                  <a:srgbClr val="B4B4B8"/>
                 </a:solidFill>
                 <a:latin typeface="Calibri" pitchFamily="34" charset="0"/>
                 <a:ea typeface="Calibri" pitchFamily="34" charset="-122"/>
@@ -12718,11 +12718,11 @@
             </a:avLst>
           </a:prstGeom>
           <a:solidFill>
-            <a:srgbClr val="1B2A20"/>
+            <a:srgbClr val="26262B"/>
           </a:solidFill>
           <a:ln w="12700">
             <a:solidFill>
-              <a:srgbClr val="2C4636"/>
+              <a:srgbClr val="34343A"/>
             </a:solidFill>
             <a:prstDash val="solid"/>
           </a:ln>
@@ -12762,7 +12762,7 @@
             <a:r>
               <a:rPr lang="en-US" sz="1450" b="1" dirty="0">
                 <a:solidFill>
-                  <a:srgbClr val="EEF3EE"/>
+                  <a:srgbClr val="F5F5F7"/>
                 </a:solidFill>
                 <a:latin typeface="Arial" pitchFamily="34" charset="0"/>
                 <a:ea typeface="Arial" pitchFamily="34" charset="-122"/>
@@ -12803,7 +12803,7 @@
             <a:r>
               <a:rPr lang="en-US" sz="1300" dirty="0">
                 <a:solidFill>
-                  <a:srgbClr val="9DB0A4"/>
+                  <a:srgbClr val="B4B4B8"/>
                 </a:solidFill>
                 <a:latin typeface="Calibri" pitchFamily="34" charset="0"/>
                 <a:ea typeface="Calibri" pitchFamily="34" charset="-122"/>
@@ -12829,7 +12829,7 @@
     <p:bg>
       <p:bgPr>
         <a:solidFill>
-          <a:srgbClr val="0B0F14"/>
+          <a:srgbClr val="101010"/>
         </a:solidFill>
       </p:bgPr>
     </p:bg>
@@ -12862,7 +12862,7 @@
             <a:avLst/>
           </a:prstGeom>
           <a:solidFill>
-            <a:srgbClr val="FF9E3D"/>
+            <a:srgbClr val="FF9933"/>
           </a:solidFill>
           <a:ln/>
         </p:spPr>
@@ -12882,7 +12882,7 @@
             <a:avLst/>
           </a:prstGeom>
           <a:solidFill>
-            <a:srgbClr val="EEF3EE"/>
+            <a:srgbClr val="FFFFFF"/>
           </a:solidFill>
           <a:ln/>
         </p:spPr>
@@ -12902,7 +12902,7 @@
             <a:avLst/>
           </a:prstGeom>
           <a:solidFill>
-            <a:srgbClr val="27C08A"/>
+            <a:srgbClr val="138808"/>
           </a:solidFill>
           <a:ln/>
         </p:spPr>
@@ -12922,7 +12922,7 @@
             <a:avLst/>
           </a:prstGeom>
           <a:solidFill>
-            <a:srgbClr val="27C08A"/>
+            <a:srgbClr val="6FA8FF"/>
           </a:solidFill>
           <a:ln/>
         </p:spPr>
@@ -12954,7 +12954,7 @@
             <a:r>
               <a:rPr lang="en-US" sz="1250" b="1" spc="200" kern="0" dirty="0">
                 <a:solidFill>
-                  <a:srgbClr val="27C08A"/>
+                  <a:srgbClr val="6FA8FF"/>
                 </a:solidFill>
                 <a:latin typeface="Arial" pitchFamily="34" charset="0"/>
                 <a:ea typeface="Arial" pitchFamily="34" charset="-122"/>
@@ -12993,7 +12993,7 @@
             <a:r>
               <a:rPr lang="en-US" sz="3000" b="1" dirty="0">
                 <a:solidFill>
-                  <a:srgbClr val="EEF3EE"/>
+                  <a:srgbClr val="F5F5F7"/>
                 </a:solidFill>
                 <a:latin typeface="Arial" pitchFamily="34" charset="0"/>
                 <a:ea typeface="Arial" pitchFamily="34" charset="-122"/>
@@ -13022,11 +13022,11 @@
             </a:avLst>
           </a:prstGeom>
           <a:solidFill>
-            <a:srgbClr val="1B2A20"/>
+            <a:srgbClr val="26262B"/>
           </a:solidFill>
           <a:ln w="12700">
             <a:solidFill>
-              <a:srgbClr val="2C4636"/>
+              <a:srgbClr val="34343A"/>
             </a:solidFill>
             <a:prstDash val="solid"/>
           </a:ln>
@@ -13068,7 +13068,7 @@
             <a:r>
               <a:rPr lang="en-US" sz="3000" b="1" dirty="0">
                 <a:solidFill>
-                  <a:srgbClr val="FF9E3D"/>
+                  <a:srgbClr val="E2C28A"/>
                 </a:solidFill>
                 <a:latin typeface="Arial" pitchFamily="34" charset="0"/>
                 <a:ea typeface="Arial" pitchFamily="34" charset="-122"/>
@@ -13107,7 +13107,7 @@
             <a:r>
               <a:rPr lang="en-US" sz="1350" dirty="0">
                 <a:solidFill>
-                  <a:srgbClr val="EEF3EE"/>
+                  <a:srgbClr val="F5F5F7"/>
                 </a:solidFill>
                 <a:latin typeface="Calibri" pitchFamily="34" charset="0"/>
                 <a:ea typeface="Calibri" pitchFamily="34" charset="-122"/>
@@ -13150,7 +13150,7 @@
             <a:r>
               <a:rPr lang="en-US" sz="1250" dirty="0">
                 <a:solidFill>
-                  <a:srgbClr val="9DB0A4"/>
+                  <a:srgbClr val="B4B4B8"/>
                 </a:solidFill>
                 <a:latin typeface="Calibri" pitchFamily="34" charset="0"/>
                 <a:ea typeface="Calibri" pitchFamily="34" charset="-122"/>
@@ -13171,7 +13171,7 @@
             <a:r>
               <a:rPr lang="en-US" sz="1250" dirty="0">
                 <a:solidFill>
-                  <a:srgbClr val="9DB0A4"/>
+                  <a:srgbClr val="B4B4B8"/>
                 </a:solidFill>
                 <a:latin typeface="Calibri" pitchFamily="34" charset="0"/>
                 <a:ea typeface="Calibri" pitchFamily="34" charset="-122"/>
@@ -13192,7 +13192,7 @@
             <a:r>
               <a:rPr lang="en-US" sz="1250" dirty="0">
                 <a:solidFill>
-                  <a:srgbClr val="9DB0A4"/>
+                  <a:srgbClr val="B4B4B8"/>
                 </a:solidFill>
                 <a:latin typeface="Calibri" pitchFamily="34" charset="0"/>
                 <a:ea typeface="Calibri" pitchFamily="34" charset="-122"/>
@@ -13213,7 +13213,7 @@
             <a:r>
               <a:rPr lang="en-US" sz="1250" dirty="0">
                 <a:solidFill>
-                  <a:srgbClr val="9DB0A4"/>
+                  <a:srgbClr val="B4B4B8"/>
                 </a:solidFill>
                 <a:latin typeface="Calibri" pitchFamily="34" charset="0"/>
                 <a:ea typeface="Calibri" pitchFamily="34" charset="-122"/>
@@ -13276,7 +13276,7 @@
             <a:r>
               <a:rPr lang="en-US" sz="950" dirty="0">
                 <a:solidFill>
-                  <a:srgbClr val="6E8579"/>
+                  <a:srgbClr val="7E7E84"/>
                 </a:solidFill>
                 <a:latin typeface="Calibri" pitchFamily="34" charset="0"/>
                 <a:ea typeface="Calibri" pitchFamily="34" charset="-122"/>
